--- a/summit/bin-blocking-flow/deck/bin-blocking-summit-deck.pptx
+++ b/summit/bin-blocking-flow/deck/bin-blocking-summit-deck.pptx
@@ -114,26 +114,26 @@
   <p:extLst>
     <p:ext uri="{521415D9-36F7-43E2-AB2F-B90AF26B5E84}">
       <p14:sectionLst xmlns:p14="http://schemas.microsoft.com/office/powerpoint/2010/main">
-        <p14:section name="Opening" id="{814cad02-132a-97b5-7703-e205751b805a}">
+        <p14:section name="Opening" id="{2fb3ba5c-4680-465a-79e9-c754c0300104}">
           <p14:sldIdLst>
             <p14:sldId id="256"/>
             <p14:sldId id="257"/>
           </p14:sldIdLst>
         </p14:section>
-        <p14:section name="How it works" id="{b299cf5d-0b0a-319e-47cf-0192938d699c}">
+        <p14:section name="How it works" id="{d4b6d9ed-ea8b-bee7-5b9c-bcfe781430fb}">
           <p14:sldIdLst>
             <p14:sldId id="258"/>
             <p14:sldId id="259"/>
             <p14:sldId id="260"/>
           </p14:sldIdLst>
         </p14:section>
-        <p14:section name="Lessons" id="{63e1afd0-0d0a-eaa6-49c1-56879c1a5123}">
+        <p14:section name="Lessons" id="{884653ae-8e60-45e5-2c8e-4847da5de74e}">
           <p14:sldIdLst>
             <p14:sldId id="261"/>
             <p14:sldId id="262"/>
           </p14:sldIdLst>
         </p14:section>
-        <p14:section name="Appendix" id="{942b348b-3ab3-a960-68af-36e9c8e02464}">
+        <p14:section name="Appendix" id="{812c889d-7cf4-c48b-0464-8d36e0f3be58}">
           <p14:sldIdLst>
             <p14:sldId id="263"/>
           </p14:sldIdLst>
@@ -1176,7 +1176,7 @@
           <a:p>
             <a:r>
               <a:rPr lang="en-US" dirty="0"/>
-              <a:t>Backup slide. Use it as a handout or for Q&amp;A; it is too dense to present from.</a:t>
+              <a:t>Appendix: the whole process on one page. Backup for Q&amp;A, and print the PDF version as a handout; it is too dense to present from.</a:t>
             </a:r>
             <a:endParaRPr lang="en-US" dirty="0"/>
           </a:p>
@@ -1282,6 +1282,38 @@
 
 <file path=ppt/slideLayouts/slideLayout3.xml><?xml version="1.0" encoding="utf-8"?>
 <p:sldLayout xmlns:a="http://schemas.openxmlformats.org/drawingml/2006/main" xmlns:r="http://schemas.openxmlformats.org/officeDocument/2006/relationships" xmlns:p="http://schemas.openxmlformats.org/presentationml/2006/main" preserve="1">
+  <p:cSld name="BLANK">
+    <p:bg>
+      <p:bgPr>
+        <a:solidFill>
+          <a:schemeClr val="bg1"/>
+        </a:solidFill>
+      </p:bgPr>
+    </p:bg>
+    <p:spTree>
+      <p:nvGrpSpPr>
+        <p:cNvPr id="1" name=""/>
+        <p:cNvGrpSpPr/>
+        <p:nvPr/>
+      </p:nvGrpSpPr>
+      <p:grpSpPr>
+        <a:xfrm>
+          <a:off x="0" y="0"/>
+          <a:ext cx="0" cy="0"/>
+          <a:chOff x="0" y="0"/>
+          <a:chExt cx="0" cy="0"/>
+        </a:xfrm>
+      </p:grpSpPr>
+    </p:spTree>
+  </p:cSld>
+  <p:clrMapOvr>
+    <a:masterClrMapping/>
+  </p:clrMapOvr>
+</p:sldLayout>
+</file>
+
+<file path=ppt/slideLayouts/slideLayout4.xml><?xml version="1.0" encoding="utf-8"?>
+<p:sldLayout xmlns:a="http://schemas.openxmlformats.org/drawingml/2006/main" xmlns:r="http://schemas.openxmlformats.org/officeDocument/2006/relationships" xmlns:p="http://schemas.openxmlformats.org/presentationml/2006/main" preserve="1">
   <p:cSld name="CONTENT">
     <p:bg>
       <p:bgPr>
@@ -1312,7 +1344,7 @@
         </p:nvSpPr>
         <p:spPr>
           <a:xfrm>
-            <a:off x="6583680" y="6400800"/>
+            <a:off x="6583680" y="6309360"/>
             <a:ext cx="4572000" cy="274320"/>
           </a:xfrm>
           <a:prstGeom prst="rect">
@@ -1351,7 +1383,7 @@
         <p:spPr>
           <a:xfrm>
             <a:off x="548640" y="384048"/>
-            <a:ext cx="7315200" cy="868680"/>
+            <a:ext cx="7040880" cy="868680"/>
           </a:xfrm>
           <a:prstGeom prst="rect">
             <a:avLst/>
@@ -1394,7 +1426,7 @@
         </p:nvSpPr>
         <p:spPr>
           <a:xfrm>
-            <a:off x="11274552" y="6400800"/>
+            <a:off x="11274552" y="6309360"/>
             <a:ext cx="365760" cy="274320"/>
           </a:xfrm>
           <a:prstGeom prst="rect">
@@ -1407,7 +1439,7 @@
           </a:extLst>
         </p:spPr>
         <p:txBody>
-          <a:bodyPr/>
+          <a:bodyPr anchor="ctr"/>
           <a:lstStyle>
             <a:lvl1pPr>
               <a:defRPr sz="1000">
@@ -1421,7 +1453,7 @@
             <a:pPr algn="r"/>
             <a:fld id="{F7021451-1387-4CA6-816F-3879F97B5CBC}" type="slidenum">
               <a:rPr b="0" lang="en-US"/>
-              <a:t>1003</a:t>
+              <a:t>1004</a:t>
             </a:fld>
             <a:endParaRPr lang="en-US"/>
           </a:p>
@@ -1435,7 +1467,7 @@
 </p:sldLayout>
 </file>
 
-<file path=ppt/slideLayouts/slideLayout4.xml><?xml version="1.0" encoding="utf-8"?>
+<file path=ppt/slideLayouts/slideLayout5.xml><?xml version="1.0" encoding="utf-8"?>
 <p:sldLayout xmlns:a="http://schemas.openxmlformats.org/drawingml/2006/main" xmlns:r="http://schemas.openxmlformats.org/officeDocument/2006/relationships" xmlns:p="http://schemas.openxmlformats.org/presentationml/2006/main" preserve="1">
   <p:cSld name="DARK">
     <p:bg>
@@ -1467,7 +1499,7 @@
         </p:nvSpPr>
         <p:spPr>
           <a:xfrm>
-            <a:off x="6583680" y="6400800"/>
+            <a:off x="6583680" y="6309360"/>
             <a:ext cx="4572000" cy="274320"/>
           </a:xfrm>
           <a:prstGeom prst="rect">
@@ -1506,7 +1538,7 @@
         <p:spPr>
           <a:xfrm>
             <a:off x="548640" y="548640"/>
-            <a:ext cx="7315200" cy="868680"/>
+            <a:ext cx="7040880" cy="868680"/>
           </a:xfrm>
           <a:prstGeom prst="rect">
             <a:avLst/>
@@ -1549,7 +1581,7 @@
         </p:nvSpPr>
         <p:spPr>
           <a:xfrm>
-            <a:off x="11274552" y="6400800"/>
+            <a:off x="11274552" y="6309360"/>
             <a:ext cx="365760" cy="274320"/>
           </a:xfrm>
           <a:prstGeom prst="rect">
@@ -1562,7 +1594,7 @@
           </a:extLst>
         </p:spPr>
         <p:txBody>
-          <a:bodyPr/>
+          <a:bodyPr anchor="ctr"/>
           <a:lstStyle>
             <a:lvl1pPr>
               <a:defRPr sz="1000">
@@ -1576,7 +1608,7 @@
             <a:pPr algn="r"/>
             <a:fld id="{F7021451-1387-4CA6-816F-3879F97B5CBC}" type="slidenum">
               <a:rPr b="0" lang="en-US"/>
-              <a:t>1004</a:t>
+              <a:t>1005</a:t>
             </a:fld>
             <a:endParaRPr lang="en-US"/>
           </a:p>
@@ -1619,7 +1651,7 @@
         </p:nvSpPr>
         <p:spPr>
           <a:xfrm>
-            <a:off x="11274552" y="6400800"/>
+            <a:off x="11274552" y="6309360"/>
             <a:ext cx="365760" cy="274320"/>
           </a:xfrm>
           <a:prstGeom prst="rect">
@@ -1632,7 +1664,7 @@
           </a:extLst>
         </p:spPr>
         <p:txBody>
-          <a:bodyPr/>
+          <a:bodyPr anchor="ctr"/>
           <a:lstStyle>
             <a:lvl1pPr>
               <a:defRPr sz="1000">
@@ -1660,6 +1692,7 @@
     <p:sldLayoutId id="2147483650" r:id="rId2"/>
     <p:sldLayoutId id="2147483651" r:id="rId3"/>
     <p:sldLayoutId id="2147483652" r:id="rId4"/>
+    <p:sldLayoutId id="2147483653" r:id="rId5"/>
   </p:sldLayoutIdLst>
   <p:hf sldNum="0" hdr="0" ftr="0" dt="0"/>
   <p:txStyles>
@@ -2076,7 +2109,7 @@
         <p:spPr>
           <a:xfrm>
             <a:off x="5532120" y="5349240"/>
-            <a:ext cx="5715000" cy="0"/>
+            <a:ext cx="5532120" cy="0"/>
           </a:xfrm>
           <a:prstGeom prst="line">
             <a:avLst/>
@@ -2441,7 +2474,7 @@
         <p:spPr>
           <a:xfrm>
             <a:off x="548640" y="384048"/>
-            <a:ext cx="7315200" cy="868680"/>
+            <a:ext cx="7040880" cy="868680"/>
           </a:xfrm>
           <a:prstGeom prst="rect">
             <a:avLst/>
@@ -2480,7 +2513,7 @@
         <p:spPr>
           <a:xfrm>
             <a:off x="548640" y="1874520"/>
-            <a:ext cx="2148840" cy="960120"/>
+            <a:ext cx="2057400" cy="960120"/>
           </a:xfrm>
           <a:prstGeom prst="roundRect">
             <a:avLst>
@@ -2526,7 +2559,7 @@
         <p:spPr>
           <a:xfrm>
             <a:off x="1115568" y="2011680"/>
-            <a:ext cx="1490472" cy="411480"/>
+            <a:ext cx="1399032" cy="411480"/>
           </a:xfrm>
           <a:prstGeom prst="rect">
             <a:avLst/>
@@ -2562,7 +2595,7 @@
         <p:spPr>
           <a:xfrm>
             <a:off x="1115568" y="2423160"/>
-            <a:ext cx="1490472" cy="347472"/>
+            <a:ext cx="1399032" cy="347472"/>
           </a:xfrm>
           <a:prstGeom prst="rect">
             <a:avLst/>
@@ -2597,8 +2630,8 @@
         </p:nvSpPr>
         <p:spPr>
           <a:xfrm>
-            <a:off x="3520440" y="1874520"/>
-            <a:ext cx="2148840" cy="960120"/>
+            <a:off x="3557016" y="1874520"/>
+            <a:ext cx="2057400" cy="960120"/>
           </a:xfrm>
           <a:prstGeom prst="roundRect">
             <a:avLst>
@@ -2627,7 +2660,7 @@
         </p:blipFill>
         <p:spPr>
           <a:xfrm>
-            <a:off x="3685032" y="2057400"/>
+            <a:off x="3721608" y="2057400"/>
             <a:ext cx="292608" cy="292608"/>
           </a:xfrm>
           <a:prstGeom prst="rect">
@@ -2643,8 +2676,8 @@
         </p:nvSpPr>
         <p:spPr>
           <a:xfrm>
-            <a:off x="4087368" y="2011680"/>
-            <a:ext cx="1490472" cy="411480"/>
+            <a:off x="4123944" y="2011680"/>
+            <a:ext cx="1399032" cy="411480"/>
           </a:xfrm>
           <a:prstGeom prst="rect">
             <a:avLst/>
@@ -2679,8 +2712,8 @@
         </p:nvSpPr>
         <p:spPr>
           <a:xfrm>
-            <a:off x="4087368" y="2423160"/>
-            <a:ext cx="1490472" cy="347472"/>
+            <a:off x="4123944" y="2423160"/>
+            <a:ext cx="1399032" cy="347472"/>
           </a:xfrm>
           <a:prstGeom prst="rect">
             <a:avLst/>
@@ -2715,8 +2748,8 @@
         </p:nvSpPr>
         <p:spPr>
           <a:xfrm>
-            <a:off x="6492240" y="1874520"/>
-            <a:ext cx="2148840" cy="960120"/>
+            <a:off x="6565392" y="1874520"/>
+            <a:ext cx="2057400" cy="960120"/>
           </a:xfrm>
           <a:prstGeom prst="roundRect">
             <a:avLst>
@@ -2745,7 +2778,7 @@
         </p:blipFill>
         <p:spPr>
           <a:xfrm>
-            <a:off x="6656832" y="2057400"/>
+            <a:off x="6729984" y="2057400"/>
             <a:ext cx="292608" cy="292608"/>
           </a:xfrm>
           <a:prstGeom prst="rect">
@@ -2761,8 +2794,8 @@
         </p:nvSpPr>
         <p:spPr>
           <a:xfrm>
-            <a:off x="7059168" y="2011680"/>
-            <a:ext cx="1490472" cy="411480"/>
+            <a:off x="7132320" y="2011680"/>
+            <a:ext cx="1399032" cy="411480"/>
           </a:xfrm>
           <a:prstGeom prst="rect">
             <a:avLst/>
@@ -2797,8 +2830,8 @@
         </p:nvSpPr>
         <p:spPr>
           <a:xfrm>
-            <a:off x="7059168" y="2423160"/>
-            <a:ext cx="1490472" cy="347472"/>
+            <a:off x="7132320" y="2423160"/>
+            <a:ext cx="1399032" cy="347472"/>
           </a:xfrm>
           <a:prstGeom prst="rect">
             <a:avLst/>
@@ -2819,7 +2852,7 @@
                   <a:schemeClr val="tx2"/>
                 </a:solidFill>
               </a:rPr>
-              <a:t>Acquirers and schemes route it onward</a:t>
+              <a:t>Routes it to the bank</a:t>
             </a:r>
             <a:endParaRPr lang="en-US" sz="1100" dirty="0"/>
           </a:p>
@@ -2833,8 +2866,8 @@
         </p:nvSpPr>
         <p:spPr>
           <a:xfrm>
-            <a:off x="9491472" y="1874520"/>
-            <a:ext cx="2148840" cy="960120"/>
+            <a:off x="9582912" y="1874520"/>
+            <a:ext cx="2057400" cy="960120"/>
           </a:xfrm>
           <a:prstGeom prst="roundRect">
             <a:avLst>
@@ -2870,7 +2903,7 @@
         </p:blipFill>
         <p:spPr>
           <a:xfrm>
-            <a:off x="9656064" y="2057400"/>
+            <a:off x="9747504" y="2057400"/>
             <a:ext cx="292608" cy="292608"/>
           </a:xfrm>
           <a:prstGeom prst="rect">
@@ -2886,8 +2919,8 @@
         </p:nvSpPr>
         <p:spPr>
           <a:xfrm>
-            <a:off x="10058400" y="2011680"/>
-            <a:ext cx="1490472" cy="411480"/>
+            <a:off x="10149840" y="2011680"/>
+            <a:ext cx="1399032" cy="411480"/>
           </a:xfrm>
           <a:prstGeom prst="rect">
             <a:avLst/>
@@ -2922,8 +2955,8 @@
         </p:nvSpPr>
         <p:spPr>
           <a:xfrm>
-            <a:off x="10058400" y="2423160"/>
-            <a:ext cx="1490472" cy="347472"/>
+            <a:off x="10149840" y="2423160"/>
+            <a:ext cx="1399032" cy="347472"/>
           </a:xfrm>
           <a:prstGeom prst="rect">
             <a:avLst/>
@@ -2958,8 +2991,8 @@
         </p:nvSpPr>
         <p:spPr>
           <a:xfrm>
-            <a:off x="2697480" y="2354580"/>
-            <a:ext cx="804672" cy="0"/>
+            <a:off x="2642616" y="2354580"/>
+            <a:ext cx="859536" cy="0"/>
           </a:xfrm>
           <a:prstGeom prst="line">
             <a:avLst/>
@@ -2982,8 +3015,8 @@
         </p:nvSpPr>
         <p:spPr>
           <a:xfrm>
-            <a:off x="5669280" y="2354580"/>
-            <a:ext cx="804672" cy="0"/>
+            <a:off x="5650992" y="2354580"/>
+            <a:ext cx="859536" cy="0"/>
           </a:xfrm>
           <a:prstGeom prst="line">
             <a:avLst/>
@@ -3006,8 +3039,8 @@
         </p:nvSpPr>
         <p:spPr>
           <a:xfrm>
-            <a:off x="8641080" y="2354580"/>
-            <a:ext cx="832104" cy="0"/>
+            <a:off x="8659368" y="2354580"/>
+            <a:ext cx="868680" cy="0"/>
           </a:xfrm>
           <a:prstGeom prst="line">
             <a:avLst/>
@@ -3030,7 +3063,7 @@
         </p:nvSpPr>
         <p:spPr>
           <a:xfrm>
-            <a:off x="5833872" y="2116836"/>
+            <a:off x="5852160" y="2116836"/>
             <a:ext cx="475488" cy="475488"/>
           </a:xfrm>
           <a:prstGeom prst="ellipse">
@@ -3068,7 +3101,7 @@
         </p:blipFill>
         <p:spPr>
           <a:xfrm>
-            <a:off x="5952744" y="2235708"/>
+            <a:off x="5971032" y="2235708"/>
             <a:ext cx="237744" cy="237744"/>
           </a:xfrm>
           <a:prstGeom prst="rect">
@@ -3084,7 +3117,7 @@
         </p:nvSpPr>
         <p:spPr>
           <a:xfrm>
-            <a:off x="4526280" y="3017520"/>
+            <a:off x="4535424" y="3017520"/>
             <a:ext cx="3108960" cy="594360"/>
           </a:xfrm>
           <a:prstGeom prst="rect">
@@ -3134,8 +3167,8 @@
         </p:nvSpPr>
         <p:spPr>
           <a:xfrm>
-            <a:off x="7315200" y="1417320"/>
-            <a:ext cx="4325112" cy="320040"/>
+            <a:off x="6565392" y="1307592"/>
+            <a:ext cx="5074920" cy="320040"/>
           </a:xfrm>
           <a:prstGeom prst="rect">
             <a:avLst/>
@@ -3170,8 +3203,8 @@
         </p:nvSpPr>
         <p:spPr>
           <a:xfrm>
-            <a:off x="7571232" y="1764792"/>
-            <a:ext cx="3813048" cy="0"/>
+            <a:off x="6565392" y="1673352"/>
+            <a:ext cx="5074920" cy="0"/>
           </a:xfrm>
           <a:prstGeom prst="line">
             <a:avLst/>
@@ -3686,7 +3719,7 @@
         </p:nvSpPr>
         <p:spPr>
           <a:xfrm>
-            <a:off x="548640" y="6400800"/>
+            <a:off x="548640" y="6309360"/>
             <a:ext cx="5852160" cy="274320"/>
           </a:xfrm>
           <a:prstGeom prst="rect">
@@ -3696,7 +3729,7 @@
           <a:ln/>
         </p:spPr>
         <p:txBody>
-          <a:bodyPr wrap="square" lIns="0" tIns="0" rIns="0" bIns="0" rtlCol="0" anchor="t"/>
+          <a:bodyPr wrap="square" lIns="0" tIns="0" rIns="0" bIns="0" rtlCol="0" anchor="ctr"/>
           <a:lstStyle/>
           <a:p>
             <a:pPr indent="0" marL="0">
@@ -3726,7 +3759,7 @@
         </p:nvSpPr>
         <p:spPr>
           <a:xfrm>
-            <a:off x="11274552" y="6400800"/>
+            <a:off x="11274552" y="6309360"/>
             <a:ext cx="365760" cy="274320"/>
           </a:xfrm>
           <a:prstGeom prst="rect">
@@ -3739,7 +3772,7 @@
           </a:extLst>
         </p:spPr>
         <p:txBody>
-          <a:bodyPr/>
+          <a:bodyPr anchor="ctr"/>
           <a:lstStyle>
             <a:lvl1pPr>
               <a:defRPr sz="1000">
@@ -3795,7 +3828,7 @@
         <p:spPr>
           <a:xfrm>
             <a:off x="548640" y="384048"/>
-            <a:ext cx="7315200" cy="868680"/>
+            <a:ext cx="7040880" cy="868680"/>
           </a:xfrm>
           <a:prstGeom prst="rect">
             <a:avLst/>
@@ -3986,12 +4019,12 @@
         </p:nvSpPr>
         <p:spPr>
           <a:xfrm>
-            <a:off x="548640" y="1600200"/>
-            <a:ext cx="2542032" cy="2331720"/>
+            <a:off x="548640" y="1691640"/>
+            <a:ext cx="2542032" cy="2286000"/>
           </a:xfrm>
           <a:prstGeom prst="roundRect">
             <a:avLst>
-              <a:gd name="adj" fmla="val 3922"/>
+              <a:gd name="adj" fmla="val 4000"/>
             </a:avLst>
           </a:prstGeom>
           <a:solidFill>
@@ -4008,7 +4041,7 @@
         </p:nvSpPr>
         <p:spPr>
           <a:xfrm>
-            <a:off x="777240" y="1828800"/>
+            <a:off x="777240" y="1920240"/>
             <a:ext cx="420624" cy="420624"/>
           </a:xfrm>
           <a:prstGeom prst="ellipse">
@@ -4046,7 +4079,7 @@
         </p:nvSpPr>
         <p:spPr>
           <a:xfrm>
-            <a:off x="1325880" y="1783080"/>
+            <a:off x="1325880" y="1874520"/>
             <a:ext cx="1627632" cy="512064"/>
           </a:xfrm>
           <a:prstGeom prst="rect">
@@ -4082,8 +4115,8 @@
         </p:nvSpPr>
         <p:spPr>
           <a:xfrm>
-            <a:off x="777240" y="2468880"/>
-            <a:ext cx="2130552" cy="1371600"/>
+            <a:off x="777240" y="2560320"/>
+            <a:ext cx="2130552" cy="1325880"/>
           </a:xfrm>
           <a:prstGeom prst="rect">
             <a:avLst/>
@@ -4140,7 +4173,7 @@
         </p:nvSpPr>
         <p:spPr>
           <a:xfrm>
-            <a:off x="3127248" y="2766060"/>
+            <a:off x="3127248" y="2834640"/>
             <a:ext cx="231343" cy="0"/>
           </a:xfrm>
           <a:prstGeom prst="line">
@@ -4164,12 +4197,12 @@
         </p:nvSpPr>
         <p:spPr>
           <a:xfrm>
-            <a:off x="3395167" y="1600200"/>
-            <a:ext cx="2542032" cy="2331720"/>
+            <a:off x="3395167" y="1691640"/>
+            <a:ext cx="2542032" cy="2286000"/>
           </a:xfrm>
           <a:prstGeom prst="roundRect">
             <a:avLst>
-              <a:gd name="adj" fmla="val 3922"/>
+              <a:gd name="adj" fmla="val 4000"/>
             </a:avLst>
           </a:prstGeom>
           <a:solidFill>
@@ -4186,7 +4219,7 @@
         </p:nvSpPr>
         <p:spPr>
           <a:xfrm>
-            <a:off x="3623767" y="1828800"/>
+            <a:off x="3623767" y="1920240"/>
             <a:ext cx="420624" cy="420624"/>
           </a:xfrm>
           <a:prstGeom prst="ellipse">
@@ -4224,7 +4257,7 @@
         </p:nvSpPr>
         <p:spPr>
           <a:xfrm>
-            <a:off x="4172407" y="1783080"/>
+            <a:off x="4172407" y="1874520"/>
             <a:ext cx="1627632" cy="512064"/>
           </a:xfrm>
           <a:prstGeom prst="rect">
@@ -4260,8 +4293,8 @@
         </p:nvSpPr>
         <p:spPr>
           <a:xfrm>
-            <a:off x="3623767" y="2468880"/>
-            <a:ext cx="2130552" cy="1371600"/>
+            <a:off x="3623767" y="2560320"/>
+            <a:ext cx="2130552" cy="1325880"/>
           </a:xfrm>
           <a:prstGeom prst="rect">
             <a:avLst/>
@@ -4318,7 +4351,7 @@
         </p:nvSpPr>
         <p:spPr>
           <a:xfrm>
-            <a:off x="5973775" y="2766060"/>
+            <a:off x="5973775" y="2834640"/>
             <a:ext cx="231343" cy="0"/>
           </a:xfrm>
           <a:prstGeom prst="line">
@@ -4342,12 +4375,12 @@
         </p:nvSpPr>
         <p:spPr>
           <a:xfrm>
-            <a:off x="6241694" y="1600200"/>
-            <a:ext cx="2542032" cy="2331720"/>
+            <a:off x="6241694" y="1691640"/>
+            <a:ext cx="2542032" cy="2286000"/>
           </a:xfrm>
           <a:prstGeom prst="roundRect">
             <a:avLst>
-              <a:gd name="adj" fmla="val 3922"/>
+              <a:gd name="adj" fmla="val 4000"/>
             </a:avLst>
           </a:prstGeom>
           <a:solidFill>
@@ -4371,7 +4404,7 @@
         </p:nvSpPr>
         <p:spPr>
           <a:xfrm>
-            <a:off x="6470294" y="1828800"/>
+            <a:off x="6470294" y="1920240"/>
             <a:ext cx="420624" cy="420624"/>
           </a:xfrm>
           <a:prstGeom prst="ellipse">
@@ -4409,7 +4442,7 @@
         </p:nvSpPr>
         <p:spPr>
           <a:xfrm>
-            <a:off x="7018934" y="1783080"/>
+            <a:off x="7018934" y="1874520"/>
             <a:ext cx="1307592" cy="512064"/>
           </a:xfrm>
           <a:prstGeom prst="rect">
@@ -4453,7 +4486,7 @@
         </p:blipFill>
         <p:spPr>
           <a:xfrm>
-            <a:off x="8344814" y="1901952"/>
+            <a:off x="8344814" y="1993392"/>
             <a:ext cx="274320" cy="274320"/>
           </a:xfrm>
           <a:prstGeom prst="rect">
@@ -4469,8 +4502,8 @@
         </p:nvSpPr>
         <p:spPr>
           <a:xfrm>
-            <a:off x="6470294" y="2468880"/>
-            <a:ext cx="2130552" cy="1371600"/>
+            <a:off x="6470294" y="2560320"/>
+            <a:ext cx="2130552" cy="1325880"/>
           </a:xfrm>
           <a:prstGeom prst="rect">
             <a:avLst/>
@@ -4527,7 +4560,7 @@
         </p:nvSpPr>
         <p:spPr>
           <a:xfrm>
-            <a:off x="8820302" y="2766060"/>
+            <a:off x="8820302" y="2834640"/>
             <a:ext cx="231343" cy="0"/>
           </a:xfrm>
           <a:prstGeom prst="line">
@@ -4551,12 +4584,12 @@
         </p:nvSpPr>
         <p:spPr>
           <a:xfrm>
-            <a:off x="9088222" y="1600200"/>
-            <a:ext cx="2542032" cy="2331720"/>
+            <a:off x="9088222" y="1691640"/>
+            <a:ext cx="2542032" cy="2286000"/>
           </a:xfrm>
           <a:prstGeom prst="roundRect">
             <a:avLst>
-              <a:gd name="adj" fmla="val 3922"/>
+              <a:gd name="adj" fmla="val 4000"/>
             </a:avLst>
           </a:prstGeom>
           <a:solidFill>
@@ -4573,7 +4606,7 @@
         </p:nvSpPr>
         <p:spPr>
           <a:xfrm>
-            <a:off x="9316822" y="1828800"/>
+            <a:off x="9316822" y="1920240"/>
             <a:ext cx="420624" cy="420624"/>
           </a:xfrm>
           <a:prstGeom prst="ellipse">
@@ -4611,7 +4644,7 @@
         </p:nvSpPr>
         <p:spPr>
           <a:xfrm>
-            <a:off x="9865462" y="1783080"/>
+            <a:off x="9865462" y="1874520"/>
             <a:ext cx="1627632" cy="512064"/>
           </a:xfrm>
           <a:prstGeom prst="rect">
@@ -4647,8 +4680,8 @@
         </p:nvSpPr>
         <p:spPr>
           <a:xfrm>
-            <a:off x="9316822" y="2468880"/>
-            <a:ext cx="2130552" cy="1371600"/>
+            <a:off x="9316822" y="2560320"/>
+            <a:ext cx="2130552" cy="1325880"/>
           </a:xfrm>
           <a:prstGeom prst="rect">
             <a:avLst/>
@@ -4705,8 +4738,8 @@
         </p:nvSpPr>
         <p:spPr>
           <a:xfrm>
-            <a:off x="10359238" y="3931920"/>
-            <a:ext cx="0" cy="347472"/>
+            <a:off x="10359238" y="3977640"/>
+            <a:ext cx="0" cy="411480"/>
           </a:xfrm>
           <a:prstGeom prst="line">
             <a:avLst/>
@@ -4729,7 +4762,7 @@
         </p:nvSpPr>
         <p:spPr>
           <a:xfrm flipH="1">
-            <a:off x="1819656" y="4279392"/>
+            <a:off x="1819656" y="4389120"/>
             <a:ext cx="8539582" cy="0"/>
           </a:xfrm>
           <a:prstGeom prst="line">
@@ -4753,8 +4786,8 @@
         </p:nvSpPr>
         <p:spPr>
           <a:xfrm flipV="1">
-            <a:off x="1819656" y="3950208"/>
-            <a:ext cx="0" cy="329184"/>
+            <a:off x="1819656" y="3995928"/>
+            <a:ext cx="0" cy="393192"/>
           </a:xfrm>
           <a:prstGeom prst="line">
             <a:avLst/>
@@ -4777,7 +4810,7 @@
         </p:nvSpPr>
         <p:spPr>
           <a:xfrm>
-            <a:off x="2103120" y="4105656"/>
+            <a:off x="2103120" y="4215384"/>
             <a:ext cx="7955280" cy="347472"/>
           </a:xfrm>
           <a:prstGeom prst="roundRect">
@@ -4804,7 +4837,7 @@
         </p:nvSpPr>
         <p:spPr>
           <a:xfrm>
-            <a:off x="2194560" y="4105656"/>
+            <a:off x="2194560" y="4215384"/>
             <a:ext cx="7772400" cy="347472"/>
           </a:xfrm>
           <a:prstGeom prst="rect">
@@ -4851,12 +4884,12 @@
         </p:nvSpPr>
         <p:spPr>
           <a:xfrm>
-            <a:off x="7973568" y="1143000"/>
-            <a:ext cx="3666744" cy="329184"/>
+            <a:off x="7973568" y="1097280"/>
+            <a:ext cx="3666744" cy="310896"/>
           </a:xfrm>
           <a:prstGeom prst="roundRect">
             <a:avLst>
-              <a:gd name="adj" fmla="val 47222"/>
+              <a:gd name="adj" fmla="val 50000"/>
             </a:avLst>
           </a:prstGeom>
           <a:solidFill>
@@ -4891,7 +4924,7 @@
         </p:nvSpPr>
         <p:spPr>
           <a:xfrm>
-            <a:off x="548640" y="4937760"/>
+            <a:off x="548640" y="4846320"/>
             <a:ext cx="11091672" cy="1097280"/>
           </a:xfrm>
           <a:prstGeom prst="roundRect">
@@ -4920,7 +4953,7 @@
         </p:nvSpPr>
         <p:spPr>
           <a:xfrm>
-            <a:off x="822960" y="5184648"/>
+            <a:off x="822960" y="5093208"/>
             <a:ext cx="603504" cy="603504"/>
           </a:xfrm>
           <a:prstGeom prst="ellipse">
@@ -4950,7 +4983,7 @@
         </p:blipFill>
         <p:spPr>
           <a:xfrm>
-            <a:off x="973836" y="5335524"/>
+            <a:off x="973836" y="5244084"/>
             <a:ext cx="301752" cy="301752"/>
           </a:xfrm>
           <a:prstGeom prst="rect">
@@ -4966,7 +4999,7 @@
         </p:nvSpPr>
         <p:spPr>
           <a:xfrm>
-            <a:off x="1645920" y="5120640"/>
+            <a:off x="1645920" y="5029200"/>
             <a:ext cx="6858000" cy="365760"/>
           </a:xfrm>
           <a:prstGeom prst="rect">
@@ -5002,7 +5035,7 @@
         </p:nvSpPr>
         <p:spPr>
           <a:xfrm>
-            <a:off x="1645920" y="5486400"/>
+            <a:off x="1645920" y="5394960"/>
             <a:ext cx="6949440" cy="457200"/>
           </a:xfrm>
           <a:prstGeom prst="rect">
@@ -5038,8 +5071,8 @@
         </p:nvSpPr>
         <p:spPr>
           <a:xfrm>
-            <a:off x="8778240" y="5065776"/>
-            <a:ext cx="2697480" cy="868680"/>
+            <a:off x="8595360" y="4956048"/>
+            <a:ext cx="2743200" cy="914400"/>
           </a:xfrm>
           <a:prstGeom prst="rect">
             <a:avLst/>
@@ -5074,7 +5107,21 @@
                   <a:schemeClr val="tx1"/>
                 </a:solidFill>
               </a:rPr>
-              <a:t>to update the Register after a major designation</a:t>
+              <a:t>to update the Register</a:t>
+            </a:r>
+            <a:endParaRPr lang="en-US" sz="3000" dirty="0"/>
+          </a:p>
+          <a:p>
+            <a:pPr algn="r" indent="0" marL="0">
+              <a:buNone/>
+            </a:pPr>
+            <a:r>
+              <a:rPr lang="en-US" sz="1100" dirty="0">
+                <a:solidFill>
+                  <a:schemeClr val="tx1"/>
+                </a:solidFill>
+              </a:rPr>
+              <a:t>after a major designation</a:t>
             </a:r>
             <a:endParaRPr lang="en-US" sz="3000" dirty="0"/>
           </a:p>
@@ -5088,7 +5135,7 @@
         </p:nvSpPr>
         <p:spPr>
           <a:xfrm>
-            <a:off x="548640" y="6400800"/>
+            <a:off x="548640" y="6309360"/>
             <a:ext cx="5852160" cy="274320"/>
           </a:xfrm>
           <a:prstGeom prst="rect">
@@ -5098,7 +5145,7 @@
           <a:ln/>
         </p:spPr>
         <p:txBody>
-          <a:bodyPr wrap="square" lIns="0" tIns="0" rIns="0" bIns="0" rtlCol="0" anchor="t"/>
+          <a:bodyPr wrap="square" lIns="0" tIns="0" rIns="0" bIns="0" rtlCol="0" anchor="ctr"/>
           <a:lstStyle/>
           <a:p>
             <a:pPr indent="0" marL="0">
@@ -5128,7 +5175,7 @@
         </p:nvSpPr>
         <p:spPr>
           <a:xfrm>
-            <a:off x="11274552" y="6400800"/>
+            <a:off x="11274552" y="6309360"/>
             <a:ext cx="365760" cy="274320"/>
           </a:xfrm>
           <a:prstGeom prst="rect">
@@ -5141,7 +5188,7 @@
           </a:extLst>
         </p:spPr>
         <p:txBody>
-          <a:bodyPr/>
+          <a:bodyPr anchor="ctr"/>
           <a:lstStyle>
             <a:lvl1pPr>
               <a:defRPr sz="1000">
@@ -5197,7 +5244,7 @@
         <p:spPr>
           <a:xfrm>
             <a:off x="548640" y="384048"/>
-            <a:ext cx="7315200" cy="868680"/>
+            <a:ext cx="7040880" cy="868680"/>
           </a:xfrm>
           <a:prstGeom prst="rect">
             <a:avLst/>
@@ -5648,12 +5695,12 @@
         </p:nvSpPr>
         <p:spPr>
           <a:xfrm>
-            <a:off x="548640" y="2542032"/>
-            <a:ext cx="2697480" cy="1298448"/>
+            <a:off x="548640" y="2514600"/>
+            <a:ext cx="2697480" cy="1243584"/>
           </a:xfrm>
           <a:prstGeom prst="roundRect">
             <a:avLst>
-              <a:gd name="adj" fmla="val 7042"/>
+              <a:gd name="adj" fmla="val 7353"/>
             </a:avLst>
           </a:prstGeom>
           <a:solidFill>
@@ -5678,7 +5725,7 @@
         </p:blipFill>
         <p:spPr>
           <a:xfrm>
-            <a:off x="777240" y="2816352"/>
+            <a:off x="777240" y="2788920"/>
             <a:ext cx="347472" cy="347472"/>
           </a:xfrm>
           <a:prstGeom prst="rect">
@@ -5694,7 +5741,7 @@
         </p:nvSpPr>
         <p:spPr>
           <a:xfrm>
-            <a:off x="1280160" y="2770632"/>
+            <a:off x="1280160" y="2743200"/>
             <a:ext cx="1874520" cy="411480"/>
           </a:xfrm>
           <a:prstGeom prst="rect">
@@ -5730,7 +5777,7 @@
         </p:nvSpPr>
         <p:spPr>
           <a:xfrm>
-            <a:off x="777240" y="3273552"/>
+            <a:off x="777240" y="3246120"/>
             <a:ext cx="2331720" cy="457200"/>
           </a:xfrm>
           <a:prstGeom prst="rect">
@@ -5766,7 +5813,7 @@
         </p:nvSpPr>
         <p:spPr>
           <a:xfrm>
-            <a:off x="3264408" y="3191256"/>
+            <a:off x="3264408" y="3136392"/>
             <a:ext cx="237744" cy="0"/>
           </a:xfrm>
           <a:prstGeom prst="line">
@@ -5790,12 +5837,12 @@
         </p:nvSpPr>
         <p:spPr>
           <a:xfrm>
-            <a:off x="3520440" y="2542032"/>
-            <a:ext cx="3611880" cy="1298448"/>
+            <a:off x="3520440" y="2514600"/>
+            <a:ext cx="3383280" cy="1243584"/>
           </a:xfrm>
           <a:prstGeom prst="roundRect">
             <a:avLst>
-              <a:gd name="adj" fmla="val 7042"/>
+              <a:gd name="adj" fmla="val 7353"/>
             </a:avLst>
           </a:prstGeom>
           <a:solidFill>
@@ -5817,8 +5864,8 @@
         </p:nvSpPr>
         <p:spPr>
           <a:xfrm>
-            <a:off x="3749040" y="2798064"/>
-            <a:ext cx="3200400" cy="411480"/>
+            <a:off x="3749040" y="2715768"/>
+            <a:ext cx="3017520" cy="548640"/>
           </a:xfrm>
           <a:prstGeom prst="rect">
             <a:avLst/>
@@ -5853,8 +5900,8 @@
         </p:nvSpPr>
         <p:spPr>
           <a:xfrm>
-            <a:off x="3749040" y="3291840"/>
-            <a:ext cx="3200400" cy="320040"/>
+            <a:off x="3749040" y="3300984"/>
+            <a:ext cx="3017520" cy="320040"/>
           </a:xfrm>
           <a:prstGeom prst="rect">
             <a:avLst/>
@@ -5889,8 +5936,8 @@
         </p:nvSpPr>
         <p:spPr>
           <a:xfrm>
-            <a:off x="7150608" y="3191256"/>
-            <a:ext cx="100584" cy="0"/>
+            <a:off x="6922008" y="3136392"/>
+            <a:ext cx="310896" cy="0"/>
           </a:xfrm>
           <a:prstGeom prst="line">
             <a:avLst/>
@@ -5913,7 +5960,7 @@
         </p:nvSpPr>
         <p:spPr>
           <a:xfrm>
-            <a:off x="7269480" y="2715768"/>
+            <a:off x="7269480" y="2660904"/>
             <a:ext cx="1188720" cy="950976"/>
           </a:xfrm>
           <a:prstGeom prst="diamond">
@@ -5955,7 +6002,7 @@
         </p:nvSpPr>
         <p:spPr>
           <a:xfrm>
-            <a:off x="8458200" y="3191256"/>
+            <a:off x="8458200" y="3136392"/>
             <a:ext cx="45720" cy="0"/>
           </a:xfrm>
           <a:prstGeom prst="line">
@@ -5979,8 +6026,8 @@
         </p:nvSpPr>
         <p:spPr>
           <a:xfrm flipV="1">
-            <a:off x="8503920" y="2816352"/>
-            <a:ext cx="0" cy="374904"/>
+            <a:off x="8503920" y="2788920"/>
+            <a:ext cx="0" cy="347472"/>
           </a:xfrm>
           <a:prstGeom prst="line">
             <a:avLst/>
@@ -6003,7 +6050,7 @@
         </p:nvSpPr>
         <p:spPr>
           <a:xfrm>
-            <a:off x="8503920" y="2816352"/>
+            <a:off x="8503920" y="2788920"/>
             <a:ext cx="100584" cy="0"/>
           </a:xfrm>
           <a:prstGeom prst="line">
@@ -6027,8 +6074,8 @@
         </p:nvSpPr>
         <p:spPr>
           <a:xfrm>
-            <a:off x="8503920" y="3191256"/>
-            <a:ext cx="0" cy="374904"/>
+            <a:off x="8503920" y="3136392"/>
+            <a:ext cx="0" cy="347472"/>
           </a:xfrm>
           <a:prstGeom prst="line">
             <a:avLst/>
@@ -6051,7 +6098,7 @@
         </p:nvSpPr>
         <p:spPr>
           <a:xfrm>
-            <a:off x="8503920" y="3566160"/>
+            <a:off x="8503920" y="3483864"/>
             <a:ext cx="100584" cy="0"/>
           </a:xfrm>
           <a:prstGeom prst="line">
@@ -6075,7 +6122,7 @@
         </p:nvSpPr>
         <p:spPr>
           <a:xfrm>
-            <a:off x="8622792" y="2542032"/>
+            <a:off x="8622792" y="2514600"/>
             <a:ext cx="3017520" cy="548640"/>
           </a:xfrm>
           <a:prstGeom prst="roundRect">
@@ -6099,7 +6146,7 @@
         </p:nvSpPr>
         <p:spPr>
           <a:xfrm>
-            <a:off x="8769096" y="2660904"/>
+            <a:off x="8769096" y="2633472"/>
             <a:ext cx="310896" cy="310896"/>
           </a:xfrm>
           <a:prstGeom prst="ellipse">
@@ -6137,7 +6184,7 @@
         </p:nvSpPr>
         <p:spPr>
           <a:xfrm>
-            <a:off x="9226296" y="2542032"/>
+            <a:off x="9226296" y="2514600"/>
             <a:ext cx="2322576" cy="548640"/>
           </a:xfrm>
           <a:prstGeom prst="rect">
@@ -6173,7 +6220,7 @@
         </p:nvSpPr>
         <p:spPr>
           <a:xfrm>
-            <a:off x="8622792" y="3291840"/>
+            <a:off x="8622792" y="3209544"/>
             <a:ext cx="3017520" cy="548640"/>
           </a:xfrm>
           <a:prstGeom prst="roundRect">
@@ -6197,7 +6244,7 @@
         </p:nvSpPr>
         <p:spPr>
           <a:xfrm>
-            <a:off x="8769096" y="3410712"/>
+            <a:off x="8769096" y="3328416"/>
             <a:ext cx="310896" cy="310896"/>
           </a:xfrm>
           <a:prstGeom prst="ellipse">
@@ -6235,7 +6282,7 @@
         </p:nvSpPr>
         <p:spPr>
           <a:xfrm>
-            <a:off x="9226296" y="3291840"/>
+            <a:off x="9226296" y="3209544"/>
             <a:ext cx="2322576" cy="548640"/>
           </a:xfrm>
           <a:prstGeom prst="rect">
@@ -6271,12 +6318,12 @@
         </p:nvSpPr>
         <p:spPr>
           <a:xfrm>
-            <a:off x="548640" y="4114800"/>
-            <a:ext cx="2697480" cy="1298448"/>
+            <a:off x="548640" y="3986784"/>
+            <a:ext cx="2697480" cy="1243584"/>
           </a:xfrm>
           <a:prstGeom prst="roundRect">
             <a:avLst>
-              <a:gd name="adj" fmla="val 7042"/>
+              <a:gd name="adj" fmla="val 7353"/>
             </a:avLst>
           </a:prstGeom>
           <a:solidFill>
@@ -6301,7 +6348,7 @@
         </p:blipFill>
         <p:spPr>
           <a:xfrm>
-            <a:off x="777240" y="4389120"/>
+            <a:off x="777240" y="4261104"/>
             <a:ext cx="347472" cy="347472"/>
           </a:xfrm>
           <a:prstGeom prst="rect">
@@ -6317,7 +6364,7 @@
         </p:nvSpPr>
         <p:spPr>
           <a:xfrm>
-            <a:off x="1280160" y="4343400"/>
+            <a:off x="1280160" y="4215384"/>
             <a:ext cx="1874520" cy="411480"/>
           </a:xfrm>
           <a:prstGeom prst="rect">
@@ -6353,7 +6400,7 @@
         </p:nvSpPr>
         <p:spPr>
           <a:xfrm>
-            <a:off x="777240" y="4846320"/>
+            <a:off x="777240" y="4718304"/>
             <a:ext cx="2331720" cy="457200"/>
           </a:xfrm>
           <a:prstGeom prst="rect">
@@ -6389,7 +6436,7 @@
         </p:nvSpPr>
         <p:spPr>
           <a:xfrm>
-            <a:off x="3264408" y="4764024"/>
+            <a:off x="3264408" y="4608576"/>
             <a:ext cx="237744" cy="0"/>
           </a:xfrm>
           <a:prstGeom prst="line">
@@ -6413,12 +6460,12 @@
         </p:nvSpPr>
         <p:spPr>
           <a:xfrm>
-            <a:off x="3520440" y="4114800"/>
-            <a:ext cx="3611880" cy="1298448"/>
+            <a:off x="3520440" y="3986784"/>
+            <a:ext cx="3383280" cy="1243584"/>
           </a:xfrm>
           <a:prstGeom prst="roundRect">
             <a:avLst>
-              <a:gd name="adj" fmla="val 7042"/>
+              <a:gd name="adj" fmla="val 7353"/>
             </a:avLst>
           </a:prstGeom>
           <a:solidFill>
@@ -6440,8 +6487,8 @@
         </p:nvSpPr>
         <p:spPr>
           <a:xfrm>
-            <a:off x="3749040" y="4370832"/>
-            <a:ext cx="3200400" cy="411480"/>
+            <a:off x="3749040" y="4187952"/>
+            <a:ext cx="3017520" cy="548640"/>
           </a:xfrm>
           <a:prstGeom prst="rect">
             <a:avLst/>
@@ -6476,8 +6523,8 @@
         </p:nvSpPr>
         <p:spPr>
           <a:xfrm>
-            <a:off x="3749040" y="4864608"/>
-            <a:ext cx="3200400" cy="320040"/>
+            <a:off x="3749040" y="4773168"/>
+            <a:ext cx="3017520" cy="320040"/>
           </a:xfrm>
           <a:prstGeom prst="rect">
             <a:avLst/>
@@ -6512,8 +6559,8 @@
         </p:nvSpPr>
         <p:spPr>
           <a:xfrm>
-            <a:off x="7150608" y="4764024"/>
-            <a:ext cx="100584" cy="0"/>
+            <a:off x="6922008" y="4608576"/>
+            <a:ext cx="310896" cy="0"/>
           </a:xfrm>
           <a:prstGeom prst="line">
             <a:avLst/>
@@ -6536,7 +6583,7 @@
         </p:nvSpPr>
         <p:spPr>
           <a:xfrm>
-            <a:off x="7269480" y="4288536"/>
+            <a:off x="7269480" y="4133088"/>
             <a:ext cx="1188720" cy="950976"/>
           </a:xfrm>
           <a:prstGeom prst="diamond">
@@ -6578,7 +6625,7 @@
         </p:nvSpPr>
         <p:spPr>
           <a:xfrm>
-            <a:off x="8458200" y="4764024"/>
+            <a:off x="8458200" y="4608576"/>
             <a:ext cx="45720" cy="0"/>
           </a:xfrm>
           <a:prstGeom prst="line">
@@ -6602,8 +6649,8 @@
         </p:nvSpPr>
         <p:spPr>
           <a:xfrm flipV="1">
-            <a:off x="8503920" y="4389120"/>
-            <a:ext cx="0" cy="374904"/>
+            <a:off x="8503920" y="4261104"/>
+            <a:ext cx="0" cy="347472"/>
           </a:xfrm>
           <a:prstGeom prst="line">
             <a:avLst/>
@@ -6626,7 +6673,7 @@
         </p:nvSpPr>
         <p:spPr>
           <a:xfrm>
-            <a:off x="8503920" y="4389120"/>
+            <a:off x="8503920" y="4261104"/>
             <a:ext cx="100584" cy="0"/>
           </a:xfrm>
           <a:prstGeom prst="line">
@@ -6650,8 +6697,8 @@
         </p:nvSpPr>
         <p:spPr>
           <a:xfrm>
-            <a:off x="8503920" y="4764024"/>
-            <a:ext cx="0" cy="374904"/>
+            <a:off x="8503920" y="4608576"/>
+            <a:ext cx="0" cy="347472"/>
           </a:xfrm>
           <a:prstGeom prst="line">
             <a:avLst/>
@@ -6674,7 +6721,7 @@
         </p:nvSpPr>
         <p:spPr>
           <a:xfrm>
-            <a:off x="8503920" y="5138928"/>
+            <a:off x="8503920" y="4956048"/>
             <a:ext cx="100584" cy="0"/>
           </a:xfrm>
           <a:prstGeom prst="line">
@@ -6698,7 +6745,7 @@
         </p:nvSpPr>
         <p:spPr>
           <a:xfrm>
-            <a:off x="8622792" y="4114800"/>
+            <a:off x="8622792" y="3986784"/>
             <a:ext cx="3017520" cy="548640"/>
           </a:xfrm>
           <a:prstGeom prst="roundRect">
@@ -6722,7 +6769,7 @@
         </p:nvSpPr>
         <p:spPr>
           <a:xfrm>
-            <a:off x="8769096" y="4233672"/>
+            <a:off x="8769096" y="4105656"/>
             <a:ext cx="310896" cy="310896"/>
           </a:xfrm>
           <a:prstGeom prst="ellipse">
@@ -6760,7 +6807,7 @@
         </p:nvSpPr>
         <p:spPr>
           <a:xfrm>
-            <a:off x="9226296" y="4114800"/>
+            <a:off x="9226296" y="3986784"/>
             <a:ext cx="2322576" cy="548640"/>
           </a:xfrm>
           <a:prstGeom prst="rect">
@@ -6796,7 +6843,7 @@
         </p:nvSpPr>
         <p:spPr>
           <a:xfrm>
-            <a:off x="8622792" y="4864608"/>
+            <a:off x="8622792" y="4681728"/>
             <a:ext cx="3017520" cy="548640"/>
           </a:xfrm>
           <a:prstGeom prst="roundRect">
@@ -6820,7 +6867,7 @@
         </p:nvSpPr>
         <p:spPr>
           <a:xfrm>
-            <a:off x="8769096" y="4983480"/>
+            <a:off x="8769096" y="4800600"/>
             <a:ext cx="310896" cy="310896"/>
           </a:xfrm>
           <a:prstGeom prst="ellipse">
@@ -6858,7 +6905,7 @@
         </p:nvSpPr>
         <p:spPr>
           <a:xfrm>
-            <a:off x="9226296" y="4864608"/>
+            <a:off x="9226296" y="4681728"/>
             <a:ext cx="2322576" cy="548640"/>
           </a:xfrm>
           <a:prstGeom prst="rect">
@@ -6894,12 +6941,12 @@
         </p:nvSpPr>
         <p:spPr>
           <a:xfrm>
-            <a:off x="548640" y="5669280"/>
-            <a:ext cx="11091672" cy="475488"/>
+            <a:off x="548640" y="5486400"/>
+            <a:ext cx="11091672" cy="457200"/>
           </a:xfrm>
           <a:prstGeom prst="roundRect">
             <a:avLst>
-              <a:gd name="adj" fmla="val 19231"/>
+              <a:gd name="adj" fmla="val 20000"/>
             </a:avLst>
           </a:prstGeom>
           <a:solidFill>
@@ -6916,8 +6963,8 @@
         </p:nvSpPr>
         <p:spPr>
           <a:xfrm>
-            <a:off x="777240" y="5669280"/>
-            <a:ext cx="10634472" cy="475488"/>
+            <a:off x="777240" y="5486400"/>
+            <a:ext cx="10634472" cy="457200"/>
           </a:xfrm>
           <a:prstGeom prst="rect">
             <a:avLst/>
@@ -6963,7 +7010,7 @@
         </p:nvSpPr>
         <p:spPr>
           <a:xfrm>
-            <a:off x="548640" y="6400800"/>
+            <a:off x="548640" y="6309360"/>
             <a:ext cx="5852160" cy="274320"/>
           </a:xfrm>
           <a:prstGeom prst="rect">
@@ -6973,7 +7020,7 @@
           <a:ln/>
         </p:spPr>
         <p:txBody>
-          <a:bodyPr wrap="square" lIns="0" tIns="0" rIns="0" bIns="0" rtlCol="0" anchor="t"/>
+          <a:bodyPr wrap="square" lIns="0" tIns="0" rIns="0" bIns="0" rtlCol="0" anchor="ctr"/>
           <a:lstStyle/>
           <a:p>
             <a:pPr indent="0" marL="0">
@@ -7003,7 +7050,7 @@
         </p:nvSpPr>
         <p:spPr>
           <a:xfrm>
-            <a:off x="11274552" y="6400800"/>
+            <a:off x="11274552" y="6309360"/>
             <a:ext cx="365760" cy="274320"/>
           </a:xfrm>
           <a:prstGeom prst="rect">
@@ -7016,7 +7063,7 @@
           </a:extLst>
         </p:spPr>
         <p:txBody>
-          <a:bodyPr/>
+          <a:bodyPr anchor="ctr"/>
           <a:lstStyle>
             <a:lvl1pPr>
               <a:defRPr sz="1000">
@@ -7072,7 +7119,7 @@
         <p:spPr>
           <a:xfrm>
             <a:off x="548640" y="384048"/>
-            <a:ext cx="7315200" cy="868680"/>
+            <a:ext cx="7040880" cy="868680"/>
           </a:xfrm>
           <a:prstGeom prst="rect">
             <a:avLst/>
@@ -7264,11 +7311,11 @@
         <p:spPr>
           <a:xfrm>
             <a:off x="548640" y="1600200"/>
-            <a:ext cx="7406640" cy="1417320"/>
+            <a:ext cx="7406640" cy="1508760"/>
           </a:xfrm>
           <a:prstGeom prst="roundRect">
             <a:avLst>
-              <a:gd name="adj" fmla="val 6452"/>
+              <a:gd name="adj" fmla="val 6061"/>
             </a:avLst>
           </a:prstGeom>
           <a:solidFill>
@@ -7393,8 +7440,8 @@
         </p:nvSpPr>
         <p:spPr>
           <a:xfrm>
-            <a:off x="3017520" y="1783080"/>
-            <a:ext cx="4754880" cy="1143000"/>
+            <a:off x="3017520" y="1801368"/>
+            <a:ext cx="4754880" cy="1216152"/>
           </a:xfrm>
           <a:prstGeom prst="rect">
             <a:avLst/>
@@ -7469,12 +7516,12 @@
         </p:nvSpPr>
         <p:spPr>
           <a:xfrm>
-            <a:off x="548640" y="3200400"/>
-            <a:ext cx="7406640" cy="1417320"/>
+            <a:off x="548640" y="3291840"/>
+            <a:ext cx="7406640" cy="1371600"/>
           </a:xfrm>
           <a:prstGeom prst="roundRect">
             <a:avLst>
-              <a:gd name="adj" fmla="val 6452"/>
+              <a:gd name="adj" fmla="val 6667"/>
             </a:avLst>
           </a:prstGeom>
           <a:solidFill>
@@ -7498,7 +7545,7 @@
         </p:nvSpPr>
         <p:spPr>
           <a:xfrm>
-            <a:off x="777240" y="3383280"/>
+            <a:off x="777240" y="3474720"/>
             <a:ext cx="1097280" cy="411480"/>
           </a:xfrm>
           <a:prstGeom prst="rect">
@@ -7534,7 +7581,7 @@
         </p:nvSpPr>
         <p:spPr>
           <a:xfrm>
-            <a:off x="777240" y="3803904"/>
+            <a:off x="777240" y="3895344"/>
             <a:ext cx="2103120" cy="320040"/>
           </a:xfrm>
           <a:prstGeom prst="rect">
@@ -7570,7 +7617,7 @@
         </p:nvSpPr>
         <p:spPr>
           <a:xfrm>
-            <a:off x="777240" y="4078224"/>
+            <a:off x="777240" y="4169664"/>
             <a:ext cx="2103120" cy="320040"/>
           </a:xfrm>
           <a:prstGeom prst="rect">
@@ -7606,8 +7653,8 @@
         </p:nvSpPr>
         <p:spPr>
           <a:xfrm>
-            <a:off x="3017520" y="3383280"/>
-            <a:ext cx="4754880" cy="1143000"/>
+            <a:off x="3017520" y="3493008"/>
+            <a:ext cx="4754880" cy="1078992"/>
           </a:xfrm>
           <a:prstGeom prst="rect">
             <a:avLst/>
@@ -7682,7 +7729,7 @@
         </p:nvSpPr>
         <p:spPr>
           <a:xfrm>
-            <a:off x="548640" y="4800600"/>
+            <a:off x="548640" y="4846320"/>
             <a:ext cx="7406640" cy="1188720"/>
           </a:xfrm>
           <a:prstGeom prst="roundRect">
@@ -7704,7 +7751,7 @@
         </p:nvSpPr>
         <p:spPr>
           <a:xfrm>
-            <a:off x="777240" y="4983480"/>
+            <a:off x="777240" y="5029200"/>
             <a:ext cx="1097280" cy="411480"/>
           </a:xfrm>
           <a:prstGeom prst="rect">
@@ -7740,7 +7787,7 @@
         </p:nvSpPr>
         <p:spPr>
           <a:xfrm>
-            <a:off x="777240" y="5404104"/>
+            <a:off x="777240" y="5449824"/>
             <a:ext cx="2103120" cy="320040"/>
           </a:xfrm>
           <a:prstGeom prst="rect">
@@ -7776,7 +7823,7 @@
         </p:nvSpPr>
         <p:spPr>
           <a:xfrm>
-            <a:off x="777240" y="5678424"/>
+            <a:off x="777240" y="5724144"/>
             <a:ext cx="2103120" cy="320040"/>
           </a:xfrm>
           <a:prstGeom prst="rect">
@@ -7812,17 +7859,17 @@
         </p:nvSpPr>
         <p:spPr>
           <a:xfrm>
-            <a:off x="3017520" y="4983480"/>
-            <a:ext cx="4754880" cy="914400"/>
-          </a:xfrm>
-          <a:prstGeom prst="rect">
-            <a:avLst/>
-          </a:prstGeom>
-          <a:noFill/>
-          <a:ln/>
-        </p:spPr>
-        <p:txBody>
-          <a:bodyPr wrap="square" lIns="0" tIns="0" rIns="0" bIns="0" rtlCol="0" anchor="ctr"/>
+            <a:off x="3017520" y="5047488"/>
+            <a:ext cx="4754880" cy="896112"/>
+          </a:xfrm>
+          <a:prstGeom prst="rect">
+            <a:avLst/>
+          </a:prstGeom>
+          <a:noFill/>
+          <a:ln/>
+        </p:spPr>
+        <p:txBody>
+          <a:bodyPr wrap="square" lIns="0" tIns="0" rIns="0" bIns="0" rtlCol="0" anchor="t"/>
           <a:lstStyle/>
           <a:p>
             <a:pPr marL="177800" indent="-177800">
@@ -7853,11 +7900,11 @@
         <p:spPr>
           <a:xfrm>
             <a:off x="8275320" y="1600200"/>
-            <a:ext cx="3364992" cy="1341120"/>
+            <a:ext cx="3364992" cy="1508760"/>
           </a:xfrm>
           <a:prstGeom prst="roundRect">
             <a:avLst>
-              <a:gd name="adj" fmla="val 6818"/>
+              <a:gd name="adj" fmla="val 6061"/>
             </a:avLst>
           </a:prstGeom>
           <a:solidFill>
@@ -7886,8 +7933,8 @@
         </p:nvSpPr>
         <p:spPr>
           <a:xfrm>
-            <a:off x="8503920" y="1764792"/>
-            <a:ext cx="2926080" cy="594360"/>
+            <a:off x="8503920" y="1737360"/>
+            <a:ext cx="2926080" cy="548640"/>
           </a:xfrm>
           <a:prstGeom prst="rect">
             <a:avLst/>
@@ -7903,14 +7950,14 @@
               <a:buNone/>
             </a:pPr>
             <a:r>
-              <a:rPr lang="en-US" sz="3400" b="1" dirty="0">
+              <a:rPr lang="en-US" sz="3200" b="1" dirty="0">
                 <a:solidFill>
                   <a:schemeClr val="accent1"/>
                 </a:solidFill>
               </a:rPr>
               <a:t>Weekly</a:t>
             </a:r>
-            <a:endParaRPr lang="en-US" sz="3400" dirty="0"/>
+            <a:endParaRPr lang="en-US" sz="3200" dirty="0"/>
           </a:p>
         </p:txBody>
       </p:sp>
@@ -7922,8 +7969,8 @@
         </p:nvSpPr>
         <p:spPr>
           <a:xfrm>
-            <a:off x="8503920" y="2377440"/>
-            <a:ext cx="2926080" cy="411480"/>
+            <a:off x="8503920" y="2295144"/>
+            <a:ext cx="2926080" cy="384048"/>
           </a:xfrm>
           <a:prstGeom prst="rect">
             <a:avLst/>
@@ -7958,12 +8005,12 @@
         </p:nvSpPr>
         <p:spPr>
           <a:xfrm>
-            <a:off x="8275320" y="3124200"/>
-            <a:ext cx="3364992" cy="1341120"/>
+            <a:off x="8275320" y="3291840"/>
+            <a:ext cx="3364992" cy="1371600"/>
           </a:xfrm>
           <a:prstGeom prst="roundRect">
             <a:avLst>
-              <a:gd name="adj" fmla="val 6818"/>
+              <a:gd name="adj" fmla="val 6667"/>
             </a:avLst>
           </a:prstGeom>
           <a:solidFill>
@@ -7992,8 +8039,8 @@
         </p:nvSpPr>
         <p:spPr>
           <a:xfrm>
-            <a:off x="8503920" y="3288792"/>
-            <a:ext cx="2926080" cy="594360"/>
+            <a:off x="8503920" y="3429000"/>
+            <a:ext cx="2926080" cy="548640"/>
           </a:xfrm>
           <a:prstGeom prst="rect">
             <a:avLst/>
@@ -8009,14 +8056,14 @@
               <a:buNone/>
             </a:pPr>
             <a:r>
-              <a:rPr lang="en-US" sz="3400" b="1" dirty="0">
+              <a:rPr lang="en-US" sz="3200" b="1" dirty="0">
                 <a:solidFill>
                   <a:schemeClr val="accent2"/>
                 </a:solidFill>
               </a:rPr>
               <a:t>2 hours</a:t>
             </a:r>
-            <a:endParaRPr lang="en-US" sz="3400" dirty="0"/>
+            <a:endParaRPr lang="en-US" sz="3200" dirty="0"/>
           </a:p>
         </p:txBody>
       </p:sp>
@@ -8028,8 +8075,8 @@
         </p:nvSpPr>
         <p:spPr>
           <a:xfrm>
-            <a:off x="8503920" y="3901440"/>
-            <a:ext cx="2926080" cy="411480"/>
+            <a:off x="8503920" y="3986784"/>
+            <a:ext cx="2926080" cy="384048"/>
           </a:xfrm>
           <a:prstGeom prst="rect">
             <a:avLst/>
@@ -8064,12 +8111,12 @@
         </p:nvSpPr>
         <p:spPr>
           <a:xfrm>
-            <a:off x="8275320" y="4648200"/>
-            <a:ext cx="3364992" cy="1341120"/>
+            <a:off x="8275320" y="4846320"/>
+            <a:ext cx="3364992" cy="1188720"/>
           </a:xfrm>
           <a:prstGeom prst="roundRect">
             <a:avLst>
-              <a:gd name="adj" fmla="val 6818"/>
+              <a:gd name="adj" fmla="val 7692"/>
             </a:avLst>
           </a:prstGeom>
           <a:solidFill>
@@ -8098,8 +8145,8 @@
         </p:nvSpPr>
         <p:spPr>
           <a:xfrm>
-            <a:off x="8503920" y="4812792"/>
-            <a:ext cx="2926080" cy="594360"/>
+            <a:off x="8503920" y="4983480"/>
+            <a:ext cx="2926080" cy="548640"/>
           </a:xfrm>
           <a:prstGeom prst="rect">
             <a:avLst/>
@@ -8115,14 +8162,14 @@
               <a:buNone/>
             </a:pPr>
             <a:r>
-              <a:rPr lang="en-US" sz="3400" b="1" dirty="0">
+              <a:rPr lang="en-US" sz="3200" b="1" dirty="0">
                 <a:solidFill>
                   <a:schemeClr val="accent2"/>
                 </a:solidFill>
               </a:rPr>
               <a:t>1 hour</a:t>
             </a:r>
-            <a:endParaRPr lang="en-US" sz="3400" dirty="0"/>
+            <a:endParaRPr lang="en-US" sz="3200" dirty="0"/>
           </a:p>
         </p:txBody>
       </p:sp>
@@ -8134,8 +8181,8 @@
         </p:nvSpPr>
         <p:spPr>
           <a:xfrm>
-            <a:off x="8503920" y="5425440"/>
-            <a:ext cx="2926080" cy="411480"/>
+            <a:off x="8503920" y="5541264"/>
+            <a:ext cx="2926080" cy="384048"/>
           </a:xfrm>
           <a:prstGeom prst="rect">
             <a:avLst/>
@@ -8170,7 +8217,7 @@
         </p:nvSpPr>
         <p:spPr>
           <a:xfrm>
-            <a:off x="548640" y="6400800"/>
+            <a:off x="548640" y="6309360"/>
             <a:ext cx="5852160" cy="274320"/>
           </a:xfrm>
           <a:prstGeom prst="rect">
@@ -8180,7 +8227,7 @@
           <a:ln/>
         </p:spPr>
         <p:txBody>
-          <a:bodyPr wrap="square" lIns="0" tIns="0" rIns="0" bIns="0" rtlCol="0" anchor="t"/>
+          <a:bodyPr wrap="square" lIns="0" tIns="0" rIns="0" bIns="0" rtlCol="0" anchor="ctr"/>
           <a:lstStyle/>
           <a:p>
             <a:pPr indent="0" marL="0">
@@ -8210,7 +8257,7 @@
         </p:nvSpPr>
         <p:spPr>
           <a:xfrm>
-            <a:off x="11274552" y="6400800"/>
+            <a:off x="11274552" y="6309360"/>
             <a:ext cx="365760" cy="274320"/>
           </a:xfrm>
           <a:prstGeom prst="rect">
@@ -8223,7 +8270,7 @@
           </a:extLst>
         </p:spPr>
         <p:txBody>
-          <a:bodyPr/>
+          <a:bodyPr anchor="ctr"/>
           <a:lstStyle>
             <a:lvl1pPr>
               <a:defRPr sz="1000">
@@ -8279,7 +8326,7 @@
         <p:spPr>
           <a:xfrm>
             <a:off x="548640" y="384048"/>
-            <a:ext cx="7315200" cy="868680"/>
+            <a:ext cx="7040880" cy="868680"/>
           </a:xfrm>
           <a:prstGeom prst="rect">
             <a:avLst/>
@@ -8318,11 +8365,11 @@
         <p:spPr>
           <a:xfrm>
             <a:off x="548640" y="1600200"/>
-            <a:ext cx="5449824" cy="2103120"/>
+            <a:ext cx="5408676" cy="2011680"/>
           </a:xfrm>
           <a:prstGeom prst="roundRect">
             <a:avLst>
-              <a:gd name="adj" fmla="val 4348"/>
+              <a:gd name="adj" fmla="val 4545"/>
             </a:avLst>
           </a:prstGeom>
           <a:solidFill>
@@ -8398,7 +8445,7 @@
         <p:spPr>
           <a:xfrm>
             <a:off x="1737360" y="1947672"/>
-            <a:ext cx="3986784" cy="594360"/>
+            <a:ext cx="3945636" cy="594360"/>
           </a:xfrm>
           <a:prstGeom prst="rect">
             <a:avLst/>
@@ -8434,7 +8481,7 @@
         <p:spPr>
           <a:xfrm>
             <a:off x="1737360" y="2587752"/>
-            <a:ext cx="3986784" cy="960120"/>
+            <a:ext cx="3945636" cy="960120"/>
           </a:xfrm>
           <a:prstGeom prst="rect">
             <a:avLst/>
@@ -8469,12 +8516,12 @@
         </p:nvSpPr>
         <p:spPr>
           <a:xfrm>
-            <a:off x="6190488" y="1600200"/>
-            <a:ext cx="5449824" cy="2103120"/>
+            <a:off x="6231636" y="1600200"/>
+            <a:ext cx="5408676" cy="2011680"/>
           </a:xfrm>
           <a:prstGeom prst="roundRect">
             <a:avLst>
-              <a:gd name="adj" fmla="val 4348"/>
+              <a:gd name="adj" fmla="val 4545"/>
             </a:avLst>
           </a:prstGeom>
           <a:solidFill>
@@ -8503,7 +8550,7 @@
         </p:nvSpPr>
         <p:spPr>
           <a:xfrm>
-            <a:off x="6510528" y="1920240"/>
+            <a:off x="6551676" y="1920240"/>
             <a:ext cx="658368" cy="658368"/>
           </a:xfrm>
           <a:prstGeom prst="ellipse">
@@ -8533,7 +8580,7 @@
         </p:blipFill>
         <p:spPr>
           <a:xfrm>
-            <a:off x="6675120" y="2084832"/>
+            <a:off x="6716268" y="2084832"/>
             <a:ext cx="329184" cy="329184"/>
           </a:xfrm>
           <a:prstGeom prst="rect">
@@ -8549,8 +8596,8 @@
         </p:nvSpPr>
         <p:spPr>
           <a:xfrm>
-            <a:off x="7379208" y="1947672"/>
-            <a:ext cx="3986784" cy="594360"/>
+            <a:off x="7420356" y="1947672"/>
+            <a:ext cx="3945636" cy="594360"/>
           </a:xfrm>
           <a:prstGeom prst="rect">
             <a:avLst/>
@@ -8585,8 +8632,8 @@
         </p:nvSpPr>
         <p:spPr>
           <a:xfrm>
-            <a:off x="7379208" y="2587752"/>
-            <a:ext cx="3986784" cy="960120"/>
+            <a:off x="7420356" y="2587752"/>
+            <a:ext cx="3945636" cy="960120"/>
           </a:xfrm>
           <a:prstGeom prst="rect">
             <a:avLst/>
@@ -8622,11 +8669,11 @@
         <p:spPr>
           <a:xfrm>
             <a:off x="548640" y="3886200"/>
-            <a:ext cx="5449824" cy="2103120"/>
+            <a:ext cx="5408676" cy="2011680"/>
           </a:xfrm>
           <a:prstGeom prst="roundRect">
             <a:avLst>
-              <a:gd name="adj" fmla="val 4348"/>
+              <a:gd name="adj" fmla="val 4545"/>
             </a:avLst>
           </a:prstGeom>
           <a:solidFill>
@@ -8702,7 +8749,7 @@
         <p:spPr>
           <a:xfrm>
             <a:off x="1737360" y="4233672"/>
-            <a:ext cx="3986784" cy="594360"/>
+            <a:ext cx="3945636" cy="594360"/>
           </a:xfrm>
           <a:prstGeom prst="rect">
             <a:avLst/>
@@ -8738,7 +8785,7 @@
         <p:spPr>
           <a:xfrm>
             <a:off x="1737360" y="4873752"/>
-            <a:ext cx="3986784" cy="960120"/>
+            <a:ext cx="3945636" cy="960120"/>
           </a:xfrm>
           <a:prstGeom prst="rect">
             <a:avLst/>
@@ -8773,12 +8820,12 @@
         </p:nvSpPr>
         <p:spPr>
           <a:xfrm>
-            <a:off x="6190488" y="3886200"/>
-            <a:ext cx="5449824" cy="2103120"/>
+            <a:off x="6231636" y="3886200"/>
+            <a:ext cx="5408676" cy="2011680"/>
           </a:xfrm>
           <a:prstGeom prst="roundRect">
             <a:avLst>
-              <a:gd name="adj" fmla="val 4348"/>
+              <a:gd name="adj" fmla="val 4545"/>
             </a:avLst>
           </a:prstGeom>
           <a:solidFill>
@@ -8807,7 +8854,7 @@
         </p:nvSpPr>
         <p:spPr>
           <a:xfrm>
-            <a:off x="6510528" y="4206240"/>
+            <a:off x="6551676" y="4206240"/>
             <a:ext cx="658368" cy="658368"/>
           </a:xfrm>
           <a:prstGeom prst="ellipse">
@@ -8837,7 +8884,7 @@
         </p:blipFill>
         <p:spPr>
           <a:xfrm>
-            <a:off x="6675120" y="4370832"/>
+            <a:off x="6716268" y="4370832"/>
             <a:ext cx="329184" cy="329184"/>
           </a:xfrm>
           <a:prstGeom prst="rect">
@@ -8853,8 +8900,8 @@
         </p:nvSpPr>
         <p:spPr>
           <a:xfrm>
-            <a:off x="7379208" y="4233672"/>
-            <a:ext cx="3986784" cy="594360"/>
+            <a:off x="7420356" y="4233672"/>
+            <a:ext cx="3945636" cy="594360"/>
           </a:xfrm>
           <a:prstGeom prst="rect">
             <a:avLst/>
@@ -8889,8 +8936,8 @@
         </p:nvSpPr>
         <p:spPr>
           <a:xfrm>
-            <a:off x="7379208" y="4873752"/>
-            <a:ext cx="3986784" cy="960120"/>
+            <a:off x="7420356" y="4873752"/>
+            <a:ext cx="3945636" cy="960120"/>
           </a:xfrm>
           <a:prstGeom prst="rect">
             <a:avLst/>
@@ -8925,7 +8972,7 @@
         </p:nvSpPr>
         <p:spPr>
           <a:xfrm>
-            <a:off x="548640" y="6400800"/>
+            <a:off x="548640" y="6309360"/>
             <a:ext cx="5852160" cy="274320"/>
           </a:xfrm>
           <a:prstGeom prst="rect">
@@ -8935,7 +8982,7 @@
           <a:ln/>
         </p:spPr>
         <p:txBody>
-          <a:bodyPr wrap="square" lIns="0" tIns="0" rIns="0" bIns="0" rtlCol="0" anchor="t"/>
+          <a:bodyPr wrap="square" lIns="0" tIns="0" rIns="0" bIns="0" rtlCol="0" anchor="ctr"/>
           <a:lstStyle/>
           <a:p>
             <a:pPr indent="0" marL="0">
@@ -8965,7 +9012,7 @@
         </p:nvSpPr>
         <p:spPr>
           <a:xfrm>
-            <a:off x="11274552" y="6400800"/>
+            <a:off x="11274552" y="6309360"/>
             <a:ext cx="365760" cy="274320"/>
           </a:xfrm>
           <a:prstGeom prst="rect">
@@ -8978,7 +9025,7 @@
           </a:extLst>
         </p:spPr>
         <p:txBody>
-          <a:bodyPr/>
+          <a:bodyPr anchor="ctr"/>
           <a:lstStyle>
             <a:lvl1pPr>
               <a:defRPr sz="1000">
@@ -9034,7 +9081,7 @@
         <p:spPr>
           <a:xfrm>
             <a:off x="548640" y="548640"/>
-            <a:ext cx="7315200" cy="868680"/>
+            <a:ext cx="7040880" cy="868680"/>
           </a:xfrm>
           <a:prstGeom prst="rect">
             <a:avLst/>
@@ -9109,7 +9156,7 @@
         <p:spPr>
           <a:xfrm>
             <a:off x="548640" y="3154680"/>
-            <a:ext cx="3291840" cy="0"/>
+            <a:ext cx="3575304" cy="0"/>
           </a:xfrm>
           <a:prstGeom prst="line">
             <a:avLst/>
@@ -9169,7 +9216,7 @@
         <p:spPr>
           <a:xfrm>
             <a:off x="548640" y="3886200"/>
-            <a:ext cx="3291840" cy="1280160"/>
+            <a:ext cx="3474720" cy="1280160"/>
           </a:xfrm>
           <a:prstGeom prst="rect">
             <a:avLst/>
@@ -9241,7 +9288,7 @@
         <p:spPr>
           <a:xfrm>
             <a:off x="4306824" y="3154680"/>
-            <a:ext cx="3291840" cy="0"/>
+            <a:ext cx="3575304" cy="0"/>
           </a:xfrm>
           <a:prstGeom prst="line">
             <a:avLst/>
@@ -9301,7 +9348,7 @@
         <p:spPr>
           <a:xfrm>
             <a:off x="4306824" y="3886200"/>
-            <a:ext cx="3291840" cy="1280160"/>
+            <a:ext cx="3474720" cy="1280160"/>
           </a:xfrm>
           <a:prstGeom prst="rect">
             <a:avLst/>
@@ -9373,7 +9420,7 @@
         <p:spPr>
           <a:xfrm>
             <a:off x="8065008" y="3154680"/>
-            <a:ext cx="3291840" cy="0"/>
+            <a:ext cx="3575304" cy="0"/>
           </a:xfrm>
           <a:prstGeom prst="line">
             <a:avLst/>
@@ -9433,7 +9480,7 @@
         <p:spPr>
           <a:xfrm>
             <a:off x="8065008" y="3886200"/>
-            <a:ext cx="3291840" cy="1280160"/>
+            <a:ext cx="3474720" cy="1280160"/>
           </a:xfrm>
           <a:prstGeom prst="rect">
             <a:avLst/>
@@ -9468,7 +9515,7 @@
         </p:nvSpPr>
         <p:spPr>
           <a:xfrm>
-            <a:off x="548640" y="6400800"/>
+            <a:off x="548640" y="6309360"/>
             <a:ext cx="5852160" cy="274320"/>
           </a:xfrm>
           <a:prstGeom prst="rect">
@@ -9478,7 +9525,7 @@
           <a:ln/>
         </p:spPr>
         <p:txBody>
-          <a:bodyPr wrap="square" lIns="0" tIns="0" rIns="0" bIns="0" rtlCol="0" anchor="t"/>
+          <a:bodyPr wrap="square" lIns="0" tIns="0" rIns="0" bIns="0" rtlCol="0" anchor="ctr"/>
           <a:lstStyle/>
           <a:p>
             <a:pPr indent="0" marL="0">
@@ -9508,7 +9555,7 @@
         </p:nvSpPr>
         <p:spPr>
           <a:xfrm>
-            <a:off x="11274552" y="6400800"/>
+            <a:off x="11274552" y="6309360"/>
             <a:ext cx="365760" cy="274320"/>
           </a:xfrm>
           <a:prstGeom prst="rect">
@@ -9521,7 +9568,7 @@
           </a:extLst>
         </p:spPr>
         <p:txBody>
-          <a:bodyPr/>
+          <a:bodyPr anchor="ctr"/>
           <a:lstStyle>
             <a:lvl1pPr>
               <a:defRPr sz="1000">
@@ -9566,50 +9613,9 @@
           <a:chExt cx="0" cy="0"/>
         </a:xfrm>
       </p:grpSpPr>
-      <p:sp>
-        <p:nvSpPr>
-          <p:cNvPr id="2" name="Text 1"/>
-          <p:cNvSpPr/>
-          <p:nvPr>
-            <p:ph idx="101" type="title" hasCustomPrompt="1"/>
-          </p:nvPr>
-        </p:nvSpPr>
-        <p:spPr>
-          <a:xfrm>
-            <a:off x="548640" y="384048"/>
-            <a:ext cx="7315200" cy="868680"/>
-          </a:xfrm>
-          <a:prstGeom prst="rect">
-            <a:avLst/>
-          </a:prstGeom>
-          <a:noFill/>
-          <a:ln/>
-        </p:spPr>
-        <p:txBody>
-          <a:bodyPr wrap="square" lIns="0" tIns="0" rIns="0" bIns="0" rtlCol="0" anchor="t"/>
-          <a:lstStyle/>
-          <a:p>
-            <a:pPr algn="l" indent="0" marL="0">
-              <a:buNone/>
-            </a:pPr>
-            <a:r>
-              <a:rPr lang="en-US" sz="2800" b="1" dirty="0">
-                <a:solidFill>
-                  <a:schemeClr val="tx1"/>
-                </a:solidFill>
-                <a:latin typeface="Arial" pitchFamily="34" charset="0"/>
-                <a:ea typeface="Arial" pitchFamily="34" charset="-122"/>
-                <a:cs typeface="Arial" pitchFamily="34" charset="-120"/>
-              </a:rPr>
-              <a:t>Appendix: the whole process on one page</a:t>
-            </a:r>
-            <a:endParaRPr lang="en-US" sz="2800" dirty="0"/>
-          </a:p>
-        </p:txBody>
-      </p:sp>
       <p:pic>
         <p:nvPicPr>
-          <p:cNvPr id="3" name="handout" descr="One-page process flow of sanctioned bank BIN blocking">    </p:cNvPr>
+          <p:cNvPr id="2" name="handout" descr="Appendix: one-page process flow of sanctioned bank BIN blocking">    </p:cNvPr>
           <p:cNvPicPr>
             <a:picLocks noChangeAspect="1"/>
           </p:cNvPicPr>
@@ -9623,95 +9629,14 @@
         </p:blipFill>
         <p:spPr>
           <a:xfrm>
-            <a:off x="1569568" y="1143000"/>
-            <a:ext cx="9052560" cy="5092065"/>
+            <a:off x="0" y="0"/>
+            <a:ext cx="12191695" cy="6858000"/>
           </a:xfrm>
           <a:prstGeom prst="rect">
             <a:avLst/>
           </a:prstGeom>
         </p:spPr>
       </p:pic>
-      <p:sp>
-        <p:nvSpPr>
-          <p:cNvPr id="4" name="Text 1"/>
-          <p:cNvSpPr txBox="1"/>
-          <p:nvPr/>
-        </p:nvSpPr>
-        <p:spPr>
-          <a:xfrm>
-            <a:off x="548640" y="6400800"/>
-            <a:ext cx="5852160" cy="274320"/>
-          </a:xfrm>
-          <a:prstGeom prst="rect">
-            <a:avLst/>
-          </a:prstGeom>
-          <a:noFill/>
-          <a:ln/>
-        </p:spPr>
-        <p:txBody>
-          <a:bodyPr wrap="square" lIns="0" tIns="0" rIns="0" bIns="0" rtlCol="0" anchor="t"/>
-          <a:lstStyle/>
-          <a:p>
-            <a:pPr indent="0" marL="0">
-              <a:buNone/>
-            </a:pPr>
-            <a:r>
-              <a:rPr lang="en-US" sz="1000" dirty="0">
-                <a:solidFill>
-                  <a:schemeClr val="tx2"/>
-                </a:solidFill>
-              </a:rPr>
-              <a:t>Source: Blocking framework §4, §6 to §11. Print the PDF version as a handout.</a:t>
-            </a:r>
-            <a:endParaRPr lang="en-US" sz="1000" dirty="0"/>
-          </a:p>
-        </p:txBody>
-      </p:sp>
-      <p:sp>
-        <p:nvSpPr>
-          <p:cNvPr id="25" name="Slide Number Placeholder 0"/>
-          <p:cNvSpPr>
-            <a:spLocks noGrp="1"/>
-          </p:cNvSpPr>
-          <p:nvPr>
-            <p:ph type="sldNum" sz="quarter" idx="4294967295"/>
-          </p:nvPr>
-        </p:nvSpPr>
-        <p:spPr>
-          <a:xfrm>
-            <a:off x="11274552" y="6400800"/>
-            <a:ext cx="365760" cy="274320"/>
-          </a:xfrm>
-          <a:prstGeom prst="rect">
-            <a:avLst/>
-          </a:prstGeom>
-          <a:extLst>
-            <a:ext uri="{C572A759-6A51-4108-AA02-DFA0A04FC94B}">
-              <ma14:wrappingTextBoxFlag xmlns:ma14="http://schemas.microsoft.com/office/mac/drawingml/2011/main" val="0"/>
-            </a:ext>
-          </a:extLst>
-        </p:spPr>
-        <p:txBody>
-          <a:bodyPr/>
-          <a:lstStyle>
-            <a:lvl1pPr>
-              <a:defRPr sz="1000">
-                <a:solidFill>
-                  <a:schemeClr val="tx2"/>
-                </a:solidFill>
-              </a:defRPr>
-            </a:lvl1pPr>
-          </a:lstStyle>
-          <a:p>
-            <a:pPr algn="r"/>
-            <a:fld id="{F7021451-1387-4CA6-816F-3879F97B5CBC}" type="slidenum">
-              <a:rPr b="0" lang="en-US"/>
-              <a:t>8</a:t>
-            </a:fld>
-            <a:endParaRPr lang="en-US"/>
-          </a:p>
-        </p:txBody>
-      </p:sp>
     </p:spTree>
   </p:cSld>
   <p:clrMapOvr>

--- a/summit/bin-blocking-flow/deck/bin-blocking-summit-deck.pptx
+++ b/summit/bin-blocking-flow/deck/bin-blocking-summit-deck.pptx
@@ -13,9 +13,10 @@
     <p:sldId id="261" r:id="rId7"/>
     <p:sldId id="262" r:id="rId8"/>
     <p:sldId id="263" r:id="rId9"/>
+    <p:sldId id="264" r:id="rId10"/>
   </p:sldIdLst>
   <p:notesMasterIdLst>
-    <p:notesMasterId r:id="rId10"/>
+    <p:notesMasterId r:id="rId11"/>
   </p:notesMasterIdLst>
   <p:sldSz cx="12192000" cy="6858000"/>
   <p:notesSz cx="6858000" cy="12192000"/>
@@ -114,28 +115,29 @@
   <p:extLst>
     <p:ext uri="{521415D9-36F7-43E2-AB2F-B90AF26B5E84}">
       <p14:sectionLst xmlns:p14="http://schemas.microsoft.com/office/powerpoint/2010/main">
-        <p14:section name="Opening" id="{2fb3ba5c-4680-465a-79e9-c754c0300104}">
+        <p14:section name="Opening" id="{822204a8-37e8-19b7-89fe-06220e8ab208}">
           <p14:sldIdLst>
             <p14:sldId id="256"/>
             <p14:sldId id="257"/>
           </p14:sldIdLst>
         </p14:section>
-        <p14:section name="How it works" id="{d4b6d9ed-ea8b-bee7-5b9c-bcfe781430fb}">
+        <p14:section name="How it works" id="{57e021df-32dc-8d0a-6668-5a0c7949749d}">
           <p14:sldIdLst>
             <p14:sldId id="258"/>
             <p14:sldId id="259"/>
             <p14:sldId id="260"/>
           </p14:sldIdLst>
         </p14:section>
-        <p14:section name="Lessons" id="{884653ae-8e60-45e5-2c8e-4847da5de74e}">
+        <p14:section name="Lessons" id="{db62fdc2-1d91-eaa7-6e65-9aa9636e2a46}">
           <p14:sldIdLst>
             <p14:sldId id="261"/>
             <p14:sldId id="262"/>
+            <p14:sldId id="263"/>
           </p14:sldIdLst>
         </p14:section>
-        <p14:section name="Appendix" id="{812c889d-7cf4-c48b-0464-8d36e0f3be58}">
+        <p14:section name="Appendix" id="{93023f58-0240-161e-5684-85bdfd657b3c}">
           <p14:sldIdLst>
-            <p14:sldId id="263"/>
+            <p14:sldId id="264"/>
           </p14:sldIdLst>
         </p14:section>
       </p14:sectionLst>
@@ -1176,7 +1178,7 @@
           <a:p>
             <a:r>
               <a:rPr lang="en-US" dirty="0"/>
-              <a:t>Appendix: the whole process on one page. Backup for Q&amp;A, and print the PDF version as a handout; it is too dense to present from.</a:t>
+              <a:t>Questions. The appendix slide after this one has the whole process on one page, if a question needs it.</a:t>
             </a:r>
             <a:endParaRPr lang="en-US" dirty="0"/>
           </a:p>
@@ -1218,14 +1220,9 @@
 </p:notes>
 </file>
 
-<file path=ppt/slideLayouts/slideLayout1.xml><?xml version="1.0" encoding="utf-8"?>
-<p:sldLayout xmlns:a="http://schemas.openxmlformats.org/drawingml/2006/main" xmlns:r="http://schemas.openxmlformats.org/officeDocument/2006/relationships" xmlns:p="http://schemas.openxmlformats.org/presentationml/2006/main" preserve="1">
-  <p:cSld name="DEFAULT">
-    <p:bg>
-      <p:bgRef idx="1001">
-        <a:schemeClr val="bg1"/>
-      </p:bgRef>
-    </p:bg>
+<file path=ppt/notesSlides/notesSlide9.xml><?xml version="1.0" encoding="utf-8"?>
+<p:notes xmlns:a="http://schemas.openxmlformats.org/drawingml/2006/main" xmlns:r="http://schemas.openxmlformats.org/officeDocument/2006/relationships" xmlns:p="http://schemas.openxmlformats.org/presentationml/2006/main">
+  <p:cSld>
     <p:spTree>
       <p:nvGrpSpPr>
         <p:cNvPr id="1" name=""/>
@@ -1240,17 +1237,80 @@
           <a:chExt cx="0" cy="0"/>
         </a:xfrm>
       </p:grpSpPr>
+      <p:sp>
+        <p:nvSpPr>
+          <p:cNvPr id="2" name="Slide Image Placeholder 1"/>
+          <p:cNvSpPr>
+            <a:spLocks noGrp="1" noRot="1" noChangeAspect="1"/>
+          </p:cNvSpPr>
+          <p:nvPr>
+            <p:ph type="sldImg"/>
+          </p:nvPr>
+        </p:nvSpPr>
+        <p:spPr/>
+      </p:sp>
+      <p:sp>
+        <p:nvSpPr>
+          <p:cNvPr id="3" name="Notes Placeholder 2"/>
+          <p:cNvSpPr>
+            <a:spLocks noGrp="1"/>
+          </p:cNvSpPr>
+          <p:nvPr>
+            <p:ph type="body" idx="1"/>
+          </p:nvPr>
+        </p:nvSpPr>
+        <p:spPr/>
+        <p:txBody>
+          <a:bodyPr/>
+          <a:lstStyle/>
+          <a:p>
+            <a:r>
+              <a:rPr lang="en-US" dirty="0"/>
+              <a:t>Appendix: the whole process on one page. Backup for Q&amp;A, and print the PDF version as a handout; it is too dense to present from.</a:t>
+            </a:r>
+            <a:endParaRPr lang="en-US" dirty="0"/>
+          </a:p>
+        </p:txBody>
+      </p:sp>
+      <p:sp>
+        <p:nvSpPr>
+          <p:cNvPr id="4" name="Slide Number Placeholder 3"/>
+          <p:cNvSpPr>
+            <a:spLocks noGrp="1"/>
+          </p:cNvSpPr>
+          <p:nvPr>
+            <p:ph type="sldNum" sz="quarter" idx="10"/>
+          </p:nvPr>
+        </p:nvSpPr>
+        <p:spPr/>
+        <p:txBody>
+          <a:bodyPr/>
+          <a:lstStyle/>
+          <a:p>
+            <a:fld id="{F7021451-1387-4CA6-816F-3879F97B5CBC}" type="slidenum">
+              <a:rPr lang="en-US"/>
+              <a:t>9</a:t>
+            </a:fld>
+            <a:endParaRPr lang="en-US"/>
+          </a:p>
+        </p:txBody>
+      </p:sp>
     </p:spTree>
+    <p:extLst>
+      <p:ext uri="{BB962C8B-B14F-4D97-AF65-F5344CB8AC3E}">
+        <p14:creationId xmlns:p14="http://schemas.microsoft.com/office/powerpoint/2010/main" val="1024086991"/>
+      </p:ext>
+    </p:extLst>
   </p:cSld>
   <p:clrMapOvr>
     <a:masterClrMapping/>
   </p:clrMapOvr>
-</p:sldLayout>
+</p:notes>
 </file>
 
-<file path=ppt/slideLayouts/slideLayout2.xml><?xml version="1.0" encoding="utf-8"?>
+<file path=ppt/slideLayouts/slideLayout10.xml><?xml version="1.0" encoding="utf-8"?>
 <p:sldLayout xmlns:a="http://schemas.openxmlformats.org/drawingml/2006/main" xmlns:r="http://schemas.openxmlformats.org/officeDocument/2006/relationships" xmlns:p="http://schemas.openxmlformats.org/presentationml/2006/main" preserve="1">
-  <p:cSld name="COVER">
+  <p:cSld name="Statement">
     <p:bg>
       <p:bgPr>
         <a:solidFill>
@@ -1272,6 +1332,223 @@
           <a:chExt cx="0" cy="0"/>
         </a:xfrm>
       </p:grpSpPr>
+      <p:sp>
+        <p:nvSpPr>
+          <p:cNvPr id="2" name="Text 0"/>
+          <p:cNvSpPr/>
+          <p:nvPr/>
+        </p:nvSpPr>
+        <p:spPr>
+          <a:xfrm>
+            <a:off x="731520" y="1481328"/>
+            <a:ext cx="146304" cy="146304"/>
+          </a:xfrm>
+          <a:prstGeom prst="ellipse">
+            <a:avLst/>
+          </a:prstGeom>
+          <a:solidFill>
+            <a:schemeClr val="accent2"/>
+          </a:solidFill>
+          <a:ln/>
+        </p:spPr>
+        <p:txBody>
+          <a:bodyPr wrap="square" rtlCol="0" anchor="ctr"/>
+          <a:lstStyle/>
+          <a:p>
+            <a:pPr indent="0" marL="0">
+              <a:buNone/>
+            </a:pPr>
+            <a:endParaRPr lang="en-US" dirty="0"/>
+          </a:p>
+        </p:txBody>
+      </p:sp>
+      <p:sp>
+        <p:nvSpPr>
+          <p:cNvPr id="3" name="Statement placeholder"/>
+          <p:cNvSpPr/>
+          <p:nvPr>
+            <p:ph idx="101" type="body" hasCustomPrompt="1"/>
+          </p:nvPr>
+        </p:nvSpPr>
+        <p:spPr>
+          <a:xfrm>
+            <a:off x="731520" y="1828800"/>
+            <a:ext cx="10241280" cy="2286000"/>
+          </a:xfrm>
+          <a:prstGeom prst="rect">
+            <a:avLst/>
+          </a:prstGeom>
+          <a:noFill/>
+          <a:ln/>
+        </p:spPr>
+        <p:txBody>
+          <a:bodyPr wrap="square" lIns="0" tIns="0" rIns="0" bIns="0" rtlCol="0" anchor="t"/>
+          <a:lstStyle>
+            <a:lvl1pPr algn="l" indent="0" marL="0">
+              <a:buNone/>
+              <a:defRPr lang="en-US" sz="3600" b="1" dirty="0">
+                <a:solidFill>
+                  <a:schemeClr val="bg1"/>
+                </a:solidFill>
+                <a:latin typeface="Arial" pitchFamily="34" charset="0"/>
+                <a:ea typeface="Arial" pitchFamily="34" charset="-122"/>
+                <a:cs typeface="Arial" pitchFamily="34" charset="-120"/>
+              </a:defRPr>
+            </a:lvl1pPr>
+          </a:lstStyle>
+          <a:p>
+            <a:pPr algn="l" indent="0" marL="0">
+              <a:buNone/>
+            </a:pPr>
+            <a:r>
+              <a:rPr lang="en-US" sz="3600" b="1" dirty="0">
+                <a:solidFill>
+                  <a:schemeClr val="bg1"/>
+                </a:solidFill>
+                <a:latin typeface="Arial" pitchFamily="34" charset="0"/>
+                <a:ea typeface="Arial" pitchFamily="34" charset="-122"/>
+                <a:cs typeface="Arial" pitchFamily="34" charset="-120"/>
+              </a:rPr>
+              <a:t>One statement, in one or two lines</a:t>
+            </a:r>
+            <a:endParaRPr lang="en-US" sz="3600" dirty="0"/>
+          </a:p>
+        </p:txBody>
+      </p:sp>
+      <p:sp>
+        <p:nvSpPr>
+          <p:cNvPr id="4" name="Attribution placeholder"/>
+          <p:cNvSpPr/>
+          <p:nvPr>
+            <p:ph idx="102" type="body" hasCustomPrompt="1"/>
+          </p:nvPr>
+        </p:nvSpPr>
+        <p:spPr>
+          <a:xfrm>
+            <a:off x="731520" y="4297680"/>
+            <a:ext cx="8229600" cy="457200"/>
+          </a:xfrm>
+          <a:prstGeom prst="rect">
+            <a:avLst/>
+          </a:prstGeom>
+          <a:noFill/>
+          <a:ln/>
+        </p:spPr>
+        <p:txBody>
+          <a:bodyPr wrap="square" lIns="0" tIns="0" rIns="0" bIns="0" rtlCol="0" anchor="t"/>
+          <a:lstStyle>
+            <a:lvl1pPr algn="l" indent="0" marL="0">
+              <a:buNone/>
+              <a:defRPr lang="en-US" sz="1600" dirty="0">
+                <a:solidFill>
+                  <a:schemeClr val="accent5"/>
+                </a:solidFill>
+                <a:latin typeface="Arial" pitchFamily="34" charset="0"/>
+                <a:ea typeface="Arial" pitchFamily="34" charset="-122"/>
+                <a:cs typeface="Arial" pitchFamily="34" charset="-120"/>
+              </a:defRPr>
+            </a:lvl1pPr>
+          </a:lstStyle>
+          <a:p>
+            <a:pPr algn="l" indent="0" marL="0">
+              <a:buNone/>
+            </a:pPr>
+            <a:r>
+              <a:rPr lang="en-US" sz="1600" dirty="0">
+                <a:solidFill>
+                  <a:schemeClr val="accent5"/>
+                </a:solidFill>
+                <a:latin typeface="Arial" pitchFamily="34" charset="0"/>
+                <a:ea typeface="Arial" pitchFamily="34" charset="-122"/>
+                <a:cs typeface="Arial" pitchFamily="34" charset="-120"/>
+              </a:rPr>
+              <a:t>Attribution or source</a:t>
+            </a:r>
+            <a:endParaRPr lang="en-US" sz="1600" dirty="0"/>
+          </a:p>
+        </p:txBody>
+      </p:sp>
+      <p:sp>
+        <p:nvSpPr>
+          <p:cNvPr id="5" name="Text 1"/>
+          <p:cNvSpPr/>
+          <p:nvPr/>
+        </p:nvSpPr>
+        <p:spPr>
+          <a:xfrm>
+            <a:off x="5852160" y="6309360"/>
+            <a:ext cx="5303520" cy="274320"/>
+          </a:xfrm>
+          <a:prstGeom prst="rect">
+            <a:avLst/>
+          </a:prstGeom>
+          <a:noFill/>
+          <a:ln/>
+        </p:spPr>
+        <p:txBody>
+          <a:bodyPr wrap="square" lIns="0" tIns="0" rIns="0" bIns="0" rtlCol="0" anchor="ctr"/>
+          <a:lstStyle/>
+          <a:p>
+            <a:pPr algn="r" indent="0" marL="0">
+              <a:buNone/>
+            </a:pPr>
+            <a:r>
+              <a:rPr lang="en-US" sz="1000" dirty="0">
+                <a:solidFill>
+                  <a:schemeClr val="accent5"/>
+                </a:solidFill>
+              </a:rPr>
+              <a:t>Checkout.com · Global Screening · Draft for Compliance sign-off</a:t>
+            </a:r>
+            <a:endParaRPr lang="en-US" sz="1000" dirty="0"/>
+          </a:p>
+        </p:txBody>
+      </p:sp>
+      <p:sp>
+        <p:nvSpPr>
+          <p:cNvPr id="25" name="Slide Number Placeholder 0"/>
+          <p:cNvSpPr>
+            <a:spLocks noGrp="1"/>
+          </p:cNvSpPr>
+          <p:nvPr>
+            <p:ph type="sldNum" sz="quarter" idx="4294967295"/>
+          </p:nvPr>
+        </p:nvSpPr>
+        <p:spPr>
+          <a:xfrm>
+            <a:off x="11274552" y="6309360"/>
+            <a:ext cx="365760" cy="274320"/>
+          </a:xfrm>
+          <a:prstGeom prst="rect">
+            <a:avLst/>
+          </a:prstGeom>
+          <a:extLst>
+            <a:ext uri="{C572A759-6A51-4108-AA02-DFA0A04FC94B}">
+              <ma14:wrappingTextBoxFlag xmlns:ma14="http://schemas.microsoft.com/office/mac/drawingml/2011/main" val="0"/>
+            </a:ext>
+          </a:extLst>
+        </p:spPr>
+        <p:txBody>
+          <a:bodyPr anchor="ctr"/>
+          <a:lstStyle>
+            <a:lvl1pPr>
+              <a:defRPr sz="1000">
+                <a:solidFill>
+                  <a:schemeClr val="accent5"/>
+                </a:solidFill>
+              </a:defRPr>
+            </a:lvl1pPr>
+          </a:lstStyle>
+          <a:p>
+            <a:pPr algn="r"/>
+            <a:fld id="{F7021451-1387-4CA6-816F-3879F97B5CBC}" type="slidenum">
+              <a:rPr b="0" lang="en-US"/>
+              <a:t>1010</a:t>
+            </a:fld>
+            <a:endParaRPr lang="en-US"/>
+          </a:p>
+        </p:txBody>
+      </p:sp>
     </p:spTree>
   </p:cSld>
   <p:clrMapOvr>
@@ -1280,9 +1557,795 @@
 </p:sldLayout>
 </file>
 
-<file path=ppt/slideLayouts/slideLayout3.xml><?xml version="1.0" encoding="utf-8"?>
+<file path=ppt/slideLayouts/slideLayout11.xml><?xml version="1.0" encoding="utf-8"?>
 <p:sldLayout xmlns:a="http://schemas.openxmlformats.org/drawingml/2006/main" xmlns:r="http://schemas.openxmlformats.org/officeDocument/2006/relationships" xmlns:p="http://schemas.openxmlformats.org/presentationml/2006/main" preserve="1">
-  <p:cSld name="BLANK">
+  <p:cSld name="Picture with caption">
+    <p:bg>
+      <p:bgPr>
+        <a:solidFill>
+          <a:schemeClr val="bg1"/>
+        </a:solidFill>
+      </p:bgPr>
+    </p:bg>
+    <p:spTree>
+      <p:nvGrpSpPr>
+        <p:cNvPr id="1" name=""/>
+        <p:cNvGrpSpPr/>
+        <p:nvPr/>
+      </p:nvGrpSpPr>
+      <p:grpSpPr>
+        <a:xfrm>
+          <a:off x="0" y="0"/>
+          <a:ext cx="0" cy="0"/>
+          <a:chOff x="0" y="0"/>
+          <a:chExt cx="0" cy="0"/>
+        </a:xfrm>
+      </p:grpSpPr>
+      <p:sp>
+        <p:nvSpPr>
+          <p:cNvPr id="2" name="Title placeholder"/>
+          <p:cNvSpPr/>
+          <p:nvPr>
+            <p:ph idx="100" type="title" hasCustomPrompt="1"/>
+          </p:nvPr>
+        </p:nvSpPr>
+        <p:spPr>
+          <a:xfrm>
+            <a:off x="548640" y="384048"/>
+            <a:ext cx="8595360" cy="868680"/>
+          </a:xfrm>
+          <a:prstGeom prst="rect">
+            <a:avLst/>
+          </a:prstGeom>
+          <a:noFill/>
+          <a:ln/>
+        </p:spPr>
+        <p:txBody>
+          <a:bodyPr wrap="square" lIns="0" tIns="0" rIns="0" bIns="0" rtlCol="0" anchor="t"/>
+          <a:lstStyle>
+            <a:lvl1pPr algn="l" indent="0" marL="0">
+              <a:buNone/>
+              <a:defRPr lang="en-US" sz="2800" b="1" dirty="0">
+                <a:solidFill>
+                  <a:schemeClr val="tx1"/>
+                </a:solidFill>
+                <a:latin typeface="Arial" pitchFamily="34" charset="0"/>
+                <a:ea typeface="Arial" pitchFamily="34" charset="-122"/>
+                <a:cs typeface="Arial" pitchFamily="34" charset="-120"/>
+              </a:defRPr>
+            </a:lvl1pPr>
+          </a:lstStyle>
+          <a:p>
+            <a:pPr algn="l" indent="0" marL="0">
+              <a:buNone/>
+            </a:pPr>
+            <a:r>
+              <a:rPr lang="en-US" sz="2800" b="1" dirty="0">
+                <a:solidFill>
+                  <a:schemeClr val="tx1"/>
+                </a:solidFill>
+                <a:latin typeface="Arial" pitchFamily="34" charset="0"/>
+                <a:ea typeface="Arial" pitchFamily="34" charset="-122"/>
+                <a:cs typeface="Arial" pitchFamily="34" charset="-120"/>
+              </a:rPr>
+              <a:t>Slide title: say the point, not the topic</a:t>
+            </a:r>
+            <a:endParaRPr lang="en-US" sz="2800" dirty="0"/>
+          </a:p>
+        </p:txBody>
+      </p:sp>
+      <p:sp>
+        <p:nvSpPr>
+          <p:cNvPr id="3" name="Tag placeholder"/>
+          <p:cNvSpPr/>
+          <p:nvPr>
+            <p:ph idx="101" type="body" hasCustomPrompt="1"/>
+          </p:nvPr>
+        </p:nvSpPr>
+        <p:spPr>
+          <a:xfrm>
+            <a:off x="9326880" y="457200"/>
+            <a:ext cx="2313432" cy="274320"/>
+          </a:xfrm>
+          <a:prstGeom prst="rect">
+            <a:avLst/>
+          </a:prstGeom>
+          <a:noFill/>
+          <a:ln/>
+        </p:spPr>
+        <p:txBody>
+          <a:bodyPr wrap="square" lIns="0" tIns="0" rIns="0" bIns="0" rtlCol="0" anchor="t"/>
+          <a:lstStyle>
+            <a:lvl1pPr algn="r" indent="0" marL="0">
+              <a:buNone/>
+              <a:defRPr lang="en-US" sz="1000" b="1" spc="150" kern="0" dirty="0">
+                <a:solidFill>
+                  <a:schemeClr val="accent1"/>
+                </a:solidFill>
+                <a:latin typeface="Arial" pitchFamily="34" charset="0"/>
+                <a:ea typeface="Arial" pitchFamily="34" charset="-122"/>
+                <a:cs typeface="Arial" pitchFamily="34" charset="-120"/>
+              </a:defRPr>
+            </a:lvl1pPr>
+          </a:lstStyle>
+          <a:p>
+            <a:pPr algn="r" indent="0" marL="0">
+              <a:buNone/>
+            </a:pPr>
+            <a:r>
+              <a:rPr lang="en-US" sz="1000" b="1" spc="150" kern="0" dirty="0">
+                <a:solidFill>
+                  <a:schemeClr val="accent1"/>
+                </a:solidFill>
+                <a:latin typeface="Arial" pitchFamily="34" charset="0"/>
+                <a:ea typeface="Arial" pitchFamily="34" charset="-122"/>
+                <a:cs typeface="Arial" pitchFamily="34" charset="-120"/>
+              </a:rPr>
+              <a:t>PART OR TOPIC</a:t>
+            </a:r>
+            <a:endParaRPr lang="en-US" sz="1000" dirty="0"/>
+          </a:p>
+        </p:txBody>
+      </p:sp>
+      <p:sp>
+        <p:nvSpPr>
+          <p:cNvPr id="4" name="Source placeholder"/>
+          <p:cNvSpPr/>
+          <p:nvPr>
+            <p:ph idx="102" type="body" hasCustomPrompt="1"/>
+          </p:nvPr>
+        </p:nvSpPr>
+        <p:spPr>
+          <a:xfrm>
+            <a:off x="548640" y="6309360"/>
+            <a:ext cx="5120640" cy="274320"/>
+          </a:xfrm>
+          <a:prstGeom prst="rect">
+            <a:avLst/>
+          </a:prstGeom>
+          <a:noFill/>
+          <a:ln/>
+        </p:spPr>
+        <p:txBody>
+          <a:bodyPr wrap="square" lIns="0" tIns="0" rIns="0" bIns="0" rtlCol="0" anchor="ctr"/>
+          <a:lstStyle>
+            <a:lvl1pPr algn="l" indent="0" marL="0">
+              <a:buNone/>
+              <a:defRPr lang="en-US" sz="1000" dirty="0">
+                <a:solidFill>
+                  <a:schemeClr val="tx2"/>
+                </a:solidFill>
+                <a:latin typeface="Arial" pitchFamily="34" charset="0"/>
+                <a:ea typeface="Arial" pitchFamily="34" charset="-122"/>
+                <a:cs typeface="Arial" pitchFamily="34" charset="-120"/>
+              </a:defRPr>
+            </a:lvl1pPr>
+          </a:lstStyle>
+          <a:p>
+            <a:pPr algn="l" indent="0" marL="0">
+              <a:buNone/>
+            </a:pPr>
+            <a:r>
+              <a:rPr lang="en-US" sz="1000" dirty="0">
+                <a:solidFill>
+                  <a:schemeClr val="tx2"/>
+                </a:solidFill>
+                <a:latin typeface="Arial" pitchFamily="34" charset="0"/>
+                <a:ea typeface="Arial" pitchFamily="34" charset="-122"/>
+                <a:cs typeface="Arial" pitchFamily="34" charset="-120"/>
+              </a:rPr>
+              <a:t>Source: cite the legislation, guidance, policy section or list entry</a:t>
+            </a:r>
+            <a:endParaRPr lang="en-US" sz="1000" dirty="0"/>
+          </a:p>
+        </p:txBody>
+      </p:sp>
+      <p:sp>
+        <p:nvSpPr>
+          <p:cNvPr id="5" name="Text 0"/>
+          <p:cNvSpPr/>
+          <p:nvPr/>
+        </p:nvSpPr>
+        <p:spPr>
+          <a:xfrm>
+            <a:off x="5852160" y="6309360"/>
+            <a:ext cx="5303520" cy="274320"/>
+          </a:xfrm>
+          <a:prstGeom prst="rect">
+            <a:avLst/>
+          </a:prstGeom>
+          <a:noFill/>
+          <a:ln/>
+        </p:spPr>
+        <p:txBody>
+          <a:bodyPr wrap="square" lIns="0" tIns="0" rIns="0" bIns="0" rtlCol="0" anchor="ctr"/>
+          <a:lstStyle/>
+          <a:p>
+            <a:pPr algn="r" indent="0" marL="0">
+              <a:buNone/>
+            </a:pPr>
+            <a:r>
+              <a:rPr lang="en-US" sz="1000" dirty="0">
+                <a:solidFill>
+                  <a:schemeClr val="tx2"/>
+                </a:solidFill>
+              </a:rPr>
+              <a:t>Checkout.com · Global Screening · Draft for Compliance sign-off</a:t>
+            </a:r>
+            <a:endParaRPr lang="en-US" sz="1000" dirty="0"/>
+          </a:p>
+        </p:txBody>
+      </p:sp>
+      <p:sp>
+        <p:nvSpPr>
+          <p:cNvPr id="6" name="Picture placeholder"/>
+          <p:cNvSpPr/>
+          <p:nvPr>
+            <p:ph idx="104" hasCustomPrompt="1"/>
+          </p:nvPr>
+        </p:nvSpPr>
+        <p:spPr>
+          <a:xfrm>
+            <a:off x="548640" y="1600200"/>
+            <a:ext cx="6858000" cy="4434840"/>
+          </a:xfrm>
+          <a:prstGeom prst="rect">
+            <a:avLst/>
+          </a:prstGeom>
+          <a:noFill/>
+          <a:ln/>
+        </p:spPr>
+        <p:txBody>
+          <a:bodyPr wrap="square" lIns="0" tIns="0" rIns="0" bIns="0" rtlCol="0" anchor="t"/>
+          <a:lstStyle>
+            <a:lvl1pPr algn="l" indent="0" marL="0">
+              <a:buNone/>
+              <a:defRPr lang="en-US" dirty="0">
+                <a:latin typeface="Arial" pitchFamily="34" charset="0"/>
+                <a:ea typeface="Arial" pitchFamily="34" charset="-122"/>
+                <a:cs typeface="Arial" pitchFamily="34" charset="-120"/>
+              </a:defRPr>
+            </a:lvl1pPr>
+          </a:lstStyle>
+          <a:p>
+            <a:pPr algn="l" indent="0" marL="0">
+              <a:buNone/>
+            </a:pPr>
+            <a:r>
+              <a:rPr lang="en-US" dirty="0">
+                <a:solidFill>
+                  <a:srgbClr val="000000"/>
+                </a:solidFill>
+                <a:latin typeface="Arial" pitchFamily="34" charset="0"/>
+                <a:ea typeface="Arial" pitchFamily="34" charset="-122"/>
+                <a:cs typeface="Arial" pitchFamily="34" charset="-120"/>
+              </a:rPr>
+              <a:t>Insert a picture or screenshot</a:t>
+            </a:r>
+            <a:endParaRPr lang="en-US" dirty="0"/>
+          </a:p>
+        </p:txBody>
+      </p:sp>
+      <p:sp>
+        <p:nvSpPr>
+          <p:cNvPr id="7" name="CaptionHeading placeholder"/>
+          <p:cNvSpPr/>
+          <p:nvPr>
+            <p:ph idx="105" type="body" hasCustomPrompt="1"/>
+          </p:nvPr>
+        </p:nvSpPr>
+        <p:spPr>
+          <a:xfrm>
+            <a:off x="7818120" y="1600200"/>
+            <a:ext cx="3822192" cy="777240"/>
+          </a:xfrm>
+          <a:prstGeom prst="rect">
+            <a:avLst/>
+          </a:prstGeom>
+          <a:noFill/>
+          <a:ln/>
+        </p:spPr>
+        <p:txBody>
+          <a:bodyPr wrap="square" lIns="0" tIns="0" rIns="0" bIns="0" rtlCol="0" anchor="t"/>
+          <a:lstStyle>
+            <a:lvl1pPr algn="l" indent="0" marL="0">
+              <a:buNone/>
+              <a:defRPr lang="en-US" sz="1800" b="1" dirty="0">
+                <a:solidFill>
+                  <a:schemeClr val="tx1"/>
+                </a:solidFill>
+                <a:latin typeface="Arial" pitchFamily="34" charset="0"/>
+                <a:ea typeface="Arial" pitchFamily="34" charset="-122"/>
+                <a:cs typeface="Arial" pitchFamily="34" charset="-120"/>
+              </a:defRPr>
+            </a:lvl1pPr>
+          </a:lstStyle>
+          <a:p>
+            <a:pPr algn="l" indent="0" marL="0">
+              <a:buNone/>
+            </a:pPr>
+            <a:r>
+              <a:rPr lang="en-US" sz="1800" b="1" dirty="0">
+                <a:solidFill>
+                  <a:schemeClr val="tx1"/>
+                </a:solidFill>
+                <a:latin typeface="Arial" pitchFamily="34" charset="0"/>
+                <a:ea typeface="Arial" pitchFamily="34" charset="-122"/>
+                <a:cs typeface="Arial" pitchFamily="34" charset="-120"/>
+              </a:rPr>
+              <a:t>Caption heading</a:t>
+            </a:r>
+            <a:endParaRPr lang="en-US" sz="1800" dirty="0"/>
+          </a:p>
+        </p:txBody>
+      </p:sp>
+      <p:sp>
+        <p:nvSpPr>
+          <p:cNvPr id="8" name="Caption placeholder"/>
+          <p:cNvSpPr/>
+          <p:nvPr>
+            <p:ph idx="106" type="body" hasCustomPrompt="1"/>
+          </p:nvPr>
+        </p:nvSpPr>
+        <p:spPr>
+          <a:xfrm>
+            <a:off x="7818120" y="2468880"/>
+            <a:ext cx="3822192" cy="3566160"/>
+          </a:xfrm>
+          <a:prstGeom prst="rect">
+            <a:avLst/>
+          </a:prstGeom>
+          <a:noFill/>
+          <a:ln/>
+        </p:spPr>
+        <p:txBody>
+          <a:bodyPr wrap="square" lIns="0" tIns="0" rIns="0" bIns="0" rtlCol="0" anchor="t"/>
+          <a:lstStyle>
+            <a:lvl1pPr algn="l" indent="0" marL="0">
+              <a:buNone/>
+              <a:defRPr lang="en-US" sz="1500" dirty="0">
+                <a:solidFill>
+                  <a:schemeClr val="tx2"/>
+                </a:solidFill>
+                <a:latin typeface="Arial" pitchFamily="34" charset="0"/>
+                <a:ea typeface="Arial" pitchFamily="34" charset="-122"/>
+                <a:cs typeface="Arial" pitchFamily="34" charset="-120"/>
+              </a:defRPr>
+            </a:lvl1pPr>
+          </a:lstStyle>
+          <a:p>
+            <a:pPr algn="l" indent="0" marL="0">
+              <a:buNone/>
+            </a:pPr>
+            <a:r>
+              <a:rPr lang="en-US" sz="1500" dirty="0">
+                <a:solidFill>
+                  <a:schemeClr val="tx2"/>
+                </a:solidFill>
+                <a:latin typeface="Arial" pitchFamily="34" charset="0"/>
+                <a:ea typeface="Arial" pitchFamily="34" charset="-122"/>
+                <a:cs typeface="Arial" pitchFamily="34" charset="-120"/>
+              </a:rPr>
+              <a:t>What the audience should notice in the picture</a:t>
+            </a:r>
+            <a:endParaRPr lang="en-US" sz="1500" dirty="0"/>
+          </a:p>
+        </p:txBody>
+      </p:sp>
+      <p:sp>
+        <p:nvSpPr>
+          <p:cNvPr id="25" name="Slide Number Placeholder 0"/>
+          <p:cNvSpPr>
+            <a:spLocks noGrp="1"/>
+          </p:cNvSpPr>
+          <p:nvPr>
+            <p:ph type="sldNum" sz="quarter" idx="4294967295"/>
+          </p:nvPr>
+        </p:nvSpPr>
+        <p:spPr>
+          <a:xfrm>
+            <a:off x="11274552" y="6309360"/>
+            <a:ext cx="365760" cy="274320"/>
+          </a:xfrm>
+          <a:prstGeom prst="rect">
+            <a:avLst/>
+          </a:prstGeom>
+          <a:extLst>
+            <a:ext uri="{C572A759-6A51-4108-AA02-DFA0A04FC94B}">
+              <ma14:wrappingTextBoxFlag xmlns:ma14="http://schemas.microsoft.com/office/mac/drawingml/2011/main" val="0"/>
+            </a:ext>
+          </a:extLst>
+        </p:spPr>
+        <p:txBody>
+          <a:bodyPr anchor="ctr"/>
+          <a:lstStyle>
+            <a:lvl1pPr>
+              <a:defRPr sz="1000">
+                <a:solidFill>
+                  <a:schemeClr val="tx2"/>
+                </a:solidFill>
+              </a:defRPr>
+            </a:lvl1pPr>
+          </a:lstStyle>
+          <a:p>
+            <a:pPr algn="r"/>
+            <a:fld id="{F7021451-1387-4CA6-816F-3879F97B5CBC}" type="slidenum">
+              <a:rPr b="0" lang="en-US"/>
+              <a:t>1011</a:t>
+            </a:fld>
+            <a:endParaRPr lang="en-US"/>
+          </a:p>
+        </p:txBody>
+      </p:sp>
+    </p:spTree>
+  </p:cSld>
+  <p:clrMapOvr>
+    <a:masterClrMapping/>
+  </p:clrMapOvr>
+</p:sldLayout>
+</file>
+
+<file path=ppt/slideLayouts/slideLayout12.xml><?xml version="1.0" encoding="utf-8"?>
+<p:sldLayout xmlns:a="http://schemas.openxmlformats.org/drawingml/2006/main" xmlns:r="http://schemas.openxmlformats.org/officeDocument/2006/relationships" xmlns:p="http://schemas.openxmlformats.org/presentationml/2006/main" preserve="1">
+  <p:cSld name="Closing">
+    <p:bg>
+      <p:bgPr>
+        <a:solidFill>
+          <a:schemeClr val="tx1"/>
+        </a:solidFill>
+      </p:bgPr>
+    </p:bg>
+    <p:spTree>
+      <p:nvGrpSpPr>
+        <p:cNvPr id="1" name=""/>
+        <p:cNvGrpSpPr/>
+        <p:nvPr/>
+      </p:nvGrpSpPr>
+      <p:grpSpPr>
+        <a:xfrm>
+          <a:off x="0" y="0"/>
+          <a:ext cx="0" cy="0"/>
+          <a:chOff x="0" y="0"/>
+          <a:chExt cx="0" cy="0"/>
+        </a:xfrm>
+      </p:grpSpPr>
+      <p:sp>
+        <p:nvSpPr>
+          <p:cNvPr id="2" name="Title placeholder"/>
+          <p:cNvSpPr/>
+          <p:nvPr>
+            <p:ph idx="100" type="title" hasCustomPrompt="1"/>
+          </p:nvPr>
+        </p:nvSpPr>
+        <p:spPr>
+          <a:xfrm>
+            <a:off x="731520" y="2011680"/>
+            <a:ext cx="10058400" cy="1097280"/>
+          </a:xfrm>
+          <a:prstGeom prst="rect">
+            <a:avLst/>
+          </a:prstGeom>
+          <a:noFill/>
+          <a:ln/>
+        </p:spPr>
+        <p:txBody>
+          <a:bodyPr wrap="square" lIns="0" tIns="0" rIns="0" bIns="0" rtlCol="0" anchor="t"/>
+          <a:lstStyle>
+            <a:lvl1pPr algn="l" indent="0" marL="0">
+              <a:buNone/>
+              <a:defRPr lang="en-US" sz="4600" b="1" dirty="0">
+                <a:solidFill>
+                  <a:schemeClr val="bg1"/>
+                </a:solidFill>
+                <a:latin typeface="Arial" pitchFamily="34" charset="0"/>
+                <a:ea typeface="Arial" pitchFamily="34" charset="-122"/>
+                <a:cs typeface="Arial" pitchFamily="34" charset="-120"/>
+              </a:defRPr>
+            </a:lvl1pPr>
+          </a:lstStyle>
+          <a:p>
+            <a:pPr algn="l" indent="0" marL="0">
+              <a:buNone/>
+            </a:pPr>
+            <a:r>
+              <a:rPr lang="en-US" sz="4600" b="1" dirty="0">
+                <a:solidFill>
+                  <a:schemeClr val="bg1"/>
+                </a:solidFill>
+                <a:latin typeface="Arial" pitchFamily="34" charset="0"/>
+                <a:ea typeface="Arial" pitchFamily="34" charset="-122"/>
+                <a:cs typeface="Arial" pitchFamily="34" charset="-120"/>
+              </a:rPr>
+              <a:t>Questions</a:t>
+            </a:r>
+            <a:endParaRPr lang="en-US" sz="4600" dirty="0"/>
+          </a:p>
+        </p:txBody>
+      </p:sp>
+      <p:sp>
+        <p:nvSpPr>
+          <p:cNvPr id="3" name="Body placeholder"/>
+          <p:cNvSpPr/>
+          <p:nvPr>
+            <p:ph idx="101" type="body" hasCustomPrompt="1"/>
+          </p:nvPr>
+        </p:nvSpPr>
+        <p:spPr>
+          <a:xfrm>
+            <a:off x="731520" y="3291840"/>
+            <a:ext cx="8778240" cy="1097280"/>
+          </a:xfrm>
+          <a:prstGeom prst="rect">
+            <a:avLst/>
+          </a:prstGeom>
+          <a:noFill/>
+          <a:ln/>
+        </p:spPr>
+        <p:txBody>
+          <a:bodyPr wrap="square" lIns="0" tIns="0" rIns="0" bIns="0" rtlCol="0" anchor="t"/>
+          <a:lstStyle>
+            <a:lvl1pPr algn="l" indent="0" marL="0">
+              <a:buNone/>
+              <a:defRPr lang="en-US" sz="1800" dirty="0">
+                <a:solidFill>
+                  <a:schemeClr val="bg2"/>
+                </a:solidFill>
+                <a:latin typeface="Arial" pitchFamily="34" charset="0"/>
+                <a:ea typeface="Arial" pitchFamily="34" charset="-122"/>
+                <a:cs typeface="Arial" pitchFamily="34" charset="-120"/>
+              </a:defRPr>
+            </a:lvl1pPr>
+          </a:lstStyle>
+          <a:p>
+            <a:pPr algn="l" indent="0" marL="0">
+              <a:buNone/>
+            </a:pPr>
+            <a:r>
+              <a:rPr lang="en-US" sz="1800" dirty="0">
+                <a:solidFill>
+                  <a:schemeClr val="bg2"/>
+                </a:solidFill>
+                <a:latin typeface="Arial" pitchFamily="34" charset="0"/>
+                <a:ea typeface="Arial" pitchFamily="34" charset="-122"/>
+                <a:cs typeface="Arial" pitchFamily="34" charset="-120"/>
+              </a:rPr>
+              <a:t>Contact details or next steps</a:t>
+            </a:r>
+            <a:endParaRPr lang="en-US" sz="1800" dirty="0"/>
+          </a:p>
+        </p:txBody>
+      </p:sp>
+      <p:sp>
+        <p:nvSpPr>
+          <p:cNvPr id="4" name="Shape 0"/>
+          <p:cNvSpPr/>
+          <p:nvPr/>
+        </p:nvSpPr>
+        <p:spPr>
+          <a:xfrm>
+            <a:off x="914400" y="5349240"/>
+            <a:ext cx="4617720" cy="0"/>
+          </a:xfrm>
+          <a:prstGeom prst="line">
+            <a:avLst/>
+          </a:prstGeom>
+          <a:noFill/>
+          <a:ln w="38100">
+            <a:solidFill>
+              <a:schemeClr val="accent1"/>
+            </a:solidFill>
+            <a:prstDash val="solid"/>
+          </a:ln>
+        </p:spPr>
+      </p:sp>
+      <p:sp>
+        <p:nvSpPr>
+          <p:cNvPr id="5" name="Shape 1"/>
+          <p:cNvSpPr/>
+          <p:nvPr/>
+        </p:nvSpPr>
+        <p:spPr>
+          <a:xfrm>
+            <a:off x="5532120" y="5349240"/>
+            <a:ext cx="5532120" cy="0"/>
+          </a:xfrm>
+          <a:prstGeom prst="line">
+            <a:avLst/>
+          </a:prstGeom>
+          <a:noFill/>
+          <a:ln w="25400">
+            <a:solidFill>
+              <a:schemeClr val="accent5"/>
+            </a:solidFill>
+            <a:prstDash val="dash"/>
+          </a:ln>
+        </p:spPr>
+      </p:sp>
+      <p:sp>
+        <p:nvSpPr>
+          <p:cNvPr id="6" name="Text 2"/>
+          <p:cNvSpPr/>
+          <p:nvPr/>
+        </p:nvSpPr>
+        <p:spPr>
+          <a:xfrm>
+            <a:off x="822960" y="5257800"/>
+            <a:ext cx="182880" cy="182880"/>
+          </a:xfrm>
+          <a:prstGeom prst="ellipse">
+            <a:avLst/>
+          </a:prstGeom>
+          <a:solidFill>
+            <a:schemeClr val="accent1"/>
+          </a:solidFill>
+          <a:ln/>
+        </p:spPr>
+        <p:txBody>
+          <a:bodyPr wrap="square" rtlCol="0" anchor="ctr"/>
+          <a:lstStyle/>
+          <a:p>
+            <a:pPr indent="0" marL="0">
+              <a:buNone/>
+            </a:pPr>
+            <a:endParaRPr lang="en-US" dirty="0"/>
+          </a:p>
+        </p:txBody>
+      </p:sp>
+      <p:sp>
+        <p:nvSpPr>
+          <p:cNvPr id="7" name="Text 3"/>
+          <p:cNvSpPr/>
+          <p:nvPr/>
+        </p:nvSpPr>
+        <p:spPr>
+          <a:xfrm>
+            <a:off x="3749040" y="5257800"/>
+            <a:ext cx="182880" cy="182880"/>
+          </a:xfrm>
+          <a:prstGeom prst="ellipse">
+            <a:avLst/>
+          </a:prstGeom>
+          <a:solidFill>
+            <a:schemeClr val="accent1"/>
+          </a:solidFill>
+          <a:ln/>
+        </p:spPr>
+        <p:txBody>
+          <a:bodyPr wrap="square" rtlCol="0" anchor="ctr"/>
+          <a:lstStyle/>
+          <a:p>
+            <a:pPr indent="0" marL="0">
+              <a:buNone/>
+            </a:pPr>
+            <a:endParaRPr lang="en-US" dirty="0"/>
+          </a:p>
+        </p:txBody>
+      </p:sp>
+      <p:sp>
+        <p:nvSpPr>
+          <p:cNvPr id="8" name="Text 4"/>
+          <p:cNvSpPr/>
+          <p:nvPr/>
+        </p:nvSpPr>
+        <p:spPr>
+          <a:xfrm>
+            <a:off x="7589520" y="5257800"/>
+            <a:ext cx="182880" cy="182880"/>
+          </a:xfrm>
+          <a:prstGeom prst="ellipse">
+            <a:avLst/>
+          </a:prstGeom>
+          <a:solidFill>
+            <a:schemeClr val="accent5"/>
+          </a:solidFill>
+          <a:ln/>
+        </p:spPr>
+        <p:txBody>
+          <a:bodyPr wrap="square" rtlCol="0" anchor="ctr"/>
+          <a:lstStyle/>
+          <a:p>
+            <a:pPr indent="0" marL="0">
+              <a:buNone/>
+            </a:pPr>
+            <a:endParaRPr lang="en-US" dirty="0"/>
+          </a:p>
+        </p:txBody>
+      </p:sp>
+      <p:sp>
+        <p:nvSpPr>
+          <p:cNvPr id="9" name="Text 5"/>
+          <p:cNvSpPr/>
+          <p:nvPr/>
+        </p:nvSpPr>
+        <p:spPr>
+          <a:xfrm>
+            <a:off x="10972800" y="5257800"/>
+            <a:ext cx="182880" cy="182880"/>
+          </a:xfrm>
+          <a:prstGeom prst="ellipse">
+            <a:avLst/>
+          </a:prstGeom>
+          <a:solidFill>
+            <a:schemeClr val="accent5"/>
+          </a:solidFill>
+          <a:ln/>
+        </p:spPr>
+        <p:txBody>
+          <a:bodyPr wrap="square" rtlCol="0" anchor="ctr"/>
+          <a:lstStyle/>
+          <a:p>
+            <a:pPr indent="0" marL="0">
+              <a:buNone/>
+            </a:pPr>
+            <a:endParaRPr lang="en-US" dirty="0"/>
+          </a:p>
+        </p:txBody>
+      </p:sp>
+      <p:sp>
+        <p:nvSpPr>
+          <p:cNvPr id="10" name="Text 6"/>
+          <p:cNvSpPr/>
+          <p:nvPr/>
+        </p:nvSpPr>
+        <p:spPr>
+          <a:xfrm>
+            <a:off x="5257800" y="5074920"/>
+            <a:ext cx="548640" cy="548640"/>
+          </a:xfrm>
+          <a:prstGeom prst="ellipse">
+            <a:avLst/>
+          </a:prstGeom>
+          <a:solidFill>
+            <a:schemeClr val="accent2"/>
+          </a:solidFill>
+          <a:ln/>
+        </p:spPr>
+        <p:txBody>
+          <a:bodyPr wrap="square" rtlCol="0" anchor="ctr"/>
+          <a:lstStyle/>
+          <a:p>
+            <a:pPr indent="0" marL="0">
+              <a:buNone/>
+            </a:pPr>
+            <a:endParaRPr lang="en-US" dirty="0"/>
+          </a:p>
+        </p:txBody>
+      </p:sp>
+      <p:pic>
+        <p:nvPicPr>
+          <p:cNvPr id="11" name="Image 0" descr="/home/user/Screening/templates/presentation/assets/check-shield.png">    </p:cNvPr>
+          <p:cNvPicPr>
+            <a:picLocks noChangeAspect="1"/>
+          </p:cNvPicPr>
+          <p:nvPr/>
+        </p:nvPicPr>
+        <p:blipFill>
+          <a:blip r:embed="rId1"/>
+          <a:stretch>
+            <a:fillRect/>
+          </a:stretch>
+        </p:blipFill>
+        <p:spPr>
+          <a:xfrm>
+            <a:off x="5394960" y="5212080"/>
+            <a:ext cx="274320" cy="274320"/>
+          </a:xfrm>
+          <a:prstGeom prst="rect">
+            <a:avLst/>
+          </a:prstGeom>
+        </p:spPr>
+      </p:pic>
+    </p:spTree>
+  </p:cSld>
+  <p:clrMapOvr>
+    <a:masterClrMapping/>
+  </p:clrMapOvr>
+</p:sldLayout>
+</file>
+
+<file path=ppt/slideLayouts/slideLayout13.xml><?xml version="1.0" encoding="utf-8"?>
+<p:sldLayout xmlns:a="http://schemas.openxmlformats.org/drawingml/2006/main" xmlns:r="http://schemas.openxmlformats.org/officeDocument/2006/relationships" xmlns:p="http://schemas.openxmlformats.org/presentationml/2006/main" preserve="1">
+  <p:cSld name="Blank">
     <p:bg>
       <p:bgPr>
         <a:solidFill>
@@ -1312,9 +2375,745 @@
 </p:sldLayout>
 </file>
 
+<file path=ppt/slideLayouts/slideLayout2.xml><?xml version="1.0" encoding="utf-8"?>
+<p:sldLayout xmlns:a="http://schemas.openxmlformats.org/drawingml/2006/main" xmlns:r="http://schemas.openxmlformats.org/officeDocument/2006/relationships" xmlns:p="http://schemas.openxmlformats.org/presentationml/2006/main" preserve="1">
+  <p:cSld name="Title">
+    <p:bg>
+      <p:bgPr>
+        <a:solidFill>
+          <a:schemeClr val="tx1"/>
+        </a:solidFill>
+      </p:bgPr>
+    </p:bg>
+    <p:spTree>
+      <p:nvGrpSpPr>
+        <p:cNvPr id="1" name=""/>
+        <p:cNvGrpSpPr/>
+        <p:nvPr/>
+      </p:nvGrpSpPr>
+      <p:grpSpPr>
+        <a:xfrm>
+          <a:off x="0" y="0"/>
+          <a:ext cx="0" cy="0"/>
+          <a:chOff x="0" y="0"/>
+          <a:chExt cx="0" cy="0"/>
+        </a:xfrm>
+      </p:grpSpPr>
+      <p:sp>
+        <p:nvSpPr>
+          <p:cNvPr id="2" name="Kicker placeholder"/>
+          <p:cNvSpPr/>
+          <p:nvPr>
+            <p:ph idx="100" type="body" hasCustomPrompt="1"/>
+          </p:nvPr>
+        </p:nvSpPr>
+        <p:spPr>
+          <a:xfrm>
+            <a:off x="731520" y="1417320"/>
+            <a:ext cx="8229600" cy="320040"/>
+          </a:xfrm>
+          <a:prstGeom prst="rect">
+            <a:avLst/>
+          </a:prstGeom>
+          <a:noFill/>
+          <a:ln/>
+        </p:spPr>
+        <p:txBody>
+          <a:bodyPr wrap="square" lIns="0" tIns="0" rIns="0" bIns="0" rtlCol="0" anchor="t"/>
+          <a:lstStyle>
+            <a:lvl1pPr algn="l" indent="0" marL="0">
+              <a:buNone/>
+              <a:defRPr lang="en-US" sz="1400" b="1" spc="300" kern="0" dirty="0">
+                <a:solidFill>
+                  <a:schemeClr val="accent5"/>
+                </a:solidFill>
+                <a:latin typeface="Arial" pitchFamily="34" charset="0"/>
+                <a:ea typeface="Arial" pitchFamily="34" charset="-122"/>
+                <a:cs typeface="Arial" pitchFamily="34" charset="-120"/>
+              </a:defRPr>
+            </a:lvl1pPr>
+          </a:lstStyle>
+          <a:p>
+            <a:pPr algn="l" indent="0" marL="0">
+              <a:buNone/>
+            </a:pPr>
+            <a:r>
+              <a:rPr lang="en-US" sz="1400" b="1" spc="300" kern="0" dirty="0">
+                <a:solidFill>
+                  <a:schemeClr val="accent5"/>
+                </a:solidFill>
+                <a:latin typeface="Arial" pitchFamily="34" charset="0"/>
+                <a:ea typeface="Arial" pitchFamily="34" charset="-122"/>
+                <a:cs typeface="Arial" pitchFamily="34" charset="-120"/>
+              </a:rPr>
+              <a:t>EVENT, TEAM OR SERIES</a:t>
+            </a:r>
+            <a:endParaRPr lang="en-US" sz="1400" dirty="0"/>
+          </a:p>
+        </p:txBody>
+      </p:sp>
+      <p:sp>
+        <p:nvSpPr>
+          <p:cNvPr id="3" name="Title placeholder"/>
+          <p:cNvSpPr/>
+          <p:nvPr>
+            <p:ph idx="101" type="title" hasCustomPrompt="1"/>
+          </p:nvPr>
+        </p:nvSpPr>
+        <p:spPr>
+          <a:xfrm>
+            <a:off x="731520" y="1828800"/>
+            <a:ext cx="8778240" cy="1737360"/>
+          </a:xfrm>
+          <a:prstGeom prst="rect">
+            <a:avLst/>
+          </a:prstGeom>
+          <a:noFill/>
+          <a:ln/>
+        </p:spPr>
+        <p:txBody>
+          <a:bodyPr wrap="square" lIns="0" tIns="0" rIns="0" bIns="0" rtlCol="0" anchor="t"/>
+          <a:lstStyle>
+            <a:lvl1pPr algn="l" indent="0" marL="0">
+              <a:buNone/>
+              <a:defRPr lang="en-US" sz="4600" b="1" dirty="0">
+                <a:solidFill>
+                  <a:schemeClr val="bg1"/>
+                </a:solidFill>
+                <a:latin typeface="Arial" pitchFamily="34" charset="0"/>
+                <a:ea typeface="Arial" pitchFamily="34" charset="-122"/>
+                <a:cs typeface="Arial" pitchFamily="34" charset="-120"/>
+              </a:defRPr>
+            </a:lvl1pPr>
+          </a:lstStyle>
+          <a:p>
+            <a:pPr algn="l" indent="0" marL="0">
+              <a:buNone/>
+            </a:pPr>
+            <a:r>
+              <a:rPr lang="en-US" sz="4600" b="1" dirty="0">
+                <a:solidFill>
+                  <a:schemeClr val="bg1"/>
+                </a:solidFill>
+                <a:latin typeface="Arial" pitchFamily="34" charset="0"/>
+                <a:ea typeface="Arial" pitchFamily="34" charset="-122"/>
+                <a:cs typeface="Arial" pitchFamily="34" charset="-120"/>
+              </a:rPr>
+              <a:t>Presentation title</a:t>
+            </a:r>
+            <a:endParaRPr lang="en-US" sz="4600" dirty="0"/>
+          </a:p>
+        </p:txBody>
+      </p:sp>
+      <p:sp>
+        <p:nvSpPr>
+          <p:cNvPr id="4" name="Subtitle placeholder"/>
+          <p:cNvSpPr/>
+          <p:nvPr>
+            <p:ph idx="102" type="body" hasCustomPrompt="1"/>
+          </p:nvPr>
+        </p:nvSpPr>
+        <p:spPr>
+          <a:xfrm>
+            <a:off x="731520" y="3657600"/>
+            <a:ext cx="8778240" cy="731520"/>
+          </a:xfrm>
+          <a:prstGeom prst="rect">
+            <a:avLst/>
+          </a:prstGeom>
+          <a:noFill/>
+          <a:ln/>
+        </p:spPr>
+        <p:txBody>
+          <a:bodyPr wrap="square" lIns="0" tIns="0" rIns="0" bIns="0" rtlCol="0" anchor="t"/>
+          <a:lstStyle>
+            <a:lvl1pPr algn="l" indent="0" marL="0">
+              <a:buNone/>
+              <a:defRPr lang="en-US" sz="2000" dirty="0">
+                <a:solidFill>
+                  <a:schemeClr val="bg2"/>
+                </a:solidFill>
+                <a:latin typeface="Arial" pitchFamily="34" charset="0"/>
+                <a:ea typeface="Arial" pitchFamily="34" charset="-122"/>
+                <a:cs typeface="Arial" pitchFamily="34" charset="-120"/>
+              </a:defRPr>
+            </a:lvl1pPr>
+          </a:lstStyle>
+          <a:p>
+            <a:pPr algn="l" indent="0" marL="0">
+              <a:buNone/>
+            </a:pPr>
+            <a:r>
+              <a:rPr lang="en-US" sz="2000" dirty="0">
+                <a:solidFill>
+                  <a:schemeClr val="bg2"/>
+                </a:solidFill>
+                <a:latin typeface="Arial" pitchFamily="34" charset="0"/>
+                <a:ea typeface="Arial" pitchFamily="34" charset="-122"/>
+                <a:cs typeface="Arial" pitchFamily="34" charset="-120"/>
+              </a:rPr>
+              <a:t>One-line subtitle</a:t>
+            </a:r>
+            <a:endParaRPr lang="en-US" sz="2000" dirty="0"/>
+          </a:p>
+        </p:txBody>
+      </p:sp>
+      <p:sp>
+        <p:nvSpPr>
+          <p:cNvPr id="5" name="Presenter placeholder"/>
+          <p:cNvSpPr/>
+          <p:nvPr>
+            <p:ph idx="103" type="body" hasCustomPrompt="1"/>
+          </p:nvPr>
+        </p:nvSpPr>
+        <p:spPr>
+          <a:xfrm>
+            <a:off x="731520" y="6080760"/>
+            <a:ext cx="7315200" cy="320040"/>
+          </a:xfrm>
+          <a:prstGeom prst="rect">
+            <a:avLst/>
+          </a:prstGeom>
+          <a:noFill/>
+          <a:ln/>
+        </p:spPr>
+        <p:txBody>
+          <a:bodyPr wrap="square" lIns="0" tIns="0" rIns="0" bIns="0" rtlCol="0" anchor="t"/>
+          <a:lstStyle>
+            <a:lvl1pPr algn="l" indent="0" marL="0">
+              <a:buNone/>
+              <a:defRPr lang="en-US" sz="1200" dirty="0">
+                <a:solidFill>
+                  <a:schemeClr val="accent5"/>
+                </a:solidFill>
+                <a:latin typeface="Arial" pitchFamily="34" charset="0"/>
+                <a:ea typeface="Arial" pitchFamily="34" charset="-122"/>
+                <a:cs typeface="Arial" pitchFamily="34" charset="-120"/>
+              </a:defRPr>
+            </a:lvl1pPr>
+          </a:lstStyle>
+          <a:p>
+            <a:pPr algn="l" indent="0" marL="0">
+              <a:buNone/>
+            </a:pPr>
+            <a:r>
+              <a:rPr lang="en-US" sz="1200" dirty="0">
+                <a:solidFill>
+                  <a:schemeClr val="accent5"/>
+                </a:solidFill>
+                <a:latin typeface="Arial" pitchFamily="34" charset="0"/>
+                <a:ea typeface="Arial" pitchFamily="34" charset="-122"/>
+                <a:cs typeface="Arial" pitchFamily="34" charset="-120"/>
+              </a:rPr>
+              <a:t>Team or role · date</a:t>
+            </a:r>
+            <a:endParaRPr lang="en-US" sz="1200" dirty="0"/>
+          </a:p>
+        </p:txBody>
+      </p:sp>
+      <p:sp>
+        <p:nvSpPr>
+          <p:cNvPr id="6" name="Shape 0"/>
+          <p:cNvSpPr/>
+          <p:nvPr/>
+        </p:nvSpPr>
+        <p:spPr>
+          <a:xfrm>
+            <a:off x="914400" y="5349240"/>
+            <a:ext cx="4617720" cy="0"/>
+          </a:xfrm>
+          <a:prstGeom prst="line">
+            <a:avLst/>
+          </a:prstGeom>
+          <a:noFill/>
+          <a:ln w="38100">
+            <a:solidFill>
+              <a:schemeClr val="accent1"/>
+            </a:solidFill>
+            <a:prstDash val="solid"/>
+          </a:ln>
+        </p:spPr>
+      </p:sp>
+      <p:sp>
+        <p:nvSpPr>
+          <p:cNvPr id="7" name="Shape 1"/>
+          <p:cNvSpPr/>
+          <p:nvPr/>
+        </p:nvSpPr>
+        <p:spPr>
+          <a:xfrm>
+            <a:off x="5532120" y="5349240"/>
+            <a:ext cx="5532120" cy="0"/>
+          </a:xfrm>
+          <a:prstGeom prst="line">
+            <a:avLst/>
+          </a:prstGeom>
+          <a:noFill/>
+          <a:ln w="25400">
+            <a:solidFill>
+              <a:schemeClr val="accent5"/>
+            </a:solidFill>
+            <a:prstDash val="dash"/>
+          </a:ln>
+        </p:spPr>
+      </p:sp>
+      <p:sp>
+        <p:nvSpPr>
+          <p:cNvPr id="8" name="Text 2"/>
+          <p:cNvSpPr/>
+          <p:nvPr/>
+        </p:nvSpPr>
+        <p:spPr>
+          <a:xfrm>
+            <a:off x="822960" y="5257800"/>
+            <a:ext cx="182880" cy="182880"/>
+          </a:xfrm>
+          <a:prstGeom prst="ellipse">
+            <a:avLst/>
+          </a:prstGeom>
+          <a:solidFill>
+            <a:schemeClr val="accent1"/>
+          </a:solidFill>
+          <a:ln/>
+        </p:spPr>
+        <p:txBody>
+          <a:bodyPr wrap="square" rtlCol="0" anchor="ctr"/>
+          <a:lstStyle/>
+          <a:p>
+            <a:pPr indent="0" marL="0">
+              <a:buNone/>
+            </a:pPr>
+            <a:endParaRPr lang="en-US" dirty="0"/>
+          </a:p>
+        </p:txBody>
+      </p:sp>
+      <p:sp>
+        <p:nvSpPr>
+          <p:cNvPr id="9" name="Text 3"/>
+          <p:cNvSpPr/>
+          <p:nvPr/>
+        </p:nvSpPr>
+        <p:spPr>
+          <a:xfrm>
+            <a:off x="3749040" y="5257800"/>
+            <a:ext cx="182880" cy="182880"/>
+          </a:xfrm>
+          <a:prstGeom prst="ellipse">
+            <a:avLst/>
+          </a:prstGeom>
+          <a:solidFill>
+            <a:schemeClr val="accent1"/>
+          </a:solidFill>
+          <a:ln/>
+        </p:spPr>
+        <p:txBody>
+          <a:bodyPr wrap="square" rtlCol="0" anchor="ctr"/>
+          <a:lstStyle/>
+          <a:p>
+            <a:pPr indent="0" marL="0">
+              <a:buNone/>
+            </a:pPr>
+            <a:endParaRPr lang="en-US" dirty="0"/>
+          </a:p>
+        </p:txBody>
+      </p:sp>
+      <p:sp>
+        <p:nvSpPr>
+          <p:cNvPr id="10" name="Text 4"/>
+          <p:cNvSpPr/>
+          <p:nvPr/>
+        </p:nvSpPr>
+        <p:spPr>
+          <a:xfrm>
+            <a:off x="7589520" y="5257800"/>
+            <a:ext cx="182880" cy="182880"/>
+          </a:xfrm>
+          <a:prstGeom prst="ellipse">
+            <a:avLst/>
+          </a:prstGeom>
+          <a:solidFill>
+            <a:schemeClr val="accent5"/>
+          </a:solidFill>
+          <a:ln/>
+        </p:spPr>
+        <p:txBody>
+          <a:bodyPr wrap="square" rtlCol="0" anchor="ctr"/>
+          <a:lstStyle/>
+          <a:p>
+            <a:pPr indent="0" marL="0">
+              <a:buNone/>
+            </a:pPr>
+            <a:endParaRPr lang="en-US" dirty="0"/>
+          </a:p>
+        </p:txBody>
+      </p:sp>
+      <p:sp>
+        <p:nvSpPr>
+          <p:cNvPr id="11" name="Text 5"/>
+          <p:cNvSpPr/>
+          <p:nvPr/>
+        </p:nvSpPr>
+        <p:spPr>
+          <a:xfrm>
+            <a:off x="10972800" y="5257800"/>
+            <a:ext cx="182880" cy="182880"/>
+          </a:xfrm>
+          <a:prstGeom prst="ellipse">
+            <a:avLst/>
+          </a:prstGeom>
+          <a:solidFill>
+            <a:schemeClr val="accent5"/>
+          </a:solidFill>
+          <a:ln/>
+        </p:spPr>
+        <p:txBody>
+          <a:bodyPr wrap="square" rtlCol="0" anchor="ctr"/>
+          <a:lstStyle/>
+          <a:p>
+            <a:pPr indent="0" marL="0">
+              <a:buNone/>
+            </a:pPr>
+            <a:endParaRPr lang="en-US" dirty="0"/>
+          </a:p>
+        </p:txBody>
+      </p:sp>
+      <p:sp>
+        <p:nvSpPr>
+          <p:cNvPr id="12" name="Text 6"/>
+          <p:cNvSpPr/>
+          <p:nvPr/>
+        </p:nvSpPr>
+        <p:spPr>
+          <a:xfrm>
+            <a:off x="5257800" y="5074920"/>
+            <a:ext cx="548640" cy="548640"/>
+          </a:xfrm>
+          <a:prstGeom prst="ellipse">
+            <a:avLst/>
+          </a:prstGeom>
+          <a:solidFill>
+            <a:schemeClr val="accent2"/>
+          </a:solidFill>
+          <a:ln/>
+        </p:spPr>
+        <p:txBody>
+          <a:bodyPr wrap="square" rtlCol="0" anchor="ctr"/>
+          <a:lstStyle/>
+          <a:p>
+            <a:pPr indent="0" marL="0">
+              <a:buNone/>
+            </a:pPr>
+            <a:endParaRPr lang="en-US" dirty="0"/>
+          </a:p>
+        </p:txBody>
+      </p:sp>
+      <p:pic>
+        <p:nvPicPr>
+          <p:cNvPr id="13" name="Image 0" descr="/home/user/Screening/templates/presentation/assets/check-shield.png">    </p:cNvPr>
+          <p:cNvPicPr>
+            <a:picLocks noChangeAspect="1"/>
+          </p:cNvPicPr>
+          <p:nvPr/>
+        </p:nvPicPr>
+        <p:blipFill>
+          <a:blip r:embed="rId1"/>
+          <a:stretch>
+            <a:fillRect/>
+          </a:stretch>
+        </p:blipFill>
+        <p:spPr>
+          <a:xfrm>
+            <a:off x="5394960" y="5212080"/>
+            <a:ext cx="274320" cy="274320"/>
+          </a:xfrm>
+          <a:prstGeom prst="rect">
+            <a:avLst/>
+          </a:prstGeom>
+        </p:spPr>
+      </p:pic>
+    </p:spTree>
+  </p:cSld>
+  <p:clrMapOvr>
+    <a:masterClrMapping/>
+  </p:clrMapOvr>
+</p:sldLayout>
+</file>
+
+<file path=ppt/slideLayouts/slideLayout3.xml><?xml version="1.0" encoding="utf-8"?>
+<p:sldLayout xmlns:a="http://schemas.openxmlformats.org/drawingml/2006/main" xmlns:r="http://schemas.openxmlformats.org/officeDocument/2006/relationships" xmlns:p="http://schemas.openxmlformats.org/presentationml/2006/main" preserve="1">
+  <p:cSld name="Section divider">
+    <p:bg>
+      <p:bgPr>
+        <a:solidFill>
+          <a:schemeClr val="accent1"/>
+        </a:solidFill>
+      </p:bgPr>
+    </p:bg>
+    <p:spTree>
+      <p:nvGrpSpPr>
+        <p:cNvPr id="1" name=""/>
+        <p:cNvGrpSpPr/>
+        <p:nvPr/>
+      </p:nvGrpSpPr>
+      <p:grpSpPr>
+        <a:xfrm>
+          <a:off x="0" y="0"/>
+          <a:ext cx="0" cy="0"/>
+          <a:chOff x="0" y="0"/>
+          <a:chExt cx="0" cy="0"/>
+        </a:xfrm>
+      </p:grpSpPr>
+      <p:sp>
+        <p:nvSpPr>
+          <p:cNvPr id="2" name="Number placeholder"/>
+          <p:cNvSpPr/>
+          <p:nvPr>
+            <p:ph idx="100" type="body" hasCustomPrompt="1"/>
+          </p:nvPr>
+        </p:nvSpPr>
+        <p:spPr>
+          <a:xfrm>
+            <a:off x="731520" y="1463040"/>
+            <a:ext cx="3657600" cy="1371600"/>
+          </a:xfrm>
+          <a:prstGeom prst="rect">
+            <a:avLst/>
+          </a:prstGeom>
+          <a:noFill/>
+          <a:ln/>
+        </p:spPr>
+        <p:txBody>
+          <a:bodyPr wrap="square" lIns="0" tIns="0" rIns="0" bIns="0" rtlCol="0" anchor="t"/>
+          <a:lstStyle>
+            <a:lvl1pPr algn="l" indent="0" marL="0">
+              <a:buNone/>
+              <a:defRPr lang="en-US" sz="8800" b="1" dirty="0">
+                <a:solidFill>
+                  <a:schemeClr val="bg1"/>
+                </a:solidFill>
+                <a:latin typeface="Arial" pitchFamily="34" charset="0"/>
+                <a:ea typeface="Arial" pitchFamily="34" charset="-122"/>
+                <a:cs typeface="Arial" pitchFamily="34" charset="-120"/>
+              </a:defRPr>
+            </a:lvl1pPr>
+          </a:lstStyle>
+          <a:p>
+            <a:pPr algn="l" indent="0" marL="0">
+              <a:buNone/>
+            </a:pPr>
+            <a:r>
+              <a:rPr lang="en-US" sz="8800" b="1" dirty="0">
+                <a:solidFill>
+                  <a:schemeClr val="bg1"/>
+                </a:solidFill>
+                <a:latin typeface="Arial" pitchFamily="34" charset="0"/>
+                <a:ea typeface="Arial" pitchFamily="34" charset="-122"/>
+                <a:cs typeface="Arial" pitchFamily="34" charset="-120"/>
+              </a:rPr>
+              <a:t>01</a:t>
+            </a:r>
+            <a:endParaRPr lang="en-US" sz="8800" dirty="0"/>
+          </a:p>
+        </p:txBody>
+      </p:sp>
+      <p:sp>
+        <p:nvSpPr>
+          <p:cNvPr id="3" name="Title placeholder"/>
+          <p:cNvSpPr/>
+          <p:nvPr>
+            <p:ph idx="101" type="title" hasCustomPrompt="1"/>
+          </p:nvPr>
+        </p:nvSpPr>
+        <p:spPr>
+          <a:xfrm>
+            <a:off x="731520" y="2971800"/>
+            <a:ext cx="10058400" cy="1097280"/>
+          </a:xfrm>
+          <a:prstGeom prst="rect">
+            <a:avLst/>
+          </a:prstGeom>
+          <a:noFill/>
+          <a:ln/>
+        </p:spPr>
+        <p:txBody>
+          <a:bodyPr wrap="square" lIns="0" tIns="0" rIns="0" bIns="0" rtlCol="0" anchor="t"/>
+          <a:lstStyle>
+            <a:lvl1pPr algn="l" indent="0" marL="0">
+              <a:buNone/>
+              <a:defRPr lang="en-US" sz="4000" b="1" dirty="0">
+                <a:solidFill>
+                  <a:schemeClr val="bg1"/>
+                </a:solidFill>
+                <a:latin typeface="Arial" pitchFamily="34" charset="0"/>
+                <a:ea typeface="Arial" pitchFamily="34" charset="-122"/>
+                <a:cs typeface="Arial" pitchFamily="34" charset="-120"/>
+              </a:defRPr>
+            </a:lvl1pPr>
+          </a:lstStyle>
+          <a:p>
+            <a:pPr algn="l" indent="0" marL="0">
+              <a:buNone/>
+            </a:pPr>
+            <a:r>
+              <a:rPr lang="en-US" sz="4000" b="1" dirty="0">
+                <a:solidFill>
+                  <a:schemeClr val="bg1"/>
+                </a:solidFill>
+                <a:latin typeface="Arial" pitchFamily="34" charset="0"/>
+                <a:ea typeface="Arial" pitchFamily="34" charset="-122"/>
+                <a:cs typeface="Arial" pitchFamily="34" charset="-120"/>
+              </a:rPr>
+              <a:t>Section title</a:t>
+            </a:r>
+            <a:endParaRPr lang="en-US" sz="4000" dirty="0"/>
+          </a:p>
+        </p:txBody>
+      </p:sp>
+      <p:sp>
+        <p:nvSpPr>
+          <p:cNvPr id="4" name="Body placeholder"/>
+          <p:cNvSpPr/>
+          <p:nvPr>
+            <p:ph idx="102" type="body" hasCustomPrompt="1"/>
+          </p:nvPr>
+        </p:nvSpPr>
+        <p:spPr>
+          <a:xfrm>
+            <a:off x="731520" y="4160520"/>
+            <a:ext cx="8229600" cy="1005840"/>
+          </a:xfrm>
+          <a:prstGeom prst="rect">
+            <a:avLst/>
+          </a:prstGeom>
+          <a:noFill/>
+          <a:ln/>
+        </p:spPr>
+        <p:txBody>
+          <a:bodyPr wrap="square" lIns="0" tIns="0" rIns="0" bIns="0" rtlCol="0" anchor="t"/>
+          <a:lstStyle>
+            <a:lvl1pPr algn="l" indent="0" marL="0">
+              <a:buNone/>
+              <a:defRPr lang="en-US" sz="1800" dirty="0">
+                <a:solidFill>
+                  <a:schemeClr val="bg2"/>
+                </a:solidFill>
+                <a:latin typeface="Arial" pitchFamily="34" charset="0"/>
+                <a:ea typeface="Arial" pitchFamily="34" charset="-122"/>
+                <a:cs typeface="Arial" pitchFamily="34" charset="-120"/>
+              </a:defRPr>
+            </a:lvl1pPr>
+          </a:lstStyle>
+          <a:p>
+            <a:pPr algn="l" indent="0" marL="0">
+              <a:buNone/>
+            </a:pPr>
+            <a:r>
+              <a:rPr lang="en-US" sz="1800" dirty="0">
+                <a:solidFill>
+                  <a:schemeClr val="bg2"/>
+                </a:solidFill>
+                <a:latin typeface="Arial" pitchFamily="34" charset="0"/>
+                <a:ea typeface="Arial" pitchFamily="34" charset="-122"/>
+                <a:cs typeface="Arial" pitchFamily="34" charset="-120"/>
+              </a:rPr>
+              <a:t>What this section covers, in a sentence</a:t>
+            </a:r>
+            <a:endParaRPr lang="en-US" sz="1800" dirty="0"/>
+          </a:p>
+        </p:txBody>
+      </p:sp>
+      <p:sp>
+        <p:nvSpPr>
+          <p:cNvPr id="5" name="Text 0"/>
+          <p:cNvSpPr/>
+          <p:nvPr/>
+        </p:nvSpPr>
+        <p:spPr>
+          <a:xfrm>
+            <a:off x="5852160" y="6309360"/>
+            <a:ext cx="5303520" cy="274320"/>
+          </a:xfrm>
+          <a:prstGeom prst="rect">
+            <a:avLst/>
+          </a:prstGeom>
+          <a:noFill/>
+          <a:ln/>
+        </p:spPr>
+        <p:txBody>
+          <a:bodyPr wrap="square" lIns="0" tIns="0" rIns="0" bIns="0" rtlCol="0" anchor="ctr"/>
+          <a:lstStyle/>
+          <a:p>
+            <a:pPr algn="r" indent="0" marL="0">
+              <a:buNone/>
+            </a:pPr>
+            <a:r>
+              <a:rPr lang="en-US" sz="1000" dirty="0">
+                <a:solidFill>
+                  <a:schemeClr val="bg2"/>
+                </a:solidFill>
+              </a:rPr>
+              <a:t>Checkout.com · Global Screening · Draft for Compliance sign-off</a:t>
+            </a:r>
+            <a:endParaRPr lang="en-US" sz="1000" dirty="0"/>
+          </a:p>
+        </p:txBody>
+      </p:sp>
+      <p:sp>
+        <p:nvSpPr>
+          <p:cNvPr id="25" name="Slide Number Placeholder 0"/>
+          <p:cNvSpPr>
+            <a:spLocks noGrp="1"/>
+          </p:cNvSpPr>
+          <p:nvPr>
+            <p:ph type="sldNum" sz="quarter" idx="4294967295"/>
+          </p:nvPr>
+        </p:nvSpPr>
+        <p:spPr>
+          <a:xfrm>
+            <a:off x="11274552" y="6309360"/>
+            <a:ext cx="365760" cy="274320"/>
+          </a:xfrm>
+          <a:prstGeom prst="rect">
+            <a:avLst/>
+          </a:prstGeom>
+          <a:extLst>
+            <a:ext uri="{C572A759-6A51-4108-AA02-DFA0A04FC94B}">
+              <ma14:wrappingTextBoxFlag xmlns:ma14="http://schemas.microsoft.com/office/mac/drawingml/2011/main" val="0"/>
+            </a:ext>
+          </a:extLst>
+        </p:spPr>
+        <p:txBody>
+          <a:bodyPr anchor="ctr"/>
+          <a:lstStyle>
+            <a:lvl1pPr>
+              <a:defRPr sz="1000">
+                <a:solidFill>
+                  <a:schemeClr val="bg2"/>
+                </a:solidFill>
+              </a:defRPr>
+            </a:lvl1pPr>
+          </a:lstStyle>
+          <a:p>
+            <a:pPr algn="r"/>
+            <a:fld id="{F7021451-1387-4CA6-816F-3879F97B5CBC}" type="slidenum">
+              <a:rPr b="0" lang="en-US"/>
+              <a:t>1003</a:t>
+            </a:fld>
+            <a:endParaRPr lang="en-US"/>
+          </a:p>
+        </p:txBody>
+      </p:sp>
+    </p:spTree>
+  </p:cSld>
+  <p:clrMapOvr>
+    <a:masterClrMapping/>
+  </p:clrMapOvr>
+</p:sldLayout>
+</file>
+
 <file path=ppt/slideLayouts/slideLayout4.xml><?xml version="1.0" encoding="utf-8"?>
 <p:sldLayout xmlns:a="http://schemas.openxmlformats.org/drawingml/2006/main" xmlns:r="http://schemas.openxmlformats.org/officeDocument/2006/relationships" xmlns:p="http://schemas.openxmlformats.org/presentationml/2006/main" preserve="1">
-  <p:cSld name="CONTENT">
+  <p:cSld name="Title and content">
     <p:bg>
       <p:bgPr>
         <a:solidFill>
@@ -1338,61 +3137,25 @@
       </p:grpSpPr>
       <p:sp>
         <p:nvSpPr>
-          <p:cNvPr id="2" name="Text 0"/>
-          <p:cNvSpPr/>
-          <p:nvPr/>
-        </p:nvSpPr>
-        <p:spPr>
-          <a:xfrm>
-            <a:off x="6583680" y="6309360"/>
-            <a:ext cx="4572000" cy="274320"/>
-          </a:xfrm>
-          <a:prstGeom prst="rect">
-            <a:avLst/>
-          </a:prstGeom>
-          <a:noFill/>
-          <a:ln/>
-        </p:spPr>
-        <p:txBody>
-          <a:bodyPr wrap="square" lIns="0" tIns="0" rIns="0" bIns="0" rtlCol="0" anchor="ctr"/>
-          <a:lstStyle/>
-          <a:p>
-            <a:pPr algn="r" indent="0" marL="0">
-              <a:buNone/>
-            </a:pPr>
-            <a:r>
-              <a:rPr lang="en-US" sz="1000" dirty="0">
-                <a:solidFill>
-                  <a:schemeClr val="tx2"/>
-                </a:solidFill>
-              </a:rPr>
-              <a:t>Checkout.com Global Screening · Draft for Compliance sign-off</a:t>
-            </a:r>
-            <a:endParaRPr lang="en-US" sz="1000" dirty="0"/>
-          </a:p>
-        </p:txBody>
-      </p:sp>
-      <p:sp>
-        <p:nvSpPr>
-          <p:cNvPr id="3" name="Text 1"/>
+          <p:cNvPr id="2" name="Title placeholder"/>
           <p:cNvSpPr/>
           <p:nvPr>
-            <p:ph idx="101" type="title" hasCustomPrompt="1"/>
+            <p:ph idx="100" type="title" hasCustomPrompt="1"/>
           </p:nvPr>
         </p:nvSpPr>
         <p:spPr>
           <a:xfrm>
             <a:off x="548640" y="384048"/>
-            <a:ext cx="7040880" cy="868680"/>
-          </a:xfrm>
-          <a:prstGeom prst="rect">
-            <a:avLst/>
-          </a:prstGeom>
-          <a:noFill/>
-          <a:ln/>
-        </p:spPr>
-        <p:txBody>
-          <a:bodyPr wrap="square" rtlCol="0"/>
+            <a:ext cx="8595360" cy="868680"/>
+          </a:xfrm>
+          <a:prstGeom prst="rect">
+            <a:avLst/>
+          </a:prstGeom>
+          <a:noFill/>
+          <a:ln/>
+        </p:spPr>
+        <p:txBody>
+          <a:bodyPr wrap="square" lIns="0" tIns="0" rIns="0" bIns="0" rtlCol="0" anchor="t"/>
           <a:lstStyle>
             <a:lvl1pPr algn="l" indent="0" marL="0">
               <a:buNone/>
@@ -1410,7 +3173,221 @@
             <a:pPr algn="l" indent="0" marL="0">
               <a:buNone/>
             </a:pPr>
+            <a:r>
+              <a:rPr lang="en-US" sz="2800" b="1" dirty="0">
+                <a:solidFill>
+                  <a:schemeClr val="tx1"/>
+                </a:solidFill>
+                <a:latin typeface="Arial" pitchFamily="34" charset="0"/>
+                <a:ea typeface="Arial" pitchFamily="34" charset="-122"/>
+                <a:cs typeface="Arial" pitchFamily="34" charset="-120"/>
+              </a:rPr>
+              <a:t>Slide title: say the point, not the topic</a:t>
+            </a:r>
             <a:endParaRPr lang="en-US" sz="2800" dirty="0"/>
+          </a:p>
+        </p:txBody>
+      </p:sp>
+      <p:sp>
+        <p:nvSpPr>
+          <p:cNvPr id="3" name="Tag placeholder"/>
+          <p:cNvSpPr/>
+          <p:nvPr>
+            <p:ph idx="101" type="body" hasCustomPrompt="1"/>
+          </p:nvPr>
+        </p:nvSpPr>
+        <p:spPr>
+          <a:xfrm>
+            <a:off x="9326880" y="457200"/>
+            <a:ext cx="2313432" cy="274320"/>
+          </a:xfrm>
+          <a:prstGeom prst="rect">
+            <a:avLst/>
+          </a:prstGeom>
+          <a:noFill/>
+          <a:ln/>
+        </p:spPr>
+        <p:txBody>
+          <a:bodyPr wrap="square" lIns="0" tIns="0" rIns="0" bIns="0" rtlCol="0" anchor="t"/>
+          <a:lstStyle>
+            <a:lvl1pPr algn="r" indent="0" marL="0">
+              <a:buNone/>
+              <a:defRPr lang="en-US" sz="1000" b="1" spc="150" kern="0" dirty="0">
+                <a:solidFill>
+                  <a:schemeClr val="accent1"/>
+                </a:solidFill>
+                <a:latin typeface="Arial" pitchFamily="34" charset="0"/>
+                <a:ea typeface="Arial" pitchFamily="34" charset="-122"/>
+                <a:cs typeface="Arial" pitchFamily="34" charset="-120"/>
+              </a:defRPr>
+            </a:lvl1pPr>
+          </a:lstStyle>
+          <a:p>
+            <a:pPr algn="r" indent="0" marL="0">
+              <a:buNone/>
+            </a:pPr>
+            <a:r>
+              <a:rPr lang="en-US" sz="1000" b="1" spc="150" kern="0" dirty="0">
+                <a:solidFill>
+                  <a:schemeClr val="accent1"/>
+                </a:solidFill>
+                <a:latin typeface="Arial" pitchFamily="34" charset="0"/>
+                <a:ea typeface="Arial" pitchFamily="34" charset="-122"/>
+                <a:cs typeface="Arial" pitchFamily="34" charset="-120"/>
+              </a:rPr>
+              <a:t>PART OR TOPIC</a:t>
+            </a:r>
+            <a:endParaRPr lang="en-US" sz="1000" dirty="0"/>
+          </a:p>
+        </p:txBody>
+      </p:sp>
+      <p:sp>
+        <p:nvSpPr>
+          <p:cNvPr id="4" name="Source placeholder"/>
+          <p:cNvSpPr/>
+          <p:nvPr>
+            <p:ph idx="102" type="body" hasCustomPrompt="1"/>
+          </p:nvPr>
+        </p:nvSpPr>
+        <p:spPr>
+          <a:xfrm>
+            <a:off x="548640" y="6309360"/>
+            <a:ext cx="5120640" cy="274320"/>
+          </a:xfrm>
+          <a:prstGeom prst="rect">
+            <a:avLst/>
+          </a:prstGeom>
+          <a:noFill/>
+          <a:ln/>
+        </p:spPr>
+        <p:txBody>
+          <a:bodyPr wrap="square" lIns="0" tIns="0" rIns="0" bIns="0" rtlCol="0" anchor="ctr"/>
+          <a:lstStyle>
+            <a:lvl1pPr algn="l" indent="0" marL="0">
+              <a:buNone/>
+              <a:defRPr lang="en-US" sz="1000" dirty="0">
+                <a:solidFill>
+                  <a:schemeClr val="tx2"/>
+                </a:solidFill>
+                <a:latin typeface="Arial" pitchFamily="34" charset="0"/>
+                <a:ea typeface="Arial" pitchFamily="34" charset="-122"/>
+                <a:cs typeface="Arial" pitchFamily="34" charset="-120"/>
+              </a:defRPr>
+            </a:lvl1pPr>
+          </a:lstStyle>
+          <a:p>
+            <a:pPr algn="l" indent="0" marL="0">
+              <a:buNone/>
+            </a:pPr>
+            <a:r>
+              <a:rPr lang="en-US" sz="1000" dirty="0">
+                <a:solidFill>
+                  <a:schemeClr val="tx2"/>
+                </a:solidFill>
+                <a:latin typeface="Arial" pitchFamily="34" charset="0"/>
+                <a:ea typeface="Arial" pitchFamily="34" charset="-122"/>
+                <a:cs typeface="Arial" pitchFamily="34" charset="-120"/>
+              </a:rPr>
+              <a:t>Source: cite the legislation, guidance, policy section or list entry</a:t>
+            </a:r>
+            <a:endParaRPr lang="en-US" sz="1000" dirty="0"/>
+          </a:p>
+        </p:txBody>
+      </p:sp>
+      <p:sp>
+        <p:nvSpPr>
+          <p:cNvPr id="5" name="Text 0"/>
+          <p:cNvSpPr/>
+          <p:nvPr/>
+        </p:nvSpPr>
+        <p:spPr>
+          <a:xfrm>
+            <a:off x="5852160" y="6309360"/>
+            <a:ext cx="5303520" cy="274320"/>
+          </a:xfrm>
+          <a:prstGeom prst="rect">
+            <a:avLst/>
+          </a:prstGeom>
+          <a:noFill/>
+          <a:ln/>
+        </p:spPr>
+        <p:txBody>
+          <a:bodyPr wrap="square" lIns="0" tIns="0" rIns="0" bIns="0" rtlCol="0" anchor="ctr"/>
+          <a:lstStyle/>
+          <a:p>
+            <a:pPr algn="r" indent="0" marL="0">
+              <a:buNone/>
+            </a:pPr>
+            <a:r>
+              <a:rPr lang="en-US" sz="1000" dirty="0">
+                <a:solidFill>
+                  <a:schemeClr val="tx2"/>
+                </a:solidFill>
+              </a:rPr>
+              <a:t>Checkout.com · Global Screening · Draft for Compliance sign-off</a:t>
+            </a:r>
+            <a:endParaRPr lang="en-US" sz="1000" dirty="0"/>
+          </a:p>
+        </p:txBody>
+      </p:sp>
+      <p:sp>
+        <p:nvSpPr>
+          <p:cNvPr id="6" name="Body placeholder"/>
+          <p:cNvSpPr/>
+          <p:nvPr>
+            <p:ph idx="104" type="body" hasCustomPrompt="1"/>
+          </p:nvPr>
+        </p:nvSpPr>
+        <p:spPr>
+          <a:xfrm>
+            <a:off x="548640" y="1600200"/>
+            <a:ext cx="11091672" cy="4434840"/>
+          </a:xfrm>
+          <a:prstGeom prst="rect">
+            <a:avLst/>
+          </a:prstGeom>
+          <a:noFill/>
+          <a:ln/>
+        </p:spPr>
+        <p:txBody>
+          <a:bodyPr wrap="square" lIns="0" tIns="0" rIns="0" bIns="0" rtlCol="0" anchor="t"/>
+          <a:lstStyle>
+            <a:lvl1pPr algn="l" marL="228600" indent="-228600">
+              <a:spcAft>
+                <a:spcPts val="800"/>
+              </a:spcAft>
+              <a:buSzPct val="100000"/>
+              <a:buChar char="•"/>
+              <a:defRPr lang="en-US" sz="1800" dirty="0">
+                <a:solidFill>
+                  <a:schemeClr val="tx1"/>
+                </a:solidFill>
+                <a:latin typeface="Arial" pitchFamily="34" charset="0"/>
+                <a:ea typeface="Arial" pitchFamily="34" charset="-122"/>
+                <a:cs typeface="Arial" pitchFamily="34" charset="-120"/>
+              </a:defRPr>
+            </a:lvl1pPr>
+          </a:lstStyle>
+          <a:p>
+            <a:pPr algn="l" marL="228600" indent="-228600">
+              <a:spcAft>
+                <a:spcPts val="800"/>
+              </a:spcAft>
+              <a:buSzPct val="100000"/>
+              <a:buChar char="•"/>
+            </a:pPr>
+            <a:r>
+              <a:rPr lang="en-US" sz="1800" dirty="0">
+                <a:solidFill>
+                  <a:schemeClr val="tx1"/>
+                </a:solidFill>
+                <a:latin typeface="Arial" pitchFamily="34" charset="0"/>
+                <a:ea typeface="Arial" pitchFamily="34" charset="-122"/>
+                <a:cs typeface="Arial" pitchFamily="34" charset="-120"/>
+              </a:rPr>
+              <a:t>Add points. Press Tab for a second level</a:t>
+            </a:r>
+            <a:endParaRPr lang="en-US" sz="1800" dirty="0"/>
           </a:p>
         </p:txBody>
       </p:sp>
@@ -1469,7 +3446,1911 @@
 
 <file path=ppt/slideLayouts/slideLayout5.xml><?xml version="1.0" encoding="utf-8"?>
 <p:sldLayout xmlns:a="http://schemas.openxmlformats.org/drawingml/2006/main" xmlns:r="http://schemas.openxmlformats.org/officeDocument/2006/relationships" xmlns:p="http://schemas.openxmlformats.org/presentationml/2006/main" preserve="1">
-  <p:cSld name="DARK">
+  <p:cSld name="Two content">
+    <p:bg>
+      <p:bgPr>
+        <a:solidFill>
+          <a:schemeClr val="bg1"/>
+        </a:solidFill>
+      </p:bgPr>
+    </p:bg>
+    <p:spTree>
+      <p:nvGrpSpPr>
+        <p:cNvPr id="1" name=""/>
+        <p:cNvGrpSpPr/>
+        <p:nvPr/>
+      </p:nvGrpSpPr>
+      <p:grpSpPr>
+        <a:xfrm>
+          <a:off x="0" y="0"/>
+          <a:ext cx="0" cy="0"/>
+          <a:chOff x="0" y="0"/>
+          <a:chExt cx="0" cy="0"/>
+        </a:xfrm>
+      </p:grpSpPr>
+      <p:sp>
+        <p:nvSpPr>
+          <p:cNvPr id="2" name="Title placeholder"/>
+          <p:cNvSpPr/>
+          <p:nvPr>
+            <p:ph idx="100" type="title" hasCustomPrompt="1"/>
+          </p:nvPr>
+        </p:nvSpPr>
+        <p:spPr>
+          <a:xfrm>
+            <a:off x="548640" y="384048"/>
+            <a:ext cx="8595360" cy="868680"/>
+          </a:xfrm>
+          <a:prstGeom prst="rect">
+            <a:avLst/>
+          </a:prstGeom>
+          <a:noFill/>
+          <a:ln/>
+        </p:spPr>
+        <p:txBody>
+          <a:bodyPr wrap="square" lIns="0" tIns="0" rIns="0" bIns="0" rtlCol="0" anchor="t"/>
+          <a:lstStyle>
+            <a:lvl1pPr algn="l" indent="0" marL="0">
+              <a:buNone/>
+              <a:defRPr lang="en-US" sz="2800" b="1" dirty="0">
+                <a:solidFill>
+                  <a:schemeClr val="tx1"/>
+                </a:solidFill>
+                <a:latin typeface="Arial" pitchFamily="34" charset="0"/>
+                <a:ea typeface="Arial" pitchFamily="34" charset="-122"/>
+                <a:cs typeface="Arial" pitchFamily="34" charset="-120"/>
+              </a:defRPr>
+            </a:lvl1pPr>
+          </a:lstStyle>
+          <a:p>
+            <a:pPr algn="l" indent="0" marL="0">
+              <a:buNone/>
+            </a:pPr>
+            <a:r>
+              <a:rPr lang="en-US" sz="2800" b="1" dirty="0">
+                <a:solidFill>
+                  <a:schemeClr val="tx1"/>
+                </a:solidFill>
+                <a:latin typeface="Arial" pitchFamily="34" charset="0"/>
+                <a:ea typeface="Arial" pitchFamily="34" charset="-122"/>
+                <a:cs typeface="Arial" pitchFamily="34" charset="-120"/>
+              </a:rPr>
+              <a:t>Slide title: say the point, not the topic</a:t>
+            </a:r>
+            <a:endParaRPr lang="en-US" sz="2800" dirty="0"/>
+          </a:p>
+        </p:txBody>
+      </p:sp>
+      <p:sp>
+        <p:nvSpPr>
+          <p:cNvPr id="3" name="Tag placeholder"/>
+          <p:cNvSpPr/>
+          <p:nvPr>
+            <p:ph idx="101" type="body" hasCustomPrompt="1"/>
+          </p:nvPr>
+        </p:nvSpPr>
+        <p:spPr>
+          <a:xfrm>
+            <a:off x="9326880" y="457200"/>
+            <a:ext cx="2313432" cy="274320"/>
+          </a:xfrm>
+          <a:prstGeom prst="rect">
+            <a:avLst/>
+          </a:prstGeom>
+          <a:noFill/>
+          <a:ln/>
+        </p:spPr>
+        <p:txBody>
+          <a:bodyPr wrap="square" lIns="0" tIns="0" rIns="0" bIns="0" rtlCol="0" anchor="t"/>
+          <a:lstStyle>
+            <a:lvl1pPr algn="r" indent="0" marL="0">
+              <a:buNone/>
+              <a:defRPr lang="en-US" sz="1000" b="1" spc="150" kern="0" dirty="0">
+                <a:solidFill>
+                  <a:schemeClr val="accent1"/>
+                </a:solidFill>
+                <a:latin typeface="Arial" pitchFamily="34" charset="0"/>
+                <a:ea typeface="Arial" pitchFamily="34" charset="-122"/>
+                <a:cs typeface="Arial" pitchFamily="34" charset="-120"/>
+              </a:defRPr>
+            </a:lvl1pPr>
+          </a:lstStyle>
+          <a:p>
+            <a:pPr algn="r" indent="0" marL="0">
+              <a:buNone/>
+            </a:pPr>
+            <a:r>
+              <a:rPr lang="en-US" sz="1000" b="1" spc="150" kern="0" dirty="0">
+                <a:solidFill>
+                  <a:schemeClr val="accent1"/>
+                </a:solidFill>
+                <a:latin typeface="Arial" pitchFamily="34" charset="0"/>
+                <a:ea typeface="Arial" pitchFamily="34" charset="-122"/>
+                <a:cs typeface="Arial" pitchFamily="34" charset="-120"/>
+              </a:rPr>
+              <a:t>PART OR TOPIC</a:t>
+            </a:r>
+            <a:endParaRPr lang="en-US" sz="1000" dirty="0"/>
+          </a:p>
+        </p:txBody>
+      </p:sp>
+      <p:sp>
+        <p:nvSpPr>
+          <p:cNvPr id="4" name="Source placeholder"/>
+          <p:cNvSpPr/>
+          <p:nvPr>
+            <p:ph idx="102" type="body" hasCustomPrompt="1"/>
+          </p:nvPr>
+        </p:nvSpPr>
+        <p:spPr>
+          <a:xfrm>
+            <a:off x="548640" y="6309360"/>
+            <a:ext cx="5120640" cy="274320"/>
+          </a:xfrm>
+          <a:prstGeom prst="rect">
+            <a:avLst/>
+          </a:prstGeom>
+          <a:noFill/>
+          <a:ln/>
+        </p:spPr>
+        <p:txBody>
+          <a:bodyPr wrap="square" lIns="0" tIns="0" rIns="0" bIns="0" rtlCol="0" anchor="ctr"/>
+          <a:lstStyle>
+            <a:lvl1pPr algn="l" indent="0" marL="0">
+              <a:buNone/>
+              <a:defRPr lang="en-US" sz="1000" dirty="0">
+                <a:solidFill>
+                  <a:schemeClr val="tx2"/>
+                </a:solidFill>
+                <a:latin typeface="Arial" pitchFamily="34" charset="0"/>
+                <a:ea typeface="Arial" pitchFamily="34" charset="-122"/>
+                <a:cs typeface="Arial" pitchFamily="34" charset="-120"/>
+              </a:defRPr>
+            </a:lvl1pPr>
+          </a:lstStyle>
+          <a:p>
+            <a:pPr algn="l" indent="0" marL="0">
+              <a:buNone/>
+            </a:pPr>
+            <a:r>
+              <a:rPr lang="en-US" sz="1000" dirty="0">
+                <a:solidFill>
+                  <a:schemeClr val="tx2"/>
+                </a:solidFill>
+                <a:latin typeface="Arial" pitchFamily="34" charset="0"/>
+                <a:ea typeface="Arial" pitchFamily="34" charset="-122"/>
+                <a:cs typeface="Arial" pitchFamily="34" charset="-120"/>
+              </a:rPr>
+              <a:t>Source: cite the legislation, guidance, policy section or list entry</a:t>
+            </a:r>
+            <a:endParaRPr lang="en-US" sz="1000" dirty="0"/>
+          </a:p>
+        </p:txBody>
+      </p:sp>
+      <p:sp>
+        <p:nvSpPr>
+          <p:cNvPr id="5" name="Text 0"/>
+          <p:cNvSpPr/>
+          <p:nvPr/>
+        </p:nvSpPr>
+        <p:spPr>
+          <a:xfrm>
+            <a:off x="5852160" y="6309360"/>
+            <a:ext cx="5303520" cy="274320"/>
+          </a:xfrm>
+          <a:prstGeom prst="rect">
+            <a:avLst/>
+          </a:prstGeom>
+          <a:noFill/>
+          <a:ln/>
+        </p:spPr>
+        <p:txBody>
+          <a:bodyPr wrap="square" lIns="0" tIns="0" rIns="0" bIns="0" rtlCol="0" anchor="ctr"/>
+          <a:lstStyle/>
+          <a:p>
+            <a:pPr algn="r" indent="0" marL="0">
+              <a:buNone/>
+            </a:pPr>
+            <a:r>
+              <a:rPr lang="en-US" sz="1000" dirty="0">
+                <a:solidFill>
+                  <a:schemeClr val="tx2"/>
+                </a:solidFill>
+              </a:rPr>
+              <a:t>Checkout.com · Global Screening · Draft for Compliance sign-off</a:t>
+            </a:r>
+            <a:endParaRPr lang="en-US" sz="1000" dirty="0"/>
+          </a:p>
+        </p:txBody>
+      </p:sp>
+      <p:sp>
+        <p:nvSpPr>
+          <p:cNvPr id="6" name="HeadingLeft placeholder"/>
+          <p:cNvSpPr/>
+          <p:nvPr>
+            <p:ph idx="104" type="body" hasCustomPrompt="1"/>
+          </p:nvPr>
+        </p:nvSpPr>
+        <p:spPr>
+          <a:xfrm>
+            <a:off x="548640" y="1600200"/>
+            <a:ext cx="5394960" cy="365760"/>
+          </a:xfrm>
+          <a:prstGeom prst="rect">
+            <a:avLst/>
+          </a:prstGeom>
+          <a:noFill/>
+          <a:ln/>
+        </p:spPr>
+        <p:txBody>
+          <a:bodyPr wrap="square" lIns="0" tIns="0" rIns="0" bIns="0" rtlCol="0" anchor="t"/>
+          <a:lstStyle>
+            <a:lvl1pPr algn="l" indent="0" marL="0">
+              <a:buNone/>
+              <a:defRPr lang="en-US" sz="1600" b="1" dirty="0">
+                <a:solidFill>
+                  <a:schemeClr val="accent1"/>
+                </a:solidFill>
+                <a:latin typeface="Arial" pitchFamily="34" charset="0"/>
+                <a:ea typeface="Arial" pitchFamily="34" charset="-122"/>
+                <a:cs typeface="Arial" pitchFamily="34" charset="-120"/>
+              </a:defRPr>
+            </a:lvl1pPr>
+          </a:lstStyle>
+          <a:p>
+            <a:pPr algn="l" indent="0" marL="0">
+              <a:buNone/>
+            </a:pPr>
+            <a:r>
+              <a:rPr lang="en-US" sz="1600" b="1" dirty="0">
+                <a:solidFill>
+                  <a:schemeClr val="accent1"/>
+                </a:solidFill>
+                <a:latin typeface="Arial" pitchFamily="34" charset="0"/>
+                <a:ea typeface="Arial" pitchFamily="34" charset="-122"/>
+                <a:cs typeface="Arial" pitchFamily="34" charset="-120"/>
+              </a:rPr>
+              <a:t>Left heading</a:t>
+            </a:r>
+            <a:endParaRPr lang="en-US" sz="1600" dirty="0"/>
+          </a:p>
+        </p:txBody>
+      </p:sp>
+      <p:sp>
+        <p:nvSpPr>
+          <p:cNvPr id="7" name="Left placeholder"/>
+          <p:cNvSpPr/>
+          <p:nvPr>
+            <p:ph idx="105" type="body" hasCustomPrompt="1"/>
+          </p:nvPr>
+        </p:nvSpPr>
+        <p:spPr>
+          <a:xfrm>
+            <a:off x="548640" y="2103120"/>
+            <a:ext cx="5394960" cy="3931920"/>
+          </a:xfrm>
+          <a:prstGeom prst="rect">
+            <a:avLst/>
+          </a:prstGeom>
+          <a:noFill/>
+          <a:ln/>
+        </p:spPr>
+        <p:txBody>
+          <a:bodyPr wrap="square" lIns="0" tIns="0" rIns="0" bIns="0" rtlCol="0" anchor="t"/>
+          <a:lstStyle>
+            <a:lvl1pPr algn="l" marL="228600" indent="-228600">
+              <a:spcAft>
+                <a:spcPts val="800"/>
+              </a:spcAft>
+              <a:buSzPct val="100000"/>
+              <a:buChar char="•"/>
+              <a:defRPr lang="en-US" sz="1600" dirty="0">
+                <a:solidFill>
+                  <a:schemeClr val="tx1"/>
+                </a:solidFill>
+                <a:latin typeface="Arial" pitchFamily="34" charset="0"/>
+                <a:ea typeface="Arial" pitchFamily="34" charset="-122"/>
+                <a:cs typeface="Arial" pitchFamily="34" charset="-120"/>
+              </a:defRPr>
+            </a:lvl1pPr>
+          </a:lstStyle>
+          <a:p>
+            <a:pPr algn="l" marL="228600" indent="-228600">
+              <a:spcAft>
+                <a:spcPts val="800"/>
+              </a:spcAft>
+              <a:buSzPct val="100000"/>
+              <a:buChar char="•"/>
+            </a:pPr>
+            <a:r>
+              <a:rPr lang="en-US" sz="1600" dirty="0">
+                <a:solidFill>
+                  <a:schemeClr val="tx1"/>
+                </a:solidFill>
+                <a:latin typeface="Arial" pitchFamily="34" charset="0"/>
+                <a:ea typeface="Arial" pitchFamily="34" charset="-122"/>
+                <a:cs typeface="Arial" pitchFamily="34" charset="-120"/>
+              </a:rPr>
+              <a:t>Add points</a:t>
+            </a:r>
+            <a:endParaRPr lang="en-US" sz="1600" dirty="0"/>
+          </a:p>
+        </p:txBody>
+      </p:sp>
+      <p:sp>
+        <p:nvSpPr>
+          <p:cNvPr id="8" name="HeadingRight placeholder"/>
+          <p:cNvSpPr/>
+          <p:nvPr>
+            <p:ph idx="106" type="body" hasCustomPrompt="1"/>
+          </p:nvPr>
+        </p:nvSpPr>
+        <p:spPr>
+          <a:xfrm>
+            <a:off x="6245352" y="1600200"/>
+            <a:ext cx="5394960" cy="365760"/>
+          </a:xfrm>
+          <a:prstGeom prst="rect">
+            <a:avLst/>
+          </a:prstGeom>
+          <a:noFill/>
+          <a:ln/>
+        </p:spPr>
+        <p:txBody>
+          <a:bodyPr wrap="square" lIns="0" tIns="0" rIns="0" bIns="0" rtlCol="0" anchor="t"/>
+          <a:lstStyle>
+            <a:lvl1pPr algn="l" indent="0" marL="0">
+              <a:buNone/>
+              <a:defRPr lang="en-US" sz="1600" b="1" dirty="0">
+                <a:solidFill>
+                  <a:schemeClr val="accent1"/>
+                </a:solidFill>
+                <a:latin typeface="Arial" pitchFamily="34" charset="0"/>
+                <a:ea typeface="Arial" pitchFamily="34" charset="-122"/>
+                <a:cs typeface="Arial" pitchFamily="34" charset="-120"/>
+              </a:defRPr>
+            </a:lvl1pPr>
+          </a:lstStyle>
+          <a:p>
+            <a:pPr algn="l" indent="0" marL="0">
+              <a:buNone/>
+            </a:pPr>
+            <a:r>
+              <a:rPr lang="en-US" sz="1600" b="1" dirty="0">
+                <a:solidFill>
+                  <a:schemeClr val="accent1"/>
+                </a:solidFill>
+                <a:latin typeface="Arial" pitchFamily="34" charset="0"/>
+                <a:ea typeface="Arial" pitchFamily="34" charset="-122"/>
+                <a:cs typeface="Arial" pitchFamily="34" charset="-120"/>
+              </a:rPr>
+              <a:t>Right heading</a:t>
+            </a:r>
+            <a:endParaRPr lang="en-US" sz="1600" dirty="0"/>
+          </a:p>
+        </p:txBody>
+      </p:sp>
+      <p:sp>
+        <p:nvSpPr>
+          <p:cNvPr id="9" name="Right placeholder"/>
+          <p:cNvSpPr/>
+          <p:nvPr>
+            <p:ph idx="107" type="body" hasCustomPrompt="1"/>
+          </p:nvPr>
+        </p:nvSpPr>
+        <p:spPr>
+          <a:xfrm>
+            <a:off x="6245352" y="2103120"/>
+            <a:ext cx="5394960" cy="3931920"/>
+          </a:xfrm>
+          <a:prstGeom prst="rect">
+            <a:avLst/>
+          </a:prstGeom>
+          <a:noFill/>
+          <a:ln/>
+        </p:spPr>
+        <p:txBody>
+          <a:bodyPr wrap="square" lIns="0" tIns="0" rIns="0" bIns="0" rtlCol="0" anchor="t"/>
+          <a:lstStyle>
+            <a:lvl1pPr algn="l" marL="228600" indent="-228600">
+              <a:spcAft>
+                <a:spcPts val="800"/>
+              </a:spcAft>
+              <a:buSzPct val="100000"/>
+              <a:buChar char="•"/>
+              <a:defRPr lang="en-US" sz="1600" dirty="0">
+                <a:solidFill>
+                  <a:schemeClr val="tx1"/>
+                </a:solidFill>
+                <a:latin typeface="Arial" pitchFamily="34" charset="0"/>
+                <a:ea typeface="Arial" pitchFamily="34" charset="-122"/>
+                <a:cs typeface="Arial" pitchFamily="34" charset="-120"/>
+              </a:defRPr>
+            </a:lvl1pPr>
+          </a:lstStyle>
+          <a:p>
+            <a:pPr algn="l" marL="228600" indent="-228600">
+              <a:spcAft>
+                <a:spcPts val="800"/>
+              </a:spcAft>
+              <a:buSzPct val="100000"/>
+              <a:buChar char="•"/>
+            </a:pPr>
+            <a:r>
+              <a:rPr lang="en-US" sz="1600" dirty="0">
+                <a:solidFill>
+                  <a:schemeClr val="tx1"/>
+                </a:solidFill>
+                <a:latin typeface="Arial" pitchFamily="34" charset="0"/>
+                <a:ea typeface="Arial" pitchFamily="34" charset="-122"/>
+                <a:cs typeface="Arial" pitchFamily="34" charset="-120"/>
+              </a:rPr>
+              <a:t>Add points</a:t>
+            </a:r>
+            <a:endParaRPr lang="en-US" sz="1600" dirty="0"/>
+          </a:p>
+        </p:txBody>
+      </p:sp>
+      <p:sp>
+        <p:nvSpPr>
+          <p:cNvPr id="25" name="Slide Number Placeholder 0"/>
+          <p:cNvSpPr>
+            <a:spLocks noGrp="1"/>
+          </p:cNvSpPr>
+          <p:nvPr>
+            <p:ph type="sldNum" sz="quarter" idx="4294967295"/>
+          </p:nvPr>
+        </p:nvSpPr>
+        <p:spPr>
+          <a:xfrm>
+            <a:off x="11274552" y="6309360"/>
+            <a:ext cx="365760" cy="274320"/>
+          </a:xfrm>
+          <a:prstGeom prst="rect">
+            <a:avLst/>
+          </a:prstGeom>
+          <a:extLst>
+            <a:ext uri="{C572A759-6A51-4108-AA02-DFA0A04FC94B}">
+              <ma14:wrappingTextBoxFlag xmlns:ma14="http://schemas.microsoft.com/office/mac/drawingml/2011/main" val="0"/>
+            </a:ext>
+          </a:extLst>
+        </p:spPr>
+        <p:txBody>
+          <a:bodyPr anchor="ctr"/>
+          <a:lstStyle>
+            <a:lvl1pPr>
+              <a:defRPr sz="1000">
+                <a:solidFill>
+                  <a:schemeClr val="tx2"/>
+                </a:solidFill>
+              </a:defRPr>
+            </a:lvl1pPr>
+          </a:lstStyle>
+          <a:p>
+            <a:pPr algn="r"/>
+            <a:fld id="{F7021451-1387-4CA6-816F-3879F97B5CBC}" type="slidenum">
+              <a:rPr b="0" lang="en-US"/>
+              <a:t>1005</a:t>
+            </a:fld>
+            <a:endParaRPr lang="en-US"/>
+          </a:p>
+        </p:txBody>
+      </p:sp>
+    </p:spTree>
+  </p:cSld>
+  <p:clrMapOvr>
+    <a:masterClrMapping/>
+  </p:clrMapOvr>
+</p:sldLayout>
+</file>
+
+<file path=ppt/slideLayouts/slideLayout6.xml><?xml version="1.0" encoding="utf-8"?>
+<p:sldLayout xmlns:a="http://schemas.openxmlformats.org/drawingml/2006/main" xmlns:r="http://schemas.openxmlformats.org/officeDocument/2006/relationships" xmlns:p="http://schemas.openxmlformats.org/presentationml/2006/main" preserve="1">
+  <p:cSld name="Content with key point">
+    <p:bg>
+      <p:bgPr>
+        <a:solidFill>
+          <a:schemeClr val="bg1"/>
+        </a:solidFill>
+      </p:bgPr>
+    </p:bg>
+    <p:spTree>
+      <p:nvGrpSpPr>
+        <p:cNvPr id="1" name=""/>
+        <p:cNvGrpSpPr/>
+        <p:nvPr/>
+      </p:nvGrpSpPr>
+      <p:grpSpPr>
+        <a:xfrm>
+          <a:off x="0" y="0"/>
+          <a:ext cx="0" cy="0"/>
+          <a:chOff x="0" y="0"/>
+          <a:chExt cx="0" cy="0"/>
+        </a:xfrm>
+      </p:grpSpPr>
+      <p:sp>
+        <p:nvSpPr>
+          <p:cNvPr id="2" name="Title placeholder"/>
+          <p:cNvSpPr/>
+          <p:nvPr>
+            <p:ph idx="100" type="title" hasCustomPrompt="1"/>
+          </p:nvPr>
+        </p:nvSpPr>
+        <p:spPr>
+          <a:xfrm>
+            <a:off x="548640" y="384048"/>
+            <a:ext cx="8595360" cy="868680"/>
+          </a:xfrm>
+          <a:prstGeom prst="rect">
+            <a:avLst/>
+          </a:prstGeom>
+          <a:noFill/>
+          <a:ln/>
+        </p:spPr>
+        <p:txBody>
+          <a:bodyPr wrap="square" lIns="0" tIns="0" rIns="0" bIns="0" rtlCol="0" anchor="t"/>
+          <a:lstStyle>
+            <a:lvl1pPr algn="l" indent="0" marL="0">
+              <a:buNone/>
+              <a:defRPr lang="en-US" sz="2800" b="1" dirty="0">
+                <a:solidFill>
+                  <a:schemeClr val="tx1"/>
+                </a:solidFill>
+                <a:latin typeface="Arial" pitchFamily="34" charset="0"/>
+                <a:ea typeface="Arial" pitchFamily="34" charset="-122"/>
+                <a:cs typeface="Arial" pitchFamily="34" charset="-120"/>
+              </a:defRPr>
+            </a:lvl1pPr>
+          </a:lstStyle>
+          <a:p>
+            <a:pPr algn="l" indent="0" marL="0">
+              <a:buNone/>
+            </a:pPr>
+            <a:r>
+              <a:rPr lang="en-US" sz="2800" b="1" dirty="0">
+                <a:solidFill>
+                  <a:schemeClr val="tx1"/>
+                </a:solidFill>
+                <a:latin typeface="Arial" pitchFamily="34" charset="0"/>
+                <a:ea typeface="Arial" pitchFamily="34" charset="-122"/>
+                <a:cs typeface="Arial" pitchFamily="34" charset="-120"/>
+              </a:rPr>
+              <a:t>Slide title: say the point, not the topic</a:t>
+            </a:r>
+            <a:endParaRPr lang="en-US" sz="2800" dirty="0"/>
+          </a:p>
+        </p:txBody>
+      </p:sp>
+      <p:sp>
+        <p:nvSpPr>
+          <p:cNvPr id="3" name="Tag placeholder"/>
+          <p:cNvSpPr/>
+          <p:nvPr>
+            <p:ph idx="101" type="body" hasCustomPrompt="1"/>
+          </p:nvPr>
+        </p:nvSpPr>
+        <p:spPr>
+          <a:xfrm>
+            <a:off x="9326880" y="457200"/>
+            <a:ext cx="2313432" cy="274320"/>
+          </a:xfrm>
+          <a:prstGeom prst="rect">
+            <a:avLst/>
+          </a:prstGeom>
+          <a:noFill/>
+          <a:ln/>
+        </p:spPr>
+        <p:txBody>
+          <a:bodyPr wrap="square" lIns="0" tIns="0" rIns="0" bIns="0" rtlCol="0" anchor="t"/>
+          <a:lstStyle>
+            <a:lvl1pPr algn="r" indent="0" marL="0">
+              <a:buNone/>
+              <a:defRPr lang="en-US" sz="1000" b="1" spc="150" kern="0" dirty="0">
+                <a:solidFill>
+                  <a:schemeClr val="accent1"/>
+                </a:solidFill>
+                <a:latin typeface="Arial" pitchFamily="34" charset="0"/>
+                <a:ea typeface="Arial" pitchFamily="34" charset="-122"/>
+                <a:cs typeface="Arial" pitchFamily="34" charset="-120"/>
+              </a:defRPr>
+            </a:lvl1pPr>
+          </a:lstStyle>
+          <a:p>
+            <a:pPr algn="r" indent="0" marL="0">
+              <a:buNone/>
+            </a:pPr>
+            <a:r>
+              <a:rPr lang="en-US" sz="1000" b="1" spc="150" kern="0" dirty="0">
+                <a:solidFill>
+                  <a:schemeClr val="accent1"/>
+                </a:solidFill>
+                <a:latin typeface="Arial" pitchFamily="34" charset="0"/>
+                <a:ea typeface="Arial" pitchFamily="34" charset="-122"/>
+                <a:cs typeface="Arial" pitchFamily="34" charset="-120"/>
+              </a:rPr>
+              <a:t>PART OR TOPIC</a:t>
+            </a:r>
+            <a:endParaRPr lang="en-US" sz="1000" dirty="0"/>
+          </a:p>
+        </p:txBody>
+      </p:sp>
+      <p:sp>
+        <p:nvSpPr>
+          <p:cNvPr id="4" name="Source placeholder"/>
+          <p:cNvSpPr/>
+          <p:nvPr>
+            <p:ph idx="102" type="body" hasCustomPrompt="1"/>
+          </p:nvPr>
+        </p:nvSpPr>
+        <p:spPr>
+          <a:xfrm>
+            <a:off x="548640" y="6309360"/>
+            <a:ext cx="5120640" cy="274320"/>
+          </a:xfrm>
+          <a:prstGeom prst="rect">
+            <a:avLst/>
+          </a:prstGeom>
+          <a:noFill/>
+          <a:ln/>
+        </p:spPr>
+        <p:txBody>
+          <a:bodyPr wrap="square" lIns="0" tIns="0" rIns="0" bIns="0" rtlCol="0" anchor="ctr"/>
+          <a:lstStyle>
+            <a:lvl1pPr algn="l" indent="0" marL="0">
+              <a:buNone/>
+              <a:defRPr lang="en-US" sz="1000" dirty="0">
+                <a:solidFill>
+                  <a:schemeClr val="tx2"/>
+                </a:solidFill>
+                <a:latin typeface="Arial" pitchFamily="34" charset="0"/>
+                <a:ea typeface="Arial" pitchFamily="34" charset="-122"/>
+                <a:cs typeface="Arial" pitchFamily="34" charset="-120"/>
+              </a:defRPr>
+            </a:lvl1pPr>
+          </a:lstStyle>
+          <a:p>
+            <a:pPr algn="l" indent="0" marL="0">
+              <a:buNone/>
+            </a:pPr>
+            <a:r>
+              <a:rPr lang="en-US" sz="1000" dirty="0">
+                <a:solidFill>
+                  <a:schemeClr val="tx2"/>
+                </a:solidFill>
+                <a:latin typeface="Arial" pitchFamily="34" charset="0"/>
+                <a:ea typeface="Arial" pitchFamily="34" charset="-122"/>
+                <a:cs typeface="Arial" pitchFamily="34" charset="-120"/>
+              </a:rPr>
+              <a:t>Source: cite the legislation, guidance, policy section or list entry</a:t>
+            </a:r>
+            <a:endParaRPr lang="en-US" sz="1000" dirty="0"/>
+          </a:p>
+        </p:txBody>
+      </p:sp>
+      <p:sp>
+        <p:nvSpPr>
+          <p:cNvPr id="5" name="Text 0"/>
+          <p:cNvSpPr/>
+          <p:nvPr/>
+        </p:nvSpPr>
+        <p:spPr>
+          <a:xfrm>
+            <a:off x="5852160" y="6309360"/>
+            <a:ext cx="5303520" cy="274320"/>
+          </a:xfrm>
+          <a:prstGeom prst="rect">
+            <a:avLst/>
+          </a:prstGeom>
+          <a:noFill/>
+          <a:ln/>
+        </p:spPr>
+        <p:txBody>
+          <a:bodyPr wrap="square" lIns="0" tIns="0" rIns="0" bIns="0" rtlCol="0" anchor="ctr"/>
+          <a:lstStyle/>
+          <a:p>
+            <a:pPr algn="r" indent="0" marL="0">
+              <a:buNone/>
+            </a:pPr>
+            <a:r>
+              <a:rPr lang="en-US" sz="1000" dirty="0">
+                <a:solidFill>
+                  <a:schemeClr val="tx2"/>
+                </a:solidFill>
+              </a:rPr>
+              <a:t>Checkout.com · Global Screening · Draft for Compliance sign-off</a:t>
+            </a:r>
+            <a:endParaRPr lang="en-US" sz="1000" dirty="0"/>
+          </a:p>
+        </p:txBody>
+      </p:sp>
+      <p:sp>
+        <p:nvSpPr>
+          <p:cNvPr id="6" name="Body placeholder"/>
+          <p:cNvSpPr/>
+          <p:nvPr>
+            <p:ph idx="104" type="body" hasCustomPrompt="1"/>
+          </p:nvPr>
+        </p:nvSpPr>
+        <p:spPr>
+          <a:xfrm>
+            <a:off x="548640" y="1600200"/>
+            <a:ext cx="6858000" cy="4434840"/>
+          </a:xfrm>
+          <a:prstGeom prst="rect">
+            <a:avLst/>
+          </a:prstGeom>
+          <a:noFill/>
+          <a:ln/>
+        </p:spPr>
+        <p:txBody>
+          <a:bodyPr wrap="square" lIns="0" tIns="0" rIns="0" bIns="0" rtlCol="0" anchor="t"/>
+          <a:lstStyle>
+            <a:lvl1pPr algn="l" marL="228600" indent="-228600">
+              <a:spcAft>
+                <a:spcPts val="800"/>
+              </a:spcAft>
+              <a:buSzPct val="100000"/>
+              <a:buChar char="•"/>
+              <a:defRPr lang="en-US" sz="1800" dirty="0">
+                <a:solidFill>
+                  <a:schemeClr val="tx1"/>
+                </a:solidFill>
+                <a:latin typeface="Arial" pitchFamily="34" charset="0"/>
+                <a:ea typeface="Arial" pitchFamily="34" charset="-122"/>
+                <a:cs typeface="Arial" pitchFamily="34" charset="-120"/>
+              </a:defRPr>
+            </a:lvl1pPr>
+          </a:lstStyle>
+          <a:p>
+            <a:pPr algn="l" marL="228600" indent="-228600">
+              <a:spcAft>
+                <a:spcPts val="800"/>
+              </a:spcAft>
+              <a:buSzPct val="100000"/>
+              <a:buChar char="•"/>
+            </a:pPr>
+            <a:r>
+              <a:rPr lang="en-US" sz="1800" dirty="0">
+                <a:solidFill>
+                  <a:schemeClr val="tx1"/>
+                </a:solidFill>
+                <a:latin typeface="Arial" pitchFamily="34" charset="0"/>
+                <a:ea typeface="Arial" pitchFamily="34" charset="-122"/>
+                <a:cs typeface="Arial" pitchFamily="34" charset="-120"/>
+              </a:rPr>
+              <a:t>Add points</a:t>
+            </a:r>
+            <a:endParaRPr lang="en-US" sz="1800" dirty="0"/>
+          </a:p>
+        </p:txBody>
+      </p:sp>
+      <p:sp>
+        <p:nvSpPr>
+          <p:cNvPr id="7" name="Text 1"/>
+          <p:cNvSpPr/>
+          <p:nvPr/>
+        </p:nvSpPr>
+        <p:spPr>
+          <a:xfrm>
+            <a:off x="7818120" y="1600200"/>
+            <a:ext cx="3822192" cy="4434840"/>
+          </a:xfrm>
+          <a:prstGeom prst="roundRect">
+            <a:avLst>
+              <a:gd name="adj" fmla="val 2392"/>
+            </a:avLst>
+          </a:prstGeom>
+          <a:solidFill>
+            <a:schemeClr val="accent1">
+              <a:alpha val="10000"/>
+            </a:schemeClr>
+          </a:solidFill>
+          <a:ln/>
+        </p:spPr>
+        <p:txBody>
+          <a:bodyPr wrap="square" rtlCol="0" anchor="ctr"/>
+          <a:lstStyle/>
+          <a:p>
+            <a:pPr indent="0" marL="0">
+              <a:buNone/>
+            </a:pPr>
+            <a:endParaRPr lang="en-US" dirty="0"/>
+          </a:p>
+        </p:txBody>
+      </p:sp>
+      <p:sp>
+        <p:nvSpPr>
+          <p:cNvPr id="8" name="KeyLabel placeholder"/>
+          <p:cNvSpPr/>
+          <p:nvPr>
+            <p:ph idx="106" type="body" hasCustomPrompt="1"/>
+          </p:nvPr>
+        </p:nvSpPr>
+        <p:spPr>
+          <a:xfrm>
+            <a:off x="8092440" y="1874520"/>
+            <a:ext cx="3291840" cy="274320"/>
+          </a:xfrm>
+          <a:prstGeom prst="rect">
+            <a:avLst/>
+          </a:prstGeom>
+          <a:noFill/>
+          <a:ln/>
+        </p:spPr>
+        <p:txBody>
+          <a:bodyPr wrap="square" lIns="0" tIns="0" rIns="0" bIns="0" rtlCol="0" anchor="t"/>
+          <a:lstStyle>
+            <a:lvl1pPr algn="l" indent="0" marL="0">
+              <a:buNone/>
+              <a:defRPr lang="en-US" sz="1100" b="1" spc="200" kern="0" dirty="0">
+                <a:solidFill>
+                  <a:schemeClr val="accent1"/>
+                </a:solidFill>
+                <a:latin typeface="Arial" pitchFamily="34" charset="0"/>
+                <a:ea typeface="Arial" pitchFamily="34" charset="-122"/>
+                <a:cs typeface="Arial" pitchFamily="34" charset="-120"/>
+              </a:defRPr>
+            </a:lvl1pPr>
+          </a:lstStyle>
+          <a:p>
+            <a:pPr algn="l" indent="0" marL="0">
+              <a:buNone/>
+            </a:pPr>
+            <a:r>
+              <a:rPr lang="en-US" sz="1100" b="1" spc="200" kern="0" dirty="0">
+                <a:solidFill>
+                  <a:schemeClr val="accent1"/>
+                </a:solidFill>
+                <a:latin typeface="Arial" pitchFamily="34" charset="0"/>
+                <a:ea typeface="Arial" pitchFamily="34" charset="-122"/>
+                <a:cs typeface="Arial" pitchFamily="34" charset="-120"/>
+              </a:rPr>
+              <a:t>KEY POINT</a:t>
+            </a:r>
+            <a:endParaRPr lang="en-US" sz="1100" dirty="0"/>
+          </a:p>
+        </p:txBody>
+      </p:sp>
+      <p:sp>
+        <p:nvSpPr>
+          <p:cNvPr id="9" name="Key placeholder"/>
+          <p:cNvSpPr/>
+          <p:nvPr>
+            <p:ph idx="107" type="body" hasCustomPrompt="1"/>
+          </p:nvPr>
+        </p:nvSpPr>
+        <p:spPr>
+          <a:xfrm>
+            <a:off x="8092440" y="2286000"/>
+            <a:ext cx="3291840" cy="3474720"/>
+          </a:xfrm>
+          <a:prstGeom prst="rect">
+            <a:avLst/>
+          </a:prstGeom>
+          <a:noFill/>
+          <a:ln/>
+        </p:spPr>
+        <p:txBody>
+          <a:bodyPr wrap="square" lIns="0" tIns="0" rIns="0" bIns="0" rtlCol="0" anchor="t"/>
+          <a:lstStyle>
+            <a:lvl1pPr algn="l" indent="0" marL="0">
+              <a:buNone/>
+              <a:defRPr lang="en-US" sz="2200" b="1" dirty="0">
+                <a:solidFill>
+                  <a:schemeClr val="tx1"/>
+                </a:solidFill>
+                <a:latin typeface="Arial" pitchFamily="34" charset="0"/>
+                <a:ea typeface="Arial" pitchFamily="34" charset="-122"/>
+                <a:cs typeface="Arial" pitchFamily="34" charset="-120"/>
+              </a:defRPr>
+            </a:lvl1pPr>
+          </a:lstStyle>
+          <a:p>
+            <a:pPr algn="l" indent="0" marL="0">
+              <a:buNone/>
+            </a:pPr>
+            <a:r>
+              <a:rPr lang="en-US" sz="2200" b="1" dirty="0">
+                <a:solidFill>
+                  <a:schemeClr val="tx1"/>
+                </a:solidFill>
+                <a:latin typeface="Arial" pitchFamily="34" charset="0"/>
+                <a:ea typeface="Arial" pitchFamily="34" charset="-122"/>
+                <a:cs typeface="Arial" pitchFamily="34" charset="-120"/>
+              </a:rPr>
+              <a:t>The one thing the audience should remember from this slide</a:t>
+            </a:r>
+            <a:endParaRPr lang="en-US" sz="2200" dirty="0"/>
+          </a:p>
+        </p:txBody>
+      </p:sp>
+      <p:sp>
+        <p:nvSpPr>
+          <p:cNvPr id="25" name="Slide Number Placeholder 0"/>
+          <p:cNvSpPr>
+            <a:spLocks noGrp="1"/>
+          </p:cNvSpPr>
+          <p:nvPr>
+            <p:ph type="sldNum" sz="quarter" idx="4294967295"/>
+          </p:nvPr>
+        </p:nvSpPr>
+        <p:spPr>
+          <a:xfrm>
+            <a:off x="11274552" y="6309360"/>
+            <a:ext cx="365760" cy="274320"/>
+          </a:xfrm>
+          <a:prstGeom prst="rect">
+            <a:avLst/>
+          </a:prstGeom>
+          <a:extLst>
+            <a:ext uri="{C572A759-6A51-4108-AA02-DFA0A04FC94B}">
+              <ma14:wrappingTextBoxFlag xmlns:ma14="http://schemas.microsoft.com/office/mac/drawingml/2011/main" val="0"/>
+            </a:ext>
+          </a:extLst>
+        </p:spPr>
+        <p:txBody>
+          <a:bodyPr anchor="ctr"/>
+          <a:lstStyle>
+            <a:lvl1pPr>
+              <a:defRPr sz="1000">
+                <a:solidFill>
+                  <a:schemeClr val="tx2"/>
+                </a:solidFill>
+              </a:defRPr>
+            </a:lvl1pPr>
+          </a:lstStyle>
+          <a:p>
+            <a:pPr algn="r"/>
+            <a:fld id="{F7021451-1387-4CA6-816F-3879F97B5CBC}" type="slidenum">
+              <a:rPr b="0" lang="en-US"/>
+              <a:t>1006</a:t>
+            </a:fld>
+            <a:endParaRPr lang="en-US"/>
+          </a:p>
+        </p:txBody>
+      </p:sp>
+    </p:spTree>
+  </p:cSld>
+  <p:clrMapOvr>
+    <a:masterClrMapping/>
+  </p:clrMapOvr>
+</p:sldLayout>
+</file>
+
+<file path=ppt/slideLayouts/slideLayout7.xml><?xml version="1.0" encoding="utf-8"?>
+<p:sldLayout xmlns:a="http://schemas.openxmlformats.org/drawingml/2006/main" xmlns:r="http://schemas.openxmlformats.org/officeDocument/2006/relationships" xmlns:p="http://schemas.openxmlformats.org/presentationml/2006/main" preserve="1">
+  <p:cSld name="Key numbers">
+    <p:bg>
+      <p:bgPr>
+        <a:solidFill>
+          <a:schemeClr val="bg1"/>
+        </a:solidFill>
+      </p:bgPr>
+    </p:bg>
+    <p:spTree>
+      <p:nvGrpSpPr>
+        <p:cNvPr id="1" name=""/>
+        <p:cNvGrpSpPr/>
+        <p:nvPr/>
+      </p:nvGrpSpPr>
+      <p:grpSpPr>
+        <a:xfrm>
+          <a:off x="0" y="0"/>
+          <a:ext cx="0" cy="0"/>
+          <a:chOff x="0" y="0"/>
+          <a:chExt cx="0" cy="0"/>
+        </a:xfrm>
+      </p:grpSpPr>
+      <p:sp>
+        <p:nvSpPr>
+          <p:cNvPr id="2" name="Title placeholder"/>
+          <p:cNvSpPr/>
+          <p:nvPr>
+            <p:ph idx="100" type="title" hasCustomPrompt="1"/>
+          </p:nvPr>
+        </p:nvSpPr>
+        <p:spPr>
+          <a:xfrm>
+            <a:off x="548640" y="384048"/>
+            <a:ext cx="8595360" cy="868680"/>
+          </a:xfrm>
+          <a:prstGeom prst="rect">
+            <a:avLst/>
+          </a:prstGeom>
+          <a:noFill/>
+          <a:ln/>
+        </p:spPr>
+        <p:txBody>
+          <a:bodyPr wrap="square" lIns="0" tIns="0" rIns="0" bIns="0" rtlCol="0" anchor="t"/>
+          <a:lstStyle>
+            <a:lvl1pPr algn="l" indent="0" marL="0">
+              <a:buNone/>
+              <a:defRPr lang="en-US" sz="2800" b="1" dirty="0">
+                <a:solidFill>
+                  <a:schemeClr val="tx1"/>
+                </a:solidFill>
+                <a:latin typeface="Arial" pitchFamily="34" charset="0"/>
+                <a:ea typeface="Arial" pitchFamily="34" charset="-122"/>
+                <a:cs typeface="Arial" pitchFamily="34" charset="-120"/>
+              </a:defRPr>
+            </a:lvl1pPr>
+          </a:lstStyle>
+          <a:p>
+            <a:pPr algn="l" indent="0" marL="0">
+              <a:buNone/>
+            </a:pPr>
+            <a:r>
+              <a:rPr lang="en-US" sz="2800" b="1" dirty="0">
+                <a:solidFill>
+                  <a:schemeClr val="tx1"/>
+                </a:solidFill>
+                <a:latin typeface="Arial" pitchFamily="34" charset="0"/>
+                <a:ea typeface="Arial" pitchFamily="34" charset="-122"/>
+                <a:cs typeface="Arial" pitchFamily="34" charset="-120"/>
+              </a:rPr>
+              <a:t>Slide title: say the point, not the topic</a:t>
+            </a:r>
+            <a:endParaRPr lang="en-US" sz="2800" dirty="0"/>
+          </a:p>
+        </p:txBody>
+      </p:sp>
+      <p:sp>
+        <p:nvSpPr>
+          <p:cNvPr id="3" name="Tag placeholder"/>
+          <p:cNvSpPr/>
+          <p:nvPr>
+            <p:ph idx="101" type="body" hasCustomPrompt="1"/>
+          </p:nvPr>
+        </p:nvSpPr>
+        <p:spPr>
+          <a:xfrm>
+            <a:off x="9326880" y="457200"/>
+            <a:ext cx="2313432" cy="274320"/>
+          </a:xfrm>
+          <a:prstGeom prst="rect">
+            <a:avLst/>
+          </a:prstGeom>
+          <a:noFill/>
+          <a:ln/>
+        </p:spPr>
+        <p:txBody>
+          <a:bodyPr wrap="square" lIns="0" tIns="0" rIns="0" bIns="0" rtlCol="0" anchor="t"/>
+          <a:lstStyle>
+            <a:lvl1pPr algn="r" indent="0" marL="0">
+              <a:buNone/>
+              <a:defRPr lang="en-US" sz="1000" b="1" spc="150" kern="0" dirty="0">
+                <a:solidFill>
+                  <a:schemeClr val="accent1"/>
+                </a:solidFill>
+                <a:latin typeface="Arial" pitchFamily="34" charset="0"/>
+                <a:ea typeface="Arial" pitchFamily="34" charset="-122"/>
+                <a:cs typeface="Arial" pitchFamily="34" charset="-120"/>
+              </a:defRPr>
+            </a:lvl1pPr>
+          </a:lstStyle>
+          <a:p>
+            <a:pPr algn="r" indent="0" marL="0">
+              <a:buNone/>
+            </a:pPr>
+            <a:r>
+              <a:rPr lang="en-US" sz="1000" b="1" spc="150" kern="0" dirty="0">
+                <a:solidFill>
+                  <a:schemeClr val="accent1"/>
+                </a:solidFill>
+                <a:latin typeface="Arial" pitchFamily="34" charset="0"/>
+                <a:ea typeface="Arial" pitchFamily="34" charset="-122"/>
+                <a:cs typeface="Arial" pitchFamily="34" charset="-120"/>
+              </a:rPr>
+              <a:t>PART OR TOPIC</a:t>
+            </a:r>
+            <a:endParaRPr lang="en-US" sz="1000" dirty="0"/>
+          </a:p>
+        </p:txBody>
+      </p:sp>
+      <p:sp>
+        <p:nvSpPr>
+          <p:cNvPr id="4" name="Source placeholder"/>
+          <p:cNvSpPr/>
+          <p:nvPr>
+            <p:ph idx="102" type="body" hasCustomPrompt="1"/>
+          </p:nvPr>
+        </p:nvSpPr>
+        <p:spPr>
+          <a:xfrm>
+            <a:off x="548640" y="6309360"/>
+            <a:ext cx="5120640" cy="274320"/>
+          </a:xfrm>
+          <a:prstGeom prst="rect">
+            <a:avLst/>
+          </a:prstGeom>
+          <a:noFill/>
+          <a:ln/>
+        </p:spPr>
+        <p:txBody>
+          <a:bodyPr wrap="square" lIns="0" tIns="0" rIns="0" bIns="0" rtlCol="0" anchor="ctr"/>
+          <a:lstStyle>
+            <a:lvl1pPr algn="l" indent="0" marL="0">
+              <a:buNone/>
+              <a:defRPr lang="en-US" sz="1000" dirty="0">
+                <a:solidFill>
+                  <a:schemeClr val="tx2"/>
+                </a:solidFill>
+                <a:latin typeface="Arial" pitchFamily="34" charset="0"/>
+                <a:ea typeface="Arial" pitchFamily="34" charset="-122"/>
+                <a:cs typeface="Arial" pitchFamily="34" charset="-120"/>
+              </a:defRPr>
+            </a:lvl1pPr>
+          </a:lstStyle>
+          <a:p>
+            <a:pPr algn="l" indent="0" marL="0">
+              <a:buNone/>
+            </a:pPr>
+            <a:r>
+              <a:rPr lang="en-US" sz="1000" dirty="0">
+                <a:solidFill>
+                  <a:schemeClr val="tx2"/>
+                </a:solidFill>
+                <a:latin typeface="Arial" pitchFamily="34" charset="0"/>
+                <a:ea typeface="Arial" pitchFamily="34" charset="-122"/>
+                <a:cs typeface="Arial" pitchFamily="34" charset="-120"/>
+              </a:rPr>
+              <a:t>Source: cite the legislation, guidance, policy section or list entry</a:t>
+            </a:r>
+            <a:endParaRPr lang="en-US" sz="1000" dirty="0"/>
+          </a:p>
+        </p:txBody>
+      </p:sp>
+      <p:sp>
+        <p:nvSpPr>
+          <p:cNvPr id="5" name="Text 0"/>
+          <p:cNvSpPr/>
+          <p:nvPr/>
+        </p:nvSpPr>
+        <p:spPr>
+          <a:xfrm>
+            <a:off x="5852160" y="6309360"/>
+            <a:ext cx="5303520" cy="274320"/>
+          </a:xfrm>
+          <a:prstGeom prst="rect">
+            <a:avLst/>
+          </a:prstGeom>
+          <a:noFill/>
+          <a:ln/>
+        </p:spPr>
+        <p:txBody>
+          <a:bodyPr wrap="square" lIns="0" tIns="0" rIns="0" bIns="0" rtlCol="0" anchor="ctr"/>
+          <a:lstStyle/>
+          <a:p>
+            <a:pPr algn="r" indent="0" marL="0">
+              <a:buNone/>
+            </a:pPr>
+            <a:r>
+              <a:rPr lang="en-US" sz="1000" dirty="0">
+                <a:solidFill>
+                  <a:schemeClr val="tx2"/>
+                </a:solidFill>
+              </a:rPr>
+              <a:t>Checkout.com · Global Screening · Draft for Compliance sign-off</a:t>
+            </a:r>
+            <a:endParaRPr lang="en-US" sz="1000" dirty="0"/>
+          </a:p>
+        </p:txBody>
+      </p:sp>
+      <p:sp>
+        <p:nvSpPr>
+          <p:cNvPr id="6" name="Shape 1"/>
+          <p:cNvSpPr/>
+          <p:nvPr/>
+        </p:nvSpPr>
+        <p:spPr>
+          <a:xfrm>
+            <a:off x="548640" y="1965960"/>
+            <a:ext cx="3575304" cy="0"/>
+          </a:xfrm>
+          <a:prstGeom prst="line">
+            <a:avLst/>
+          </a:prstGeom>
+          <a:noFill/>
+          <a:ln w="12700">
+            <a:solidFill>
+              <a:schemeClr val="accent6"/>
+            </a:solidFill>
+            <a:prstDash val="solid"/>
+          </a:ln>
+        </p:spPr>
+      </p:sp>
+      <p:sp>
+        <p:nvSpPr>
+          <p:cNvPr id="7" name="Number1 placeholder"/>
+          <p:cNvSpPr/>
+          <p:nvPr>
+            <p:ph idx="105" type="body" hasCustomPrompt="1"/>
+          </p:nvPr>
+        </p:nvSpPr>
+        <p:spPr>
+          <a:xfrm>
+            <a:off x="548640" y="2194560"/>
+            <a:ext cx="3575304" cy="1097280"/>
+          </a:xfrm>
+          <a:prstGeom prst="rect">
+            <a:avLst/>
+          </a:prstGeom>
+          <a:noFill/>
+          <a:ln/>
+        </p:spPr>
+        <p:txBody>
+          <a:bodyPr wrap="square" lIns="0" tIns="0" rIns="0" bIns="0" rtlCol="0" anchor="t"/>
+          <a:lstStyle>
+            <a:lvl1pPr algn="l" indent="0" marL="0">
+              <a:buNone/>
+              <a:defRPr lang="en-US" sz="5400" b="1" dirty="0">
+                <a:solidFill>
+                  <a:schemeClr val="accent1"/>
+                </a:solidFill>
+                <a:latin typeface="Arial" pitchFamily="34" charset="0"/>
+                <a:ea typeface="Arial" pitchFamily="34" charset="-122"/>
+                <a:cs typeface="Arial" pitchFamily="34" charset="-120"/>
+              </a:defRPr>
+            </a:lvl1pPr>
+          </a:lstStyle>
+          <a:p>
+            <a:pPr algn="l" indent="0" marL="0">
+              <a:buNone/>
+            </a:pPr>
+            <a:r>
+              <a:rPr lang="en-US" sz="5400" b="1" dirty="0">
+                <a:solidFill>
+                  <a:schemeClr val="accent1"/>
+                </a:solidFill>
+                <a:latin typeface="Arial" pitchFamily="34" charset="0"/>
+                <a:ea typeface="Arial" pitchFamily="34" charset="-122"/>
+                <a:cs typeface="Arial" pitchFamily="34" charset="-120"/>
+              </a:rPr>
+              <a:t>24h</a:t>
+            </a:r>
+            <a:endParaRPr lang="en-US" sz="5400" dirty="0"/>
+          </a:p>
+        </p:txBody>
+      </p:sp>
+      <p:sp>
+        <p:nvSpPr>
+          <p:cNvPr id="8" name="Label1 placeholder"/>
+          <p:cNvSpPr/>
+          <p:nvPr>
+            <p:ph idx="106" type="body" hasCustomPrompt="1"/>
+          </p:nvPr>
+        </p:nvSpPr>
+        <p:spPr>
+          <a:xfrm>
+            <a:off x="548640" y="3429000"/>
+            <a:ext cx="3291840" cy="1463040"/>
+          </a:xfrm>
+          <a:prstGeom prst="rect">
+            <a:avLst/>
+          </a:prstGeom>
+          <a:noFill/>
+          <a:ln/>
+        </p:spPr>
+        <p:txBody>
+          <a:bodyPr wrap="square" lIns="0" tIns="0" rIns="0" bIns="0" rtlCol="0" anchor="t"/>
+          <a:lstStyle>
+            <a:lvl1pPr algn="l" indent="0" marL="0">
+              <a:buNone/>
+              <a:defRPr lang="en-US" sz="1500" dirty="0">
+                <a:solidFill>
+                  <a:schemeClr val="tx2"/>
+                </a:solidFill>
+                <a:latin typeface="Arial" pitchFamily="34" charset="0"/>
+                <a:ea typeface="Arial" pitchFamily="34" charset="-122"/>
+                <a:cs typeface="Arial" pitchFamily="34" charset="-120"/>
+              </a:defRPr>
+            </a:lvl1pPr>
+          </a:lstStyle>
+          <a:p>
+            <a:pPr algn="l" indent="0" marL="0">
+              <a:buNone/>
+            </a:pPr>
+            <a:r>
+              <a:rPr lang="en-US" sz="1500" dirty="0">
+                <a:solidFill>
+                  <a:schemeClr val="tx2"/>
+                </a:solidFill>
+                <a:latin typeface="Arial" pitchFamily="34" charset="0"/>
+                <a:ea typeface="Arial" pitchFamily="34" charset="-122"/>
+                <a:cs typeface="Arial" pitchFamily="34" charset="-120"/>
+              </a:rPr>
+              <a:t>What the number means, and its source</a:t>
+            </a:r>
+            <a:endParaRPr lang="en-US" sz="1500" dirty="0"/>
+          </a:p>
+        </p:txBody>
+      </p:sp>
+      <p:sp>
+        <p:nvSpPr>
+          <p:cNvPr id="9" name="Shape 2"/>
+          <p:cNvSpPr/>
+          <p:nvPr/>
+        </p:nvSpPr>
+        <p:spPr>
+          <a:xfrm>
+            <a:off x="4306824" y="1965960"/>
+            <a:ext cx="3575304" cy="0"/>
+          </a:xfrm>
+          <a:prstGeom prst="line">
+            <a:avLst/>
+          </a:prstGeom>
+          <a:noFill/>
+          <a:ln w="12700">
+            <a:solidFill>
+              <a:schemeClr val="accent6"/>
+            </a:solidFill>
+            <a:prstDash val="solid"/>
+          </a:ln>
+        </p:spPr>
+      </p:sp>
+      <p:sp>
+        <p:nvSpPr>
+          <p:cNvPr id="10" name="Number2 placeholder"/>
+          <p:cNvSpPr/>
+          <p:nvPr>
+            <p:ph idx="108" type="body" hasCustomPrompt="1"/>
+          </p:nvPr>
+        </p:nvSpPr>
+        <p:spPr>
+          <a:xfrm>
+            <a:off x="4306824" y="2194560"/>
+            <a:ext cx="3575304" cy="1097280"/>
+          </a:xfrm>
+          <a:prstGeom prst="rect">
+            <a:avLst/>
+          </a:prstGeom>
+          <a:noFill/>
+          <a:ln/>
+        </p:spPr>
+        <p:txBody>
+          <a:bodyPr wrap="square" lIns="0" tIns="0" rIns="0" bIns="0" rtlCol="0" anchor="t"/>
+          <a:lstStyle>
+            <a:lvl1pPr algn="l" indent="0" marL="0">
+              <a:buNone/>
+              <a:defRPr lang="en-US" sz="5400" b="1" dirty="0">
+                <a:solidFill>
+                  <a:schemeClr val="accent1"/>
+                </a:solidFill>
+                <a:latin typeface="Arial" pitchFamily="34" charset="0"/>
+                <a:ea typeface="Arial" pitchFamily="34" charset="-122"/>
+                <a:cs typeface="Arial" pitchFamily="34" charset="-120"/>
+              </a:defRPr>
+            </a:lvl1pPr>
+          </a:lstStyle>
+          <a:p>
+            <a:pPr algn="l" indent="0" marL="0">
+              <a:buNone/>
+            </a:pPr>
+            <a:r>
+              <a:rPr lang="en-US" sz="5400" b="1" dirty="0">
+                <a:solidFill>
+                  <a:schemeClr val="accent1"/>
+                </a:solidFill>
+                <a:latin typeface="Arial" pitchFamily="34" charset="0"/>
+                <a:ea typeface="Arial" pitchFamily="34" charset="-122"/>
+                <a:cs typeface="Arial" pitchFamily="34" charset="-120"/>
+              </a:rPr>
+              <a:t>3</a:t>
+            </a:r>
+            <a:endParaRPr lang="en-US" sz="5400" dirty="0"/>
+          </a:p>
+        </p:txBody>
+      </p:sp>
+      <p:sp>
+        <p:nvSpPr>
+          <p:cNvPr id="11" name="Label2 placeholder"/>
+          <p:cNvSpPr/>
+          <p:nvPr>
+            <p:ph idx="109" type="body" hasCustomPrompt="1"/>
+          </p:nvPr>
+        </p:nvSpPr>
+        <p:spPr>
+          <a:xfrm>
+            <a:off x="4306824" y="3429000"/>
+            <a:ext cx="3291840" cy="1463040"/>
+          </a:xfrm>
+          <a:prstGeom prst="rect">
+            <a:avLst/>
+          </a:prstGeom>
+          <a:noFill/>
+          <a:ln/>
+        </p:spPr>
+        <p:txBody>
+          <a:bodyPr wrap="square" lIns="0" tIns="0" rIns="0" bIns="0" rtlCol="0" anchor="t"/>
+          <a:lstStyle>
+            <a:lvl1pPr algn="l" indent="0" marL="0">
+              <a:buNone/>
+              <a:defRPr lang="en-US" sz="1500" dirty="0">
+                <a:solidFill>
+                  <a:schemeClr val="tx2"/>
+                </a:solidFill>
+                <a:latin typeface="Arial" pitchFamily="34" charset="0"/>
+                <a:ea typeface="Arial" pitchFamily="34" charset="-122"/>
+                <a:cs typeface="Arial" pitchFamily="34" charset="-120"/>
+              </a:defRPr>
+            </a:lvl1pPr>
+          </a:lstStyle>
+          <a:p>
+            <a:pPr algn="l" indent="0" marL="0">
+              <a:buNone/>
+            </a:pPr>
+            <a:r>
+              <a:rPr lang="en-US" sz="1500" dirty="0">
+                <a:solidFill>
+                  <a:schemeClr val="tx2"/>
+                </a:solidFill>
+                <a:latin typeface="Arial" pitchFamily="34" charset="0"/>
+                <a:ea typeface="Arial" pitchFamily="34" charset="-122"/>
+                <a:cs typeface="Arial" pitchFamily="34" charset="-120"/>
+              </a:rPr>
+              <a:t>What the number means, and its source</a:t>
+            </a:r>
+            <a:endParaRPr lang="en-US" sz="1500" dirty="0"/>
+          </a:p>
+        </p:txBody>
+      </p:sp>
+      <p:sp>
+        <p:nvSpPr>
+          <p:cNvPr id="12" name="Shape 3"/>
+          <p:cNvSpPr/>
+          <p:nvPr/>
+        </p:nvSpPr>
+        <p:spPr>
+          <a:xfrm>
+            <a:off x="8065008" y="1965960"/>
+            <a:ext cx="3575304" cy="0"/>
+          </a:xfrm>
+          <a:prstGeom prst="line">
+            <a:avLst/>
+          </a:prstGeom>
+          <a:noFill/>
+          <a:ln w="12700">
+            <a:solidFill>
+              <a:schemeClr val="accent6"/>
+            </a:solidFill>
+            <a:prstDash val="solid"/>
+          </a:ln>
+        </p:spPr>
+      </p:sp>
+      <p:sp>
+        <p:nvSpPr>
+          <p:cNvPr id="13" name="Number3 placeholder"/>
+          <p:cNvSpPr/>
+          <p:nvPr>
+            <p:ph idx="111" type="body" hasCustomPrompt="1"/>
+          </p:nvPr>
+        </p:nvSpPr>
+        <p:spPr>
+          <a:xfrm>
+            <a:off x="8065008" y="2194560"/>
+            <a:ext cx="3575304" cy="1097280"/>
+          </a:xfrm>
+          <a:prstGeom prst="rect">
+            <a:avLst/>
+          </a:prstGeom>
+          <a:noFill/>
+          <a:ln/>
+        </p:spPr>
+        <p:txBody>
+          <a:bodyPr wrap="square" lIns="0" tIns="0" rIns="0" bIns="0" rtlCol="0" anchor="t"/>
+          <a:lstStyle>
+            <a:lvl1pPr algn="l" indent="0" marL="0">
+              <a:buNone/>
+              <a:defRPr lang="en-US" sz="5400" b="1" dirty="0">
+                <a:solidFill>
+                  <a:schemeClr val="accent1"/>
+                </a:solidFill>
+                <a:latin typeface="Arial" pitchFamily="34" charset="0"/>
+                <a:ea typeface="Arial" pitchFamily="34" charset="-122"/>
+                <a:cs typeface="Arial" pitchFamily="34" charset="-120"/>
+              </a:defRPr>
+            </a:lvl1pPr>
+          </a:lstStyle>
+          <a:p>
+            <a:pPr algn="l" indent="0" marL="0">
+              <a:buNone/>
+            </a:pPr>
+            <a:r>
+              <a:rPr lang="en-US" sz="5400" b="1" dirty="0">
+                <a:solidFill>
+                  <a:schemeClr val="accent1"/>
+                </a:solidFill>
+                <a:latin typeface="Arial" pitchFamily="34" charset="0"/>
+                <a:ea typeface="Arial" pitchFamily="34" charset="-122"/>
+                <a:cs typeface="Arial" pitchFamily="34" charset="-120"/>
+              </a:rPr>
+              <a:t>100%</a:t>
+            </a:r>
+            <a:endParaRPr lang="en-US" sz="5400" dirty="0"/>
+          </a:p>
+        </p:txBody>
+      </p:sp>
+      <p:sp>
+        <p:nvSpPr>
+          <p:cNvPr id="14" name="Label3 placeholder"/>
+          <p:cNvSpPr/>
+          <p:nvPr>
+            <p:ph idx="112" type="body" hasCustomPrompt="1"/>
+          </p:nvPr>
+        </p:nvSpPr>
+        <p:spPr>
+          <a:xfrm>
+            <a:off x="8065008" y="3429000"/>
+            <a:ext cx="3291840" cy="1463040"/>
+          </a:xfrm>
+          <a:prstGeom prst="rect">
+            <a:avLst/>
+          </a:prstGeom>
+          <a:noFill/>
+          <a:ln/>
+        </p:spPr>
+        <p:txBody>
+          <a:bodyPr wrap="square" lIns="0" tIns="0" rIns="0" bIns="0" rtlCol="0" anchor="t"/>
+          <a:lstStyle>
+            <a:lvl1pPr algn="l" indent="0" marL="0">
+              <a:buNone/>
+              <a:defRPr lang="en-US" sz="1500" dirty="0">
+                <a:solidFill>
+                  <a:schemeClr val="tx2"/>
+                </a:solidFill>
+                <a:latin typeface="Arial" pitchFamily="34" charset="0"/>
+                <a:ea typeface="Arial" pitchFamily="34" charset="-122"/>
+                <a:cs typeface="Arial" pitchFamily="34" charset="-120"/>
+              </a:defRPr>
+            </a:lvl1pPr>
+          </a:lstStyle>
+          <a:p>
+            <a:pPr algn="l" indent="0" marL="0">
+              <a:buNone/>
+            </a:pPr>
+            <a:r>
+              <a:rPr lang="en-US" sz="1500" dirty="0">
+                <a:solidFill>
+                  <a:schemeClr val="tx2"/>
+                </a:solidFill>
+                <a:latin typeface="Arial" pitchFamily="34" charset="0"/>
+                <a:ea typeface="Arial" pitchFamily="34" charset="-122"/>
+                <a:cs typeface="Arial" pitchFamily="34" charset="-120"/>
+              </a:rPr>
+              <a:t>What the number means, and its source</a:t>
+            </a:r>
+            <a:endParaRPr lang="en-US" sz="1500" dirty="0"/>
+          </a:p>
+        </p:txBody>
+      </p:sp>
+      <p:sp>
+        <p:nvSpPr>
+          <p:cNvPr id="25" name="Slide Number Placeholder 0"/>
+          <p:cNvSpPr>
+            <a:spLocks noGrp="1"/>
+          </p:cNvSpPr>
+          <p:nvPr>
+            <p:ph type="sldNum" sz="quarter" idx="4294967295"/>
+          </p:nvPr>
+        </p:nvSpPr>
+        <p:spPr>
+          <a:xfrm>
+            <a:off x="11274552" y="6309360"/>
+            <a:ext cx="365760" cy="274320"/>
+          </a:xfrm>
+          <a:prstGeom prst="rect">
+            <a:avLst/>
+          </a:prstGeom>
+          <a:extLst>
+            <a:ext uri="{C572A759-6A51-4108-AA02-DFA0A04FC94B}">
+              <ma14:wrappingTextBoxFlag xmlns:ma14="http://schemas.microsoft.com/office/mac/drawingml/2011/main" val="0"/>
+            </a:ext>
+          </a:extLst>
+        </p:spPr>
+        <p:txBody>
+          <a:bodyPr anchor="ctr"/>
+          <a:lstStyle>
+            <a:lvl1pPr>
+              <a:defRPr sz="1000">
+                <a:solidFill>
+                  <a:schemeClr val="tx2"/>
+                </a:solidFill>
+              </a:defRPr>
+            </a:lvl1pPr>
+          </a:lstStyle>
+          <a:p>
+            <a:pPr algn="r"/>
+            <a:fld id="{F7021451-1387-4CA6-816F-3879F97B5CBC}" type="slidenum">
+              <a:rPr b="0" lang="en-US"/>
+              <a:t>1007</a:t>
+            </a:fld>
+            <a:endParaRPr lang="en-US"/>
+          </a:p>
+        </p:txBody>
+      </p:sp>
+    </p:spTree>
+  </p:cSld>
+  <p:clrMapOvr>
+    <a:masterClrMapping/>
+  </p:clrMapOvr>
+</p:sldLayout>
+</file>
+
+<file path=ppt/slideLayouts/slideLayout8.xml><?xml version="1.0" encoding="utf-8"?>
+<p:sldLayout xmlns:a="http://schemas.openxmlformats.org/drawingml/2006/main" xmlns:r="http://schemas.openxmlformats.org/officeDocument/2006/relationships" xmlns:p="http://schemas.openxmlformats.org/presentationml/2006/main" preserve="1">
+  <p:cSld name="Title only">
+    <p:bg>
+      <p:bgPr>
+        <a:solidFill>
+          <a:schemeClr val="bg1"/>
+        </a:solidFill>
+      </p:bgPr>
+    </p:bg>
+    <p:spTree>
+      <p:nvGrpSpPr>
+        <p:cNvPr id="1" name=""/>
+        <p:cNvGrpSpPr/>
+        <p:nvPr/>
+      </p:nvGrpSpPr>
+      <p:grpSpPr>
+        <a:xfrm>
+          <a:off x="0" y="0"/>
+          <a:ext cx="0" cy="0"/>
+          <a:chOff x="0" y="0"/>
+          <a:chExt cx="0" cy="0"/>
+        </a:xfrm>
+      </p:grpSpPr>
+      <p:sp>
+        <p:nvSpPr>
+          <p:cNvPr id="2" name="Title placeholder"/>
+          <p:cNvSpPr/>
+          <p:nvPr>
+            <p:ph idx="100" type="title" hasCustomPrompt="1"/>
+          </p:nvPr>
+        </p:nvSpPr>
+        <p:spPr>
+          <a:xfrm>
+            <a:off x="548640" y="384048"/>
+            <a:ext cx="8595360" cy="868680"/>
+          </a:xfrm>
+          <a:prstGeom prst="rect">
+            <a:avLst/>
+          </a:prstGeom>
+          <a:noFill/>
+          <a:ln/>
+        </p:spPr>
+        <p:txBody>
+          <a:bodyPr wrap="square" lIns="0" tIns="0" rIns="0" bIns="0" rtlCol="0" anchor="t"/>
+          <a:lstStyle>
+            <a:lvl1pPr algn="l" indent="0" marL="0">
+              <a:buNone/>
+              <a:defRPr lang="en-US" sz="2800" b="1" dirty="0">
+                <a:solidFill>
+                  <a:schemeClr val="tx1"/>
+                </a:solidFill>
+                <a:latin typeface="Arial" pitchFamily="34" charset="0"/>
+                <a:ea typeface="Arial" pitchFamily="34" charset="-122"/>
+                <a:cs typeface="Arial" pitchFamily="34" charset="-120"/>
+              </a:defRPr>
+            </a:lvl1pPr>
+          </a:lstStyle>
+          <a:p>
+            <a:pPr algn="l" indent="0" marL="0">
+              <a:buNone/>
+            </a:pPr>
+            <a:r>
+              <a:rPr lang="en-US" sz="2800" b="1" dirty="0">
+                <a:solidFill>
+                  <a:schemeClr val="tx1"/>
+                </a:solidFill>
+                <a:latin typeface="Arial" pitchFamily="34" charset="0"/>
+                <a:ea typeface="Arial" pitchFamily="34" charset="-122"/>
+                <a:cs typeface="Arial" pitchFamily="34" charset="-120"/>
+              </a:rPr>
+              <a:t>Slide title: say the point, not the topic</a:t>
+            </a:r>
+            <a:endParaRPr lang="en-US" sz="2800" dirty="0"/>
+          </a:p>
+        </p:txBody>
+      </p:sp>
+      <p:sp>
+        <p:nvSpPr>
+          <p:cNvPr id="3" name="Tag placeholder"/>
+          <p:cNvSpPr/>
+          <p:nvPr>
+            <p:ph idx="101" type="body" hasCustomPrompt="1"/>
+          </p:nvPr>
+        </p:nvSpPr>
+        <p:spPr>
+          <a:xfrm>
+            <a:off x="9326880" y="457200"/>
+            <a:ext cx="2313432" cy="274320"/>
+          </a:xfrm>
+          <a:prstGeom prst="rect">
+            <a:avLst/>
+          </a:prstGeom>
+          <a:noFill/>
+          <a:ln/>
+        </p:spPr>
+        <p:txBody>
+          <a:bodyPr wrap="square" lIns="0" tIns="0" rIns="0" bIns="0" rtlCol="0" anchor="t"/>
+          <a:lstStyle>
+            <a:lvl1pPr algn="r" indent="0" marL="0">
+              <a:buNone/>
+              <a:defRPr lang="en-US" sz="1000" b="1" spc="150" kern="0" dirty="0">
+                <a:solidFill>
+                  <a:schemeClr val="accent1"/>
+                </a:solidFill>
+                <a:latin typeface="Arial" pitchFamily="34" charset="0"/>
+                <a:ea typeface="Arial" pitchFamily="34" charset="-122"/>
+                <a:cs typeface="Arial" pitchFamily="34" charset="-120"/>
+              </a:defRPr>
+            </a:lvl1pPr>
+          </a:lstStyle>
+          <a:p>
+            <a:pPr algn="r" indent="0" marL="0">
+              <a:buNone/>
+            </a:pPr>
+            <a:r>
+              <a:rPr lang="en-US" sz="1000" b="1" spc="150" kern="0" dirty="0">
+                <a:solidFill>
+                  <a:schemeClr val="accent1"/>
+                </a:solidFill>
+                <a:latin typeface="Arial" pitchFamily="34" charset="0"/>
+                <a:ea typeface="Arial" pitchFamily="34" charset="-122"/>
+                <a:cs typeface="Arial" pitchFamily="34" charset="-120"/>
+              </a:rPr>
+              <a:t>PART OR TOPIC</a:t>
+            </a:r>
+            <a:endParaRPr lang="en-US" sz="1000" dirty="0"/>
+          </a:p>
+        </p:txBody>
+      </p:sp>
+      <p:sp>
+        <p:nvSpPr>
+          <p:cNvPr id="4" name="Source placeholder"/>
+          <p:cNvSpPr/>
+          <p:nvPr>
+            <p:ph idx="102" type="body" hasCustomPrompt="1"/>
+          </p:nvPr>
+        </p:nvSpPr>
+        <p:spPr>
+          <a:xfrm>
+            <a:off x="548640" y="6309360"/>
+            <a:ext cx="5120640" cy="274320"/>
+          </a:xfrm>
+          <a:prstGeom prst="rect">
+            <a:avLst/>
+          </a:prstGeom>
+          <a:noFill/>
+          <a:ln/>
+        </p:spPr>
+        <p:txBody>
+          <a:bodyPr wrap="square" lIns="0" tIns="0" rIns="0" bIns="0" rtlCol="0" anchor="ctr"/>
+          <a:lstStyle>
+            <a:lvl1pPr algn="l" indent="0" marL="0">
+              <a:buNone/>
+              <a:defRPr lang="en-US" sz="1000" dirty="0">
+                <a:solidFill>
+                  <a:schemeClr val="tx2"/>
+                </a:solidFill>
+                <a:latin typeface="Arial" pitchFamily="34" charset="0"/>
+                <a:ea typeface="Arial" pitchFamily="34" charset="-122"/>
+                <a:cs typeface="Arial" pitchFamily="34" charset="-120"/>
+              </a:defRPr>
+            </a:lvl1pPr>
+          </a:lstStyle>
+          <a:p>
+            <a:pPr algn="l" indent="0" marL="0">
+              <a:buNone/>
+            </a:pPr>
+            <a:r>
+              <a:rPr lang="en-US" sz="1000" dirty="0">
+                <a:solidFill>
+                  <a:schemeClr val="tx2"/>
+                </a:solidFill>
+                <a:latin typeface="Arial" pitchFamily="34" charset="0"/>
+                <a:ea typeface="Arial" pitchFamily="34" charset="-122"/>
+                <a:cs typeface="Arial" pitchFamily="34" charset="-120"/>
+              </a:rPr>
+              <a:t>Source: cite the legislation, guidance, policy section or list entry</a:t>
+            </a:r>
+            <a:endParaRPr lang="en-US" sz="1000" dirty="0"/>
+          </a:p>
+        </p:txBody>
+      </p:sp>
+      <p:sp>
+        <p:nvSpPr>
+          <p:cNvPr id="5" name="Text 0"/>
+          <p:cNvSpPr/>
+          <p:nvPr/>
+        </p:nvSpPr>
+        <p:spPr>
+          <a:xfrm>
+            <a:off x="5852160" y="6309360"/>
+            <a:ext cx="5303520" cy="274320"/>
+          </a:xfrm>
+          <a:prstGeom prst="rect">
+            <a:avLst/>
+          </a:prstGeom>
+          <a:noFill/>
+          <a:ln/>
+        </p:spPr>
+        <p:txBody>
+          <a:bodyPr wrap="square" lIns="0" tIns="0" rIns="0" bIns="0" rtlCol="0" anchor="ctr"/>
+          <a:lstStyle/>
+          <a:p>
+            <a:pPr algn="r" indent="0" marL="0">
+              <a:buNone/>
+            </a:pPr>
+            <a:r>
+              <a:rPr lang="en-US" sz="1000" dirty="0">
+                <a:solidFill>
+                  <a:schemeClr val="tx2"/>
+                </a:solidFill>
+              </a:rPr>
+              <a:t>Checkout.com · Global Screening · Draft for Compliance sign-off</a:t>
+            </a:r>
+            <a:endParaRPr lang="en-US" sz="1000" dirty="0"/>
+          </a:p>
+        </p:txBody>
+      </p:sp>
+      <p:sp>
+        <p:nvSpPr>
+          <p:cNvPr id="25" name="Slide Number Placeholder 0"/>
+          <p:cNvSpPr>
+            <a:spLocks noGrp="1"/>
+          </p:cNvSpPr>
+          <p:nvPr>
+            <p:ph type="sldNum" sz="quarter" idx="4294967295"/>
+          </p:nvPr>
+        </p:nvSpPr>
+        <p:spPr>
+          <a:xfrm>
+            <a:off x="11274552" y="6309360"/>
+            <a:ext cx="365760" cy="274320"/>
+          </a:xfrm>
+          <a:prstGeom prst="rect">
+            <a:avLst/>
+          </a:prstGeom>
+          <a:extLst>
+            <a:ext uri="{C572A759-6A51-4108-AA02-DFA0A04FC94B}">
+              <ma14:wrappingTextBoxFlag xmlns:ma14="http://schemas.microsoft.com/office/mac/drawingml/2011/main" val="0"/>
+            </a:ext>
+          </a:extLst>
+        </p:spPr>
+        <p:txBody>
+          <a:bodyPr anchor="ctr"/>
+          <a:lstStyle>
+            <a:lvl1pPr>
+              <a:defRPr sz="1000">
+                <a:solidFill>
+                  <a:schemeClr val="tx2"/>
+                </a:solidFill>
+              </a:defRPr>
+            </a:lvl1pPr>
+          </a:lstStyle>
+          <a:p>
+            <a:pPr algn="r"/>
+            <a:fld id="{F7021451-1387-4CA6-816F-3879F97B5CBC}" type="slidenum">
+              <a:rPr b="0" lang="en-US"/>
+              <a:t>1008</a:t>
+            </a:fld>
+            <a:endParaRPr lang="en-US"/>
+          </a:p>
+        </p:txBody>
+      </p:sp>
+    </p:spTree>
+  </p:cSld>
+  <p:clrMapOvr>
+    <a:masterClrMapping/>
+  </p:clrMapOvr>
+</p:sldLayout>
+</file>
+
+<file path=ppt/slideLayouts/slideLayout9.xml><?xml version="1.0" encoding="utf-8"?>
+<p:sldLayout xmlns:a="http://schemas.openxmlformats.org/drawingml/2006/main" xmlns:r="http://schemas.openxmlformats.org/officeDocument/2006/relationships" xmlns:p="http://schemas.openxmlformats.org/presentationml/2006/main" preserve="1">
+  <p:cSld name="Title only, dark">
     <p:bg>
       <p:bgPr>
         <a:solidFill>
@@ -1493,61 +5374,25 @@
       </p:grpSpPr>
       <p:sp>
         <p:nvSpPr>
-          <p:cNvPr id="2" name="Text 0"/>
-          <p:cNvSpPr/>
-          <p:nvPr/>
-        </p:nvSpPr>
-        <p:spPr>
-          <a:xfrm>
-            <a:off x="6583680" y="6309360"/>
-            <a:ext cx="4572000" cy="274320"/>
-          </a:xfrm>
-          <a:prstGeom prst="rect">
-            <a:avLst/>
-          </a:prstGeom>
-          <a:noFill/>
-          <a:ln/>
-        </p:spPr>
-        <p:txBody>
-          <a:bodyPr wrap="square" lIns="0" tIns="0" rIns="0" bIns="0" rtlCol="0" anchor="ctr"/>
-          <a:lstStyle/>
-          <a:p>
-            <a:pPr algn="r" indent="0" marL="0">
-              <a:buNone/>
-            </a:pPr>
-            <a:r>
-              <a:rPr lang="en-US" sz="1000" dirty="0">
-                <a:solidFill>
-                  <a:schemeClr val="accent5"/>
-                </a:solidFill>
-              </a:rPr>
-              <a:t>Checkout.com Global Screening · Draft for Compliance sign-off</a:t>
-            </a:r>
-            <a:endParaRPr lang="en-US" sz="1000" dirty="0"/>
-          </a:p>
-        </p:txBody>
-      </p:sp>
-      <p:sp>
-        <p:nvSpPr>
-          <p:cNvPr id="3" name="Text 1"/>
+          <p:cNvPr id="2" name="Title placeholder"/>
           <p:cNvSpPr/>
           <p:nvPr>
-            <p:ph idx="101" type="title" hasCustomPrompt="1"/>
+            <p:ph idx="100" type="title" hasCustomPrompt="1"/>
           </p:nvPr>
         </p:nvSpPr>
         <p:spPr>
           <a:xfrm>
             <a:off x="548640" y="548640"/>
-            <a:ext cx="7040880" cy="868680"/>
-          </a:xfrm>
-          <a:prstGeom prst="rect">
-            <a:avLst/>
-          </a:prstGeom>
-          <a:noFill/>
-          <a:ln/>
-        </p:spPr>
-        <p:txBody>
-          <a:bodyPr wrap="square" rtlCol="0"/>
+            <a:ext cx="8595360" cy="868680"/>
+          </a:xfrm>
+          <a:prstGeom prst="rect">
+            <a:avLst/>
+          </a:prstGeom>
+          <a:noFill/>
+          <a:ln/>
+        </p:spPr>
+        <p:txBody>
+          <a:bodyPr wrap="square" lIns="0" tIns="0" rIns="0" bIns="0" rtlCol="0" anchor="t"/>
           <a:lstStyle>
             <a:lvl1pPr algn="l" indent="0" marL="0">
               <a:buNone/>
@@ -1565,7 +5410,160 @@
             <a:pPr algn="l" indent="0" marL="0">
               <a:buNone/>
             </a:pPr>
+            <a:r>
+              <a:rPr lang="en-US" sz="3200" b="1" dirty="0">
+                <a:solidFill>
+                  <a:schemeClr val="bg1"/>
+                </a:solidFill>
+                <a:latin typeface="Arial" pitchFamily="34" charset="0"/>
+                <a:ea typeface="Arial" pitchFamily="34" charset="-122"/>
+                <a:cs typeface="Arial" pitchFamily="34" charset="-120"/>
+              </a:rPr>
+              <a:t>Slide title</a:t>
+            </a:r>
             <a:endParaRPr lang="en-US" sz="3200" dirty="0"/>
+          </a:p>
+        </p:txBody>
+      </p:sp>
+      <p:sp>
+        <p:nvSpPr>
+          <p:cNvPr id="3" name="Tag placeholder"/>
+          <p:cNvSpPr/>
+          <p:nvPr>
+            <p:ph idx="101" type="body" hasCustomPrompt="1"/>
+          </p:nvPr>
+        </p:nvSpPr>
+        <p:spPr>
+          <a:xfrm>
+            <a:off x="9326880" y="621792"/>
+            <a:ext cx="2313432" cy="274320"/>
+          </a:xfrm>
+          <a:prstGeom prst="rect">
+            <a:avLst/>
+          </a:prstGeom>
+          <a:noFill/>
+          <a:ln/>
+        </p:spPr>
+        <p:txBody>
+          <a:bodyPr wrap="square" lIns="0" tIns="0" rIns="0" bIns="0" rtlCol="0" anchor="t"/>
+          <a:lstStyle>
+            <a:lvl1pPr algn="r" indent="0" marL="0">
+              <a:buNone/>
+              <a:defRPr lang="en-US" sz="1000" b="1" spc="150" kern="0" dirty="0">
+                <a:solidFill>
+                  <a:schemeClr val="accent5"/>
+                </a:solidFill>
+                <a:latin typeface="Arial" pitchFamily="34" charset="0"/>
+                <a:ea typeface="Arial" pitchFamily="34" charset="-122"/>
+                <a:cs typeface="Arial" pitchFamily="34" charset="-120"/>
+              </a:defRPr>
+            </a:lvl1pPr>
+          </a:lstStyle>
+          <a:p>
+            <a:pPr algn="r" indent="0" marL="0">
+              <a:buNone/>
+            </a:pPr>
+            <a:r>
+              <a:rPr lang="en-US" sz="1000" b="1" spc="150" kern="0" dirty="0">
+                <a:solidFill>
+                  <a:schemeClr val="accent5"/>
+                </a:solidFill>
+                <a:latin typeface="Arial" pitchFamily="34" charset="0"/>
+                <a:ea typeface="Arial" pitchFamily="34" charset="-122"/>
+                <a:cs typeface="Arial" pitchFamily="34" charset="-120"/>
+              </a:rPr>
+              <a:t>PART OR TOPIC</a:t>
+            </a:r>
+            <a:endParaRPr lang="en-US" sz="1000" dirty="0"/>
+          </a:p>
+        </p:txBody>
+      </p:sp>
+      <p:sp>
+        <p:nvSpPr>
+          <p:cNvPr id="4" name="Source placeholder"/>
+          <p:cNvSpPr/>
+          <p:nvPr>
+            <p:ph idx="102" type="body" hasCustomPrompt="1"/>
+          </p:nvPr>
+        </p:nvSpPr>
+        <p:spPr>
+          <a:xfrm>
+            <a:off x="548640" y="6309360"/>
+            <a:ext cx="5120640" cy="274320"/>
+          </a:xfrm>
+          <a:prstGeom prst="rect">
+            <a:avLst/>
+          </a:prstGeom>
+          <a:noFill/>
+          <a:ln/>
+        </p:spPr>
+        <p:txBody>
+          <a:bodyPr wrap="square" lIns="0" tIns="0" rIns="0" bIns="0" rtlCol="0" anchor="ctr"/>
+          <a:lstStyle>
+            <a:lvl1pPr algn="l" indent="0" marL="0">
+              <a:buNone/>
+              <a:defRPr lang="en-US" sz="1000" dirty="0">
+                <a:solidFill>
+                  <a:schemeClr val="accent5"/>
+                </a:solidFill>
+                <a:latin typeface="Arial" pitchFamily="34" charset="0"/>
+                <a:ea typeface="Arial" pitchFamily="34" charset="-122"/>
+                <a:cs typeface="Arial" pitchFamily="34" charset="-120"/>
+              </a:defRPr>
+            </a:lvl1pPr>
+          </a:lstStyle>
+          <a:p>
+            <a:pPr algn="l" indent="0" marL="0">
+              <a:buNone/>
+            </a:pPr>
+            <a:r>
+              <a:rPr lang="en-US" sz="1000" dirty="0">
+                <a:solidFill>
+                  <a:schemeClr val="accent5"/>
+                </a:solidFill>
+                <a:latin typeface="Arial" pitchFamily="34" charset="0"/>
+                <a:ea typeface="Arial" pitchFamily="34" charset="-122"/>
+                <a:cs typeface="Arial" pitchFamily="34" charset="-120"/>
+              </a:rPr>
+              <a:t>Source: cite the legislation, guidance, policy section or list entry</a:t>
+            </a:r>
+            <a:endParaRPr lang="en-US" sz="1000" dirty="0"/>
+          </a:p>
+        </p:txBody>
+      </p:sp>
+      <p:sp>
+        <p:nvSpPr>
+          <p:cNvPr id="5" name="Text 0"/>
+          <p:cNvSpPr/>
+          <p:nvPr/>
+        </p:nvSpPr>
+        <p:spPr>
+          <a:xfrm>
+            <a:off x="5852160" y="6309360"/>
+            <a:ext cx="5303520" cy="274320"/>
+          </a:xfrm>
+          <a:prstGeom prst="rect">
+            <a:avLst/>
+          </a:prstGeom>
+          <a:noFill/>
+          <a:ln/>
+        </p:spPr>
+        <p:txBody>
+          <a:bodyPr wrap="square" lIns="0" tIns="0" rIns="0" bIns="0" rtlCol="0" anchor="ctr"/>
+          <a:lstStyle/>
+          <a:p>
+            <a:pPr algn="r" indent="0" marL="0">
+              <a:buNone/>
+            </a:pPr>
+            <a:r>
+              <a:rPr lang="en-US" sz="1000" dirty="0">
+                <a:solidFill>
+                  <a:schemeClr val="accent5"/>
+                </a:solidFill>
+              </a:rPr>
+              <a:t>Checkout.com · Global Screening · Draft for Compliance sign-off</a:t>
+            </a:r>
+            <a:endParaRPr lang="en-US" sz="1000" dirty="0"/>
           </a:p>
         </p:txBody>
       </p:sp>
@@ -1608,7 +5606,7 @@
             <a:pPr algn="r"/>
             <a:fld id="{F7021451-1387-4CA6-816F-3879F97B5CBC}" type="slidenum">
               <a:rPr b="0" lang="en-US"/>
-              <a:t>1005</a:t>
+              <a:t>1009</a:t>
             </a:fld>
             <a:endParaRPr lang="en-US"/>
           </a:p>
@@ -1669,7 +5667,7 @@
             <a:lvl1pPr>
               <a:defRPr sz="1000">
                 <a:solidFill>
-                  <a:schemeClr val="tx2"/>
+                  <a:schemeClr val="bg2"/>
                 </a:solidFill>
               </a:defRPr>
             </a:lvl1pPr>
@@ -1688,21 +5686,31 @@
   </p:cSld>
   <p:clrMap bg1="lt1" tx1="dk1" bg2="lt2" tx2="dk2" accent1="accent1" accent2="accent2" accent3="accent3" accent4="accent4" accent5="accent5" accent6="accent6" hlink="hlink" folHlink="folHlink"/>
   <p:sldLayoutIdLst>
-    <p:sldLayoutId id="2147483649" r:id="rId1"/>
     <p:sldLayoutId id="2147483650" r:id="rId2"/>
     <p:sldLayoutId id="2147483651" r:id="rId3"/>
     <p:sldLayoutId id="2147483652" r:id="rId4"/>
     <p:sldLayoutId id="2147483653" r:id="rId5"/>
+    <p:sldLayoutId id="2147483654" r:id="rId6"/>
+    <p:sldLayoutId id="2147483655" r:id="rId7"/>
+    <p:sldLayoutId id="2147483656" r:id="rId8"/>
+    <p:sldLayoutId id="2147483657" r:id="rId9"/>
+    <p:sldLayoutId id="2147483658" r:id="rId10"/>
+    <p:sldLayoutId id="2147483659" r:id="rId11"/>
+    <p:sldLayoutId id="2147483660" r:id="rId12"/>
+    <p:sldLayoutId id="2147483661" r:id="rId13"/>
   </p:sldLayoutIdLst>
   <p:hf sldNum="0" hdr="0" ftr="0" dt="0"/>
   <p:txStyles>
     <p:titleStyle>
-      <a:lvl1pPr algn="ctr" defTabSz="914400" rtl="0" eaLnBrk="1" latinLnBrk="0" hangingPunct="1">
+      <a:lvl1pPr algn="l" defTabSz="914400" rtl="0" eaLnBrk="1" latinLnBrk="0" hangingPunct="1">
+        <a:lnSpc>
+          <a:spcPct val="95000"/>
+        </a:lnSpc>
         <a:spcBef>
           <a:spcPct val="0"/>
         </a:spcBef>
         <a:buNone/>
-        <a:defRPr sz="4400" kern="1200">
+        <a:defRPr sz="2800" b="1" kern="1200">
           <a:solidFill>
             <a:schemeClr val="tx1"/>
           </a:solidFill>
@@ -1713,13 +5721,19 @@
       </a:lvl1pPr>
     </p:titleStyle>
     <p:bodyStyle>
-      <a:lvl1pPr marL="342900" indent="-342900" algn="l" defTabSz="914400" rtl="0" eaLnBrk="1" latinLnBrk="0" hangingPunct="1">
+      <a:lvl1pPr marL="228600" indent="-228600" algn="l" defTabSz="914400" rtl="0" eaLnBrk="1" latinLnBrk="0" hangingPunct="1">
+        <a:lnSpc>
+          <a:spcPct val="100000"/>
+        </a:lnSpc>
         <a:spcBef>
-          <a:spcPct val="20000"/>
+          <a:spcPts val="0"/>
         </a:spcBef>
-        <a:buFont typeface="Arial" pitchFamily="34" charset="0"/>
+        <a:spcAft>
+          <a:spcPts val="600"/>
+        </a:spcAft>
+        <a:buFont typeface="Arial"/>
         <a:buChar char="•"/>
-        <a:defRPr sz="3200" kern="1200">
+        <a:defRPr sz="1800" kern="1200">
           <a:solidFill>
             <a:schemeClr val="tx1"/>
           </a:solidFill>
@@ -1728,120 +5742,168 @@
           <a:cs typeface="+mn-cs"/>
         </a:defRPr>
       </a:lvl1pPr>
-      <a:lvl2pPr marL="742950" indent="-285750" algn="l" defTabSz="914400" rtl="0" eaLnBrk="1" latinLnBrk="0" hangingPunct="1">
+      <a:lvl2pPr marL="457200" indent="-228600" algn="l" defTabSz="914400" rtl="0" eaLnBrk="1" latinLnBrk="0" hangingPunct="1">
+        <a:lnSpc>
+          <a:spcPct val="100000"/>
+        </a:lnSpc>
         <a:spcBef>
-          <a:spcPct val="20000"/>
+          <a:spcPts val="0"/>
         </a:spcBef>
-        <a:buFont typeface="Arial" pitchFamily="34" charset="0"/>
+        <a:spcAft>
+          <a:spcPts val="600"/>
+        </a:spcAft>
+        <a:buFont typeface="Arial"/>
         <a:buChar char="–"/>
-        <a:defRPr sz="2800" kern="1200">
+        <a:defRPr sz="1600" kern="1200">
           <a:solidFill>
-            <a:schemeClr val="tx1"/>
+            <a:schemeClr val="tx2"/>
           </a:solidFill>
           <a:latin typeface="+mn-lt"/>
           <a:ea typeface="+mn-ea"/>
           <a:cs typeface="+mn-cs"/>
         </a:defRPr>
       </a:lvl2pPr>
-      <a:lvl3pPr marL="1143000" indent="-228600" algn="l" defTabSz="914400" rtl="0" eaLnBrk="1" latinLnBrk="0" hangingPunct="1">
+      <a:lvl3pPr marL="685800" indent="-228600" algn="l" defTabSz="914400" rtl="0" eaLnBrk="1" latinLnBrk="0" hangingPunct="1">
+        <a:lnSpc>
+          <a:spcPct val="100000"/>
+        </a:lnSpc>
         <a:spcBef>
-          <a:spcPct val="20000"/>
+          <a:spcPts val="0"/>
         </a:spcBef>
-        <a:buFont typeface="Arial" pitchFamily="34" charset="0"/>
+        <a:spcAft>
+          <a:spcPts val="600"/>
+        </a:spcAft>
+        <a:buFont typeface="Arial"/>
         <a:buChar char="•"/>
-        <a:defRPr sz="2400" kern="1200">
+        <a:defRPr sz="1400" kern="1200">
           <a:solidFill>
-            <a:schemeClr val="tx1"/>
+            <a:schemeClr val="tx2"/>
           </a:solidFill>
           <a:latin typeface="+mn-lt"/>
           <a:ea typeface="+mn-ea"/>
           <a:cs typeface="+mn-cs"/>
         </a:defRPr>
       </a:lvl3pPr>
-      <a:lvl4pPr marL="1600200" indent="-228600" algn="l" defTabSz="914400" rtl="0" eaLnBrk="1" latinLnBrk="0" hangingPunct="1">
+      <a:lvl4pPr marL="914400" indent="-228600" algn="l" defTabSz="914400" rtl="0" eaLnBrk="1" latinLnBrk="0" hangingPunct="1">
+        <a:lnSpc>
+          <a:spcPct val="100000"/>
+        </a:lnSpc>
         <a:spcBef>
-          <a:spcPct val="20000"/>
+          <a:spcPts val="0"/>
         </a:spcBef>
-        <a:buFont typeface="Arial" pitchFamily="34" charset="0"/>
+        <a:spcAft>
+          <a:spcPts val="600"/>
+        </a:spcAft>
+        <a:buFont typeface="Arial"/>
         <a:buChar char="–"/>
-        <a:defRPr sz="2000" kern="1200">
+        <a:defRPr sz="1400" kern="1200">
           <a:solidFill>
-            <a:schemeClr val="tx1"/>
+            <a:schemeClr val="tx2"/>
           </a:solidFill>
           <a:latin typeface="+mn-lt"/>
           <a:ea typeface="+mn-ea"/>
           <a:cs typeface="+mn-cs"/>
         </a:defRPr>
       </a:lvl4pPr>
-      <a:lvl5pPr marL="2057400" indent="-228600" algn="l" defTabSz="914400" rtl="0" eaLnBrk="1" latinLnBrk="0" hangingPunct="1">
+      <a:lvl5pPr marL="1143000" indent="-228600" algn="l" defTabSz="914400" rtl="0" eaLnBrk="1" latinLnBrk="0" hangingPunct="1">
+        <a:lnSpc>
+          <a:spcPct val="100000"/>
+        </a:lnSpc>
         <a:spcBef>
-          <a:spcPct val="20000"/>
+          <a:spcPts val="0"/>
         </a:spcBef>
-        <a:buFont typeface="Arial" pitchFamily="34" charset="0"/>
-        <a:buChar char="»"/>
-        <a:defRPr sz="2000" kern="1200">
+        <a:spcAft>
+          <a:spcPts val="600"/>
+        </a:spcAft>
+        <a:buFont typeface="Arial"/>
+        <a:buChar char="–"/>
+        <a:defRPr sz="1400" kern="1200">
           <a:solidFill>
-            <a:schemeClr val="tx1"/>
+            <a:schemeClr val="tx2"/>
           </a:solidFill>
           <a:latin typeface="+mn-lt"/>
           <a:ea typeface="+mn-ea"/>
           <a:cs typeface="+mn-cs"/>
         </a:defRPr>
       </a:lvl5pPr>
-      <a:lvl6pPr marL="2514600" indent="-228600" algn="l" defTabSz="914400" rtl="0" eaLnBrk="1" latinLnBrk="0" hangingPunct="1">
+      <a:lvl6pPr marL="1371600" indent="-228600" algn="l" defTabSz="914400" rtl="0" eaLnBrk="1" latinLnBrk="0" hangingPunct="1">
+        <a:lnSpc>
+          <a:spcPct val="100000"/>
+        </a:lnSpc>
         <a:spcBef>
-          <a:spcPct val="20000"/>
+          <a:spcPts val="0"/>
         </a:spcBef>
-        <a:buFont typeface="Arial" pitchFamily="34" charset="0"/>
-        <a:buChar char="•"/>
-        <a:defRPr sz="2000" kern="1200">
+        <a:spcAft>
+          <a:spcPts val="600"/>
+        </a:spcAft>
+        <a:buFont typeface="Arial"/>
+        <a:buChar char="–"/>
+        <a:defRPr sz="1400" kern="1200">
           <a:solidFill>
-            <a:schemeClr val="tx1"/>
+            <a:schemeClr val="tx2"/>
           </a:solidFill>
           <a:latin typeface="+mn-lt"/>
           <a:ea typeface="+mn-ea"/>
           <a:cs typeface="+mn-cs"/>
         </a:defRPr>
       </a:lvl6pPr>
-      <a:lvl7pPr marL="2971800" indent="-228600" algn="l" defTabSz="914400" rtl="0" eaLnBrk="1" latinLnBrk="0" hangingPunct="1">
+      <a:lvl7pPr marL="1600200" indent="-228600" algn="l" defTabSz="914400" rtl="0" eaLnBrk="1" latinLnBrk="0" hangingPunct="1">
+        <a:lnSpc>
+          <a:spcPct val="100000"/>
+        </a:lnSpc>
         <a:spcBef>
-          <a:spcPct val="20000"/>
+          <a:spcPts val="0"/>
         </a:spcBef>
-        <a:buFont typeface="Arial" pitchFamily="34" charset="0"/>
-        <a:buChar char="•"/>
-        <a:defRPr sz="2000" kern="1200">
+        <a:spcAft>
+          <a:spcPts val="600"/>
+        </a:spcAft>
+        <a:buFont typeface="Arial"/>
+        <a:buChar char="–"/>
+        <a:defRPr sz="1400" kern="1200">
           <a:solidFill>
-            <a:schemeClr val="tx1"/>
+            <a:schemeClr val="tx2"/>
           </a:solidFill>
           <a:latin typeface="+mn-lt"/>
           <a:ea typeface="+mn-ea"/>
           <a:cs typeface="+mn-cs"/>
         </a:defRPr>
       </a:lvl7pPr>
-      <a:lvl8pPr marL="3429000" indent="-228600" algn="l" defTabSz="914400" rtl="0" eaLnBrk="1" latinLnBrk="0" hangingPunct="1">
+      <a:lvl8pPr marL="1828800" indent="-228600" algn="l" defTabSz="914400" rtl="0" eaLnBrk="1" latinLnBrk="0" hangingPunct="1">
+        <a:lnSpc>
+          <a:spcPct val="100000"/>
+        </a:lnSpc>
         <a:spcBef>
-          <a:spcPct val="20000"/>
+          <a:spcPts val="0"/>
         </a:spcBef>
-        <a:buFont typeface="Arial" pitchFamily="34" charset="0"/>
-        <a:buChar char="•"/>
-        <a:defRPr sz="2000" kern="1200">
+        <a:spcAft>
+          <a:spcPts val="600"/>
+        </a:spcAft>
+        <a:buFont typeface="Arial"/>
+        <a:buChar char="–"/>
+        <a:defRPr sz="1400" kern="1200">
           <a:solidFill>
-            <a:schemeClr val="tx1"/>
+            <a:schemeClr val="tx2"/>
           </a:solidFill>
           <a:latin typeface="+mn-lt"/>
           <a:ea typeface="+mn-ea"/>
           <a:cs typeface="+mn-cs"/>
         </a:defRPr>
       </a:lvl8pPr>
-      <a:lvl9pPr marL="3886200" indent="-228600" algn="l" defTabSz="914400" rtl="0" eaLnBrk="1" latinLnBrk="0" hangingPunct="1">
+      <a:lvl9pPr marL="2057400" indent="-228600" algn="l" defTabSz="914400" rtl="0" eaLnBrk="1" latinLnBrk="0" hangingPunct="1">
+        <a:lnSpc>
+          <a:spcPct val="100000"/>
+        </a:lnSpc>
         <a:spcBef>
-          <a:spcPct val="20000"/>
+          <a:spcPts val="0"/>
         </a:spcBef>
-        <a:buFont typeface="Arial" pitchFamily="34" charset="0"/>
-        <a:buChar char="•"/>
-        <a:defRPr sz="2000" kern="1200">
+        <a:spcAft>
+          <a:spcPts val="600"/>
+        </a:spcAft>
+        <a:buFont typeface="Arial"/>
+        <a:buChar char="–"/>
+        <a:defRPr sz="1400" kern="1200">
           <a:solidFill>
-            <a:schemeClr val="tx1"/>
+            <a:schemeClr val="tx2"/>
           </a:solidFill>
           <a:latin typeface="+mn-lt"/>
           <a:ea typeface="+mn-ea"/>
@@ -1851,7 +5913,7 @@
     </p:bodyStyle>
     <p:otherStyle>
       <a:defPPr>
-        <a:defRPr lang="en-US"/>
+        <a:defRPr lang="en-GB"/>
       </a:defPPr>
       <a:lvl1pPr marL="0" algn="l" defTabSz="914400" rtl="0" eaLnBrk="1" latinLnBrk="0" hangingPunct="1">
         <a:defRPr sz="1800" kern="1200">
@@ -1967,14 +6029,16 @@
       </p:grpSpPr>
       <p:sp>
         <p:nvSpPr>
-          <p:cNvPr id="2" name="Text 0"/>
-          <p:cNvSpPr txBox="1"/>
-          <p:nvPr/>
+          <p:cNvPr id="2" name="Kicker placeholder"/>
+          <p:cNvSpPr/>
+          <p:nvPr>
+            <p:ph idx="100" type="body" hasCustomPrompt="1"/>
+          </p:nvPr>
         </p:nvSpPr>
         <p:spPr>
           <a:xfrm>
             <a:off x="731520" y="1417320"/>
-            <a:ext cx="7315200" cy="320040"/>
+            <a:ext cx="8229600" cy="320040"/>
           </a:xfrm>
           <a:prstGeom prst="rect">
             <a:avLst/>
@@ -1986,54 +6050,59 @@
           <a:bodyPr wrap="square" lIns="0" tIns="0" rIns="0" bIns="0" rtlCol="0" anchor="t"/>
           <a:lstStyle/>
           <a:p>
-            <a:pPr indent="0" marL="0">
+            <a:pPr algn="l" indent="0" marL="0">
               <a:buNone/>
             </a:pPr>
             <a:r>
               <a:rPr lang="en-US" sz="1400" b="1" spc="300" kern="0" dirty="0">
                 <a:solidFill>
                   <a:schemeClr val="accent5"/>
-                </a:solidFill>
-              </a:rPr>
-              <a:t>GLOBAL SCREENING · SANCTIONS CONTROLS</a:t>
-            </a:r>
-            <a:endParaRPr lang="en-US" sz="1400" dirty="0"/>
-          </a:p>
-        </p:txBody>
-      </p:sp>
-      <p:sp>
-        <p:nvSpPr>
-          <p:cNvPr id="3" name="Text 1"/>
-          <p:cNvSpPr txBox="1"/>
-          <p:nvPr/>
-        </p:nvSpPr>
-        <p:spPr>
-          <a:xfrm>
-            <a:off x="731520" y="1828800"/>
-            <a:ext cx="8412480" cy="1737360"/>
-          </a:xfrm>
-          <a:prstGeom prst="rect">
-            <a:avLst/>
-          </a:prstGeom>
-          <a:noFill/>
-          <a:ln/>
-        </p:spPr>
-        <p:txBody>
-          <a:bodyPr wrap="square" lIns="0" tIns="0" rIns="0" bIns="0" rtlCol="0" anchor="t"/>
-          <a:lstStyle/>
-          <a:p>
-            <a:pPr indent="0" marL="0">
-              <a:buNone/>
-            </a:pPr>
-            <a:r>
-              <a:rPr lang="en-US" sz="4600" b="1" dirty="0">
-                <a:solidFill>
-                  <a:schemeClr val="bg1"/>
                 </a:solidFill>
                 <a:latin typeface="Arial" pitchFamily="34" charset="0"/>
                 <a:ea typeface="Arial" pitchFamily="34" charset="-122"/>
                 <a:cs typeface="Arial" pitchFamily="34" charset="-120"/>
               </a:rPr>
+              <a:t>GLOBAL SCREENING · SANCTIONS CONTROLS</a:t>
+            </a:r>
+            <a:endParaRPr lang="en-US" sz="1400" dirty="0"/>
+          </a:p>
+        </p:txBody>
+      </p:sp>
+      <p:sp>
+        <p:nvSpPr>
+          <p:cNvPr id="3" name="Title placeholder"/>
+          <p:cNvSpPr/>
+          <p:nvPr>
+            <p:ph idx="101" type="title" hasCustomPrompt="1"/>
+          </p:nvPr>
+        </p:nvSpPr>
+        <p:spPr>
+          <a:xfrm>
+            <a:off x="731520" y="1828800"/>
+            <a:ext cx="8778240" cy="1737360"/>
+          </a:xfrm>
+          <a:prstGeom prst="rect">
+            <a:avLst/>
+          </a:prstGeom>
+          <a:noFill/>
+          <a:ln/>
+        </p:spPr>
+        <p:txBody>
+          <a:bodyPr wrap="square" lIns="0" tIns="0" rIns="0" bIns="0" rtlCol="0" anchor="t"/>
+          <a:lstStyle/>
+          <a:p>
+            <a:pPr algn="l" indent="0" marL="0">
+              <a:buNone/>
+            </a:pPr>
+            <a:r>
+              <a:rPr lang="en-US" sz="4600" b="1" dirty="0">
+                <a:solidFill>
+                  <a:schemeClr val="bg1"/>
+                </a:solidFill>
+                <a:latin typeface="Arial" pitchFamily="34" charset="0"/>
+                <a:ea typeface="Arial" pitchFamily="34" charset="-122"/>
+                <a:cs typeface="Arial" pitchFamily="34" charset="-120"/>
+              </a:rPr>
               <a:t>Stopping sanctioned banks at the point of payment</a:t>
             </a:r>
             <a:endParaRPr lang="en-US" sz="4600" dirty="0"/>
@@ -2042,14 +6111,96 @@
       </p:sp>
       <p:sp>
         <p:nvSpPr>
-          <p:cNvPr id="4" name="Text 2"/>
+          <p:cNvPr id="4" name="Subtitle placeholder"/>
+          <p:cNvSpPr/>
+          <p:nvPr>
+            <p:ph idx="102" type="body" hasCustomPrompt="1"/>
+          </p:nvPr>
+        </p:nvSpPr>
+        <p:spPr>
+          <a:xfrm>
+            <a:off x="731520" y="3657600"/>
+            <a:ext cx="8778240" cy="731520"/>
+          </a:xfrm>
+          <a:prstGeom prst="rect">
+            <a:avLst/>
+          </a:prstGeom>
+          <a:noFill/>
+          <a:ln/>
+        </p:spPr>
+        <p:txBody>
+          <a:bodyPr wrap="square" lIns="0" tIns="0" rIns="0" bIns="0" rtlCol="0" anchor="t"/>
+          <a:lstStyle/>
+          <a:p>
+            <a:pPr algn="l" indent="0" marL="0">
+              <a:buNone/>
+            </a:pPr>
+            <a:r>
+              <a:rPr lang="en-US" sz="2000" dirty="0">
+                <a:solidFill>
+                  <a:schemeClr val="bg2"/>
+                </a:solidFill>
+                <a:latin typeface="Arial" pitchFamily="34" charset="0"/>
+                <a:ea typeface="Arial" pitchFamily="34" charset="-122"/>
+                <a:cs typeface="Arial" pitchFamily="34" charset="-120"/>
+              </a:rPr>
+              <a:t>How our BIN blocking control works, from designation to declined payment</a:t>
+            </a:r>
+            <a:endParaRPr lang="en-US" sz="2000" dirty="0"/>
+          </a:p>
+        </p:txBody>
+      </p:sp>
+      <p:sp>
+        <p:nvSpPr>
+          <p:cNvPr id="5" name="Presenter placeholder"/>
+          <p:cNvSpPr/>
+          <p:nvPr>
+            <p:ph idx="103" type="body" hasCustomPrompt="1"/>
+          </p:nvPr>
+        </p:nvSpPr>
+        <p:spPr>
+          <a:xfrm>
+            <a:off x="731520" y="6080760"/>
+            <a:ext cx="7315200" cy="320040"/>
+          </a:xfrm>
+          <a:prstGeom prst="rect">
+            <a:avLst/>
+          </a:prstGeom>
+          <a:noFill/>
+          <a:ln/>
+        </p:spPr>
+        <p:txBody>
+          <a:bodyPr wrap="square" lIns="0" tIns="0" rIns="0" bIns="0" rtlCol="0" anchor="t"/>
+          <a:lstStyle/>
+          <a:p>
+            <a:pPr algn="l" indent="0" marL="0">
+              <a:buNone/>
+            </a:pPr>
+            <a:r>
+              <a:rPr lang="en-US" sz="1200" dirty="0">
+                <a:solidFill>
+                  <a:schemeClr val="accent5"/>
+                </a:solidFill>
+                <a:latin typeface="Arial" pitchFamily="34" charset="0"/>
+                <a:ea typeface="Arial" pitchFamily="34" charset="-122"/>
+                <a:cs typeface="Arial" pitchFamily="34" charset="-120"/>
+              </a:rPr>
+              <a:t>Global Screening · Checkout.com</a:t>
+            </a:r>
+            <a:endParaRPr lang="en-US" sz="1200" dirty="0"/>
+          </a:p>
+        </p:txBody>
+      </p:sp>
+      <p:sp>
+        <p:nvSpPr>
+          <p:cNvPr id="6" name="Text 4"/>
           <p:cNvSpPr txBox="1"/>
           <p:nvPr/>
         </p:nvSpPr>
         <p:spPr>
           <a:xfrm>
-            <a:off x="731520" y="3657600"/>
-            <a:ext cx="8595360" cy="731520"/>
+            <a:off x="0" y="5550408"/>
+            <a:ext cx="1828800" cy="274320"/>
           </a:xfrm>
           <a:prstGeom prst="rect">
             <a:avLst/>
@@ -2061,88 +6212,56 @@
           <a:bodyPr wrap="square" lIns="0" tIns="0" rIns="0" bIns="0" rtlCol="0" anchor="t"/>
           <a:lstStyle/>
           <a:p>
-            <a:pPr indent="0" marL="0">
-              <a:buNone/>
-            </a:pPr>
-            <a:r>
-              <a:rPr lang="en-US" sz="2000" dirty="0">
+            <a:pPr algn="ctr" indent="0" marL="0">
+              <a:buNone/>
+            </a:pPr>
+            <a:r>
+              <a:rPr lang="en-US" sz="1200" dirty="0">
                 <a:solidFill>
                   <a:schemeClr val="bg2"/>
                 </a:solidFill>
               </a:rPr>
-              <a:t>How our BIN blocking control works, from designation to declined payment</a:t>
-            </a:r>
-            <a:endParaRPr lang="en-US" sz="2000" dirty="0"/>
-          </a:p>
-        </p:txBody>
-      </p:sp>
-      <p:sp>
-        <p:nvSpPr>
-          <p:cNvPr id="5" name="Shape 3"/>
-          <p:cNvSpPr/>
-          <p:nvPr/>
-        </p:nvSpPr>
-        <p:spPr>
-          <a:xfrm>
-            <a:off x="914400" y="5349240"/>
-            <a:ext cx="4617720" cy="0"/>
-          </a:xfrm>
-          <a:prstGeom prst="line">
-            <a:avLst/>
-          </a:prstGeom>
-          <a:noFill/>
-          <a:ln w="38100">
-            <a:solidFill>
-              <a:schemeClr val="accent1"/>
-            </a:solidFill>
-            <a:prstDash val="solid"/>
-            <a:tailEnd type="none"/>
-          </a:ln>
-        </p:spPr>
-      </p:sp>
-      <p:sp>
-        <p:nvSpPr>
-          <p:cNvPr id="6" name="Shape 4"/>
-          <p:cNvSpPr/>
-          <p:nvPr/>
-        </p:nvSpPr>
-        <p:spPr>
-          <a:xfrm>
-            <a:off x="5532120" y="5349240"/>
-            <a:ext cx="5532120" cy="0"/>
-          </a:xfrm>
-          <a:prstGeom prst="line">
-            <a:avLst/>
-          </a:prstGeom>
-          <a:noFill/>
-          <a:ln w="25400">
-            <a:solidFill>
-              <a:schemeClr val="accent5"/>
-            </a:solidFill>
-            <a:prstDash val="dash"/>
-            <a:tailEnd type="none"/>
-          </a:ln>
-        </p:spPr>
-      </p:sp>
-      <p:sp>
-        <p:nvSpPr>
-          <p:cNvPr id="7" name="Shape 5"/>
-          <p:cNvSpPr/>
-          <p:nvPr/>
-        </p:nvSpPr>
-        <p:spPr>
-          <a:xfrm>
-            <a:off x="822960" y="5257800"/>
-            <a:ext cx="182880" cy="182880"/>
-          </a:xfrm>
-          <a:prstGeom prst="ellipse">
-            <a:avLst/>
-          </a:prstGeom>
-          <a:solidFill>
-            <a:schemeClr val="accent1"/>
-          </a:solidFill>
-          <a:ln/>
-        </p:spPr>
+              <a:t>Merchant</a:t>
+            </a:r>
+            <a:endParaRPr lang="en-US" sz="1200" dirty="0"/>
+          </a:p>
+        </p:txBody>
+      </p:sp>
+      <p:sp>
+        <p:nvSpPr>
+          <p:cNvPr id="7" name="Text 5"/>
+          <p:cNvSpPr txBox="1"/>
+          <p:nvPr/>
+        </p:nvSpPr>
+        <p:spPr>
+          <a:xfrm>
+            <a:off x="2926080" y="5550408"/>
+            <a:ext cx="1828800" cy="274320"/>
+          </a:xfrm>
+          <a:prstGeom prst="rect">
+            <a:avLst/>
+          </a:prstGeom>
+          <a:noFill/>
+          <a:ln/>
+        </p:spPr>
+        <p:txBody>
+          <a:bodyPr wrap="square" lIns="0" tIns="0" rIns="0" bIns="0" rtlCol="0" anchor="t"/>
+          <a:lstStyle/>
+          <a:p>
+            <a:pPr algn="ctr" indent="0" marL="0">
+              <a:buNone/>
+            </a:pPr>
+            <a:r>
+              <a:rPr lang="en-US" sz="1200" dirty="0">
+                <a:solidFill>
+                  <a:schemeClr val="bg2"/>
+                </a:solidFill>
+              </a:rPr>
+              <a:t>Checkout.com</a:t>
+            </a:r>
+            <a:endParaRPr lang="en-US" sz="1200" dirty="0"/>
+          </a:p>
+        </p:txBody>
       </p:sp>
       <p:sp>
         <p:nvSpPr>
@@ -2152,118 +6271,6 @@
         </p:nvSpPr>
         <p:spPr>
           <a:xfrm>
-            <a:off x="0" y="5550408"/>
-            <a:ext cx="1828800" cy="274320"/>
-          </a:xfrm>
-          <a:prstGeom prst="rect">
-            <a:avLst/>
-          </a:prstGeom>
-          <a:noFill/>
-          <a:ln/>
-        </p:spPr>
-        <p:txBody>
-          <a:bodyPr wrap="square" lIns="0" tIns="0" rIns="0" bIns="0" rtlCol="0" anchor="t"/>
-          <a:lstStyle/>
-          <a:p>
-            <a:pPr algn="ctr" indent="0" marL="0">
-              <a:buNone/>
-            </a:pPr>
-            <a:r>
-              <a:rPr lang="en-US" sz="1200" dirty="0">
-                <a:solidFill>
-                  <a:schemeClr val="bg2"/>
-                </a:solidFill>
-              </a:rPr>
-              <a:t>Merchant</a:t>
-            </a:r>
-            <a:endParaRPr lang="en-US" sz="1200" dirty="0"/>
-          </a:p>
-        </p:txBody>
-      </p:sp>
-      <p:sp>
-        <p:nvSpPr>
-          <p:cNvPr id="9" name="Shape 7"/>
-          <p:cNvSpPr/>
-          <p:nvPr/>
-        </p:nvSpPr>
-        <p:spPr>
-          <a:xfrm>
-            <a:off x="3749040" y="5257800"/>
-            <a:ext cx="182880" cy="182880"/>
-          </a:xfrm>
-          <a:prstGeom prst="ellipse">
-            <a:avLst/>
-          </a:prstGeom>
-          <a:solidFill>
-            <a:schemeClr val="accent1"/>
-          </a:solidFill>
-          <a:ln/>
-        </p:spPr>
-      </p:sp>
-      <p:sp>
-        <p:nvSpPr>
-          <p:cNvPr id="10" name="Text 8"/>
-          <p:cNvSpPr txBox="1"/>
-          <p:nvPr/>
-        </p:nvSpPr>
-        <p:spPr>
-          <a:xfrm>
-            <a:off x="2926080" y="5550408"/>
-            <a:ext cx="1828800" cy="274320"/>
-          </a:xfrm>
-          <a:prstGeom prst="rect">
-            <a:avLst/>
-          </a:prstGeom>
-          <a:noFill/>
-          <a:ln/>
-        </p:spPr>
-        <p:txBody>
-          <a:bodyPr wrap="square" lIns="0" tIns="0" rIns="0" bIns="0" rtlCol="0" anchor="t"/>
-          <a:lstStyle/>
-          <a:p>
-            <a:pPr algn="ctr" indent="0" marL="0">
-              <a:buNone/>
-            </a:pPr>
-            <a:r>
-              <a:rPr lang="en-US" sz="1200" dirty="0">
-                <a:solidFill>
-                  <a:schemeClr val="bg2"/>
-                </a:solidFill>
-              </a:rPr>
-              <a:t>Checkout.com</a:t>
-            </a:r>
-            <a:endParaRPr lang="en-US" sz="1200" dirty="0"/>
-          </a:p>
-        </p:txBody>
-      </p:sp>
-      <p:sp>
-        <p:nvSpPr>
-          <p:cNvPr id="11" name="Shape 9"/>
-          <p:cNvSpPr/>
-          <p:nvPr/>
-        </p:nvSpPr>
-        <p:spPr>
-          <a:xfrm>
-            <a:off x="7589520" y="5257800"/>
-            <a:ext cx="182880" cy="182880"/>
-          </a:xfrm>
-          <a:prstGeom prst="ellipse">
-            <a:avLst/>
-          </a:prstGeom>
-          <a:solidFill>
-            <a:schemeClr val="accent5"/>
-          </a:solidFill>
-          <a:ln/>
-        </p:spPr>
-      </p:sp>
-      <p:sp>
-        <p:nvSpPr>
-          <p:cNvPr id="12" name="Text 10"/>
-          <p:cNvSpPr txBox="1"/>
-          <p:nvPr/>
-        </p:nvSpPr>
-        <p:spPr>
-          <a:xfrm>
             <a:off x="6766560" y="5550408"/>
             <a:ext cx="1828800" cy="274320"/>
           </a:xfrm>
@@ -2294,27 +6301,7 @@
       </p:sp>
       <p:sp>
         <p:nvSpPr>
-          <p:cNvPr id="13" name="Shape 11"/>
-          <p:cNvSpPr/>
-          <p:nvPr/>
-        </p:nvSpPr>
-        <p:spPr>
-          <a:xfrm>
-            <a:off x="10972800" y="5257800"/>
-            <a:ext cx="182880" cy="182880"/>
-          </a:xfrm>
-          <a:prstGeom prst="ellipse">
-            <a:avLst/>
-          </a:prstGeom>
-          <a:solidFill>
-            <a:schemeClr val="accent5"/>
-          </a:solidFill>
-          <a:ln/>
-        </p:spPr>
-      </p:sp>
-      <p:sp>
-        <p:nvSpPr>
-          <p:cNvPr id="14" name="Text 12"/>
+          <p:cNvPr id="9" name="Text 7"/>
           <p:cNvSpPr txBox="1"/>
           <p:nvPr/>
         </p:nvSpPr>
@@ -2350,61 +6337,7 @@
       </p:sp>
       <p:sp>
         <p:nvSpPr>
-          <p:cNvPr id="15" name="Text 13"/>
-          <p:cNvSpPr/>
-          <p:nvPr/>
-        </p:nvSpPr>
-        <p:spPr>
-          <a:xfrm>
-            <a:off x="5257800" y="5074920"/>
-            <a:ext cx="548640" cy="548640"/>
-          </a:xfrm>
-          <a:prstGeom prst="ellipse">
-            <a:avLst/>
-          </a:prstGeom>
-          <a:solidFill>
-            <a:schemeClr val="accent2"/>
-          </a:solidFill>
-          <a:ln/>
-        </p:spPr>
-        <p:txBody>
-          <a:bodyPr wrap="square" lIns="0" tIns="0" rIns="0" bIns="0" rtlCol="0" anchor="ctr"/>
-          <a:lstStyle/>
-          <a:p>
-            <a:pPr algn="ctr" indent="0" marL="0">
-              <a:buNone/>
-            </a:pPr>
-            <a:endParaRPr lang="en-US" sz="1400" dirty="0"/>
-          </a:p>
-        </p:txBody>
-      </p:sp>
-      <p:pic>
-        <p:nvPicPr>
-          <p:cNvPr id="16" name="Image 0" descr="preencoded.png">    </p:cNvPr>
-          <p:cNvPicPr>
-            <a:picLocks noChangeAspect="1"/>
-          </p:cNvPicPr>
-          <p:nvPr/>
-        </p:nvPicPr>
-        <p:blipFill>
-          <a:blip r:embed="rId1"/>
-          <a:stretch>
-            <a:fillRect/>
-          </a:stretch>
-        </p:blipFill>
-        <p:spPr>
-          <a:xfrm>
-            <a:off x="5394960" y="5212080"/>
-            <a:ext cx="274320" cy="274320"/>
-          </a:xfrm>
-          <a:prstGeom prst="rect">
-            <a:avLst/>
-          </a:prstGeom>
-        </p:spPr>
-      </p:pic>
-      <p:sp>
-        <p:nvSpPr>
-          <p:cNvPr id="17" name="Text 14"/>
+          <p:cNvPr id="10" name="Text 8"/>
           <p:cNvSpPr txBox="1"/>
           <p:nvPr/>
         </p:nvSpPr>
@@ -2465,16 +6398,16 @@
       </p:grpSpPr>
       <p:sp>
         <p:nvSpPr>
-          <p:cNvPr id="2" name="Text 1"/>
+          <p:cNvPr id="2" name="Title placeholder"/>
           <p:cNvSpPr/>
           <p:nvPr>
-            <p:ph idx="101" type="title" hasCustomPrompt="1"/>
+            <p:ph idx="100" type="title" hasCustomPrompt="1"/>
           </p:nvPr>
         </p:nvSpPr>
         <p:spPr>
           <a:xfrm>
             <a:off x="548640" y="384048"/>
-            <a:ext cx="7040880" cy="868680"/>
+            <a:ext cx="8595360" cy="868680"/>
           </a:xfrm>
           <a:prstGeom prst="rect">
             <a:avLst/>
@@ -2506,7 +6439,48 @@
       </p:sp>
       <p:sp>
         <p:nvSpPr>
-          <p:cNvPr id="3" name="chain-0"/>
+          <p:cNvPr id="3" name="Tag placeholder"/>
+          <p:cNvSpPr/>
+          <p:nvPr>
+            <p:ph idx="101" type="body" hasCustomPrompt="1"/>
+          </p:nvPr>
+        </p:nvSpPr>
+        <p:spPr>
+          <a:xfrm>
+            <a:off x="9326880" y="457200"/>
+            <a:ext cx="2313432" cy="274320"/>
+          </a:xfrm>
+          <a:prstGeom prst="rect">
+            <a:avLst/>
+          </a:prstGeom>
+          <a:noFill/>
+          <a:ln/>
+        </p:spPr>
+        <p:txBody>
+          <a:bodyPr wrap="square" lIns="0" tIns="0" rIns="0" bIns="0" rtlCol="0" anchor="t"/>
+          <a:lstStyle/>
+          <a:p>
+            <a:pPr algn="r" indent="0" marL="0">
+              <a:buNone/>
+            </a:pPr>
+            <a:r>
+              <a:rPr lang="en-US" sz="1000" b="1" spc="150" kern="0" dirty="0">
+                <a:solidFill>
+                  <a:schemeClr val="accent1"/>
+                </a:solidFill>
+                <a:latin typeface="Arial" pitchFamily="34" charset="0"/>
+                <a:ea typeface="Arial" pitchFamily="34" charset="-122"/>
+                <a:cs typeface="Arial" pitchFamily="34" charset="-120"/>
+              </a:rPr>
+              <a:t>WHY WE DO IT</a:t>
+            </a:r>
+            <a:endParaRPr lang="en-US" sz="1000" dirty="0"/>
+          </a:p>
+        </p:txBody>
+      </p:sp>
+      <p:sp>
+        <p:nvSpPr>
+          <p:cNvPr id="4" name="chain-0"/>
           <p:cNvSpPr/>
           <p:nvPr/>
         </p:nvSpPr>
@@ -2528,7 +6502,7 @@
       </p:sp>
       <p:pic>
         <p:nvPicPr>
-          <p:cNvPr id="4" name="Image 0" descr="preencoded.png">    </p:cNvPr>
+          <p:cNvPr id="5" name="Image 0" descr="preencoded.png">    </p:cNvPr>
           <p:cNvPicPr>
             <a:picLocks noChangeAspect="1"/>
           </p:cNvPicPr>
@@ -2552,7 +6526,7 @@
       </p:pic>
       <p:sp>
         <p:nvSpPr>
-          <p:cNvPr id="5" name="Text 2"/>
+          <p:cNvPr id="6" name="Text 3"/>
           <p:cNvSpPr txBox="1"/>
           <p:nvPr/>
         </p:nvSpPr>
@@ -2588,7 +6562,7 @@
       </p:sp>
       <p:sp>
         <p:nvSpPr>
-          <p:cNvPr id="6" name="Text 3"/>
+          <p:cNvPr id="7" name="Text 4"/>
           <p:cNvSpPr txBox="1"/>
           <p:nvPr/>
         </p:nvSpPr>
@@ -2624,7 +6598,7 @@
       </p:sp>
       <p:sp>
         <p:nvSpPr>
-          <p:cNvPr id="7" name="chain-1"/>
+          <p:cNvPr id="8" name="chain-1"/>
           <p:cNvSpPr/>
           <p:nvPr/>
         </p:nvSpPr>
@@ -2646,7 +6620,7 @@
       </p:sp>
       <p:pic>
         <p:nvPicPr>
-          <p:cNvPr id="8" name="Image 1" descr="preencoded.png">    </p:cNvPr>
+          <p:cNvPr id="9" name="Image 1" descr="preencoded.png">    </p:cNvPr>
           <p:cNvPicPr>
             <a:picLocks noChangeAspect="1"/>
           </p:cNvPicPr>
@@ -2670,7 +6644,7 @@
       </p:pic>
       <p:sp>
         <p:nvSpPr>
-          <p:cNvPr id="9" name="Text 5"/>
+          <p:cNvPr id="10" name="Text 6"/>
           <p:cNvSpPr txBox="1"/>
           <p:nvPr/>
         </p:nvSpPr>
@@ -2706,7 +6680,7 @@
       </p:sp>
       <p:sp>
         <p:nvSpPr>
-          <p:cNvPr id="10" name="Text 6"/>
+          <p:cNvPr id="11" name="Text 7"/>
           <p:cNvSpPr txBox="1"/>
           <p:nvPr/>
         </p:nvSpPr>
@@ -2742,7 +6716,7 @@
       </p:sp>
       <p:sp>
         <p:nvSpPr>
-          <p:cNvPr id="11" name="chain-2"/>
+          <p:cNvPr id="12" name="chain-2"/>
           <p:cNvSpPr/>
           <p:nvPr/>
         </p:nvSpPr>
@@ -2764,7 +6738,7 @@
       </p:sp>
       <p:pic>
         <p:nvPicPr>
-          <p:cNvPr id="12" name="Image 2" descr="preencoded.png">    </p:cNvPr>
+          <p:cNvPr id="13" name="Image 2" descr="preencoded.png">    </p:cNvPr>
           <p:cNvPicPr>
             <a:picLocks noChangeAspect="1"/>
           </p:cNvPicPr>
@@ -2788,7 +6762,7 @@
       </p:pic>
       <p:sp>
         <p:nvSpPr>
-          <p:cNvPr id="13" name="Text 8"/>
+          <p:cNvPr id="14" name="Text 9"/>
           <p:cNvSpPr txBox="1"/>
           <p:nvPr/>
         </p:nvSpPr>
@@ -2824,7 +6798,7 @@
       </p:sp>
       <p:sp>
         <p:nvSpPr>
-          <p:cNvPr id="14" name="Text 9"/>
+          <p:cNvPr id="15" name="Text 10"/>
           <p:cNvSpPr txBox="1"/>
           <p:nvPr/>
         </p:nvSpPr>
@@ -2860,7 +6834,7 @@
       </p:sp>
       <p:sp>
         <p:nvSpPr>
-          <p:cNvPr id="15" name="chain-3"/>
+          <p:cNvPr id="16" name="chain-3"/>
           <p:cNvSpPr/>
           <p:nvPr/>
         </p:nvSpPr>
@@ -2889,7 +6863,7 @@
       </p:sp>
       <p:pic>
         <p:nvPicPr>
-          <p:cNvPr id="16" name="Image 3" descr="preencoded.png">    </p:cNvPr>
+          <p:cNvPr id="17" name="Image 3" descr="preencoded.png">    </p:cNvPr>
           <p:cNvPicPr>
             <a:picLocks noChangeAspect="1"/>
           </p:cNvPicPr>
@@ -2913,7 +6887,7 @@
       </p:pic>
       <p:sp>
         <p:nvSpPr>
-          <p:cNvPr id="17" name="Text 11"/>
+          <p:cNvPr id="18" name="Text 12"/>
           <p:cNvSpPr txBox="1"/>
           <p:nvPr/>
         </p:nvSpPr>
@@ -2949,7 +6923,7 @@
       </p:sp>
       <p:sp>
         <p:nvSpPr>
-          <p:cNvPr id="18" name="Text 12"/>
+          <p:cNvPr id="19" name="Text 13"/>
           <p:cNvSpPr txBox="1"/>
           <p:nvPr/>
         </p:nvSpPr>
@@ -2985,7 +6959,7 @@
       </p:sp>
       <p:sp>
         <p:nvSpPr>
-          <p:cNvPr id="19" name="Shape 13"/>
+          <p:cNvPr id="20" name="Shape 14"/>
           <p:cNvSpPr/>
           <p:nvPr/>
         </p:nvSpPr>
@@ -3009,7 +6983,7 @@
       </p:sp>
       <p:sp>
         <p:nvSpPr>
-          <p:cNvPr id="20" name="Shape 14"/>
+          <p:cNvPr id="21" name="Shape 15"/>
           <p:cNvSpPr/>
           <p:nvPr/>
         </p:nvSpPr>
@@ -3033,7 +7007,7 @@
       </p:sp>
       <p:sp>
         <p:nvSpPr>
-          <p:cNvPr id="21" name="Shape 15"/>
+          <p:cNvPr id="22" name="Shape 16"/>
           <p:cNvSpPr/>
           <p:nvPr/>
         </p:nvSpPr>
@@ -3057,7 +7031,7 @@
       </p:sp>
       <p:sp>
         <p:nvSpPr>
-          <p:cNvPr id="22" name="Text 16"/>
+          <p:cNvPr id="23" name="Text 17"/>
           <p:cNvSpPr/>
           <p:nvPr/>
         </p:nvSpPr>
@@ -3087,7 +7061,7 @@
       </p:sp>
       <p:pic>
         <p:nvPicPr>
-          <p:cNvPr id="23" name="Image 4" descr="preencoded.png">    </p:cNvPr>
+          <p:cNvPr id="24" name="Image 4" descr="preencoded.png">    </p:cNvPr>
           <p:cNvPicPr>
             <a:picLocks noChangeAspect="1"/>
           </p:cNvPicPr>
@@ -3111,7 +7085,7 @@
       </p:pic>
       <p:sp>
         <p:nvSpPr>
-          <p:cNvPr id="24" name="Text 17"/>
+          <p:cNvPr id="25" name="Text 18"/>
           <p:cNvSpPr txBox="1"/>
           <p:nvPr/>
         </p:nvSpPr>
@@ -3161,7 +7135,7 @@
       </p:sp>
       <p:sp>
         <p:nvSpPr>
-          <p:cNvPr id="25" name="Text 18"/>
+          <p:cNvPr id="26" name="Text 19"/>
           <p:cNvSpPr txBox="1"/>
           <p:nvPr/>
         </p:nvSpPr>
@@ -3197,7 +7171,7 @@
       </p:sp>
       <p:sp>
         <p:nvSpPr>
-          <p:cNvPr id="26" name="Shape 19"/>
+          <p:cNvPr id="27" name="Shape 20"/>
           <p:cNvSpPr/>
           <p:nvPr/>
         </p:nvSpPr>
@@ -3221,7 +7195,7 @@
       </p:sp>
       <p:sp>
         <p:nvSpPr>
-          <p:cNvPr id="27" name="Text 20"/>
+          <p:cNvPr id="28" name="Text 21"/>
           <p:cNvSpPr txBox="1"/>
           <p:nvPr/>
         </p:nvSpPr>
@@ -3257,7 +7231,7 @@
       </p:sp>
       <p:sp>
         <p:nvSpPr>
-          <p:cNvPr id="28" name="exposure-0"/>
+          <p:cNvPr id="29" name="exposure-0"/>
           <p:cNvSpPr/>
           <p:nvPr/>
         </p:nvSpPr>
@@ -3291,7 +7265,7 @@
       </p:sp>
       <p:sp>
         <p:nvSpPr>
-          <p:cNvPr id="29" name="Shape 22"/>
+          <p:cNvPr id="30" name="Shape 23"/>
           <p:cNvSpPr/>
           <p:nvPr/>
         </p:nvSpPr>
@@ -3313,7 +7287,7 @@
       </p:sp>
       <p:pic>
         <p:nvPicPr>
-          <p:cNvPr id="30" name="Image 5" descr="preencoded.png">    </p:cNvPr>
+          <p:cNvPr id="31" name="Image 5" descr="preencoded.png">    </p:cNvPr>
           <p:cNvPicPr>
             <a:picLocks noChangeAspect="1"/>
           </p:cNvPicPr>
@@ -3337,7 +7311,7 @@
       </p:pic>
       <p:sp>
         <p:nvSpPr>
-          <p:cNvPr id="31" name="Text 23"/>
+          <p:cNvPr id="32" name="Text 24"/>
           <p:cNvSpPr txBox="1"/>
           <p:nvPr/>
         </p:nvSpPr>
@@ -3373,7 +7347,7 @@
       </p:sp>
       <p:sp>
         <p:nvSpPr>
-          <p:cNvPr id="32" name="Text 24"/>
+          <p:cNvPr id="33" name="Text 25"/>
           <p:cNvSpPr txBox="1"/>
           <p:nvPr/>
         </p:nvSpPr>
@@ -3409,7 +7383,7 @@
       </p:sp>
       <p:sp>
         <p:nvSpPr>
-          <p:cNvPr id="33" name="exposure-1"/>
+          <p:cNvPr id="34" name="exposure-1"/>
           <p:cNvSpPr/>
           <p:nvPr/>
         </p:nvSpPr>
@@ -3443,7 +7417,7 @@
       </p:sp>
       <p:sp>
         <p:nvSpPr>
-          <p:cNvPr id="34" name="Shape 26"/>
+          <p:cNvPr id="35" name="Shape 27"/>
           <p:cNvSpPr/>
           <p:nvPr/>
         </p:nvSpPr>
@@ -3465,7 +7439,7 @@
       </p:sp>
       <p:pic>
         <p:nvPicPr>
-          <p:cNvPr id="35" name="Image 6" descr="preencoded.png">    </p:cNvPr>
+          <p:cNvPr id="36" name="Image 6" descr="preencoded.png">    </p:cNvPr>
           <p:cNvPicPr>
             <a:picLocks noChangeAspect="1"/>
           </p:cNvPicPr>
@@ -3489,7 +7463,7 @@
       </p:pic>
       <p:sp>
         <p:nvSpPr>
-          <p:cNvPr id="36" name="Text 27"/>
+          <p:cNvPr id="37" name="Text 28"/>
           <p:cNvSpPr txBox="1"/>
           <p:nvPr/>
         </p:nvSpPr>
@@ -3525,7 +7499,7 @@
       </p:sp>
       <p:sp>
         <p:nvSpPr>
-          <p:cNvPr id="37" name="Text 28"/>
+          <p:cNvPr id="38" name="Text 29"/>
           <p:cNvSpPr txBox="1"/>
           <p:nvPr/>
         </p:nvSpPr>
@@ -3561,7 +7535,7 @@
       </p:sp>
       <p:sp>
         <p:nvSpPr>
-          <p:cNvPr id="38" name="exposure-2"/>
+          <p:cNvPr id="39" name="exposure-2"/>
           <p:cNvSpPr/>
           <p:nvPr/>
         </p:nvSpPr>
@@ -3595,7 +7569,7 @@
       </p:sp>
       <p:sp>
         <p:nvSpPr>
-          <p:cNvPr id="39" name="Shape 30"/>
+          <p:cNvPr id="40" name="Shape 31"/>
           <p:cNvSpPr/>
           <p:nvPr/>
         </p:nvSpPr>
@@ -3617,7 +7591,7 @@
       </p:sp>
       <p:pic>
         <p:nvPicPr>
-          <p:cNvPr id="40" name="Image 7" descr="preencoded.png">    </p:cNvPr>
+          <p:cNvPr id="41" name="Image 7" descr="preencoded.png">    </p:cNvPr>
           <p:cNvPicPr>
             <a:picLocks noChangeAspect="1"/>
           </p:cNvPicPr>
@@ -3641,7 +7615,7 @@
       </p:pic>
       <p:sp>
         <p:nvSpPr>
-          <p:cNvPr id="41" name="Text 31"/>
+          <p:cNvPr id="42" name="Text 32"/>
           <p:cNvSpPr txBox="1"/>
           <p:nvPr/>
         </p:nvSpPr>
@@ -3677,7 +7651,7 @@
       </p:sp>
       <p:sp>
         <p:nvSpPr>
-          <p:cNvPr id="42" name="Text 32"/>
+          <p:cNvPr id="43" name="Text 33"/>
           <p:cNvSpPr txBox="1"/>
           <p:nvPr/>
         </p:nvSpPr>
@@ -3713,14 +7687,16 @@
       </p:sp>
       <p:sp>
         <p:nvSpPr>
-          <p:cNvPr id="43" name="Text 33"/>
-          <p:cNvSpPr txBox="1"/>
-          <p:nvPr/>
+          <p:cNvPr id="44" name="Source placeholder"/>
+          <p:cNvSpPr/>
+          <p:nvPr>
+            <p:ph idx="102" type="body" hasCustomPrompt="1"/>
+          </p:nvPr>
         </p:nvSpPr>
         <p:spPr>
           <a:xfrm>
             <a:off x="548640" y="6309360"/>
-            <a:ext cx="5852160" cy="274320"/>
+            <a:ext cx="5120640" cy="274320"/>
           </a:xfrm>
           <a:prstGeom prst="rect">
             <a:avLst/>
@@ -3732,7 +7708,7 @@
           <a:bodyPr wrap="square" lIns="0" tIns="0" rIns="0" bIns="0" rtlCol="0" anchor="ctr"/>
           <a:lstStyle/>
           <a:p>
-            <a:pPr indent="0" marL="0">
+            <a:pPr algn="l" indent="0" marL="0">
               <a:buNone/>
             </a:pPr>
             <a:r>
@@ -3740,6 +7716,9 @@
                 <a:solidFill>
                   <a:schemeClr val="tx2"/>
                 </a:solidFill>
+                <a:latin typeface="Arial" pitchFamily="34" charset="0"/>
+                <a:ea typeface="Arial" pitchFamily="34" charset="-122"/>
+                <a:cs typeface="Arial" pitchFamily="34" charset="-120"/>
               </a:rPr>
               <a:t>Source: Blocking framework §3, §6.1, §7.2</a:t>
             </a:r>
@@ -3819,16 +7798,16 @@
       </p:grpSpPr>
       <p:sp>
         <p:nvSpPr>
-          <p:cNvPr id="2" name="Text 1"/>
+          <p:cNvPr id="2" name="Title placeholder"/>
           <p:cNvSpPr/>
           <p:nvPr>
-            <p:ph idx="101" type="title" hasCustomPrompt="1"/>
+            <p:ph idx="100" type="title" hasCustomPrompt="1"/>
           </p:nvPr>
         </p:nvSpPr>
         <p:spPr>
           <a:xfrm>
             <a:off x="548640" y="384048"/>
-            <a:ext cx="7040880" cy="868680"/>
+            <a:ext cx="8595360" cy="868680"/>
           </a:xfrm>
           <a:prstGeom prst="rect">
             <a:avLst/>
@@ -3860,19 +7839,80 @@
       </p:sp>
       <p:sp>
         <p:nvSpPr>
-          <p:cNvPr id="3" name="Text 1"/>
-          <p:cNvSpPr/>
-          <p:nvPr/>
-        </p:nvSpPr>
-        <p:spPr>
-          <a:xfrm>
-            <a:off x="7882128" y="438912"/>
-            <a:ext cx="1097280" cy="310896"/>
+          <p:cNvPr id="3" name="Tag placeholder"/>
+          <p:cNvSpPr/>
+          <p:nvPr>
+            <p:ph idx="101" type="body" hasCustomPrompt="1"/>
+          </p:nvPr>
+        </p:nvSpPr>
+        <p:spPr>
+          <a:xfrm>
+            <a:off x="9326880" y="457200"/>
+            <a:ext cx="2313432" cy="274320"/>
+          </a:xfrm>
+          <a:prstGeom prst="rect">
+            <a:avLst/>
+          </a:prstGeom>
+          <a:noFill/>
+          <a:ln/>
+        </p:spPr>
+        <p:txBody>
+          <a:bodyPr wrap="square" lIns="0" tIns="0" rIns="0" bIns="0" rtlCol="0" anchor="t"/>
+          <a:lstStyle/>
+          <a:p>
+            <a:pPr algn="r" indent="0" marL="0">
+              <a:buNone/>
+            </a:pPr>
+            <a:r>
+              <a:rPr lang="en-US" sz="1000" b="1" spc="150" kern="0" dirty="0">
+                <a:solidFill>
+                  <a:schemeClr val="accent1"/>
+                </a:solidFill>
+                <a:latin typeface="Arial" pitchFamily="34" charset="0"/>
+                <a:ea typeface="Arial" pitchFamily="34" charset="-122"/>
+                <a:cs typeface="Arial" pitchFamily="34" charset="-120"/>
+              </a:rPr>
+              <a:t>PART 1 OF 3 · THE LIST</a:t>
+            </a:r>
+            <a:endParaRPr lang="en-US" sz="1000" dirty="0"/>
+          </a:p>
+        </p:txBody>
+      </p:sp>
+      <p:sp>
+        <p:nvSpPr>
+          <p:cNvPr id="4" name="phase-1"/>
+          <p:cNvSpPr/>
+          <p:nvPr/>
+        </p:nvSpPr>
+        <p:spPr>
+          <a:xfrm>
+            <a:off x="548640" y="1691640"/>
+            <a:ext cx="2542032" cy="2377440"/>
           </a:xfrm>
           <a:prstGeom prst="roundRect">
             <a:avLst>
-              <a:gd name="adj" fmla="val 47059"/>
+              <a:gd name="adj" fmla="val 3846"/>
             </a:avLst>
+          </a:prstGeom>
+          <a:solidFill>
+            <a:schemeClr val="bg2"/>
+          </a:solidFill>
+          <a:ln/>
+        </p:spPr>
+      </p:sp>
+      <p:sp>
+        <p:nvSpPr>
+          <p:cNvPr id="5" name="Text 3"/>
+          <p:cNvSpPr/>
+          <p:nvPr/>
+        </p:nvSpPr>
+        <p:spPr>
+          <a:xfrm>
+            <a:off x="777240" y="1920240"/>
+            <a:ext cx="420624" cy="420624"/>
+          </a:xfrm>
+          <a:prstGeom prst="ellipse">
+            <a:avLst/>
           </a:prstGeom>
           <a:solidFill>
             <a:schemeClr val="tx1"/>
@@ -3887,184 +7927,11 @@
               <a:buNone/>
             </a:pPr>
             <a:r>
-              <a:rPr lang="en-US" sz="1100" b="1" dirty="0">
+              <a:rPr lang="en-US" sz="1500" b="1" dirty="0">
                 <a:solidFill>
                   <a:schemeClr val="bg1"/>
                 </a:solidFill>
               </a:rPr>
-              <a:t>1  </a:t>
-            </a:r>
-            <a:pPr algn="ctr" indent="0" marL="0">
-              <a:buNone/>
-            </a:pPr>
-            <a:r>
-              <a:rPr lang="en-US" sz="1100" dirty="0">
-                <a:solidFill>
-                  <a:schemeClr val="bg1"/>
-                </a:solidFill>
-              </a:rPr>
-              <a:t>The list</a:t>
-            </a:r>
-            <a:endParaRPr lang="en-US" sz="1100" dirty="0"/>
-          </a:p>
-        </p:txBody>
-      </p:sp>
-      <p:sp>
-        <p:nvSpPr>
-          <p:cNvPr id="4" name="Text 2"/>
-          <p:cNvSpPr/>
-          <p:nvPr/>
-        </p:nvSpPr>
-        <p:spPr>
-          <a:xfrm>
-            <a:off x="9052560" y="438912"/>
-            <a:ext cx="1325880" cy="310896"/>
-          </a:xfrm>
-          <a:prstGeom prst="roundRect">
-            <a:avLst>
-              <a:gd name="adj" fmla="val 47059"/>
-            </a:avLst>
-          </a:prstGeom>
-          <a:solidFill>
-            <a:schemeClr val="bg2"/>
-          </a:solidFill>
-          <a:ln/>
-        </p:spPr>
-        <p:txBody>
-          <a:bodyPr wrap="square" lIns="0" tIns="0" rIns="0" bIns="0" rtlCol="0" anchor="ctr"/>
-          <a:lstStyle/>
-          <a:p>
-            <a:pPr algn="ctr" indent="0" marL="0">
-              <a:buNone/>
-            </a:pPr>
-            <a:r>
-              <a:rPr lang="en-US" sz="1100" b="1" dirty="0">
-                <a:solidFill>
-                  <a:schemeClr val="tx2"/>
-                </a:solidFill>
-              </a:rPr>
-              <a:t>2  </a:t>
-            </a:r>
-            <a:pPr algn="ctr" indent="0" marL="0">
-              <a:buNone/>
-            </a:pPr>
-            <a:r>
-              <a:rPr lang="en-US" sz="1100" dirty="0">
-                <a:solidFill>
-                  <a:schemeClr val="tx2"/>
-                </a:solidFill>
-              </a:rPr>
-              <a:t>Every payment</a:t>
-            </a:r>
-            <a:endParaRPr lang="en-US" sz="1100" dirty="0"/>
-          </a:p>
-        </p:txBody>
-      </p:sp>
-      <p:sp>
-        <p:nvSpPr>
-          <p:cNvPr id="5" name="Text 3"/>
-          <p:cNvSpPr/>
-          <p:nvPr/>
-        </p:nvSpPr>
-        <p:spPr>
-          <a:xfrm>
-            <a:off x="10451592" y="438912"/>
-            <a:ext cx="1188720" cy="310896"/>
-          </a:xfrm>
-          <a:prstGeom prst="roundRect">
-            <a:avLst>
-              <a:gd name="adj" fmla="val 47059"/>
-            </a:avLst>
-          </a:prstGeom>
-          <a:solidFill>
-            <a:schemeClr val="bg2"/>
-          </a:solidFill>
-          <a:ln/>
-        </p:spPr>
-        <p:txBody>
-          <a:bodyPr wrap="square" lIns="0" tIns="0" rIns="0" bIns="0" rtlCol="0" anchor="ctr"/>
-          <a:lstStyle/>
-          <a:p>
-            <a:pPr algn="ctr" indent="0" marL="0">
-              <a:buNone/>
-            </a:pPr>
-            <a:r>
-              <a:rPr lang="en-US" sz="1100" b="1" dirty="0">
-                <a:solidFill>
-                  <a:schemeClr val="tx2"/>
-                </a:solidFill>
-              </a:rPr>
-              <a:t>3  </a:t>
-            </a:r>
-            <a:pPr algn="ctr" indent="0" marL="0">
-              <a:buNone/>
-            </a:pPr>
-            <a:r>
-              <a:rPr lang="en-US" sz="1100" dirty="0">
-                <a:solidFill>
-                  <a:schemeClr val="tx2"/>
-                </a:solidFill>
-              </a:rPr>
-              <a:t>Who owns it</a:t>
-            </a:r>
-            <a:endParaRPr lang="en-US" sz="1100" dirty="0"/>
-          </a:p>
-        </p:txBody>
-      </p:sp>
-      <p:sp>
-        <p:nvSpPr>
-          <p:cNvPr id="6" name="phase-1"/>
-          <p:cNvSpPr/>
-          <p:nvPr/>
-        </p:nvSpPr>
-        <p:spPr>
-          <a:xfrm>
-            <a:off x="548640" y="1691640"/>
-            <a:ext cx="2542032" cy="2286000"/>
-          </a:xfrm>
-          <a:prstGeom prst="roundRect">
-            <a:avLst>
-              <a:gd name="adj" fmla="val 4000"/>
-            </a:avLst>
-          </a:prstGeom>
-          <a:solidFill>
-            <a:schemeClr val="bg2"/>
-          </a:solidFill>
-          <a:ln/>
-        </p:spPr>
-      </p:sp>
-      <p:sp>
-        <p:nvSpPr>
-          <p:cNvPr id="7" name="Text 5"/>
-          <p:cNvSpPr/>
-          <p:nvPr/>
-        </p:nvSpPr>
-        <p:spPr>
-          <a:xfrm>
-            <a:off x="777240" y="1920240"/>
-            <a:ext cx="420624" cy="420624"/>
-          </a:xfrm>
-          <a:prstGeom prst="ellipse">
-            <a:avLst/>
-          </a:prstGeom>
-          <a:solidFill>
-            <a:schemeClr val="tx1"/>
-          </a:solidFill>
-          <a:ln/>
-        </p:spPr>
-        <p:txBody>
-          <a:bodyPr wrap="square" lIns="0" tIns="0" rIns="0" bIns="0" rtlCol="0" anchor="ctr"/>
-          <a:lstStyle/>
-          <a:p>
-            <a:pPr algn="ctr" indent="0" marL="0">
-              <a:buNone/>
-            </a:pPr>
-            <a:r>
-              <a:rPr lang="en-US" sz="1500" b="1" dirty="0">
-                <a:solidFill>
-                  <a:schemeClr val="bg1"/>
-                </a:solidFill>
-              </a:rPr>
               <a:t>1</a:t>
             </a:r>
             <a:endParaRPr lang="en-US" sz="1500" dirty="0"/>
@@ -4073,7 +7940,7 @@
       </p:sp>
       <p:sp>
         <p:nvSpPr>
-          <p:cNvPr id="8" name="Text 6"/>
+          <p:cNvPr id="6" name="Text 4"/>
           <p:cNvSpPr txBox="1"/>
           <p:nvPr/>
         </p:nvSpPr>
@@ -4109,14 +7976,14 @@
       </p:sp>
       <p:sp>
         <p:nvSpPr>
-          <p:cNvPr id="9" name="Text 7"/>
+          <p:cNvPr id="7" name="Text 5"/>
           <p:cNvSpPr txBox="1"/>
           <p:nvPr/>
         </p:nvSpPr>
         <p:spPr>
           <a:xfrm>
             <a:off x="777240" y="2560320"/>
-            <a:ext cx="2130552" cy="1325880"/>
+            <a:ext cx="2130552" cy="1417320"/>
           </a:xfrm>
           <a:prstGeom prst="rect">
             <a:avLst/>
@@ -4167,13 +8034,13 @@
       </p:sp>
       <p:sp>
         <p:nvSpPr>
-          <p:cNvPr id="10" name="Shape 8"/>
-          <p:cNvSpPr/>
-          <p:nvPr/>
-        </p:nvSpPr>
-        <p:spPr>
-          <a:xfrm>
-            <a:off x="3127248" y="2834640"/>
+          <p:cNvPr id="8" name="Shape 6"/>
+          <p:cNvSpPr/>
+          <p:nvPr/>
+        </p:nvSpPr>
+        <p:spPr>
+          <a:xfrm>
+            <a:off x="3127248" y="2880360"/>
             <a:ext cx="231343" cy="0"/>
           </a:xfrm>
           <a:prstGeom prst="line">
@@ -4191,18 +8058,18 @@
       </p:sp>
       <p:sp>
         <p:nvSpPr>
-          <p:cNvPr id="11" name="phase-2"/>
+          <p:cNvPr id="9" name="phase-2"/>
           <p:cNvSpPr/>
           <p:nvPr/>
         </p:nvSpPr>
         <p:spPr>
           <a:xfrm>
             <a:off x="3395167" y="1691640"/>
-            <a:ext cx="2542032" cy="2286000"/>
+            <a:ext cx="2542032" cy="2377440"/>
           </a:xfrm>
           <a:prstGeom prst="roundRect">
             <a:avLst>
-              <a:gd name="adj" fmla="val 4000"/>
+              <a:gd name="adj" fmla="val 3846"/>
             </a:avLst>
           </a:prstGeom>
           <a:solidFill>
@@ -4213,7 +8080,7 @@
       </p:sp>
       <p:sp>
         <p:nvSpPr>
-          <p:cNvPr id="12" name="Text 10"/>
+          <p:cNvPr id="10" name="Text 8"/>
           <p:cNvSpPr/>
           <p:nvPr/>
         </p:nvSpPr>
@@ -4251,7 +8118,7 @@
       </p:sp>
       <p:sp>
         <p:nvSpPr>
-          <p:cNvPr id="13" name="Text 11"/>
+          <p:cNvPr id="11" name="Text 9"/>
           <p:cNvSpPr txBox="1"/>
           <p:nvPr/>
         </p:nvSpPr>
@@ -4287,14 +8154,14 @@
       </p:sp>
       <p:sp>
         <p:nvSpPr>
-          <p:cNvPr id="14" name="Text 12"/>
+          <p:cNvPr id="12" name="Text 10"/>
           <p:cNvSpPr txBox="1"/>
           <p:nvPr/>
         </p:nvSpPr>
         <p:spPr>
           <a:xfrm>
             <a:off x="3623767" y="2560320"/>
-            <a:ext cx="2130552" cy="1325880"/>
+            <a:ext cx="2130552" cy="1417320"/>
           </a:xfrm>
           <a:prstGeom prst="rect">
             <a:avLst/>
@@ -4345,13 +8212,13 @@
       </p:sp>
       <p:sp>
         <p:nvSpPr>
-          <p:cNvPr id="15" name="Shape 13"/>
-          <p:cNvSpPr/>
-          <p:nvPr/>
-        </p:nvSpPr>
-        <p:spPr>
-          <a:xfrm>
-            <a:off x="5973775" y="2834640"/>
+          <p:cNvPr id="13" name="Shape 11"/>
+          <p:cNvSpPr/>
+          <p:nvPr/>
+        </p:nvSpPr>
+        <p:spPr>
+          <a:xfrm>
+            <a:off x="5973775" y="2880360"/>
             <a:ext cx="231343" cy="0"/>
           </a:xfrm>
           <a:prstGeom prst="line">
@@ -4369,18 +8236,18 @@
       </p:sp>
       <p:sp>
         <p:nvSpPr>
-          <p:cNvPr id="16" name="phase-3"/>
+          <p:cNvPr id="14" name="phase-3"/>
           <p:cNvSpPr/>
           <p:nvPr/>
         </p:nvSpPr>
         <p:spPr>
           <a:xfrm>
             <a:off x="6241694" y="1691640"/>
-            <a:ext cx="2542032" cy="2286000"/>
+            <a:ext cx="2542032" cy="2377440"/>
           </a:xfrm>
           <a:prstGeom prst="roundRect">
             <a:avLst>
-              <a:gd name="adj" fmla="val 4000"/>
+              <a:gd name="adj" fmla="val 3846"/>
             </a:avLst>
           </a:prstGeom>
           <a:solidFill>
@@ -4398,7 +8265,7 @@
       </p:sp>
       <p:sp>
         <p:nvSpPr>
-          <p:cNvPr id="17" name="Text 15"/>
+          <p:cNvPr id="15" name="Text 13"/>
           <p:cNvSpPr/>
           <p:nvPr/>
         </p:nvSpPr>
@@ -4436,7 +8303,7 @@
       </p:sp>
       <p:sp>
         <p:nvSpPr>
-          <p:cNvPr id="18" name="Text 16"/>
+          <p:cNvPr id="16" name="Text 14"/>
           <p:cNvSpPr txBox="1"/>
           <p:nvPr/>
         </p:nvSpPr>
@@ -4472,7 +8339,7 @@
       </p:sp>
       <p:pic>
         <p:nvPicPr>
-          <p:cNvPr id="19" name="Image 0" descr="preencoded.png">    </p:cNvPr>
+          <p:cNvPr id="17" name="Image 0" descr="preencoded.png">    </p:cNvPr>
           <p:cNvPicPr>
             <a:picLocks noChangeAspect="1"/>
           </p:cNvPicPr>
@@ -4496,14 +8363,14 @@
       </p:pic>
       <p:sp>
         <p:nvSpPr>
-          <p:cNvPr id="20" name="Text 17"/>
+          <p:cNvPr id="18" name="Text 15"/>
           <p:cNvSpPr txBox="1"/>
           <p:nvPr/>
         </p:nvSpPr>
         <p:spPr>
           <a:xfrm>
             <a:off x="6470294" y="2560320"/>
-            <a:ext cx="2130552" cy="1325880"/>
+            <a:ext cx="2130552" cy="1417320"/>
           </a:xfrm>
           <a:prstGeom prst="rect">
             <a:avLst/>
@@ -4554,13 +8421,13 @@
       </p:sp>
       <p:sp>
         <p:nvSpPr>
-          <p:cNvPr id="21" name="Shape 18"/>
-          <p:cNvSpPr/>
-          <p:nvPr/>
-        </p:nvSpPr>
-        <p:spPr>
-          <a:xfrm>
-            <a:off x="8820302" y="2834640"/>
+          <p:cNvPr id="19" name="Shape 16"/>
+          <p:cNvSpPr/>
+          <p:nvPr/>
+        </p:nvSpPr>
+        <p:spPr>
+          <a:xfrm>
+            <a:off x="8820302" y="2880360"/>
             <a:ext cx="231343" cy="0"/>
           </a:xfrm>
           <a:prstGeom prst="line">
@@ -4578,18 +8445,18 @@
       </p:sp>
       <p:sp>
         <p:nvSpPr>
-          <p:cNvPr id="22" name="phase-4"/>
+          <p:cNvPr id="20" name="phase-4"/>
           <p:cNvSpPr/>
           <p:nvPr/>
         </p:nvSpPr>
         <p:spPr>
           <a:xfrm>
             <a:off x="9088222" y="1691640"/>
-            <a:ext cx="2542032" cy="2286000"/>
+            <a:ext cx="2542032" cy="2377440"/>
           </a:xfrm>
           <a:prstGeom prst="roundRect">
             <a:avLst>
-              <a:gd name="adj" fmla="val 4000"/>
+              <a:gd name="adj" fmla="val 3846"/>
             </a:avLst>
           </a:prstGeom>
           <a:solidFill>
@@ -4600,7 +8467,7 @@
       </p:sp>
       <p:sp>
         <p:nvSpPr>
-          <p:cNvPr id="23" name="Text 20"/>
+          <p:cNvPr id="21" name="Text 18"/>
           <p:cNvSpPr/>
           <p:nvPr/>
         </p:nvSpPr>
@@ -4638,7 +8505,7 @@
       </p:sp>
       <p:sp>
         <p:nvSpPr>
-          <p:cNvPr id="24" name="Text 21"/>
+          <p:cNvPr id="22" name="Text 19"/>
           <p:cNvSpPr txBox="1"/>
           <p:nvPr/>
         </p:nvSpPr>
@@ -4674,14 +8541,14 @@
       </p:sp>
       <p:sp>
         <p:nvSpPr>
-          <p:cNvPr id="25" name="Text 22"/>
+          <p:cNvPr id="23" name="Text 20"/>
           <p:cNvSpPr txBox="1"/>
           <p:nvPr/>
         </p:nvSpPr>
         <p:spPr>
           <a:xfrm>
             <a:off x="9316822" y="2560320"/>
-            <a:ext cx="2130552" cy="1325880"/>
+            <a:ext cx="2130552" cy="1417320"/>
           </a:xfrm>
           <a:prstGeom prst="rect">
             <a:avLst/>
@@ -4732,14 +8599,14 @@
       </p:sp>
       <p:sp>
         <p:nvSpPr>
-          <p:cNvPr id="26" name="Shape 23"/>
-          <p:cNvSpPr/>
-          <p:nvPr/>
-        </p:nvSpPr>
-        <p:spPr>
-          <a:xfrm>
-            <a:off x="10359238" y="3977640"/>
-            <a:ext cx="0" cy="411480"/>
+          <p:cNvPr id="24" name="Shape 21"/>
+          <p:cNvSpPr/>
+          <p:nvPr/>
+        </p:nvSpPr>
+        <p:spPr>
+          <a:xfrm>
+            <a:off x="10359238" y="4069080"/>
+            <a:ext cx="0" cy="365760"/>
           </a:xfrm>
           <a:prstGeom prst="line">
             <a:avLst/>
@@ -4756,13 +8623,13 @@
       </p:sp>
       <p:sp>
         <p:nvSpPr>
-          <p:cNvPr id="27" name="Shape 24"/>
+          <p:cNvPr id="25" name="Shape 22"/>
           <p:cNvSpPr/>
           <p:nvPr/>
         </p:nvSpPr>
         <p:spPr>
           <a:xfrm flipH="1">
-            <a:off x="1819656" y="4389120"/>
+            <a:off x="1819656" y="4434840"/>
             <a:ext cx="8539582" cy="0"/>
           </a:xfrm>
           <a:prstGeom prst="line">
@@ -4780,14 +8647,14 @@
       </p:sp>
       <p:sp>
         <p:nvSpPr>
-          <p:cNvPr id="28" name="Shape 25"/>
+          <p:cNvPr id="26" name="Shape 23"/>
           <p:cNvSpPr/>
           <p:nvPr/>
         </p:nvSpPr>
         <p:spPr>
           <a:xfrm flipV="1">
-            <a:off x="1819656" y="3995928"/>
-            <a:ext cx="0" cy="393192"/>
+            <a:off x="1819656" y="4087368"/>
+            <a:ext cx="0" cy="347472"/>
           </a:xfrm>
           <a:prstGeom prst="line">
             <a:avLst/>
@@ -4804,13 +8671,13 @@
       </p:sp>
       <p:sp>
         <p:nvSpPr>
-          <p:cNvPr id="29" name="Shape 26"/>
-          <p:cNvSpPr/>
-          <p:nvPr/>
-        </p:nvSpPr>
-        <p:spPr>
-          <a:xfrm>
-            <a:off x="2103120" y="4215384"/>
+          <p:cNvPr id="27" name="Shape 24"/>
+          <p:cNvSpPr/>
+          <p:nvPr/>
+        </p:nvSpPr>
+        <p:spPr>
+          <a:xfrm>
+            <a:off x="2103120" y="4261104"/>
             <a:ext cx="7955280" cy="347472"/>
           </a:xfrm>
           <a:prstGeom prst="roundRect">
@@ -4831,13 +8698,13 @@
       </p:sp>
       <p:sp>
         <p:nvSpPr>
-          <p:cNvPr id="30" name="Text 27"/>
+          <p:cNvPr id="28" name="Text 25"/>
           <p:cNvSpPr txBox="1"/>
           <p:nvPr/>
         </p:nvSpPr>
         <p:spPr>
           <a:xfrm>
-            <a:off x="2194560" y="4215384"/>
+            <a:off x="2194560" y="4261104"/>
             <a:ext cx="7772400" cy="347472"/>
           </a:xfrm>
           <a:prstGeom prst="rect">
@@ -4878,14 +8745,14 @@
       </p:sp>
       <p:sp>
         <p:nvSpPr>
-          <p:cNvPr id="31" name="Text 28"/>
-          <p:cNvSpPr/>
-          <p:nvPr/>
-        </p:nvSpPr>
-        <p:spPr>
-          <a:xfrm>
-            <a:off x="7973568" y="1097280"/>
-            <a:ext cx="3666744" cy="310896"/>
+          <p:cNvPr id="29" name="Text 26"/>
+          <p:cNvSpPr/>
+          <p:nvPr/>
+        </p:nvSpPr>
+        <p:spPr>
+          <a:xfrm>
+            <a:off x="9316822" y="3657600"/>
+            <a:ext cx="2084832" cy="274320"/>
           </a:xfrm>
           <a:prstGeom prst="roundRect">
             <a:avLst>
@@ -4905,20 +8772,20 @@
               <a:buNone/>
             </a:pPr>
             <a:r>
-              <a:rPr lang="en-US" sz="1200" b="1" dirty="0">
+              <a:rPr lang="en-US" sz="1100" b="1" dirty="0">
                 <a:solidFill>
                   <a:schemeClr val="bg1"/>
                 </a:solidFill>
               </a:rPr>
-              <a:t>Output: the Sanctioned BIN List, used in Part 2</a:t>
-            </a:r>
-            <a:endParaRPr lang="en-US" sz="1200" dirty="0"/>
-          </a:p>
-        </p:txBody>
-      </p:sp>
-      <p:sp>
-        <p:nvSpPr>
-          <p:cNvPr id="32" name="emergency"/>
+              <a:t>Output: Sanctioned BIN List</a:t>
+            </a:r>
+            <a:endParaRPr lang="en-US" sz="1100" dirty="0"/>
+          </a:p>
+        </p:txBody>
+      </p:sp>
+      <p:sp>
+        <p:nvSpPr>
+          <p:cNvPr id="30" name="emergency"/>
           <p:cNvSpPr/>
           <p:nvPr/>
         </p:nvSpPr>
@@ -4947,7 +8814,7 @@
       </p:sp>
       <p:sp>
         <p:nvSpPr>
-          <p:cNvPr id="33" name="Shape 30"/>
+          <p:cNvPr id="31" name="Shape 28"/>
           <p:cNvSpPr/>
           <p:nvPr/>
         </p:nvSpPr>
@@ -4969,7 +8836,7 @@
       </p:sp>
       <p:pic>
         <p:nvPicPr>
-          <p:cNvPr id="34" name="Image 1" descr="preencoded.png">    </p:cNvPr>
+          <p:cNvPr id="32" name="Image 1" descr="preencoded.png">    </p:cNvPr>
           <p:cNvPicPr>
             <a:picLocks noChangeAspect="1"/>
           </p:cNvPicPr>
@@ -4993,84 +8860,84 @@
       </p:pic>
       <p:sp>
         <p:nvSpPr>
+          <p:cNvPr id="33" name="Text 29"/>
+          <p:cNvSpPr txBox="1"/>
+          <p:nvPr/>
+        </p:nvSpPr>
+        <p:spPr>
+          <a:xfrm>
+            <a:off x="1645920" y="5029200"/>
+            <a:ext cx="6858000" cy="365760"/>
+          </a:xfrm>
+          <a:prstGeom prst="rect">
+            <a:avLst/>
+          </a:prstGeom>
+          <a:noFill/>
+          <a:ln/>
+        </p:spPr>
+        <p:txBody>
+          <a:bodyPr wrap="square" lIns="0" tIns="0" rIns="0" bIns="0" rtlCol="0" anchor="t"/>
+          <a:lstStyle/>
+          <a:p>
+            <a:pPr indent="0" marL="0">
+              <a:buNone/>
+            </a:pPr>
+            <a:r>
+              <a:rPr lang="en-US" sz="1700" b="1" dirty="0">
+                <a:solidFill>
+                  <a:schemeClr val="accent2"/>
+                </a:solidFill>
+              </a:rPr>
+              <a:t>Emergency route for a major designation</a:t>
+            </a:r>
+            <a:endParaRPr lang="en-US" sz="1700" dirty="0"/>
+          </a:p>
+        </p:txBody>
+      </p:sp>
+      <p:sp>
+        <p:nvSpPr>
+          <p:cNvPr id="34" name="Text 30"/>
+          <p:cNvSpPr txBox="1"/>
+          <p:nvPr/>
+        </p:nvSpPr>
+        <p:spPr>
+          <a:xfrm>
+            <a:off x="1645920" y="5394960"/>
+            <a:ext cx="6949440" cy="457200"/>
+          </a:xfrm>
+          <a:prstGeom prst="rect">
+            <a:avLst/>
+          </a:prstGeom>
+          <a:noFill/>
+          <a:ln/>
+        </p:spPr>
+        <p:txBody>
+          <a:bodyPr wrap="square" lIns="0" tIns="0" rIns="0" bIns="0" rtlCol="0" anchor="t"/>
+          <a:lstStyle/>
+          <a:p>
+            <a:pPr indent="0" marL="0">
+              <a:buNone/>
+            </a:pPr>
+            <a:r>
+              <a:rPr lang="en-US" sz="1300" dirty="0">
+                <a:solidFill>
+                  <a:schemeClr val="tx1"/>
+                </a:solidFill>
+              </a:rPr>
+              <a:t>Expedited approval, and a temporary block goes in before full BIN regeneration. Documentation and validation are completed afterwards.</a:t>
+            </a:r>
+            <a:endParaRPr lang="en-US" sz="1300" dirty="0"/>
+          </a:p>
+        </p:txBody>
+      </p:sp>
+      <p:sp>
+        <p:nvSpPr>
           <p:cNvPr id="35" name="Text 31"/>
           <p:cNvSpPr txBox="1"/>
           <p:nvPr/>
         </p:nvSpPr>
         <p:spPr>
           <a:xfrm>
-            <a:off x="1645920" y="5029200"/>
-            <a:ext cx="6858000" cy="365760"/>
-          </a:xfrm>
-          <a:prstGeom prst="rect">
-            <a:avLst/>
-          </a:prstGeom>
-          <a:noFill/>
-          <a:ln/>
-        </p:spPr>
-        <p:txBody>
-          <a:bodyPr wrap="square" lIns="0" tIns="0" rIns="0" bIns="0" rtlCol="0" anchor="t"/>
-          <a:lstStyle/>
-          <a:p>
-            <a:pPr indent="0" marL="0">
-              <a:buNone/>
-            </a:pPr>
-            <a:r>
-              <a:rPr lang="en-US" sz="1700" b="1" dirty="0">
-                <a:solidFill>
-                  <a:schemeClr val="accent2"/>
-                </a:solidFill>
-              </a:rPr>
-              <a:t>Emergency route for a major designation</a:t>
-            </a:r>
-            <a:endParaRPr lang="en-US" sz="1700" dirty="0"/>
-          </a:p>
-        </p:txBody>
-      </p:sp>
-      <p:sp>
-        <p:nvSpPr>
-          <p:cNvPr id="36" name="Text 32"/>
-          <p:cNvSpPr txBox="1"/>
-          <p:nvPr/>
-        </p:nvSpPr>
-        <p:spPr>
-          <a:xfrm>
-            <a:off x="1645920" y="5394960"/>
-            <a:ext cx="6949440" cy="457200"/>
-          </a:xfrm>
-          <a:prstGeom prst="rect">
-            <a:avLst/>
-          </a:prstGeom>
-          <a:noFill/>
-          <a:ln/>
-        </p:spPr>
-        <p:txBody>
-          <a:bodyPr wrap="square" lIns="0" tIns="0" rIns="0" bIns="0" rtlCol="0" anchor="t"/>
-          <a:lstStyle/>
-          <a:p>
-            <a:pPr indent="0" marL="0">
-              <a:buNone/>
-            </a:pPr>
-            <a:r>
-              <a:rPr lang="en-US" sz="1300" dirty="0">
-                <a:solidFill>
-                  <a:schemeClr val="tx1"/>
-                </a:solidFill>
-              </a:rPr>
-              <a:t>Expedited approval, and a temporary block goes in before full BIN regeneration. Documentation and validation are completed afterwards.</a:t>
-            </a:r>
-            <a:endParaRPr lang="en-US" sz="1300" dirty="0"/>
-          </a:p>
-        </p:txBody>
-      </p:sp>
-      <p:sp>
-        <p:nvSpPr>
-          <p:cNvPr id="37" name="Text 33"/>
-          <p:cNvSpPr txBox="1"/>
-          <p:nvPr/>
-        </p:nvSpPr>
-        <p:spPr>
-          <a:xfrm>
             <a:off x="8595360" y="4956048"/>
             <a:ext cx="2743200" cy="914400"/>
           </a:xfrm>
@@ -5129,14 +8996,16 @@
       </p:sp>
       <p:sp>
         <p:nvSpPr>
-          <p:cNvPr id="38" name="Text 34"/>
-          <p:cNvSpPr txBox="1"/>
-          <p:nvPr/>
+          <p:cNvPr id="36" name="Source placeholder"/>
+          <p:cNvSpPr/>
+          <p:nvPr>
+            <p:ph idx="102" type="body" hasCustomPrompt="1"/>
+          </p:nvPr>
         </p:nvSpPr>
         <p:spPr>
           <a:xfrm>
             <a:off x="548640" y="6309360"/>
-            <a:ext cx="5852160" cy="274320"/>
+            <a:ext cx="5120640" cy="274320"/>
           </a:xfrm>
           <a:prstGeom prst="rect">
             <a:avLst/>
@@ -5148,7 +9017,7 @@
           <a:bodyPr wrap="square" lIns="0" tIns="0" rIns="0" bIns="0" rtlCol="0" anchor="ctr"/>
           <a:lstStyle/>
           <a:p>
-            <a:pPr indent="0" marL="0">
+            <a:pPr algn="l" indent="0" marL="0">
               <a:buNone/>
             </a:pPr>
             <a:r>
@@ -5156,6 +9025,9 @@
                 <a:solidFill>
                   <a:schemeClr val="tx2"/>
                 </a:solidFill>
+                <a:latin typeface="Arial" pitchFamily="34" charset="0"/>
+                <a:ea typeface="Arial" pitchFamily="34" charset="-122"/>
+                <a:cs typeface="Arial" pitchFamily="34" charset="-120"/>
               </a:rPr>
               <a:t>Source: Blocking framework §6.2, §7.3, §7.4, §8.2, §9.1, §9.3, §10.1, §10.4</a:t>
             </a:r>
@@ -5235,16 +9107,16 @@
       </p:grpSpPr>
       <p:sp>
         <p:nvSpPr>
-          <p:cNvPr id="2" name="Text 1"/>
+          <p:cNvPr id="2" name="Title placeholder"/>
           <p:cNvSpPr/>
           <p:nvPr>
-            <p:ph idx="101" type="title" hasCustomPrompt="1"/>
+            <p:ph idx="100" type="title" hasCustomPrompt="1"/>
           </p:nvPr>
         </p:nvSpPr>
         <p:spPr>
           <a:xfrm>
             <a:off x="548640" y="384048"/>
-            <a:ext cx="7040880" cy="868680"/>
+            <a:ext cx="8595360" cy="868680"/>
           </a:xfrm>
           <a:prstGeom prst="rect">
             <a:avLst/>
@@ -5276,19 +9148,58 @@
       </p:sp>
       <p:sp>
         <p:nvSpPr>
-          <p:cNvPr id="3" name="Text 1"/>
-          <p:cNvSpPr/>
-          <p:nvPr/>
-        </p:nvSpPr>
-        <p:spPr>
-          <a:xfrm>
-            <a:off x="7882128" y="438912"/>
-            <a:ext cx="1097280" cy="310896"/>
-          </a:xfrm>
-          <a:prstGeom prst="roundRect">
-            <a:avLst>
-              <a:gd name="adj" fmla="val 47059"/>
-            </a:avLst>
+          <p:cNvPr id="3" name="Tag placeholder"/>
+          <p:cNvSpPr/>
+          <p:nvPr>
+            <p:ph idx="101" type="body" hasCustomPrompt="1"/>
+          </p:nvPr>
+        </p:nvSpPr>
+        <p:spPr>
+          <a:xfrm>
+            <a:off x="9326880" y="457200"/>
+            <a:ext cx="2313432" cy="274320"/>
+          </a:xfrm>
+          <a:prstGeom prst="rect">
+            <a:avLst/>
+          </a:prstGeom>
+          <a:noFill/>
+          <a:ln/>
+        </p:spPr>
+        <p:txBody>
+          <a:bodyPr wrap="square" lIns="0" tIns="0" rIns="0" bIns="0" rtlCol="0" anchor="t"/>
+          <a:lstStyle/>
+          <a:p>
+            <a:pPr algn="r" indent="0" marL="0">
+              <a:buNone/>
+            </a:pPr>
+            <a:r>
+              <a:rPr lang="en-US" sz="1000" b="1" spc="150" kern="0" dirty="0">
+                <a:solidFill>
+                  <a:schemeClr val="accent1"/>
+                </a:solidFill>
+                <a:latin typeface="Arial" pitchFamily="34" charset="0"/>
+                <a:ea typeface="Arial" pitchFamily="34" charset="-122"/>
+                <a:cs typeface="Arial" pitchFamily="34" charset="-120"/>
+              </a:rPr>
+              <a:t>PART 2 OF 3 · PAYMENTS</a:t>
+            </a:r>
+            <a:endParaRPr lang="en-US" sz="1000" dirty="0"/>
+          </a:p>
+        </p:txBody>
+      </p:sp>
+      <p:sp>
+        <p:nvSpPr>
+          <p:cNvPr id="4" name="Text 2"/>
+          <p:cNvSpPr/>
+          <p:nvPr/>
+        </p:nvSpPr>
+        <p:spPr>
+          <a:xfrm>
+            <a:off x="548640" y="1463040"/>
+            <a:ext cx="2514600" cy="475488"/>
+          </a:xfrm>
+          <a:prstGeom prst="homePlate">
+            <a:avLst/>
           </a:prstGeom>
           <a:solidFill>
             <a:schemeClr val="bg2"/>
@@ -5303,94 +9214,68 @@
               <a:buNone/>
             </a:pPr>
             <a:r>
-              <a:rPr lang="en-US" sz="1100" b="1" dirty="0">
+              <a:rPr lang="en-US" sz="1400" dirty="0">
                 <a:solidFill>
                   <a:schemeClr val="tx2"/>
                 </a:solidFill>
               </a:rPr>
-              <a:t>1  </a:t>
-            </a:r>
+              <a:t>Issuer BIN extracted</a:t>
+            </a:r>
+            <a:endParaRPr lang="en-US" sz="1400" dirty="0"/>
+          </a:p>
+        </p:txBody>
+      </p:sp>
+      <p:sp>
+        <p:nvSpPr>
+          <p:cNvPr id="5" name="Text 3"/>
+          <p:cNvSpPr/>
+          <p:nvPr/>
+        </p:nvSpPr>
+        <p:spPr>
+          <a:xfrm>
+            <a:off x="3063240" y="1463040"/>
+            <a:ext cx="2377440" cy="475488"/>
+          </a:xfrm>
+          <a:prstGeom prst="chevron">
+            <a:avLst/>
+          </a:prstGeom>
+          <a:solidFill>
+            <a:schemeClr val="accent2"/>
+          </a:solidFill>
+          <a:ln/>
+        </p:spPr>
+        <p:txBody>
+          <a:bodyPr wrap="square" lIns="0" tIns="0" rIns="0" bIns="0" rtlCol="0" anchor="ctr"/>
+          <a:lstStyle/>
+          <a:p>
             <a:pPr algn="ctr" indent="0" marL="0">
               <a:buNone/>
             </a:pPr>
             <a:r>
-              <a:rPr lang="en-US" sz="1100" dirty="0">
-                <a:solidFill>
-                  <a:schemeClr val="tx2"/>
-                </a:solidFill>
-              </a:rPr>
-              <a:t>The list</a:t>
-            </a:r>
-            <a:endParaRPr lang="en-US" sz="1100" dirty="0"/>
-          </a:p>
-        </p:txBody>
-      </p:sp>
-      <p:sp>
-        <p:nvSpPr>
-          <p:cNvPr id="4" name="Text 2"/>
-          <p:cNvSpPr/>
-          <p:nvPr/>
-        </p:nvSpPr>
-        <p:spPr>
-          <a:xfrm>
-            <a:off x="9052560" y="438912"/>
-            <a:ext cx="1325880" cy="310896"/>
-          </a:xfrm>
-          <a:prstGeom prst="roundRect">
-            <a:avLst>
-              <a:gd name="adj" fmla="val 47059"/>
-            </a:avLst>
-          </a:prstGeom>
-          <a:solidFill>
-            <a:schemeClr val="tx1"/>
-          </a:solidFill>
-          <a:ln/>
-        </p:spPr>
-        <p:txBody>
-          <a:bodyPr wrap="square" lIns="0" tIns="0" rIns="0" bIns="0" rtlCol="0" anchor="ctr"/>
-          <a:lstStyle/>
-          <a:p>
-            <a:pPr algn="ctr" indent="0" marL="0">
-              <a:buNone/>
-            </a:pPr>
-            <a:r>
-              <a:rPr lang="en-US" sz="1100" b="1" dirty="0">
+              <a:rPr lang="en-US" sz="1400" b="1" dirty="0">
                 <a:solidFill>
                   <a:schemeClr val="bg1"/>
                 </a:solidFill>
               </a:rPr>
-              <a:t>2  </a:t>
-            </a:r>
-            <a:pPr algn="ctr" indent="0" marL="0">
-              <a:buNone/>
-            </a:pPr>
-            <a:r>
-              <a:rPr lang="en-US" sz="1100" dirty="0">
-                <a:solidFill>
-                  <a:schemeClr val="bg1"/>
-                </a:solidFill>
-              </a:rPr>
-              <a:t>Every payment</a:t>
-            </a:r>
-            <a:endParaRPr lang="en-US" sz="1100" dirty="0"/>
-          </a:p>
-        </p:txBody>
-      </p:sp>
-      <p:sp>
-        <p:nvSpPr>
-          <p:cNvPr id="5" name="Text 3"/>
-          <p:cNvSpPr/>
-          <p:nvPr/>
-        </p:nvSpPr>
-        <p:spPr>
-          <a:xfrm>
-            <a:off x="10451592" y="438912"/>
-            <a:ext cx="1188720" cy="310896"/>
-          </a:xfrm>
-          <a:prstGeom prst="roundRect">
-            <a:avLst>
-              <a:gd name="adj" fmla="val 47059"/>
-            </a:avLst>
+              <a:t>Sanctions check</a:t>
+            </a:r>
+            <a:endParaRPr lang="en-US" sz="1400" dirty="0"/>
+          </a:p>
+        </p:txBody>
+      </p:sp>
+      <p:sp>
+        <p:nvSpPr>
+          <p:cNvPr id="6" name="Text 4"/>
+          <p:cNvSpPr/>
+          <p:nvPr/>
+        </p:nvSpPr>
+        <p:spPr>
+          <a:xfrm>
+            <a:off x="5440680" y="1463040"/>
+            <a:ext cx="3383280" cy="475488"/>
+          </a:xfrm>
+          <a:prstGeom prst="chevron">
+            <a:avLst/>
           </a:prstGeom>
           <a:solidFill>
             <a:schemeClr val="bg2"/>
@@ -5405,40 +9290,29 @@
               <a:buNone/>
             </a:pPr>
             <a:r>
-              <a:rPr lang="en-US" sz="1100" b="1" dirty="0">
+              <a:rPr lang="en-US" sz="1400" dirty="0">
                 <a:solidFill>
                   <a:schemeClr val="tx2"/>
                 </a:solidFill>
               </a:rPr>
-              <a:t>3  </a:t>
-            </a:r>
-            <a:pPr algn="ctr" indent="0" marL="0">
-              <a:buNone/>
-            </a:pPr>
-            <a:r>
-              <a:rPr lang="en-US" sz="1100" dirty="0">
-                <a:solidFill>
-                  <a:schemeClr val="tx2"/>
-                </a:solidFill>
-              </a:rPr>
-              <a:t>Who owns it</a:t>
-            </a:r>
-            <a:endParaRPr lang="en-US" sz="1100" dirty="0"/>
-          </a:p>
-        </p:txBody>
-      </p:sp>
-      <p:sp>
-        <p:nvSpPr>
-          <p:cNvPr id="6" name="Text 4"/>
-          <p:cNvSpPr/>
-          <p:nvPr/>
-        </p:nvSpPr>
-        <p:spPr>
-          <a:xfrm>
-            <a:off x="548640" y="1463040"/>
-            <a:ext cx="2514600" cy="475488"/>
-          </a:xfrm>
-          <a:prstGeom prst="homePlate">
+              <a:t>Authorisation request to scheme</a:t>
+            </a:r>
+            <a:endParaRPr lang="en-US" sz="1400" dirty="0"/>
+          </a:p>
+        </p:txBody>
+      </p:sp>
+      <p:sp>
+        <p:nvSpPr>
+          <p:cNvPr id="7" name="Text 5"/>
+          <p:cNvSpPr/>
+          <p:nvPr/>
+        </p:nvSpPr>
+        <p:spPr>
+          <a:xfrm>
+            <a:off x="8823960" y="1463040"/>
+            <a:ext cx="2816352" cy="475488"/>
+          </a:xfrm>
+          <a:prstGeom prst="chevron">
             <a:avLst/>
           </a:prstGeom>
           <a:solidFill>
@@ -5459,7 +9333,7 @@
                   <a:schemeClr val="tx2"/>
                 </a:solidFill>
               </a:rPr>
-              <a:t>Issuer BIN extracted</a:t>
+              <a:t>Clearing &amp; settlement</a:t>
             </a:r>
             <a:endParaRPr lang="en-US" sz="1400" dirty="0"/>
           </a:p>
@@ -5467,115 +9341,73 @@
       </p:sp>
       <p:sp>
         <p:nvSpPr>
-          <p:cNvPr id="7" name="Text 5"/>
-          <p:cNvSpPr/>
-          <p:nvPr/>
-        </p:nvSpPr>
-        <p:spPr>
-          <a:xfrm>
-            <a:off x="3063240" y="1463040"/>
-            <a:ext cx="2377440" cy="475488"/>
-          </a:xfrm>
-          <a:prstGeom prst="chevron">
-            <a:avLst/>
-          </a:prstGeom>
-          <a:solidFill>
-            <a:schemeClr val="accent2"/>
-          </a:solidFill>
-          <a:ln/>
-        </p:spPr>
-        <p:txBody>
-          <a:bodyPr wrap="square" lIns="0" tIns="0" rIns="0" bIns="0" rtlCol="0" anchor="ctr"/>
-          <a:lstStyle/>
-          <a:p>
-            <a:pPr algn="ctr" indent="0" marL="0">
-              <a:buNone/>
-            </a:pPr>
-            <a:r>
-              <a:rPr lang="en-US" sz="1400" b="1" dirty="0">
-                <a:solidFill>
-                  <a:schemeClr val="bg1"/>
-                </a:solidFill>
-              </a:rPr>
-              <a:t>Sanctions check</a:t>
-            </a:r>
-            <a:endParaRPr lang="en-US" sz="1400" dirty="0"/>
-          </a:p>
-        </p:txBody>
-      </p:sp>
-      <p:sp>
-        <p:nvSpPr>
           <p:cNvPr id="8" name="Text 6"/>
-          <p:cNvSpPr/>
-          <p:nvPr/>
-        </p:nvSpPr>
-        <p:spPr>
-          <a:xfrm>
-            <a:off x="5440680" y="1463040"/>
-            <a:ext cx="3383280" cy="475488"/>
-          </a:xfrm>
-          <a:prstGeom prst="chevron">
-            <a:avLst/>
-          </a:prstGeom>
-          <a:solidFill>
-            <a:schemeClr val="bg2"/>
-          </a:solidFill>
-          <a:ln/>
-        </p:spPr>
-        <p:txBody>
-          <a:bodyPr wrap="square" lIns="0" tIns="0" rIns="0" bIns="0" rtlCol="0" anchor="ctr"/>
-          <a:lstStyle/>
-          <a:p>
-            <a:pPr algn="ctr" indent="0" marL="0">
-              <a:buNone/>
-            </a:pPr>
-            <a:r>
-              <a:rPr lang="en-US" sz="1400" dirty="0">
+          <p:cNvSpPr txBox="1"/>
+          <p:nvPr/>
+        </p:nvSpPr>
+        <p:spPr>
+          <a:xfrm>
+            <a:off x="548640" y="2212848"/>
+            <a:ext cx="2743200" cy="228600"/>
+          </a:xfrm>
+          <a:prstGeom prst="rect">
+            <a:avLst/>
+          </a:prstGeom>
+          <a:noFill/>
+          <a:ln/>
+        </p:spPr>
+        <p:txBody>
+          <a:bodyPr wrap="square" lIns="0" tIns="0" rIns="0" bIns="0" rtlCol="0" anchor="t"/>
+          <a:lstStyle/>
+          <a:p>
+            <a:pPr indent="0" marL="0">
+              <a:buNone/>
+            </a:pPr>
+            <a:r>
+              <a:rPr lang="en-US" sz="1000" b="1" spc="200" kern="0" dirty="0">
                 <a:solidFill>
                   <a:schemeClr val="tx2"/>
                 </a:solidFill>
               </a:rPr>
-              <a:t>Authorisation request to scheme</a:t>
-            </a:r>
-            <a:endParaRPr lang="en-US" sz="1400" dirty="0"/>
+              <a:t>PAYMENT TYPE</a:t>
+            </a:r>
+            <a:endParaRPr lang="en-US" sz="1000" dirty="0"/>
           </a:p>
         </p:txBody>
       </p:sp>
       <p:sp>
         <p:nvSpPr>
           <p:cNvPr id="9" name="Text 7"/>
-          <p:cNvSpPr/>
-          <p:nvPr/>
-        </p:nvSpPr>
-        <p:spPr>
-          <a:xfrm>
-            <a:off x="8823960" y="1463040"/>
-            <a:ext cx="2816352" cy="475488"/>
-          </a:xfrm>
-          <a:prstGeom prst="chevron">
-            <a:avLst/>
-          </a:prstGeom>
-          <a:solidFill>
-            <a:schemeClr val="bg2"/>
-          </a:solidFill>
-          <a:ln/>
-        </p:spPr>
-        <p:txBody>
-          <a:bodyPr wrap="square" lIns="0" tIns="0" rIns="0" bIns="0" rtlCol="0" anchor="ctr"/>
-          <a:lstStyle/>
-          <a:p>
-            <a:pPr algn="ctr" indent="0" marL="0">
-              <a:buNone/>
-            </a:pPr>
-            <a:r>
-              <a:rPr lang="en-US" sz="1400" dirty="0">
+          <p:cNvSpPr txBox="1"/>
+          <p:nvPr/>
+        </p:nvSpPr>
+        <p:spPr>
+          <a:xfrm>
+            <a:off x="3520440" y="2212848"/>
+            <a:ext cx="2743200" cy="228600"/>
+          </a:xfrm>
+          <a:prstGeom prst="rect">
+            <a:avLst/>
+          </a:prstGeom>
+          <a:noFill/>
+          <a:ln/>
+        </p:spPr>
+        <p:txBody>
+          <a:bodyPr wrap="square" lIns="0" tIns="0" rIns="0" bIns="0" rtlCol="0" anchor="t"/>
+          <a:lstStyle/>
+          <a:p>
+            <a:pPr indent="0" marL="0">
+              <a:buNone/>
+            </a:pPr>
+            <a:r>
+              <a:rPr lang="en-US" sz="1000" b="1" spc="200" kern="0" dirty="0">
                 <a:solidFill>
                   <a:schemeClr val="tx2"/>
                 </a:solidFill>
               </a:rPr>
-              <a:t>Clearing &amp; settlement</a:t>
-            </a:r>
-            <a:endParaRPr lang="en-US" sz="1400" dirty="0"/>
+              <a:t>WHAT IS CHECKED, AND WHERE</a:t>
+            </a:r>
+            <a:endParaRPr lang="en-US" sz="1000" dirty="0"/>
           </a:p>
         </p:txBody>
       </p:sp>
@@ -5587,78 +9419,6 @@
         </p:nvSpPr>
         <p:spPr>
           <a:xfrm>
-            <a:off x="548640" y="2212848"/>
-            <a:ext cx="2743200" cy="228600"/>
-          </a:xfrm>
-          <a:prstGeom prst="rect">
-            <a:avLst/>
-          </a:prstGeom>
-          <a:noFill/>
-          <a:ln/>
-        </p:spPr>
-        <p:txBody>
-          <a:bodyPr wrap="square" lIns="0" tIns="0" rIns="0" bIns="0" rtlCol="0" anchor="t"/>
-          <a:lstStyle/>
-          <a:p>
-            <a:pPr indent="0" marL="0">
-              <a:buNone/>
-            </a:pPr>
-            <a:r>
-              <a:rPr lang="en-US" sz="1000" b="1" spc="200" kern="0" dirty="0">
-                <a:solidFill>
-                  <a:schemeClr val="tx2"/>
-                </a:solidFill>
-              </a:rPr>
-              <a:t>PAYMENT TYPE</a:t>
-            </a:r>
-            <a:endParaRPr lang="en-US" sz="1000" dirty="0"/>
-          </a:p>
-        </p:txBody>
-      </p:sp>
-      <p:sp>
-        <p:nvSpPr>
-          <p:cNvPr id="11" name="Text 9"/>
-          <p:cNvSpPr txBox="1"/>
-          <p:nvPr/>
-        </p:nvSpPr>
-        <p:spPr>
-          <a:xfrm>
-            <a:off x="3520440" y="2212848"/>
-            <a:ext cx="2743200" cy="228600"/>
-          </a:xfrm>
-          <a:prstGeom prst="rect">
-            <a:avLst/>
-          </a:prstGeom>
-          <a:noFill/>
-          <a:ln/>
-        </p:spPr>
-        <p:txBody>
-          <a:bodyPr wrap="square" lIns="0" tIns="0" rIns="0" bIns="0" rtlCol="0" anchor="t"/>
-          <a:lstStyle/>
-          <a:p>
-            <a:pPr indent="0" marL="0">
-              <a:buNone/>
-            </a:pPr>
-            <a:r>
-              <a:rPr lang="en-US" sz="1000" b="1" spc="200" kern="0" dirty="0">
-                <a:solidFill>
-                  <a:schemeClr val="tx2"/>
-                </a:solidFill>
-              </a:rPr>
-              <a:t>WHAT IS CHECKED, AND WHERE</a:t>
-            </a:r>
-            <a:endParaRPr lang="en-US" sz="1000" dirty="0"/>
-          </a:p>
-        </p:txBody>
-      </p:sp>
-      <p:sp>
-        <p:nvSpPr>
-          <p:cNvPr id="12" name="Text 10"/>
-          <p:cNvSpPr txBox="1"/>
-          <p:nvPr/>
-        </p:nvSpPr>
-        <p:spPr>
-          <a:xfrm>
             <a:off x="8622792" y="2212848"/>
             <a:ext cx="2743200" cy="228600"/>
           </a:xfrm>
@@ -5689,7 +9449,7 @@
       </p:sp>
       <p:sp>
         <p:nvSpPr>
-          <p:cNvPr id="13" name="rail-0"/>
+          <p:cNvPr id="11" name="rail-0"/>
           <p:cNvSpPr/>
           <p:nvPr/>
         </p:nvSpPr>
@@ -5711,7 +9471,7 @@
       </p:sp>
       <p:pic>
         <p:nvPicPr>
-          <p:cNvPr id="14" name="Image 0" descr="preencoded.png">    </p:cNvPr>
+          <p:cNvPr id="12" name="Image 0" descr="preencoded.png">    </p:cNvPr>
           <p:cNvPicPr>
             <a:picLocks noChangeAspect="1"/>
           </p:cNvPicPr>
@@ -5735,7 +9495,7 @@
       </p:pic>
       <p:sp>
         <p:nvSpPr>
-          <p:cNvPr id="15" name="Text 12"/>
+          <p:cNvPr id="13" name="Text 10"/>
           <p:cNvSpPr txBox="1"/>
           <p:nvPr/>
         </p:nvSpPr>
@@ -5771,7 +9531,7 @@
       </p:sp>
       <p:sp>
         <p:nvSpPr>
-          <p:cNvPr id="16" name="Text 13"/>
+          <p:cNvPr id="14" name="Text 11"/>
           <p:cNvSpPr txBox="1"/>
           <p:nvPr/>
         </p:nvSpPr>
@@ -5807,7 +9567,7 @@
       </p:sp>
       <p:sp>
         <p:nvSpPr>
-          <p:cNvPr id="17" name="Shape 14"/>
+          <p:cNvPr id="15" name="Shape 12"/>
           <p:cNvSpPr/>
           <p:nvPr/>
         </p:nvSpPr>
@@ -5831,7 +9591,7 @@
       </p:sp>
       <p:sp>
         <p:nvSpPr>
-          <p:cNvPr id="18" name="check-0"/>
+          <p:cNvPr id="16" name="check-0"/>
           <p:cNvSpPr/>
           <p:nvPr/>
         </p:nvSpPr>
@@ -5858,7 +9618,7 @@
       </p:sp>
       <p:sp>
         <p:nvSpPr>
-          <p:cNvPr id="19" name="Text 16"/>
+          <p:cNvPr id="17" name="Text 14"/>
           <p:cNvSpPr txBox="1"/>
           <p:nvPr/>
         </p:nvSpPr>
@@ -5894,7 +9654,7 @@
       </p:sp>
       <p:sp>
         <p:nvSpPr>
-          <p:cNvPr id="20" name="Text 17"/>
+          <p:cNvPr id="18" name="Text 15"/>
           <p:cNvSpPr txBox="1"/>
           <p:nvPr/>
         </p:nvSpPr>
@@ -5930,7 +9690,7 @@
       </p:sp>
       <p:sp>
         <p:nvSpPr>
-          <p:cNvPr id="21" name="Shape 18"/>
+          <p:cNvPr id="19" name="Shape 16"/>
           <p:cNvSpPr/>
           <p:nvPr/>
         </p:nvSpPr>
@@ -5954,7 +9714,7 @@
       </p:sp>
       <p:sp>
         <p:nvSpPr>
-          <p:cNvPr id="22" name="Text 19"/>
+          <p:cNvPr id="20" name="Text 17"/>
           <p:cNvSpPr/>
           <p:nvPr/>
         </p:nvSpPr>
@@ -5996,7 +9756,7 @@
       </p:sp>
       <p:sp>
         <p:nvSpPr>
-          <p:cNvPr id="23" name="Shape 20"/>
+          <p:cNvPr id="21" name="Shape 18"/>
           <p:cNvSpPr/>
           <p:nvPr/>
         </p:nvSpPr>
@@ -6020,7 +9780,7 @@
       </p:sp>
       <p:sp>
         <p:nvSpPr>
-          <p:cNvPr id="24" name="Shape 21"/>
+          <p:cNvPr id="22" name="Shape 19"/>
           <p:cNvSpPr/>
           <p:nvPr/>
         </p:nvSpPr>
@@ -6044,7 +9804,7 @@
       </p:sp>
       <p:sp>
         <p:nvSpPr>
-          <p:cNvPr id="25" name="Shape 22"/>
+          <p:cNvPr id="23" name="Shape 20"/>
           <p:cNvSpPr/>
           <p:nvPr/>
         </p:nvSpPr>
@@ -6068,7 +9828,7 @@
       </p:sp>
       <p:sp>
         <p:nvSpPr>
-          <p:cNvPr id="26" name="Shape 23"/>
+          <p:cNvPr id="24" name="Shape 21"/>
           <p:cNvSpPr/>
           <p:nvPr/>
         </p:nvSpPr>
@@ -6092,7 +9852,7 @@
       </p:sp>
       <p:sp>
         <p:nvSpPr>
-          <p:cNvPr id="27" name="Shape 24"/>
+          <p:cNvPr id="25" name="Shape 22"/>
           <p:cNvSpPr/>
           <p:nvPr/>
         </p:nvSpPr>
@@ -6116,7 +9876,7 @@
       </p:sp>
       <p:sp>
         <p:nvSpPr>
-          <p:cNvPr id="28" name="Shape 25"/>
+          <p:cNvPr id="26" name="Shape 23"/>
           <p:cNvSpPr/>
           <p:nvPr/>
         </p:nvSpPr>
@@ -6140,7 +9900,7 @@
       </p:sp>
       <p:sp>
         <p:nvSpPr>
-          <p:cNvPr id="29" name="Text 26"/>
+          <p:cNvPr id="27" name="Text 24"/>
           <p:cNvSpPr/>
           <p:nvPr/>
         </p:nvSpPr>
@@ -6178,7 +9938,7 @@
       </p:sp>
       <p:sp>
         <p:nvSpPr>
-          <p:cNvPr id="30" name="Text 27"/>
+          <p:cNvPr id="28" name="Text 25"/>
           <p:cNvSpPr txBox="1"/>
           <p:nvPr/>
         </p:nvSpPr>
@@ -6214,7 +9974,7 @@
       </p:sp>
       <p:sp>
         <p:nvSpPr>
-          <p:cNvPr id="31" name="Shape 28"/>
+          <p:cNvPr id="29" name="Shape 26"/>
           <p:cNvSpPr/>
           <p:nvPr/>
         </p:nvSpPr>
@@ -6238,7 +9998,7 @@
       </p:sp>
       <p:sp>
         <p:nvSpPr>
-          <p:cNvPr id="32" name="Text 29"/>
+          <p:cNvPr id="30" name="Text 27"/>
           <p:cNvSpPr/>
           <p:nvPr/>
         </p:nvSpPr>
@@ -6276,7 +10036,7 @@
       </p:sp>
       <p:sp>
         <p:nvSpPr>
-          <p:cNvPr id="33" name="Text 30"/>
+          <p:cNvPr id="31" name="Text 28"/>
           <p:cNvSpPr txBox="1"/>
           <p:nvPr/>
         </p:nvSpPr>
@@ -6312,7 +10072,7 @@
       </p:sp>
       <p:sp>
         <p:nvSpPr>
-          <p:cNvPr id="34" name="rail-1"/>
+          <p:cNvPr id="32" name="rail-1"/>
           <p:cNvSpPr/>
           <p:nvPr/>
         </p:nvSpPr>
@@ -6334,7 +10094,7 @@
       </p:sp>
       <p:pic>
         <p:nvPicPr>
-          <p:cNvPr id="35" name="Image 1" descr="preencoded.png">    </p:cNvPr>
+          <p:cNvPr id="33" name="Image 1" descr="preencoded.png">    </p:cNvPr>
           <p:cNvPicPr>
             <a:picLocks noChangeAspect="1"/>
           </p:cNvPicPr>
@@ -6358,7 +10118,7 @@
       </p:pic>
       <p:sp>
         <p:nvSpPr>
-          <p:cNvPr id="36" name="Text 32"/>
+          <p:cNvPr id="34" name="Text 30"/>
           <p:cNvSpPr txBox="1"/>
           <p:nvPr/>
         </p:nvSpPr>
@@ -6394,7 +10154,7 @@
       </p:sp>
       <p:sp>
         <p:nvSpPr>
-          <p:cNvPr id="37" name="Text 33"/>
+          <p:cNvPr id="35" name="Text 31"/>
           <p:cNvSpPr txBox="1"/>
           <p:nvPr/>
         </p:nvSpPr>
@@ -6430,7 +10190,7 @@
       </p:sp>
       <p:sp>
         <p:nvSpPr>
-          <p:cNvPr id="38" name="Shape 34"/>
+          <p:cNvPr id="36" name="Shape 32"/>
           <p:cNvSpPr/>
           <p:nvPr/>
         </p:nvSpPr>
@@ -6454,7 +10214,7 @@
       </p:sp>
       <p:sp>
         <p:nvSpPr>
-          <p:cNvPr id="39" name="check-1"/>
+          <p:cNvPr id="37" name="check-1"/>
           <p:cNvSpPr/>
           <p:nvPr/>
         </p:nvSpPr>
@@ -6481,7 +10241,7 @@
       </p:sp>
       <p:sp>
         <p:nvSpPr>
-          <p:cNvPr id="40" name="Text 36"/>
+          <p:cNvPr id="38" name="Text 34"/>
           <p:cNvSpPr txBox="1"/>
           <p:nvPr/>
         </p:nvSpPr>
@@ -6517,7 +10277,7 @@
       </p:sp>
       <p:sp>
         <p:nvSpPr>
-          <p:cNvPr id="41" name="Text 37"/>
+          <p:cNvPr id="39" name="Text 35"/>
           <p:cNvSpPr txBox="1"/>
           <p:nvPr/>
         </p:nvSpPr>
@@ -6553,7 +10313,7 @@
       </p:sp>
       <p:sp>
         <p:nvSpPr>
-          <p:cNvPr id="42" name="Shape 38"/>
+          <p:cNvPr id="40" name="Shape 36"/>
           <p:cNvSpPr/>
           <p:nvPr/>
         </p:nvSpPr>
@@ -6577,7 +10337,7 @@
       </p:sp>
       <p:sp>
         <p:nvSpPr>
-          <p:cNvPr id="43" name="Text 39"/>
+          <p:cNvPr id="41" name="Text 37"/>
           <p:cNvSpPr/>
           <p:nvPr/>
         </p:nvSpPr>
@@ -6619,7 +10379,7 @@
       </p:sp>
       <p:sp>
         <p:nvSpPr>
-          <p:cNvPr id="44" name="Shape 40"/>
+          <p:cNvPr id="42" name="Shape 38"/>
           <p:cNvSpPr/>
           <p:nvPr/>
         </p:nvSpPr>
@@ -6643,7 +10403,7 @@
       </p:sp>
       <p:sp>
         <p:nvSpPr>
-          <p:cNvPr id="45" name="Shape 41"/>
+          <p:cNvPr id="43" name="Shape 39"/>
           <p:cNvSpPr/>
           <p:nvPr/>
         </p:nvSpPr>
@@ -6667,7 +10427,7 @@
       </p:sp>
       <p:sp>
         <p:nvSpPr>
-          <p:cNvPr id="46" name="Shape 42"/>
+          <p:cNvPr id="44" name="Shape 40"/>
           <p:cNvSpPr/>
           <p:nvPr/>
         </p:nvSpPr>
@@ -6691,7 +10451,7 @@
       </p:sp>
       <p:sp>
         <p:nvSpPr>
-          <p:cNvPr id="47" name="Shape 43"/>
+          <p:cNvPr id="45" name="Shape 41"/>
           <p:cNvSpPr/>
           <p:nvPr/>
         </p:nvSpPr>
@@ -6715,7 +10475,7 @@
       </p:sp>
       <p:sp>
         <p:nvSpPr>
-          <p:cNvPr id="48" name="Shape 44"/>
+          <p:cNvPr id="46" name="Shape 42"/>
           <p:cNvSpPr/>
           <p:nvPr/>
         </p:nvSpPr>
@@ -6739,7 +10499,7 @@
       </p:sp>
       <p:sp>
         <p:nvSpPr>
-          <p:cNvPr id="49" name="Shape 45"/>
+          <p:cNvPr id="47" name="Shape 43"/>
           <p:cNvSpPr/>
           <p:nvPr/>
         </p:nvSpPr>
@@ -6763,7 +10523,7 @@
       </p:sp>
       <p:sp>
         <p:nvSpPr>
-          <p:cNvPr id="50" name="Text 46"/>
+          <p:cNvPr id="48" name="Text 44"/>
           <p:cNvSpPr/>
           <p:nvPr/>
         </p:nvSpPr>
@@ -6801,7 +10561,7 @@
       </p:sp>
       <p:sp>
         <p:nvSpPr>
-          <p:cNvPr id="51" name="Text 47"/>
+          <p:cNvPr id="49" name="Text 45"/>
           <p:cNvSpPr txBox="1"/>
           <p:nvPr/>
         </p:nvSpPr>
@@ -6837,7 +10597,7 @@
       </p:sp>
       <p:sp>
         <p:nvSpPr>
-          <p:cNvPr id="52" name="Shape 48"/>
+          <p:cNvPr id="50" name="Shape 46"/>
           <p:cNvSpPr/>
           <p:nvPr/>
         </p:nvSpPr>
@@ -6861,7 +10621,7 @@
       </p:sp>
       <p:sp>
         <p:nvSpPr>
-          <p:cNvPr id="53" name="Text 49"/>
+          <p:cNvPr id="51" name="Text 47"/>
           <p:cNvSpPr/>
           <p:nvPr/>
         </p:nvSpPr>
@@ -6899,7 +10659,7 @@
       </p:sp>
       <p:sp>
         <p:nvSpPr>
-          <p:cNvPr id="54" name="Text 50"/>
+          <p:cNvPr id="52" name="Text 48"/>
           <p:cNvSpPr txBox="1"/>
           <p:nvPr/>
         </p:nvSpPr>
@@ -6935,7 +10695,7 @@
       </p:sp>
       <p:sp>
         <p:nvSpPr>
-          <p:cNvPr id="55" name="Shape 51"/>
+          <p:cNvPr id="53" name="Shape 49"/>
           <p:cNvSpPr/>
           <p:nvPr/>
         </p:nvSpPr>
@@ -6957,7 +10717,7 @@
       </p:sp>
       <p:sp>
         <p:nvSpPr>
-          <p:cNvPr id="56" name="Text 52"/>
+          <p:cNvPr id="54" name="Text 50"/>
           <p:cNvSpPr txBox="1"/>
           <p:nvPr/>
         </p:nvSpPr>
@@ -7004,14 +10764,16 @@
       </p:sp>
       <p:sp>
         <p:nvSpPr>
-          <p:cNvPr id="57" name="Text 53"/>
-          <p:cNvSpPr txBox="1"/>
-          <p:nvPr/>
+          <p:cNvPr id="55" name="Source placeholder"/>
+          <p:cNvSpPr/>
+          <p:nvPr>
+            <p:ph idx="102" type="body" hasCustomPrompt="1"/>
+          </p:nvPr>
         </p:nvSpPr>
         <p:spPr>
           <a:xfrm>
             <a:off x="548640" y="6309360"/>
-            <a:ext cx="5852160" cy="274320"/>
+            <a:ext cx="5120640" cy="274320"/>
           </a:xfrm>
           <a:prstGeom prst="rect">
             <a:avLst/>
@@ -7023,7 +10785,7 @@
           <a:bodyPr wrap="square" lIns="0" tIns="0" rIns="0" bIns="0" rtlCol="0" anchor="ctr"/>
           <a:lstStyle/>
           <a:p>
-            <a:pPr indent="0" marL="0">
+            <a:pPr algn="l" indent="0" marL="0">
               <a:buNone/>
             </a:pPr>
             <a:r>
@@ -7031,6 +10793,9 @@
                 <a:solidFill>
                   <a:schemeClr val="tx2"/>
                 </a:solidFill>
+                <a:latin typeface="Arial" pitchFamily="34" charset="0"/>
+                <a:ea typeface="Arial" pitchFamily="34" charset="-122"/>
+                <a:cs typeface="Arial" pitchFamily="34" charset="-120"/>
               </a:rPr>
               <a:t>Source: Blocking framework §4, §7.2 (minimum requirements), §7.3.1, §8.1</a:t>
             </a:r>
@@ -7110,16 +10875,16 @@
       </p:grpSpPr>
       <p:sp>
         <p:nvSpPr>
-          <p:cNvPr id="2" name="Text 1"/>
+          <p:cNvPr id="2" name="Title placeholder"/>
           <p:cNvSpPr/>
           <p:nvPr>
-            <p:ph idx="101" type="title" hasCustomPrompt="1"/>
+            <p:ph idx="100" type="title" hasCustomPrompt="1"/>
           </p:nvPr>
         </p:nvSpPr>
         <p:spPr>
           <a:xfrm>
             <a:off x="548640" y="384048"/>
-            <a:ext cx="7040880" cy="868680"/>
+            <a:ext cx="8595360" cy="868680"/>
           </a:xfrm>
           <a:prstGeom prst="rect">
             <a:avLst/>
@@ -7151,160 +10916,48 @@
       </p:sp>
       <p:sp>
         <p:nvSpPr>
-          <p:cNvPr id="3" name="Text 1"/>
-          <p:cNvSpPr/>
-          <p:nvPr/>
-        </p:nvSpPr>
-        <p:spPr>
-          <a:xfrm>
-            <a:off x="7882128" y="438912"/>
-            <a:ext cx="1097280" cy="310896"/>
-          </a:xfrm>
-          <a:prstGeom prst="roundRect">
-            <a:avLst>
-              <a:gd name="adj" fmla="val 47059"/>
-            </a:avLst>
-          </a:prstGeom>
-          <a:solidFill>
-            <a:schemeClr val="bg2"/>
-          </a:solidFill>
-          <a:ln/>
-        </p:spPr>
-        <p:txBody>
-          <a:bodyPr wrap="square" lIns="0" tIns="0" rIns="0" bIns="0" rtlCol="0" anchor="ctr"/>
-          <a:lstStyle/>
-          <a:p>
-            <a:pPr algn="ctr" indent="0" marL="0">
-              <a:buNone/>
-            </a:pPr>
-            <a:r>
-              <a:rPr lang="en-US" sz="1100" b="1" dirty="0">
-                <a:solidFill>
-                  <a:schemeClr val="tx2"/>
-                </a:solidFill>
-              </a:rPr>
-              <a:t>1  </a:t>
-            </a:r>
-            <a:pPr algn="ctr" indent="0" marL="0">
-              <a:buNone/>
-            </a:pPr>
-            <a:r>
-              <a:rPr lang="en-US" sz="1100" dirty="0">
-                <a:solidFill>
-                  <a:schemeClr val="tx2"/>
-                </a:solidFill>
-              </a:rPr>
-              <a:t>The list</a:t>
-            </a:r>
-            <a:endParaRPr lang="en-US" sz="1100" dirty="0"/>
-          </a:p>
-        </p:txBody>
-      </p:sp>
-      <p:sp>
-        <p:nvSpPr>
-          <p:cNvPr id="4" name="Text 2"/>
-          <p:cNvSpPr/>
-          <p:nvPr/>
-        </p:nvSpPr>
-        <p:spPr>
-          <a:xfrm>
-            <a:off x="9052560" y="438912"/>
-            <a:ext cx="1325880" cy="310896"/>
-          </a:xfrm>
-          <a:prstGeom prst="roundRect">
-            <a:avLst>
-              <a:gd name="adj" fmla="val 47059"/>
-            </a:avLst>
-          </a:prstGeom>
-          <a:solidFill>
-            <a:schemeClr val="bg2"/>
-          </a:solidFill>
-          <a:ln/>
-        </p:spPr>
-        <p:txBody>
-          <a:bodyPr wrap="square" lIns="0" tIns="0" rIns="0" bIns="0" rtlCol="0" anchor="ctr"/>
-          <a:lstStyle/>
-          <a:p>
-            <a:pPr algn="ctr" indent="0" marL="0">
-              <a:buNone/>
-            </a:pPr>
-            <a:r>
-              <a:rPr lang="en-US" sz="1100" b="1" dirty="0">
-                <a:solidFill>
-                  <a:schemeClr val="tx2"/>
-                </a:solidFill>
-              </a:rPr>
-              <a:t>2  </a:t>
-            </a:r>
-            <a:pPr algn="ctr" indent="0" marL="0">
-              <a:buNone/>
-            </a:pPr>
-            <a:r>
-              <a:rPr lang="en-US" sz="1100" dirty="0">
-                <a:solidFill>
-                  <a:schemeClr val="tx2"/>
-                </a:solidFill>
-              </a:rPr>
-              <a:t>Every payment</a:t>
-            </a:r>
-            <a:endParaRPr lang="en-US" sz="1100" dirty="0"/>
-          </a:p>
-        </p:txBody>
-      </p:sp>
-      <p:sp>
-        <p:nvSpPr>
-          <p:cNvPr id="5" name="Text 3"/>
-          <p:cNvSpPr/>
-          <p:nvPr/>
-        </p:nvSpPr>
-        <p:spPr>
-          <a:xfrm>
-            <a:off x="10451592" y="438912"/>
-            <a:ext cx="1188720" cy="310896"/>
-          </a:xfrm>
-          <a:prstGeom prst="roundRect">
-            <a:avLst>
-              <a:gd name="adj" fmla="val 47059"/>
-            </a:avLst>
-          </a:prstGeom>
-          <a:solidFill>
-            <a:schemeClr val="tx1"/>
-          </a:solidFill>
-          <a:ln/>
-        </p:spPr>
-        <p:txBody>
-          <a:bodyPr wrap="square" lIns="0" tIns="0" rIns="0" bIns="0" rtlCol="0" anchor="ctr"/>
-          <a:lstStyle/>
-          <a:p>
-            <a:pPr algn="ctr" indent="0" marL="0">
-              <a:buNone/>
-            </a:pPr>
-            <a:r>
-              <a:rPr lang="en-US" sz="1100" b="1" dirty="0">
-                <a:solidFill>
-                  <a:schemeClr val="bg1"/>
-                </a:solidFill>
-              </a:rPr>
-              <a:t>3  </a:t>
-            </a:r>
-            <a:pPr algn="ctr" indent="0" marL="0">
-              <a:buNone/>
-            </a:pPr>
-            <a:r>
-              <a:rPr lang="en-US" sz="1100" dirty="0">
-                <a:solidFill>
-                  <a:schemeClr val="bg1"/>
-                </a:solidFill>
-              </a:rPr>
-              <a:t>Who owns it</a:t>
-            </a:r>
-            <a:endParaRPr lang="en-US" sz="1100" dirty="0"/>
-          </a:p>
-        </p:txBody>
-      </p:sp>
-      <p:sp>
-        <p:nvSpPr>
-          <p:cNvPr id="6" name="1LOD"/>
+          <p:cNvPr id="3" name="Tag placeholder"/>
+          <p:cNvSpPr/>
+          <p:nvPr>
+            <p:ph idx="101" type="body" hasCustomPrompt="1"/>
+          </p:nvPr>
+        </p:nvSpPr>
+        <p:spPr>
+          <a:xfrm>
+            <a:off x="9326880" y="457200"/>
+            <a:ext cx="2313432" cy="274320"/>
+          </a:xfrm>
+          <a:prstGeom prst="rect">
+            <a:avLst/>
+          </a:prstGeom>
+          <a:noFill/>
+          <a:ln/>
+        </p:spPr>
+        <p:txBody>
+          <a:bodyPr wrap="square" lIns="0" tIns="0" rIns="0" bIns="0" rtlCol="0" anchor="t"/>
+          <a:lstStyle/>
+          <a:p>
+            <a:pPr algn="r" indent="0" marL="0">
+              <a:buNone/>
+            </a:pPr>
+            <a:r>
+              <a:rPr lang="en-US" sz="1000" b="1" spc="150" kern="0" dirty="0">
+                <a:solidFill>
+                  <a:schemeClr val="accent1"/>
+                </a:solidFill>
+                <a:latin typeface="Arial" pitchFamily="34" charset="0"/>
+                <a:ea typeface="Arial" pitchFamily="34" charset="-122"/>
+                <a:cs typeface="Arial" pitchFamily="34" charset="-120"/>
+              </a:rPr>
+              <a:t>PART 3 OF 3 · OWNERSHIP</a:t>
+            </a:r>
+            <a:endParaRPr lang="en-US" sz="1000" dirty="0"/>
+          </a:p>
+        </p:txBody>
+      </p:sp>
+      <p:sp>
+        <p:nvSpPr>
+          <p:cNvPr id="4" name="1LOD"/>
           <p:cNvSpPr/>
           <p:nvPr/>
         </p:nvSpPr>
@@ -7326,84 +10979,84 @@
       </p:sp>
       <p:sp>
         <p:nvSpPr>
+          <p:cNvPr id="5" name="Text 3"/>
+          <p:cNvSpPr txBox="1"/>
+          <p:nvPr/>
+        </p:nvSpPr>
+        <p:spPr>
+          <a:xfrm>
+            <a:off x="777240" y="1783080"/>
+            <a:ext cx="1097280" cy="411480"/>
+          </a:xfrm>
+          <a:prstGeom prst="rect">
+            <a:avLst/>
+          </a:prstGeom>
+          <a:noFill/>
+          <a:ln/>
+        </p:spPr>
+        <p:txBody>
+          <a:bodyPr wrap="square" lIns="0" tIns="0" rIns="0" bIns="0" rtlCol="0" anchor="t"/>
+          <a:lstStyle/>
+          <a:p>
+            <a:pPr indent="0" marL="0">
+              <a:buNone/>
+            </a:pPr>
+            <a:r>
+              <a:rPr lang="en-US" sz="2400" b="1" dirty="0">
+                <a:solidFill>
+                  <a:schemeClr val="accent1"/>
+                </a:solidFill>
+              </a:rPr>
+              <a:t>1LOD</a:t>
+            </a:r>
+            <a:endParaRPr lang="en-US" sz="2400" dirty="0"/>
+          </a:p>
+        </p:txBody>
+      </p:sp>
+      <p:sp>
+        <p:nvSpPr>
+          <p:cNvPr id="6" name="Text 4"/>
+          <p:cNvSpPr txBox="1"/>
+          <p:nvPr/>
+        </p:nvSpPr>
+        <p:spPr>
+          <a:xfrm>
+            <a:off x="777240" y="2203704"/>
+            <a:ext cx="2103120" cy="320040"/>
+          </a:xfrm>
+          <a:prstGeom prst="rect">
+            <a:avLst/>
+          </a:prstGeom>
+          <a:noFill/>
+          <a:ln/>
+        </p:spPr>
+        <p:txBody>
+          <a:bodyPr wrap="square" lIns="0" tIns="0" rIns="0" bIns="0" rtlCol="0" anchor="t"/>
+          <a:lstStyle/>
+          <a:p>
+            <a:pPr indent="0" marL="0">
+              <a:buNone/>
+            </a:pPr>
+            <a:r>
+              <a:rPr lang="en-US" sz="1300" b="1" dirty="0">
+                <a:solidFill>
+                  <a:schemeClr val="tx1"/>
+                </a:solidFill>
+              </a:rPr>
+              <a:t>Payments &amp; Engineering</a:t>
+            </a:r>
+            <a:endParaRPr lang="en-US" sz="1300" dirty="0"/>
+          </a:p>
+        </p:txBody>
+      </p:sp>
+      <p:sp>
+        <p:nvSpPr>
           <p:cNvPr id="7" name="Text 5"/>
           <p:cNvSpPr txBox="1"/>
           <p:nvPr/>
         </p:nvSpPr>
         <p:spPr>
           <a:xfrm>
-            <a:off x="777240" y="1783080"/>
-            <a:ext cx="1097280" cy="411480"/>
-          </a:xfrm>
-          <a:prstGeom prst="rect">
-            <a:avLst/>
-          </a:prstGeom>
-          <a:noFill/>
-          <a:ln/>
-        </p:spPr>
-        <p:txBody>
-          <a:bodyPr wrap="square" lIns="0" tIns="0" rIns="0" bIns="0" rtlCol="0" anchor="t"/>
-          <a:lstStyle/>
-          <a:p>
-            <a:pPr indent="0" marL="0">
-              <a:buNone/>
-            </a:pPr>
-            <a:r>
-              <a:rPr lang="en-US" sz="2400" b="1" dirty="0">
-                <a:solidFill>
-                  <a:schemeClr val="accent1"/>
-                </a:solidFill>
-              </a:rPr>
-              <a:t>1LOD</a:t>
-            </a:r>
-            <a:endParaRPr lang="en-US" sz="2400" dirty="0"/>
-          </a:p>
-        </p:txBody>
-      </p:sp>
-      <p:sp>
-        <p:nvSpPr>
-          <p:cNvPr id="8" name="Text 6"/>
-          <p:cNvSpPr txBox="1"/>
-          <p:nvPr/>
-        </p:nvSpPr>
-        <p:spPr>
-          <a:xfrm>
-            <a:off x="777240" y="2203704"/>
-            <a:ext cx="2103120" cy="320040"/>
-          </a:xfrm>
-          <a:prstGeom prst="rect">
-            <a:avLst/>
-          </a:prstGeom>
-          <a:noFill/>
-          <a:ln/>
-        </p:spPr>
-        <p:txBody>
-          <a:bodyPr wrap="square" lIns="0" tIns="0" rIns="0" bIns="0" rtlCol="0" anchor="t"/>
-          <a:lstStyle/>
-          <a:p>
-            <a:pPr indent="0" marL="0">
-              <a:buNone/>
-            </a:pPr>
-            <a:r>
-              <a:rPr lang="en-US" sz="1300" b="1" dirty="0">
-                <a:solidFill>
-                  <a:schemeClr val="tx1"/>
-                </a:solidFill>
-              </a:rPr>
-              <a:t>Payments &amp; Engineering</a:t>
-            </a:r>
-            <a:endParaRPr lang="en-US" sz="1300" dirty="0"/>
-          </a:p>
-        </p:txBody>
-      </p:sp>
-      <p:sp>
-        <p:nvSpPr>
-          <p:cNvPr id="9" name="Text 7"/>
-          <p:cNvSpPr txBox="1"/>
-          <p:nvPr/>
-        </p:nvSpPr>
-        <p:spPr>
-          <a:xfrm>
             <a:off x="777240" y="2478024"/>
             <a:ext cx="2103120" cy="320040"/>
           </a:xfrm>
@@ -7434,7 +11087,7 @@
       </p:sp>
       <p:sp>
         <p:nvSpPr>
-          <p:cNvPr id="10" name="Text 8"/>
+          <p:cNvPr id="8" name="Text 6"/>
           <p:cNvSpPr txBox="1"/>
           <p:nvPr/>
         </p:nvSpPr>
@@ -7510,7 +11163,7 @@
       </p:sp>
       <p:sp>
         <p:nvSpPr>
-          <p:cNvPr id="11" name="2LOD"/>
+          <p:cNvPr id="9" name="2LOD"/>
           <p:cNvSpPr/>
           <p:nvPr/>
         </p:nvSpPr>
@@ -7539,84 +11192,84 @@
       </p:sp>
       <p:sp>
         <p:nvSpPr>
+          <p:cNvPr id="10" name="Text 8"/>
+          <p:cNvSpPr txBox="1"/>
+          <p:nvPr/>
+        </p:nvSpPr>
+        <p:spPr>
+          <a:xfrm>
+            <a:off x="777240" y="3474720"/>
+            <a:ext cx="1097280" cy="411480"/>
+          </a:xfrm>
+          <a:prstGeom prst="rect">
+            <a:avLst/>
+          </a:prstGeom>
+          <a:noFill/>
+          <a:ln/>
+        </p:spPr>
+        <p:txBody>
+          <a:bodyPr wrap="square" lIns="0" tIns="0" rIns="0" bIns="0" rtlCol="0" anchor="t"/>
+          <a:lstStyle/>
+          <a:p>
+            <a:pPr indent="0" marL="0">
+              <a:buNone/>
+            </a:pPr>
+            <a:r>
+              <a:rPr lang="en-US" sz="2400" b="1" dirty="0">
+                <a:solidFill>
+                  <a:schemeClr val="accent4"/>
+                </a:solidFill>
+              </a:rPr>
+              <a:t>2LOD</a:t>
+            </a:r>
+            <a:endParaRPr lang="en-US" sz="2400" dirty="0"/>
+          </a:p>
+        </p:txBody>
+      </p:sp>
+      <p:sp>
+        <p:nvSpPr>
+          <p:cNvPr id="11" name="Text 9"/>
+          <p:cNvSpPr txBox="1"/>
+          <p:nvPr/>
+        </p:nvSpPr>
+        <p:spPr>
+          <a:xfrm>
+            <a:off x="777240" y="3895344"/>
+            <a:ext cx="2103120" cy="320040"/>
+          </a:xfrm>
+          <a:prstGeom prst="rect">
+            <a:avLst/>
+          </a:prstGeom>
+          <a:noFill/>
+          <a:ln/>
+        </p:spPr>
+        <p:txBody>
+          <a:bodyPr wrap="square" lIns="0" tIns="0" rIns="0" bIns="0" rtlCol="0" anchor="t"/>
+          <a:lstStyle/>
+          <a:p>
+            <a:pPr indent="0" marL="0">
+              <a:buNone/>
+            </a:pPr>
+            <a:r>
+              <a:rPr lang="en-US" sz="1300" b="1" dirty="0">
+                <a:solidFill>
+                  <a:schemeClr val="tx1"/>
+                </a:solidFill>
+              </a:rPr>
+              <a:t>Sanctions Team</a:t>
+            </a:r>
+            <a:endParaRPr lang="en-US" sz="1300" dirty="0"/>
+          </a:p>
+        </p:txBody>
+      </p:sp>
+      <p:sp>
+        <p:nvSpPr>
           <p:cNvPr id="12" name="Text 10"/>
           <p:cNvSpPr txBox="1"/>
           <p:nvPr/>
         </p:nvSpPr>
         <p:spPr>
           <a:xfrm>
-            <a:off x="777240" y="3474720"/>
-            <a:ext cx="1097280" cy="411480"/>
-          </a:xfrm>
-          <a:prstGeom prst="rect">
-            <a:avLst/>
-          </a:prstGeom>
-          <a:noFill/>
-          <a:ln/>
-        </p:spPr>
-        <p:txBody>
-          <a:bodyPr wrap="square" lIns="0" tIns="0" rIns="0" bIns="0" rtlCol="0" anchor="t"/>
-          <a:lstStyle/>
-          <a:p>
-            <a:pPr indent="0" marL="0">
-              <a:buNone/>
-            </a:pPr>
-            <a:r>
-              <a:rPr lang="en-US" sz="2400" b="1" dirty="0">
-                <a:solidFill>
-                  <a:schemeClr val="accent4"/>
-                </a:solidFill>
-              </a:rPr>
-              <a:t>2LOD</a:t>
-            </a:r>
-            <a:endParaRPr lang="en-US" sz="2400" dirty="0"/>
-          </a:p>
-        </p:txBody>
-      </p:sp>
-      <p:sp>
-        <p:nvSpPr>
-          <p:cNvPr id="13" name="Text 11"/>
-          <p:cNvSpPr txBox="1"/>
-          <p:nvPr/>
-        </p:nvSpPr>
-        <p:spPr>
-          <a:xfrm>
-            <a:off x="777240" y="3895344"/>
-            <a:ext cx="2103120" cy="320040"/>
-          </a:xfrm>
-          <a:prstGeom prst="rect">
-            <a:avLst/>
-          </a:prstGeom>
-          <a:noFill/>
-          <a:ln/>
-        </p:spPr>
-        <p:txBody>
-          <a:bodyPr wrap="square" lIns="0" tIns="0" rIns="0" bIns="0" rtlCol="0" anchor="t"/>
-          <a:lstStyle/>
-          <a:p>
-            <a:pPr indent="0" marL="0">
-              <a:buNone/>
-            </a:pPr>
-            <a:r>
-              <a:rPr lang="en-US" sz="1300" b="1" dirty="0">
-                <a:solidFill>
-                  <a:schemeClr val="tx1"/>
-                </a:solidFill>
-              </a:rPr>
-              <a:t>Sanctions Team</a:t>
-            </a:r>
-            <a:endParaRPr lang="en-US" sz="1300" dirty="0"/>
-          </a:p>
-        </p:txBody>
-      </p:sp>
-      <p:sp>
-        <p:nvSpPr>
-          <p:cNvPr id="14" name="Text 12"/>
-          <p:cNvSpPr txBox="1"/>
-          <p:nvPr/>
-        </p:nvSpPr>
-        <p:spPr>
-          <a:xfrm>
             <a:off x="777240" y="4169664"/>
             <a:ext cx="2103120" cy="320040"/>
           </a:xfrm>
@@ -7647,7 +11300,7 @@
       </p:sp>
       <p:sp>
         <p:nvSpPr>
-          <p:cNvPr id="15" name="Text 13"/>
+          <p:cNvPr id="13" name="Text 11"/>
           <p:cNvSpPr txBox="1"/>
           <p:nvPr/>
         </p:nvSpPr>
@@ -7723,7 +11376,7 @@
       </p:sp>
       <p:sp>
         <p:nvSpPr>
-          <p:cNvPr id="16" name="3LOD"/>
+          <p:cNvPr id="14" name="3LOD"/>
           <p:cNvSpPr/>
           <p:nvPr/>
         </p:nvSpPr>
@@ -7745,84 +11398,84 @@
       </p:sp>
       <p:sp>
         <p:nvSpPr>
+          <p:cNvPr id="15" name="Text 13"/>
+          <p:cNvSpPr txBox="1"/>
+          <p:nvPr/>
+        </p:nvSpPr>
+        <p:spPr>
+          <a:xfrm>
+            <a:off x="777240" y="5029200"/>
+            <a:ext cx="1097280" cy="411480"/>
+          </a:xfrm>
+          <a:prstGeom prst="rect">
+            <a:avLst/>
+          </a:prstGeom>
+          <a:noFill/>
+          <a:ln/>
+        </p:spPr>
+        <p:txBody>
+          <a:bodyPr wrap="square" lIns="0" tIns="0" rIns="0" bIns="0" rtlCol="0" anchor="t"/>
+          <a:lstStyle/>
+          <a:p>
+            <a:pPr indent="0" marL="0">
+              <a:buNone/>
+            </a:pPr>
+            <a:r>
+              <a:rPr lang="en-US" sz="2400" b="1" dirty="0">
+                <a:solidFill>
+                  <a:schemeClr val="accent1"/>
+                </a:solidFill>
+              </a:rPr>
+              <a:t>3LOD</a:t>
+            </a:r>
+            <a:endParaRPr lang="en-US" sz="2400" dirty="0"/>
+          </a:p>
+        </p:txBody>
+      </p:sp>
+      <p:sp>
+        <p:nvSpPr>
+          <p:cNvPr id="16" name="Text 14"/>
+          <p:cNvSpPr txBox="1"/>
+          <p:nvPr/>
+        </p:nvSpPr>
+        <p:spPr>
+          <a:xfrm>
+            <a:off x="777240" y="5449824"/>
+            <a:ext cx="2103120" cy="320040"/>
+          </a:xfrm>
+          <a:prstGeom prst="rect">
+            <a:avLst/>
+          </a:prstGeom>
+          <a:noFill/>
+          <a:ln/>
+        </p:spPr>
+        <p:txBody>
+          <a:bodyPr wrap="square" lIns="0" tIns="0" rIns="0" bIns="0" rtlCol="0" anchor="t"/>
+          <a:lstStyle/>
+          <a:p>
+            <a:pPr indent="0" marL="0">
+              <a:buNone/>
+            </a:pPr>
+            <a:r>
+              <a:rPr lang="en-US" sz="1300" b="1" dirty="0">
+                <a:solidFill>
+                  <a:schemeClr val="tx1"/>
+                </a:solidFill>
+              </a:rPr>
+              <a:t>Internal Audit</a:t>
+            </a:r>
+            <a:endParaRPr lang="en-US" sz="1300" dirty="0"/>
+          </a:p>
+        </p:txBody>
+      </p:sp>
+      <p:sp>
+        <p:nvSpPr>
           <p:cNvPr id="17" name="Text 15"/>
           <p:cNvSpPr txBox="1"/>
           <p:nvPr/>
         </p:nvSpPr>
         <p:spPr>
           <a:xfrm>
-            <a:off x="777240" y="5029200"/>
-            <a:ext cx="1097280" cy="411480"/>
-          </a:xfrm>
-          <a:prstGeom prst="rect">
-            <a:avLst/>
-          </a:prstGeom>
-          <a:noFill/>
-          <a:ln/>
-        </p:spPr>
-        <p:txBody>
-          <a:bodyPr wrap="square" lIns="0" tIns="0" rIns="0" bIns="0" rtlCol="0" anchor="t"/>
-          <a:lstStyle/>
-          <a:p>
-            <a:pPr indent="0" marL="0">
-              <a:buNone/>
-            </a:pPr>
-            <a:r>
-              <a:rPr lang="en-US" sz="2400" b="1" dirty="0">
-                <a:solidFill>
-                  <a:schemeClr val="accent1"/>
-                </a:solidFill>
-              </a:rPr>
-              <a:t>3LOD</a:t>
-            </a:r>
-            <a:endParaRPr lang="en-US" sz="2400" dirty="0"/>
-          </a:p>
-        </p:txBody>
-      </p:sp>
-      <p:sp>
-        <p:nvSpPr>
-          <p:cNvPr id="18" name="Text 16"/>
-          <p:cNvSpPr txBox="1"/>
-          <p:nvPr/>
-        </p:nvSpPr>
-        <p:spPr>
-          <a:xfrm>
-            <a:off x="777240" y="5449824"/>
-            <a:ext cx="2103120" cy="320040"/>
-          </a:xfrm>
-          <a:prstGeom prst="rect">
-            <a:avLst/>
-          </a:prstGeom>
-          <a:noFill/>
-          <a:ln/>
-        </p:spPr>
-        <p:txBody>
-          <a:bodyPr wrap="square" lIns="0" tIns="0" rIns="0" bIns="0" rtlCol="0" anchor="t"/>
-          <a:lstStyle/>
-          <a:p>
-            <a:pPr indent="0" marL="0">
-              <a:buNone/>
-            </a:pPr>
-            <a:r>
-              <a:rPr lang="en-US" sz="1300" b="1" dirty="0">
-                <a:solidFill>
-                  <a:schemeClr val="tx1"/>
-                </a:solidFill>
-              </a:rPr>
-              <a:t>Internal Audit</a:t>
-            </a:r>
-            <a:endParaRPr lang="en-US" sz="1300" dirty="0"/>
-          </a:p>
-        </p:txBody>
-      </p:sp>
-      <p:sp>
-        <p:nvSpPr>
-          <p:cNvPr id="19" name="Text 17"/>
-          <p:cNvSpPr txBox="1"/>
-          <p:nvPr/>
-        </p:nvSpPr>
-        <p:spPr>
-          <a:xfrm>
             <a:off x="777240" y="5724144"/>
             <a:ext cx="2103120" cy="320040"/>
           </a:xfrm>
@@ -7853,7 +11506,7 @@
       </p:sp>
       <p:sp>
         <p:nvSpPr>
-          <p:cNvPr id="20" name="Text 18"/>
+          <p:cNvPr id="18" name="Text 16"/>
           <p:cNvSpPr txBox="1"/>
           <p:nvPr/>
         </p:nvSpPr>
@@ -7893,7 +11546,7 @@
       </p:sp>
       <p:sp>
         <p:nvSpPr>
-          <p:cNvPr id="21" name="stat-0"/>
+          <p:cNvPr id="19" name="stat-0"/>
           <p:cNvSpPr/>
           <p:nvPr/>
         </p:nvSpPr>
@@ -7927,7 +11580,7 @@
       </p:sp>
       <p:sp>
         <p:nvSpPr>
-          <p:cNvPr id="22" name="Text 20"/>
+          <p:cNvPr id="20" name="Text 18"/>
           <p:cNvSpPr txBox="1"/>
           <p:nvPr/>
         </p:nvSpPr>
@@ -7963,7 +11616,7 @@
       </p:sp>
       <p:sp>
         <p:nvSpPr>
-          <p:cNvPr id="23" name="Text 21"/>
+          <p:cNvPr id="21" name="Text 19"/>
           <p:cNvSpPr txBox="1"/>
           <p:nvPr/>
         </p:nvSpPr>
@@ -7999,7 +11652,7 @@
       </p:sp>
       <p:sp>
         <p:nvSpPr>
-          <p:cNvPr id="24" name="stat-1"/>
+          <p:cNvPr id="22" name="stat-1"/>
           <p:cNvSpPr/>
           <p:nvPr/>
         </p:nvSpPr>
@@ -8033,7 +11686,7 @@
       </p:sp>
       <p:sp>
         <p:nvSpPr>
-          <p:cNvPr id="25" name="Text 23"/>
+          <p:cNvPr id="23" name="Text 21"/>
           <p:cNvSpPr txBox="1"/>
           <p:nvPr/>
         </p:nvSpPr>
@@ -8069,7 +11722,7 @@
       </p:sp>
       <p:sp>
         <p:nvSpPr>
-          <p:cNvPr id="26" name="Text 24"/>
+          <p:cNvPr id="24" name="Text 22"/>
           <p:cNvSpPr txBox="1"/>
           <p:nvPr/>
         </p:nvSpPr>
@@ -8105,7 +11758,7 @@
       </p:sp>
       <p:sp>
         <p:nvSpPr>
-          <p:cNvPr id="27" name="stat-2"/>
+          <p:cNvPr id="25" name="stat-2"/>
           <p:cNvSpPr/>
           <p:nvPr/>
         </p:nvSpPr>
@@ -8139,7 +11792,7 @@
       </p:sp>
       <p:sp>
         <p:nvSpPr>
-          <p:cNvPr id="28" name="Text 26"/>
+          <p:cNvPr id="26" name="Text 24"/>
           <p:cNvSpPr txBox="1"/>
           <p:nvPr/>
         </p:nvSpPr>
@@ -8175,7 +11828,7 @@
       </p:sp>
       <p:sp>
         <p:nvSpPr>
-          <p:cNvPr id="29" name="Text 27"/>
+          <p:cNvPr id="27" name="Text 25"/>
           <p:cNvSpPr txBox="1"/>
           <p:nvPr/>
         </p:nvSpPr>
@@ -8211,14 +11864,16 @@
       </p:sp>
       <p:sp>
         <p:nvSpPr>
-          <p:cNvPr id="30" name="Text 28"/>
-          <p:cNvSpPr txBox="1"/>
-          <p:nvPr/>
+          <p:cNvPr id="28" name="Source placeholder"/>
+          <p:cNvSpPr/>
+          <p:nvPr>
+            <p:ph idx="102" type="body" hasCustomPrompt="1"/>
+          </p:nvPr>
         </p:nvSpPr>
         <p:spPr>
           <a:xfrm>
             <a:off x="548640" y="6309360"/>
-            <a:ext cx="5852160" cy="274320"/>
+            <a:ext cx="5120640" cy="274320"/>
           </a:xfrm>
           <a:prstGeom prst="rect">
             <a:avLst/>
@@ -8230,7 +11885,7 @@
           <a:bodyPr wrap="square" lIns="0" tIns="0" rIns="0" bIns="0" rtlCol="0" anchor="ctr"/>
           <a:lstStyle/>
           <a:p>
-            <a:pPr indent="0" marL="0">
+            <a:pPr algn="l" indent="0" marL="0">
               <a:buNone/>
             </a:pPr>
             <a:r>
@@ -8238,6 +11893,9 @@
                 <a:solidFill>
                   <a:schemeClr val="tx2"/>
                 </a:solidFill>
+                <a:latin typeface="Arial" pitchFamily="34" charset="0"/>
+                <a:ea typeface="Arial" pitchFamily="34" charset="-122"/>
+                <a:cs typeface="Arial" pitchFamily="34" charset="-120"/>
               </a:rPr>
               <a:t>Source: Blocking framework §8.1, §8.2, §8.3, §9.1, §11</a:t>
             </a:r>
@@ -8317,16 +11975,16 @@
       </p:grpSpPr>
       <p:sp>
         <p:nvSpPr>
-          <p:cNvPr id="2" name="Text 1"/>
+          <p:cNvPr id="2" name="Title placeholder"/>
           <p:cNvSpPr/>
           <p:nvPr>
-            <p:ph idx="101" type="title" hasCustomPrompt="1"/>
+            <p:ph idx="100" type="title" hasCustomPrompt="1"/>
           </p:nvPr>
         </p:nvSpPr>
         <p:spPr>
           <a:xfrm>
             <a:off x="548640" y="384048"/>
-            <a:ext cx="7040880" cy="868680"/>
+            <a:ext cx="8595360" cy="868680"/>
           </a:xfrm>
           <a:prstGeom prst="rect">
             <a:avLst/>
@@ -8358,7 +12016,48 @@
       </p:sp>
       <p:sp>
         <p:nvSpPr>
-          <p:cNvPr id="3" name="lesson-0"/>
+          <p:cNvPr id="3" name="Tag placeholder"/>
+          <p:cNvSpPr/>
+          <p:nvPr>
+            <p:ph idx="101" type="body" hasCustomPrompt="1"/>
+          </p:nvPr>
+        </p:nvSpPr>
+        <p:spPr>
+          <a:xfrm>
+            <a:off x="9326880" y="457200"/>
+            <a:ext cx="2313432" cy="274320"/>
+          </a:xfrm>
+          <a:prstGeom prst="rect">
+            <a:avLst/>
+          </a:prstGeom>
+          <a:noFill/>
+          <a:ln/>
+        </p:spPr>
+        <p:txBody>
+          <a:bodyPr wrap="square" lIns="0" tIns="0" rIns="0" bIns="0" rtlCol="0" anchor="t"/>
+          <a:lstStyle/>
+          <a:p>
+            <a:pPr algn="r" indent="0" marL="0">
+              <a:buNone/>
+            </a:pPr>
+            <a:r>
+              <a:rPr lang="en-US" sz="1000" b="1" spc="150" kern="0" dirty="0">
+                <a:solidFill>
+                  <a:schemeClr val="accent1"/>
+                </a:solidFill>
+                <a:latin typeface="Arial" pitchFamily="34" charset="0"/>
+                <a:ea typeface="Arial" pitchFamily="34" charset="-122"/>
+                <a:cs typeface="Arial" pitchFamily="34" charset="-120"/>
+              </a:rPr>
+              <a:t>LESSONS</a:t>
+            </a:r>
+            <a:endParaRPr lang="en-US" sz="1000" dirty="0"/>
+          </a:p>
+        </p:txBody>
+      </p:sp>
+      <p:sp>
+        <p:nvSpPr>
+          <p:cNvPr id="4" name="lesson-0"/>
           <p:cNvSpPr/>
           <p:nvPr/>
         </p:nvSpPr>
@@ -8392,7 +12091,7 @@
       </p:sp>
       <p:sp>
         <p:nvSpPr>
-          <p:cNvPr id="4" name="Shape 2"/>
+          <p:cNvPr id="5" name="Shape 3"/>
           <p:cNvSpPr/>
           <p:nvPr/>
         </p:nvSpPr>
@@ -8414,7 +12113,7 @@
       </p:sp>
       <p:pic>
         <p:nvPicPr>
-          <p:cNvPr id="5" name="Image 0" descr="preencoded.png">    </p:cNvPr>
+          <p:cNvPr id="6" name="Image 0" descr="preencoded.png">    </p:cNvPr>
           <p:cNvPicPr>
             <a:picLocks noChangeAspect="1"/>
           </p:cNvPicPr>
@@ -8438,7 +12137,7 @@
       </p:pic>
       <p:sp>
         <p:nvSpPr>
-          <p:cNvPr id="6" name="Text 3"/>
+          <p:cNvPr id="7" name="Text 4"/>
           <p:cNvSpPr txBox="1"/>
           <p:nvPr/>
         </p:nvSpPr>
@@ -8474,7 +12173,7 @@
       </p:sp>
       <p:sp>
         <p:nvSpPr>
-          <p:cNvPr id="7" name="Text 4"/>
+          <p:cNvPr id="8" name="Text 5"/>
           <p:cNvSpPr txBox="1"/>
           <p:nvPr/>
         </p:nvSpPr>
@@ -8510,7 +12209,7 @@
       </p:sp>
       <p:sp>
         <p:nvSpPr>
-          <p:cNvPr id="8" name="lesson-1"/>
+          <p:cNvPr id="9" name="lesson-1"/>
           <p:cNvSpPr/>
           <p:nvPr/>
         </p:nvSpPr>
@@ -8544,7 +12243,7 @@
       </p:sp>
       <p:sp>
         <p:nvSpPr>
-          <p:cNvPr id="9" name="Shape 6"/>
+          <p:cNvPr id="10" name="Shape 7"/>
           <p:cNvSpPr/>
           <p:nvPr/>
         </p:nvSpPr>
@@ -8566,7 +12265,7 @@
       </p:sp>
       <p:pic>
         <p:nvPicPr>
-          <p:cNvPr id="10" name="Image 1" descr="preencoded.png">    </p:cNvPr>
+          <p:cNvPr id="11" name="Image 1" descr="preencoded.png">    </p:cNvPr>
           <p:cNvPicPr>
             <a:picLocks noChangeAspect="1"/>
           </p:cNvPicPr>
@@ -8590,7 +12289,7 @@
       </p:pic>
       <p:sp>
         <p:nvSpPr>
-          <p:cNvPr id="11" name="Text 7"/>
+          <p:cNvPr id="12" name="Text 8"/>
           <p:cNvSpPr txBox="1"/>
           <p:nvPr/>
         </p:nvSpPr>
@@ -8626,7 +12325,7 @@
       </p:sp>
       <p:sp>
         <p:nvSpPr>
-          <p:cNvPr id="12" name="Text 8"/>
+          <p:cNvPr id="13" name="Text 9"/>
           <p:cNvSpPr txBox="1"/>
           <p:nvPr/>
         </p:nvSpPr>
@@ -8662,7 +12361,7 @@
       </p:sp>
       <p:sp>
         <p:nvSpPr>
-          <p:cNvPr id="13" name="lesson-2"/>
+          <p:cNvPr id="14" name="lesson-2"/>
           <p:cNvSpPr/>
           <p:nvPr/>
         </p:nvSpPr>
@@ -8696,7 +12395,7 @@
       </p:sp>
       <p:sp>
         <p:nvSpPr>
-          <p:cNvPr id="14" name="Shape 10"/>
+          <p:cNvPr id="15" name="Shape 11"/>
           <p:cNvSpPr/>
           <p:nvPr/>
         </p:nvSpPr>
@@ -8718,7 +12417,7 @@
       </p:sp>
       <p:pic>
         <p:nvPicPr>
-          <p:cNvPr id="15" name="Image 2" descr="preencoded.png">    </p:cNvPr>
+          <p:cNvPr id="16" name="Image 2" descr="preencoded.png">    </p:cNvPr>
           <p:cNvPicPr>
             <a:picLocks noChangeAspect="1"/>
           </p:cNvPicPr>
@@ -8742,7 +12441,7 @@
       </p:pic>
       <p:sp>
         <p:nvSpPr>
-          <p:cNvPr id="16" name="Text 11"/>
+          <p:cNvPr id="17" name="Text 12"/>
           <p:cNvSpPr txBox="1"/>
           <p:nvPr/>
         </p:nvSpPr>
@@ -8778,7 +12477,7 @@
       </p:sp>
       <p:sp>
         <p:nvSpPr>
-          <p:cNvPr id="17" name="Text 12"/>
+          <p:cNvPr id="18" name="Text 13"/>
           <p:cNvSpPr txBox="1"/>
           <p:nvPr/>
         </p:nvSpPr>
@@ -8814,7 +12513,7 @@
       </p:sp>
       <p:sp>
         <p:nvSpPr>
-          <p:cNvPr id="18" name="lesson-3"/>
+          <p:cNvPr id="19" name="lesson-3"/>
           <p:cNvSpPr/>
           <p:nvPr/>
         </p:nvSpPr>
@@ -8848,7 +12547,7 @@
       </p:sp>
       <p:sp>
         <p:nvSpPr>
-          <p:cNvPr id="19" name="Shape 14"/>
+          <p:cNvPr id="20" name="Shape 15"/>
           <p:cNvSpPr/>
           <p:nvPr/>
         </p:nvSpPr>
@@ -8870,7 +12569,7 @@
       </p:sp>
       <p:pic>
         <p:nvPicPr>
-          <p:cNvPr id="20" name="Image 3" descr="preencoded.png">    </p:cNvPr>
+          <p:cNvPr id="21" name="Image 3" descr="preencoded.png">    </p:cNvPr>
           <p:cNvPicPr>
             <a:picLocks noChangeAspect="1"/>
           </p:cNvPicPr>
@@ -8894,7 +12593,7 @@
       </p:pic>
       <p:sp>
         <p:nvSpPr>
-          <p:cNvPr id="21" name="Text 15"/>
+          <p:cNvPr id="22" name="Text 16"/>
           <p:cNvSpPr txBox="1"/>
           <p:nvPr/>
         </p:nvSpPr>
@@ -8930,7 +12629,7 @@
       </p:sp>
       <p:sp>
         <p:nvSpPr>
-          <p:cNvPr id="22" name="Text 16"/>
+          <p:cNvPr id="23" name="Text 17"/>
           <p:cNvSpPr txBox="1"/>
           <p:nvPr/>
         </p:nvSpPr>
@@ -8966,14 +12665,16 @@
       </p:sp>
       <p:sp>
         <p:nvSpPr>
-          <p:cNvPr id="23" name="Text 17"/>
-          <p:cNvSpPr txBox="1"/>
-          <p:nvPr/>
+          <p:cNvPr id="24" name="Source placeholder"/>
+          <p:cNvSpPr/>
+          <p:nvPr>
+            <p:ph idx="102" type="body" hasCustomPrompt="1"/>
+          </p:nvPr>
         </p:nvSpPr>
         <p:spPr>
           <a:xfrm>
             <a:off x="548640" y="6309360"/>
-            <a:ext cx="5852160" cy="274320"/>
+            <a:ext cx="5120640" cy="274320"/>
           </a:xfrm>
           <a:prstGeom prst="rect">
             <a:avLst/>
@@ -8985,7 +12686,7 @@
           <a:bodyPr wrap="square" lIns="0" tIns="0" rIns="0" bIns="0" rtlCol="0" anchor="ctr"/>
           <a:lstStyle/>
           <a:p>
-            <a:pPr indent="0" marL="0">
+            <a:pPr algn="l" indent="0" marL="0">
               <a:buNone/>
             </a:pPr>
             <a:r>
@@ -8993,6 +12694,9 @@
                 <a:solidFill>
                   <a:schemeClr val="tx2"/>
                 </a:solidFill>
+                <a:latin typeface="Arial" pitchFamily="34" charset="0"/>
+                <a:ea typeface="Arial" pitchFamily="34" charset="-122"/>
+                <a:cs typeface="Arial" pitchFamily="34" charset="-120"/>
               </a:rPr>
               <a:t>Source: Blocking framework §3, §6.3, §7.4, §8.2, §10.4</a:t>
             </a:r>
@@ -9072,16 +12776,16 @@
       </p:grpSpPr>
       <p:sp>
         <p:nvSpPr>
-          <p:cNvPr id="2" name="Text 1"/>
+          <p:cNvPr id="2" name="Title placeholder"/>
           <p:cNvSpPr/>
           <p:nvPr>
-            <p:ph idx="101" type="title" hasCustomPrompt="1"/>
+            <p:ph idx="100" type="title" hasCustomPrompt="1"/>
           </p:nvPr>
         </p:nvSpPr>
         <p:spPr>
           <a:xfrm>
             <a:off x="548640" y="548640"/>
-            <a:ext cx="7040880" cy="868680"/>
+            <a:ext cx="8595360" cy="868680"/>
           </a:xfrm>
           <a:prstGeom prst="rect">
             <a:avLst/>
@@ -9113,7 +12817,48 @@
       </p:sp>
       <p:sp>
         <p:nvSpPr>
-          <p:cNvPr id="3" name="Text 1"/>
+          <p:cNvPr id="3" name="Tag placeholder"/>
+          <p:cNvSpPr/>
+          <p:nvPr>
+            <p:ph idx="101" type="body" hasCustomPrompt="1"/>
+          </p:nvPr>
+        </p:nvSpPr>
+        <p:spPr>
+          <a:xfrm>
+            <a:off x="9326880" y="621792"/>
+            <a:ext cx="2313432" cy="274320"/>
+          </a:xfrm>
+          <a:prstGeom prst="rect">
+            <a:avLst/>
+          </a:prstGeom>
+          <a:noFill/>
+          <a:ln/>
+        </p:spPr>
+        <p:txBody>
+          <a:bodyPr wrap="square" lIns="0" tIns="0" rIns="0" bIns="0" rtlCol="0" anchor="t"/>
+          <a:lstStyle/>
+          <a:p>
+            <a:pPr algn="r" indent="0" marL="0">
+              <a:buNone/>
+            </a:pPr>
+            <a:r>
+              <a:rPr lang="en-US" sz="1000" b="1" spc="150" kern="0" dirty="0">
+                <a:solidFill>
+                  <a:schemeClr val="accent5"/>
+                </a:solidFill>
+                <a:latin typeface="Arial" pitchFamily="34" charset="0"/>
+                <a:ea typeface="Arial" pitchFamily="34" charset="-122"/>
+                <a:cs typeface="Arial" pitchFamily="34" charset="-120"/>
+              </a:rPr>
+              <a:t>TAKEAWAYS</a:t>
+            </a:r>
+            <a:endParaRPr lang="en-US" sz="1000" dirty="0"/>
+          </a:p>
+        </p:txBody>
+      </p:sp>
+      <p:sp>
+        <p:nvSpPr>
+          <p:cNvPr id="4" name="Text 2"/>
           <p:cNvSpPr txBox="1"/>
           <p:nvPr/>
         </p:nvSpPr>
@@ -9149,7 +12894,7 @@
       </p:sp>
       <p:sp>
         <p:nvSpPr>
-          <p:cNvPr id="4" name="Shape 2"/>
+          <p:cNvPr id="5" name="Shape 3"/>
           <p:cNvSpPr/>
           <p:nvPr/>
         </p:nvSpPr>
@@ -9173,7 +12918,7 @@
       </p:sp>
       <p:sp>
         <p:nvSpPr>
-          <p:cNvPr id="5" name="Text 3"/>
+          <p:cNvPr id="6" name="Text 4"/>
           <p:cNvSpPr txBox="1"/>
           <p:nvPr/>
         </p:nvSpPr>
@@ -9209,7 +12954,7 @@
       </p:sp>
       <p:sp>
         <p:nvSpPr>
-          <p:cNvPr id="6" name="Text 4"/>
+          <p:cNvPr id="7" name="Text 5"/>
           <p:cNvSpPr txBox="1"/>
           <p:nvPr/>
         </p:nvSpPr>
@@ -9245,7 +12990,7 @@
       </p:sp>
       <p:sp>
         <p:nvSpPr>
-          <p:cNvPr id="7" name="Text 5"/>
+          <p:cNvPr id="8" name="Text 6"/>
           <p:cNvSpPr txBox="1"/>
           <p:nvPr/>
         </p:nvSpPr>
@@ -9281,7 +13026,7 @@
       </p:sp>
       <p:sp>
         <p:nvSpPr>
-          <p:cNvPr id="8" name="Shape 6"/>
+          <p:cNvPr id="9" name="Shape 7"/>
           <p:cNvSpPr/>
           <p:nvPr/>
         </p:nvSpPr>
@@ -9305,7 +13050,7 @@
       </p:sp>
       <p:sp>
         <p:nvSpPr>
-          <p:cNvPr id="9" name="Text 7"/>
+          <p:cNvPr id="10" name="Text 8"/>
           <p:cNvSpPr txBox="1"/>
           <p:nvPr/>
         </p:nvSpPr>
@@ -9341,7 +13086,7 @@
       </p:sp>
       <p:sp>
         <p:nvSpPr>
-          <p:cNvPr id="10" name="Text 8"/>
+          <p:cNvPr id="11" name="Text 9"/>
           <p:cNvSpPr txBox="1"/>
           <p:nvPr/>
         </p:nvSpPr>
@@ -9377,7 +13122,7 @@
       </p:sp>
       <p:sp>
         <p:nvSpPr>
-          <p:cNvPr id="11" name="Text 9"/>
+          <p:cNvPr id="12" name="Text 10"/>
           <p:cNvSpPr txBox="1"/>
           <p:nvPr/>
         </p:nvSpPr>
@@ -9413,7 +13158,7 @@
       </p:sp>
       <p:sp>
         <p:nvSpPr>
-          <p:cNvPr id="12" name="Shape 10"/>
+          <p:cNvPr id="13" name="Shape 11"/>
           <p:cNvSpPr/>
           <p:nvPr/>
         </p:nvSpPr>
@@ -9437,7 +13182,7 @@
       </p:sp>
       <p:sp>
         <p:nvSpPr>
-          <p:cNvPr id="13" name="Text 11"/>
+          <p:cNvPr id="14" name="Text 12"/>
           <p:cNvSpPr txBox="1"/>
           <p:nvPr/>
         </p:nvSpPr>
@@ -9473,7 +13218,7 @@
       </p:sp>
       <p:sp>
         <p:nvSpPr>
-          <p:cNvPr id="14" name="Text 12"/>
+          <p:cNvPr id="15" name="Text 13"/>
           <p:cNvSpPr txBox="1"/>
           <p:nvPr/>
         </p:nvSpPr>
@@ -9509,14 +13254,16 @@
       </p:sp>
       <p:sp>
         <p:nvSpPr>
-          <p:cNvPr id="15" name="Text 13"/>
-          <p:cNvSpPr txBox="1"/>
-          <p:nvPr/>
+          <p:cNvPr id="16" name="Source placeholder"/>
+          <p:cNvSpPr/>
+          <p:nvPr>
+            <p:ph idx="102" type="body" hasCustomPrompt="1"/>
+          </p:nvPr>
         </p:nvSpPr>
         <p:spPr>
           <a:xfrm>
             <a:off x="548640" y="6309360"/>
-            <a:ext cx="5852160" cy="274320"/>
+            <a:ext cx="5120640" cy="274320"/>
           </a:xfrm>
           <a:prstGeom prst="rect">
             <a:avLst/>
@@ -9528,7 +13275,7 @@
           <a:bodyPr wrap="square" lIns="0" tIns="0" rIns="0" bIns="0" rtlCol="0" anchor="ctr"/>
           <a:lstStyle/>
           <a:p>
-            <a:pPr indent="0" marL="0">
+            <a:pPr algn="l" indent="0" marL="0">
               <a:buNone/>
             </a:pPr>
             <a:r>
@@ -9536,6 +13283,9 @@
                 <a:solidFill>
                   <a:schemeClr val="accent5"/>
                 </a:solidFill>
+                <a:latin typeface="Arial" pitchFamily="34" charset="0"/>
+                <a:ea typeface="Arial" pitchFamily="34" charset="-122"/>
+                <a:cs typeface="Arial" pitchFamily="34" charset="-120"/>
               </a:rPr>
               <a:t>Source: Blocking framework §6.1, §7.2, §8.2, §9.1, §10.4</a:t>
             </a:r>
@@ -9613,6 +13363,113 @@
           <a:chExt cx="0" cy="0"/>
         </a:xfrm>
       </p:grpSpPr>
+      <p:sp>
+        <p:nvSpPr>
+          <p:cNvPr id="2" name="Title placeholder"/>
+          <p:cNvSpPr/>
+          <p:nvPr>
+            <p:ph idx="100" type="title" hasCustomPrompt="1"/>
+          </p:nvPr>
+        </p:nvSpPr>
+        <p:spPr>
+          <a:xfrm>
+            <a:off x="731520" y="2011680"/>
+            <a:ext cx="10058400" cy="1097280"/>
+          </a:xfrm>
+          <a:prstGeom prst="rect">
+            <a:avLst/>
+          </a:prstGeom>
+          <a:noFill/>
+          <a:ln/>
+        </p:spPr>
+        <p:txBody>
+          <a:bodyPr wrap="square" lIns="0" tIns="0" rIns="0" bIns="0" rtlCol="0" anchor="t"/>
+          <a:lstStyle/>
+          <a:p>
+            <a:pPr algn="l" indent="0" marL="0">
+              <a:buNone/>
+            </a:pPr>
+            <a:r>
+              <a:rPr lang="en-US" sz="4600" b="1" dirty="0">
+                <a:solidFill>
+                  <a:schemeClr val="bg1"/>
+                </a:solidFill>
+                <a:latin typeface="Arial" pitchFamily="34" charset="0"/>
+                <a:ea typeface="Arial" pitchFamily="34" charset="-122"/>
+                <a:cs typeface="Arial" pitchFamily="34" charset="-120"/>
+              </a:rPr>
+              <a:t>Questions</a:t>
+            </a:r>
+            <a:endParaRPr lang="en-US" sz="4600" dirty="0"/>
+          </a:p>
+        </p:txBody>
+      </p:sp>
+      <p:sp>
+        <p:nvSpPr>
+          <p:cNvPr id="3" name="Body placeholder"/>
+          <p:cNvSpPr/>
+          <p:nvPr>
+            <p:ph idx="101" type="body" hasCustomPrompt="1"/>
+          </p:nvPr>
+        </p:nvSpPr>
+        <p:spPr>
+          <a:xfrm>
+            <a:off x="731520" y="3291840"/>
+            <a:ext cx="8778240" cy="1097280"/>
+          </a:xfrm>
+          <a:prstGeom prst="rect">
+            <a:avLst/>
+          </a:prstGeom>
+          <a:noFill/>
+          <a:ln/>
+        </p:spPr>
+        <p:txBody>
+          <a:bodyPr wrap="square" lIns="0" tIns="0" rIns="0" bIns="0" rtlCol="0" anchor="t"/>
+          <a:lstStyle/>
+          <a:p>
+            <a:pPr algn="l" indent="0" marL="0">
+              <a:buNone/>
+            </a:pPr>
+            <a:r>
+              <a:rPr lang="en-US" sz="1800" dirty="0">
+                <a:solidFill>
+                  <a:schemeClr val="bg2"/>
+                </a:solidFill>
+                <a:latin typeface="Arial" pitchFamily="34" charset="0"/>
+                <a:ea typeface="Arial" pitchFamily="34" charset="-122"/>
+                <a:cs typeface="Arial" pitchFamily="34" charset="-120"/>
+              </a:rPr>
+              <a:t>Global Screening · Checkout.com</a:t>
+            </a:r>
+            <a:endParaRPr lang="en-US" sz="1800" dirty="0"/>
+          </a:p>
+        </p:txBody>
+      </p:sp>
+    </p:spTree>
+  </p:cSld>
+  <p:clrMapOvr>
+    <a:masterClrMapping/>
+  </p:clrMapOvr>
+</p:sld>
+</file>
+
+<file path=ppt/slides/slide9.xml><?xml version="1.0" encoding="utf-8"?>
+<p:sld xmlns:a="http://schemas.openxmlformats.org/drawingml/2006/main" xmlns:r="http://schemas.openxmlformats.org/officeDocument/2006/relationships" xmlns:p="http://schemas.openxmlformats.org/presentationml/2006/main">
+  <p:cSld name="Slide 9">
+    <p:spTree>
+      <p:nvGrpSpPr>
+        <p:cNvPr id="1" name=""/>
+        <p:cNvGrpSpPr/>
+        <p:nvPr/>
+      </p:nvGrpSpPr>
+      <p:grpSpPr>
+        <a:xfrm>
+          <a:off x="0" y="0"/>
+          <a:ext cx="0" cy="0"/>
+          <a:chOff x="0" y="0"/>
+          <a:chExt cx="0" cy="0"/>
+        </a:xfrm>
+      </p:grpSpPr>
       <p:pic>
         <p:nvPicPr>
           <p:cNvPr id="2" name="handout" descr="Appendix: one-page process flow of sanctioned bank BIN blocking">    </p:cNvPr>
@@ -9646,9 +13503,9 @@
 </file>
 
 <file path=ppt/theme/theme1.xml><?xml version="1.0" encoding="utf-8"?>
-<a:theme xmlns:a="http://schemas.openxmlformats.org/drawingml/2006/main" name="BIN blocking summit">
+<a:theme xmlns:a="http://schemas.openxmlformats.org/drawingml/2006/main" name="Global Screening">
   <a:themeElements>
-    <a:clrScheme name="BIN blocking summit">
+    <a:clrScheme name="Global Screening">
       <a:dk1>
         <a:srgbClr val="0B1526"/>
       </a:dk1>
@@ -9686,7 +13543,7 @@
         <a:srgbClr val="55617A"/>
       </a:folHlink>
     </a:clrScheme>
-    <a:fontScheme name="BIN blocking summit">
+    <a:fontScheme name="Global Screening">
       <a:majorFont>
         <a:latin typeface="Arial"/>
         <a:ea typeface=""/>
